--- a/PRESENTACION_FINAL_EFT.pptx
+++ b/PRESENTACION_FINAL_EFT.pptx
@@ -3093,10 +3093,15 @@
   <p:cSld>
     <p:bg>
       <p:bgPr>
+        <a:effectLst/>
         <a:solidFill>
-          <a:srgbClr val="2C3E50"/>
+          <a:srgbClr val="111827"/>
         </a:solidFill>
-        <a:effectLst/>
+      </p:bgPr>
+      <p:bgPr>
+        <a:solidFill>
+          <a:srgbClr val="111827"/>
+        </a:solidFill>
       </p:bgPr>
     </p:bg>
     <p:spTree>
@@ -3113,6 +3118,9 @@
           <p:nvPr/>
         </p:nvSpPr>
         <p:spPr>
+          <a:solidFill>
+            <a:srgbClr val="818CF8"/>
+          </a:solidFill>
           <a:xfrm>
             <a:off x="0" y="2286000"/>
             <a:ext cx="12191695" cy="73152"/>
@@ -3120,9 +3128,6 @@
           <a:prstGeom prst="rect">
             <a:avLst/>
           </a:prstGeom>
-          <a:solidFill>
-            <a:srgbClr val="2980B9"/>
-          </a:solidFill>
           <a:ln>
             <a:noFill/>
           </a:ln>
@@ -3179,6 +3184,11 @@
               </a:defRPr>
             </a:pPr>
             <a:r>
+              <a:rPr>
+                <a:solidFill>
+                  <a:srgbClr val="FFFFFF"/>
+                </a:solidFill>
+              </a:rPr>
               <a:t>EVALUACION FINAL TRANSVERSAL</a:t>
             </a:r>
           </a:p>
@@ -3214,6 +3224,11 @@
               </a:defRPr>
             </a:pPr>
             <a:r>
+              <a:rPr>
+                <a:solidFill>
+                  <a:srgbClr val="A5B4FC"/>
+                </a:solidFill>
+              </a:rPr>
               <a:t>Automatizacion de Pruebas - OrangeHRM</a:t>
             </a:r>
           </a:p>
@@ -3249,19 +3264,39 @@
               </a:defRPr>
             </a:pPr>
             <a:r>
+              <a:rPr>
+                <a:solidFill>
+                  <a:srgbClr val="FFFFFF"/>
+                </a:solidFill>
+              </a:rPr>
               <a:t>Behave 1.2.6  +  Selenium 4.28  +  Python 3.14</a:t>
             </a:r>
             <a:br/>
             <a:br/>
             <a:r>
+              <a:rPr>
+                <a:solidFill>
+                  <a:srgbClr val="FFFFFF"/>
+                </a:solidFill>
+              </a:rPr>
               <a:t>Estudiante: Luis Tasso  |  Seccion: 802V</a:t>
             </a:r>
             <a:br/>
             <a:r>
+              <a:rPr>
+                <a:solidFill>
+                  <a:srgbClr val="FFFFFF"/>
+                </a:solidFill>
+              </a:rPr>
               <a:t>Profesor: Manuel Soto</a:t>
             </a:r>
             <a:br/>
             <a:r>
+              <a:rPr>
+                <a:solidFill>
+                  <a:srgbClr val="A5B4FC"/>
+                </a:solidFill>
+              </a:rPr>
               <a:t>API0101 - Automatizacion de Pruebas</a:t>
             </a:r>
           </a:p>
@@ -3280,10 +3315,15 @@
   <p:cSld>
     <p:bg>
       <p:bgPr>
+        <a:effectLst/>
         <a:solidFill>
-          <a:srgbClr val="FFFFFF"/>
+          <a:srgbClr val="1E3A5F"/>
         </a:solidFill>
-        <a:effectLst/>
+      </p:bgPr>
+      <p:bgPr>
+        <a:solidFill>
+          <a:srgbClr val="F1F5F9"/>
+        </a:solidFill>
       </p:bgPr>
     </p:bg>
     <p:spTree>
@@ -3300,6 +3340,9 @@
           <p:nvPr/>
         </p:nvSpPr>
         <p:spPr>
+          <a:solidFill>
+            <a:srgbClr val="818CF8"/>
+          </a:solidFill>
           <a:xfrm>
             <a:off x="0" y="0"/>
             <a:ext cx="12191695" cy="1097280"/>
@@ -3307,9 +3350,6 @@
           <a:prstGeom prst="rect">
             <a:avLst/>
           </a:prstGeom>
-          <a:solidFill>
-            <a:srgbClr val="2C3E50"/>
-          </a:solidFill>
           <a:ln>
             <a:noFill/>
           </a:ln>
@@ -3366,6 +3406,11 @@
               </a:defRPr>
             </a:pPr>
             <a:r>
+              <a:rPr>
+                <a:solidFill>
+                  <a:srgbClr val="FFFFFF"/>
+                </a:solidFill>
+              </a:rPr>
               <a:t>Conclusiones y Proyecciones</a:t>
             </a:r>
           </a:p>
@@ -3404,6 +3449,11 @@
               </a:defRPr>
             </a:pPr>
             <a:r>
+              <a:rPr>
+                <a:solidFill>
+                  <a:srgbClr val="CBD5E1"/>
+                </a:solidFill>
+              </a:rPr>
               <a:t>29/29 escenarios ejecutados</a:t>
             </a:r>
           </a:p>
@@ -3419,6 +3469,11 @@
               </a:defRPr>
             </a:pPr>
             <a:r>
+              <a:rPr>
+                <a:solidFill>
+                  <a:srgbClr val="CBD5E1"/>
+                </a:solidFill>
+              </a:rPr>
               <a:t>96.55% aprobacion (fallo intencional TC_004)</a:t>
             </a:r>
           </a:p>
@@ -3434,6 +3489,11 @@
               </a:defRPr>
             </a:pPr>
             <a:r>
+              <a:rPr>
+                <a:solidFill>
+                  <a:srgbClr val="CBD5E1"/>
+                </a:solidFill>
+              </a:rPr>
               <a:t>Suite bilingue: ingles + chino</a:t>
             </a:r>
           </a:p>
@@ -3449,6 +3509,11 @@
               </a:defRPr>
             </a:pPr>
             <a:r>
+              <a:rPr>
+                <a:solidFill>
+                  <a:srgbClr val="CBD5E1"/>
+                </a:solidFill>
+              </a:rPr>
               <a:t>Data-Driven: 18 escenarios parametrizados (62%)</a:t>
             </a:r>
           </a:p>
@@ -3464,7 +3529,12 @@
               </a:defRPr>
             </a:pPr>
             <a:r>
-              <a:t>177 screenshots de evidencia</a:t>
+              <a:rPr>
+                <a:solidFill>
+                  <a:srgbClr val="CBD5E1"/>
+                </a:solidFill>
+              </a:rPr>
+              <a:t>93 screenshots de evidencia</a:t>
             </a:r>
           </a:p>
           <a:p>
@@ -3479,6 +3549,11 @@
               </a:defRPr>
             </a:pPr>
             <a:r>
+              <a:rPr>
+                <a:solidFill>
+                  <a:srgbClr val="CBD5E1"/>
+                </a:solidFill>
+              </a:rPr>
               <a:t>10 features, 6 archivos Excel</a:t>
             </a:r>
           </a:p>
@@ -3494,6 +3569,11 @@
               </a:defRPr>
             </a:pPr>
             <a:r>
+              <a:rPr>
+                <a:solidFill>
+                  <a:srgbClr val="CBD5E1"/>
+                </a:solidFill>
+              </a:rPr>
               <a:t>Metricas trazables al reporte</a:t>
             </a:r>
           </a:p>
@@ -3572,26 +3652,56 @@
               </a:defRPr>
             </a:pPr>
             <a:r>
+              <a:rPr>
+                <a:solidFill>
+                  <a:srgbClr val="CBD5E1"/>
+                </a:solidFill>
+              </a:rPr>
               <a:t>Proyecciones:</a:t>
             </a:r>
             <a:br/>
             <a:r>
+              <a:rPr>
+                <a:solidFill>
+                  <a:srgbClr val="CBD5E1"/>
+                </a:solidFill>
+              </a:rPr>
               <a:t>- GitHub Actions para CI/CD</a:t>
             </a:r>
             <a:br/>
             <a:r>
+              <a:rPr>
+                <a:solidFill>
+                  <a:srgbClr val="CBD5E1"/>
+                </a:solidFill>
+              </a:rPr>
               <a:t>- Page Object Model completo</a:t>
             </a:r>
             <a:br/>
             <a:r>
+              <a:rPr>
+                <a:solidFill>
+                  <a:srgbClr val="CBD5E1"/>
+                </a:solidFill>
+              </a:rPr>
               <a:t>- Allure Reports para tendencias</a:t>
             </a:r>
             <a:br/>
             <a:r>
+              <a:rPr>
+                <a:solidFill>
+                  <a:srgbClr val="CBD5E1"/>
+                </a:solidFill>
+              </a:rPr>
               <a:t>- Ejecucion paralela behave -j 4</a:t>
             </a:r>
             <a:br/>
             <a:r>
+              <a:rPr>
+                <a:solidFill>
+                  <a:srgbClr val="CBD5E1"/>
+                </a:solidFill>
+              </a:rPr>
               <a:t>- Expandir cobertura a mas modulos</a:t>
             </a:r>
           </a:p>
@@ -3670,19 +3780,39 @@
               </a:defRPr>
             </a:pPr>
             <a:r>
+              <a:rPr>
+                <a:solidFill>
+                  <a:srgbClr val="CBD5E1"/>
+                </a:solidFill>
+              </a:rPr>
               <a:t>5 oportunidades de mejora documentadas</a:t>
             </a:r>
             <a:br/>
             <a:r>
+              <a:rPr>
+                <a:solidFill>
+                  <a:srgbClr val="CBD5E1"/>
+                </a:solidFill>
+              </a:rPr>
               <a:t>6 propuestas formales (2 producto + 4 proceso)</a:t>
             </a:r>
             <a:br/>
             <a:r>
+              <a:rPr>
+                <a:solidFill>
+                  <a:srgbClr val="CBD5E1"/>
+                </a:solidFill>
+              </a:rPr>
               <a:t>Stack: Behave 1.2.6 + Selenium 4.28 + Python 3.14</a:t>
             </a:r>
             <a:br/>
             <a:br/>
             <a:r>
+              <a:rPr>
+                <a:solidFill>
+                  <a:srgbClr val="CBD5E1"/>
+                </a:solidFill>
+              </a:rPr>
               <a:t>Lista para integracion en pipeline CI/CD</a:t>
             </a:r>
           </a:p>
@@ -3701,10 +3831,15 @@
   <p:cSld>
     <p:bg>
       <p:bgPr>
+        <a:effectLst/>
         <a:solidFill>
-          <a:srgbClr val="2C3E50"/>
+          <a:srgbClr val="111827"/>
         </a:solidFill>
-        <a:effectLst/>
+      </p:bgPr>
+      <p:bgPr>
+        <a:solidFill>
+          <a:srgbClr val="111827"/>
+        </a:solidFill>
       </p:bgPr>
     </p:bg>
     <p:spTree>
@@ -3721,6 +3856,9 @@
           <p:nvPr/>
         </p:nvSpPr>
         <p:spPr>
+          <a:solidFill>
+            <a:srgbClr val="818CF8"/>
+          </a:solidFill>
           <a:xfrm>
             <a:off x="0" y="2926080"/>
             <a:ext cx="12191695" cy="73152"/>
@@ -3728,9 +3866,6 @@
           <a:prstGeom prst="rect">
             <a:avLst/>
           </a:prstGeom>
-          <a:solidFill>
-            <a:srgbClr val="2980B9"/>
-          </a:solidFill>
           <a:ln>
             <a:noFill/>
           </a:ln>
@@ -3787,6 +3922,11 @@
               </a:defRPr>
             </a:pPr>
             <a:r>
+              <a:rPr>
+                <a:solidFill>
+                  <a:srgbClr val="FFFFFF"/>
+                </a:solidFill>
+              </a:rPr>
               <a:t>Gracias</a:t>
             </a:r>
           </a:p>
@@ -3822,14 +3962,29 @@
               </a:defRPr>
             </a:pPr>
             <a:r>
+              <a:rPr>
+                <a:solidFill>
+                  <a:srgbClr val="FFFFFF"/>
+                </a:solidFill>
+              </a:rPr>
               <a:t>Luis Tasso  |  Seccion 802V</a:t>
             </a:r>
             <a:br/>
             <a:r>
+              <a:rPr>
+                <a:solidFill>
+                  <a:srgbClr val="FFFFFF"/>
+                </a:solidFill>
+              </a:rPr>
               <a:t>API0101 - Automatizacion de Pruebas</a:t>
             </a:r>
             <a:br/>
             <a:r>
+              <a:rPr>
+                <a:solidFill>
+                  <a:srgbClr val="FFFFFF"/>
+                </a:solidFill>
+              </a:rPr>
               <a:t>Prof. Manuel Soto</a:t>
             </a:r>
           </a:p>
@@ -3848,10 +4003,15 @@
   <p:cSld>
     <p:bg>
       <p:bgPr>
+        <a:effectLst/>
         <a:solidFill>
-          <a:srgbClr val="FFFFFF"/>
+          <a:srgbClr val="1E3A5F"/>
         </a:solidFill>
-        <a:effectLst/>
+      </p:bgPr>
+      <p:bgPr>
+        <a:solidFill>
+          <a:srgbClr val="F1F5F9"/>
+        </a:solidFill>
       </p:bgPr>
     </p:bg>
     <p:spTree>
@@ -3868,6 +4028,9 @@
           <p:nvPr/>
         </p:nvSpPr>
         <p:spPr>
+          <a:solidFill>
+            <a:srgbClr val="818CF8"/>
+          </a:solidFill>
           <a:xfrm>
             <a:off x="0" y="0"/>
             <a:ext cx="12191695" cy="1097280"/>
@@ -3875,9 +4038,6 @@
           <a:prstGeom prst="rect">
             <a:avLst/>
           </a:prstGeom>
-          <a:solidFill>
-            <a:srgbClr val="2C3E50"/>
-          </a:solidFill>
           <a:ln>
             <a:noFill/>
           </a:ln>
@@ -3934,6 +4094,11 @@
               </a:defRPr>
             </a:pPr>
             <a:r>
+              <a:rPr>
+                <a:solidFill>
+                  <a:srgbClr val="FFFFFF"/>
+                </a:solidFill>
+              </a:rPr>
               <a:t>Agenda</a:t>
             </a:r>
           </a:p>
@@ -3972,6 +4137,11 @@
               </a:defRPr>
             </a:pPr>
             <a:r>
+              <a:rPr>
+                <a:solidFill>
+                  <a:srgbClr val="CBD5E1"/>
+                </a:solidFill>
+              </a:rPr>
               <a:t>1. Plan de Pruebas y Cronograma por Sprint</a:t>
             </a:r>
           </a:p>
@@ -3987,6 +4157,11 @@
               </a:defRPr>
             </a:pPr>
             <a:r>
+              <a:rPr>
+                <a:solidFill>
+                  <a:srgbClr val="CBD5E1"/>
+                </a:solidFill>
+              </a:rPr>
               <a:t>2. Trazabilidad Requisito -&gt; Escenario -&gt; Resultado</a:t>
             </a:r>
           </a:p>
@@ -4002,6 +4177,11 @@
               </a:defRPr>
             </a:pPr>
             <a:r>
+              <a:rPr>
+                <a:solidFill>
+                  <a:srgbClr val="CBD5E1"/>
+                </a:solidFill>
+              </a:rPr>
               <a:t>3. Resultados de Ejecucion - 29 escenarios, evidencias, fallo intencional</a:t>
             </a:r>
           </a:p>
@@ -4017,6 +4197,11 @@
               </a:defRPr>
             </a:pPr>
             <a:r>
+              <a:rPr>
+                <a:solidFill>
+                  <a:srgbClr val="CBD5E1"/>
+                </a:solidFill>
+              </a:rPr>
               <a:t>4. Metricas de Calidad (PPT 3.3.1) y Rendimiento</a:t>
             </a:r>
           </a:p>
@@ -4032,6 +4217,11 @@
               </a:defRPr>
             </a:pPr>
             <a:r>
+              <a:rPr>
+                <a:solidFill>
+                  <a:srgbClr val="CBD5E1"/>
+                </a:solidFill>
+              </a:rPr>
               <a:t>5. Oportunidades de Mejora (A+B+C)</a:t>
             </a:r>
           </a:p>
@@ -4047,6 +4237,11 @@
               </a:defRPr>
             </a:pPr>
             <a:r>
+              <a:rPr>
+                <a:solidFill>
+                  <a:srgbClr val="CBD5E1"/>
+                </a:solidFill>
+              </a:rPr>
               <a:t>6. Propuestas: Producto (OrangeHRM) vs. Proceso (Framework)</a:t>
             </a:r>
           </a:p>
@@ -4062,6 +4257,11 @@
               </a:defRPr>
             </a:pPr>
             <a:r>
+              <a:rPr>
+                <a:solidFill>
+                  <a:srgbClr val="CBD5E1"/>
+                </a:solidFill>
+              </a:rPr>
               <a:t>7. Stack Tecnologico: Behave + Python + Selenium</a:t>
             </a:r>
           </a:p>
@@ -4077,6 +4277,11 @@
               </a:defRPr>
             </a:pPr>
             <a:r>
+              <a:rPr>
+                <a:solidFill>
+                  <a:srgbClr val="CBD5E1"/>
+                </a:solidFill>
+              </a:rPr>
               <a:t>8. Conclusiones y Proyecciones</a:t>
             </a:r>
           </a:p>
@@ -4095,10 +4300,15 @@
   <p:cSld>
     <p:bg>
       <p:bgPr>
+        <a:effectLst/>
         <a:solidFill>
-          <a:srgbClr val="FFFFFF"/>
+          <a:srgbClr val="1E3A5F"/>
         </a:solidFill>
-        <a:effectLst/>
+      </p:bgPr>
+      <p:bgPr>
+        <a:solidFill>
+          <a:srgbClr val="F1F5F9"/>
+        </a:solidFill>
       </p:bgPr>
     </p:bg>
     <p:spTree>
@@ -4115,6 +4325,9 @@
           <p:nvPr/>
         </p:nvSpPr>
         <p:spPr>
+          <a:solidFill>
+            <a:srgbClr val="818CF8"/>
+          </a:solidFill>
           <a:xfrm>
             <a:off x="0" y="0"/>
             <a:ext cx="12191695" cy="1097280"/>
@@ -4122,9 +4335,6 @@
           <a:prstGeom prst="rect">
             <a:avLst/>
           </a:prstGeom>
-          <a:solidFill>
-            <a:srgbClr val="2C3E50"/>
-          </a:solidFill>
           <a:ln>
             <a:noFill/>
           </a:ln>
@@ -4181,6 +4391,11 @@
               </a:defRPr>
             </a:pPr>
             <a:r>
+              <a:rPr>
+                <a:solidFill>
+                  <a:srgbClr val="FFFFFF"/>
+                </a:solidFill>
+              </a:rPr>
               <a:t>Plan de Pruebas y Cronograma por Sprint</a:t>
             </a:r>
           </a:p>
@@ -4225,13 +4440,18 @@
                         </a:defRPr>
                       </a:pPr>
                       <a:r>
+                        <a:rPr>
+                          <a:solidFill>
+                            <a:srgbClr val="FFFFFF"/>
+                          </a:solidFill>
+                        </a:rPr>
                         <a:t>Sprint</a:t>
                       </a:r>
                     </a:p>
                   </a:txBody>
                   <a:tcPr>
                     <a:solidFill>
-                      <a:srgbClr val="2C3E50"/>
+                      <a:srgbClr val="1E293B"/>
                     </a:solidFill>
                   </a:tcPr>
                 </a:tc>
@@ -4248,13 +4468,18 @@
                         </a:defRPr>
                       </a:pPr>
                       <a:r>
+                        <a:rPr>
+                          <a:solidFill>
+                            <a:srgbClr val="FFFFFF"/>
+                          </a:solidFill>
+                        </a:rPr>
                         <a:t>Semanas</a:t>
                       </a:r>
                     </a:p>
                   </a:txBody>
                   <a:tcPr>
                     <a:solidFill>
-                      <a:srgbClr val="2C3E50"/>
+                      <a:srgbClr val="1E293B"/>
                     </a:solidFill>
                   </a:tcPr>
                 </a:tc>
@@ -4271,13 +4496,18 @@
                         </a:defRPr>
                       </a:pPr>
                       <a:r>
+                        <a:rPr>
+                          <a:solidFill>
+                            <a:srgbClr val="FFFFFF"/>
+                          </a:solidFill>
+                        </a:rPr>
                         <a:t>Features</a:t>
                       </a:r>
                     </a:p>
                   </a:txBody>
                   <a:tcPr>
                     <a:solidFill>
-                      <a:srgbClr val="2C3E50"/>
+                      <a:srgbClr val="1E293B"/>
                     </a:solidFill>
                   </a:tcPr>
                 </a:tc>
@@ -4294,13 +4524,18 @@
                         </a:defRPr>
                       </a:pPr>
                       <a:r>
+                        <a:rPr>
+                          <a:solidFill>
+                            <a:srgbClr val="FFFFFF"/>
+                          </a:solidFill>
+                        </a:rPr>
                         <a:t>Escenarios</a:t>
                       </a:r>
                     </a:p>
                   </a:txBody>
                   <a:tcPr>
                     <a:solidFill>
-                      <a:srgbClr val="2C3E50"/>
+                      <a:srgbClr val="1E293B"/>
                     </a:solidFill>
                   </a:tcPr>
                 </a:tc>
@@ -4317,13 +4552,18 @@
                         </a:defRPr>
                       </a:pPr>
                       <a:r>
+                        <a:rPr>
+                          <a:solidFill>
+                            <a:srgbClr val="FFFFFF"/>
+                          </a:solidFill>
+                        </a:rPr>
                         <a:t>Entregable</a:t>
                       </a:r>
                     </a:p>
                   </a:txBody>
                   <a:tcPr>
                     <a:solidFill>
-                      <a:srgbClr val="2C3E50"/>
+                      <a:srgbClr val="1E293B"/>
                     </a:solidFill>
                   </a:tcPr>
                 </a:tc>
@@ -4337,11 +4577,16 @@
                       <a:pPr>
                         <a:defRPr sz="1000">
                           <a:solidFill>
-                            <a:srgbClr val="2C3E50"/>
-                          </a:solidFill>
-                        </a:defRPr>
-                      </a:pPr>
-                      <a:r>
+                            <a:srgbClr val="E2E8F0"/>
+                          </a:solidFill>
+                        </a:defRPr>
+                      </a:pPr>
+                      <a:r>
+                        <a:rPr>
+                          <a:solidFill>
+                            <a:srgbClr val="E2E8F0"/>
+                          </a:solidFill>
+                        </a:rPr>
                         <a:t>Sprint 1</a:t>
                       </a:r>
                     </a:p>
@@ -4349,57 +4594,72 @@
                       <a:pPr>
                         <a:defRPr sz="1000">
                           <a:solidFill>
-                            <a:srgbClr val="2C3E50"/>
-                          </a:solidFill>
-                        </a:defRPr>
-                      </a:pPr>
-                      <a:r>
+                            <a:srgbClr val="E2E8F0"/>
+                          </a:solidFill>
+                        </a:defRPr>
+                      </a:pPr>
+                      <a:r>
+                        <a:rPr>
+                          <a:solidFill>
+                            <a:srgbClr val="E2E8F0"/>
+                          </a:solidFill>
+                        </a:rPr>
                         <a:t>Fundamentos</a:t>
                       </a:r>
                     </a:p>
                   </a:txBody>
                   <a:tcPr>
                     <a:solidFill>
-                      <a:srgbClr val="ECF0F1"/>
-                    </a:solidFill>
-                  </a:tcPr>
-                </a:tc>
-                <a:tc>
-                  <a:txBody>
-                    <a:bodyPr/>
-                    <a:lstStyle/>
-                    <a:p>
-                      <a:pPr>
-                        <a:defRPr sz="1000">
-                          <a:solidFill>
-                            <a:srgbClr val="2C3E50"/>
-                          </a:solidFill>
-                        </a:defRPr>
-                      </a:pPr>
-                      <a:r>
+                      <a:srgbClr val="2D3748"/>
+                    </a:solidFill>
+                  </a:tcPr>
+                </a:tc>
+                <a:tc>
+                  <a:txBody>
+                    <a:bodyPr/>
+                    <a:lstStyle/>
+                    <a:p>
+                      <a:pPr>
+                        <a:defRPr sz="1000">
+                          <a:solidFill>
+                            <a:srgbClr val="E2E8F0"/>
+                          </a:solidFill>
+                        </a:defRPr>
+                      </a:pPr>
+                      <a:r>
+                        <a:rPr>
+                          <a:solidFill>
+                            <a:srgbClr val="E2E8F0"/>
+                          </a:solidFill>
+                        </a:rPr>
                         <a:t>1-4</a:t>
                       </a:r>
                     </a:p>
                   </a:txBody>
                   <a:tcPr>
                     <a:solidFill>
-                      <a:srgbClr val="ECF0F1"/>
-                    </a:solidFill>
-                  </a:tcPr>
-                </a:tc>
-                <a:tc>
-                  <a:txBody>
-                    <a:bodyPr/>
-                    <a:lstStyle/>
-                    <a:p>
-                      <a:pPr>
-                        <a:defRPr sz="1000">
-                          <a:solidFill>
-                            <a:srgbClr val="2C3E50"/>
-                          </a:solidFill>
-                        </a:defRPr>
-                      </a:pPr>
-                      <a:r>
+                      <a:srgbClr val="2D3748"/>
+                    </a:solidFill>
+                  </a:tcPr>
+                </a:tc>
+                <a:tc>
+                  <a:txBody>
+                    <a:bodyPr/>
+                    <a:lstStyle/>
+                    <a:p>
+                      <a:pPr>
+                        <a:defRPr sz="1000">
+                          <a:solidFill>
+                            <a:srgbClr val="E2E8F0"/>
+                          </a:solidFill>
+                        </a:defRPr>
+                      </a:pPr>
+                      <a:r>
+                        <a:rPr>
+                          <a:solidFill>
+                            <a:srgbClr val="E2E8F0"/>
+                          </a:solidFill>
+                        </a:rPr>
                         <a:t>login.feature</a:t>
                       </a:r>
                     </a:p>
@@ -4407,57 +4667,72 @@
                       <a:pPr>
                         <a:defRPr sz="1000">
                           <a:solidFill>
-                            <a:srgbClr val="2C3E50"/>
-                          </a:solidFill>
-                        </a:defRPr>
-                      </a:pPr>
-                      <a:r>
+                            <a:srgbClr val="E2E8F0"/>
+                          </a:solidFill>
+                        </a:defRPr>
+                      </a:pPr>
+                      <a:r>
+                        <a:rPr>
+                          <a:solidFill>
+                            <a:srgbClr val="E2E8F0"/>
+                          </a:solidFill>
+                        </a:rPr>
                         <a:t>sesion.feature</a:t>
                       </a:r>
                     </a:p>
                   </a:txBody>
                   <a:tcPr>
                     <a:solidFill>
-                      <a:srgbClr val="ECF0F1"/>
-                    </a:solidFill>
-                  </a:tcPr>
-                </a:tc>
-                <a:tc>
-                  <a:txBody>
-                    <a:bodyPr/>
-                    <a:lstStyle/>
-                    <a:p>
-                      <a:pPr>
-                        <a:defRPr sz="1000">
-                          <a:solidFill>
-                            <a:srgbClr val="2C3E50"/>
-                          </a:solidFill>
-                        </a:defRPr>
-                      </a:pPr>
-                      <a:r>
+                      <a:srgbClr val="2D3748"/>
+                    </a:solidFill>
+                  </a:tcPr>
+                </a:tc>
+                <a:tc>
+                  <a:txBody>
+                    <a:bodyPr/>
+                    <a:lstStyle/>
+                    <a:p>
+                      <a:pPr>
+                        <a:defRPr sz="1000">
+                          <a:solidFill>
+                            <a:srgbClr val="E2E8F0"/>
+                          </a:solidFill>
+                        </a:defRPr>
+                      </a:pPr>
+                      <a:r>
+                        <a:rPr>
+                          <a:solidFill>
+                            <a:srgbClr val="E2E8F0"/>
+                          </a:solidFill>
+                        </a:rPr>
                         <a:t>4</a:t>
                       </a:r>
                     </a:p>
                   </a:txBody>
                   <a:tcPr>
                     <a:solidFill>
-                      <a:srgbClr val="ECF0F1"/>
-                    </a:solidFill>
-                  </a:tcPr>
-                </a:tc>
-                <a:tc>
-                  <a:txBody>
-                    <a:bodyPr/>
-                    <a:lstStyle/>
-                    <a:p>
-                      <a:pPr>
-                        <a:defRPr sz="1000">
-                          <a:solidFill>
-                            <a:srgbClr val="2C3E50"/>
-                          </a:solidFill>
-                        </a:defRPr>
-                      </a:pPr>
-                      <a:r>
+                      <a:srgbClr val="2D3748"/>
+                    </a:solidFill>
+                  </a:tcPr>
+                </a:tc>
+                <a:tc>
+                  <a:txBody>
+                    <a:bodyPr/>
+                    <a:lstStyle/>
+                    <a:p>
+                      <a:pPr>
+                        <a:defRPr sz="1000">
+                          <a:solidFill>
+                            <a:srgbClr val="E2E8F0"/>
+                          </a:solidFill>
+                        </a:defRPr>
+                      </a:pPr>
+                      <a:r>
+                        <a:rPr>
+                          <a:solidFill>
+                            <a:srgbClr val="E2E8F0"/>
+                          </a:solidFill>
+                        </a:rPr>
                         <a:t>Steps genericos</a:t>
                       </a:r>
                     </a:p>
@@ -4465,11 +4740,16 @@
                       <a:pPr>
                         <a:defRPr sz="1000">
                           <a:solidFill>
-                            <a:srgbClr val="2C3E50"/>
-                          </a:solidFill>
-                        </a:defRPr>
-                      </a:pPr>
-                      <a:r>
+                            <a:srgbClr val="E2E8F0"/>
+                          </a:solidFill>
+                        </a:defRPr>
+                      </a:pPr>
+                      <a:r>
+                        <a:rPr>
+                          <a:solidFill>
+                            <a:srgbClr val="E2E8F0"/>
+                          </a:solidFill>
+                        </a:rPr>
                         <a:t>environment.py</a:t>
                       </a:r>
                     </a:p>
@@ -4477,18 +4757,23 @@
                       <a:pPr>
                         <a:defRPr sz="1000">
                           <a:solidFill>
-                            <a:srgbClr val="2C3E50"/>
-                          </a:solidFill>
-                        </a:defRPr>
-                      </a:pPr>
-                      <a:r>
+                            <a:srgbClr val="E2E8F0"/>
+                          </a:solidFill>
+                        </a:defRPr>
+                      </a:pPr>
+                      <a:r>
+                        <a:rPr>
+                          <a:solidFill>
+                            <a:srgbClr val="E2E8F0"/>
+                          </a:solidFill>
+                        </a:rPr>
                         <a:t>Screenshots</a:t>
                       </a:r>
                     </a:p>
                   </a:txBody>
                   <a:tcPr>
                     <a:solidFill>
-                      <a:srgbClr val="ECF0F1"/>
+                      <a:srgbClr val="2D3748"/>
                     </a:solidFill>
                   </a:tcPr>
                 </a:tc>
@@ -4502,11 +4787,16 @@
                       <a:pPr>
                         <a:defRPr sz="1000">
                           <a:solidFill>
-                            <a:srgbClr val="2C3E50"/>
-                          </a:solidFill>
-                        </a:defRPr>
-                      </a:pPr>
-                      <a:r>
+                            <a:srgbClr val="E2E8F0"/>
+                          </a:solidFill>
+                        </a:defRPr>
+                      </a:pPr>
+                      <a:r>
+                        <a:rPr>
+                          <a:solidFill>
+                            <a:srgbClr val="E2E8F0"/>
+                          </a:solidFill>
+                        </a:rPr>
                         <a:t>Sprint 2</a:t>
                       </a:r>
                     </a:p>
@@ -4514,49 +4804,72 @@
                       <a:pPr>
                         <a:defRPr sz="1000">
                           <a:solidFill>
-                            <a:srgbClr val="2C3E50"/>
-                          </a:solidFill>
-                        </a:defRPr>
-                      </a:pPr>
-                      <a:r>
+                            <a:srgbClr val="E2E8F0"/>
+                          </a:solidFill>
+                        </a:defRPr>
+                      </a:pPr>
+                      <a:r>
+                        <a:rPr>
+                          <a:solidFill>
+                            <a:srgbClr val="E2E8F0"/>
+                          </a:solidFill>
+                        </a:rPr>
                         <a:t>PIM CRUD + DD</a:t>
                       </a:r>
                     </a:p>
                   </a:txBody>
-                  <a:tcPr/>
-                </a:tc>
-                <a:tc>
-                  <a:txBody>
-                    <a:bodyPr/>
-                    <a:lstStyle/>
-                    <a:p>
-                      <a:pPr>
-                        <a:defRPr sz="1000">
-                          <a:solidFill>
-                            <a:srgbClr val="2C3E50"/>
-                          </a:solidFill>
-                        </a:defRPr>
-                      </a:pPr>
-                      <a:r>
+                  <a:tcPr>
+                    <a:solidFill>
+                      <a:srgbClr val="1E293B"/>
+                    </a:solidFill>
+                  </a:tcPr>
+                </a:tc>
+                <a:tc>
+                  <a:txBody>
+                    <a:bodyPr/>
+                    <a:lstStyle/>
+                    <a:p>
+                      <a:pPr>
+                        <a:defRPr sz="1000">
+                          <a:solidFill>
+                            <a:srgbClr val="E2E8F0"/>
+                          </a:solidFill>
+                        </a:defRPr>
+                      </a:pPr>
+                      <a:r>
+                        <a:rPr>
+                          <a:solidFill>
+                            <a:srgbClr val="E2E8F0"/>
+                          </a:solidFill>
+                        </a:rPr>
                         <a:t>5-8</a:t>
                       </a:r>
                     </a:p>
                   </a:txBody>
-                  <a:tcPr/>
-                </a:tc>
-                <a:tc>
-                  <a:txBody>
-                    <a:bodyPr/>
-                    <a:lstStyle/>
-                    <a:p>
-                      <a:pPr>
-                        <a:defRPr sz="1000">
-                          <a:solidFill>
-                            <a:srgbClr val="2C3E50"/>
-                          </a:solidFill>
-                        </a:defRPr>
-                      </a:pPr>
-                      <a:r>
+                  <a:tcPr>
+                    <a:solidFill>
+                      <a:srgbClr val="1E293B"/>
+                    </a:solidFill>
+                  </a:tcPr>
+                </a:tc>
+                <a:tc>
+                  <a:txBody>
+                    <a:bodyPr/>
+                    <a:lstStyle/>
+                    <a:p>
+                      <a:pPr>
+                        <a:defRPr sz="1000">
+                          <a:solidFill>
+                            <a:srgbClr val="E2E8F0"/>
+                          </a:solidFill>
+                        </a:defRPr>
+                      </a:pPr>
+                      <a:r>
+                        <a:rPr>
+                          <a:solidFill>
+                            <a:srgbClr val="E2E8F0"/>
+                          </a:solidFill>
+                        </a:rPr>
                         <a:t>empleados.feature</a:t>
                       </a:r>
                     </a:p>
@@ -4564,11 +4877,16 @@
                       <a:pPr>
                         <a:defRPr sz="1000">
                           <a:solidFill>
-                            <a:srgbClr val="2C3E50"/>
-                          </a:solidFill>
-                        </a:defRPr>
-                      </a:pPr>
-                      <a:r>
+                            <a:srgbClr val="E2E8F0"/>
+                          </a:solidFill>
+                        </a:defRPr>
+                      </a:pPr>
+                      <a:r>
+                        <a:rPr>
+                          <a:solidFill>
+                            <a:srgbClr val="E2E8F0"/>
+                          </a:solidFill>
+                        </a:rPr>
                         <a:t>busqueda.feature</a:t>
                       </a:r>
                     </a:p>
@@ -4576,11 +4894,16 @@
                       <a:pPr>
                         <a:defRPr sz="1000">
                           <a:solidFill>
-                            <a:srgbClr val="2C3E50"/>
-                          </a:solidFill>
-                        </a:defRPr>
-                      </a:pPr>
-                      <a:r>
+                            <a:srgbClr val="E2E8F0"/>
+                          </a:solidFill>
+                        </a:defRPr>
+                      </a:pPr>
+                      <a:r>
+                        <a:rPr>
+                          <a:solidFill>
+                            <a:srgbClr val="E2E8F0"/>
+                          </a:solidFill>
+                        </a:rPr>
                         <a:t>edicion.feature</a:t>
                       </a:r>
                     </a:p>
@@ -4588,49 +4911,72 @@
                       <a:pPr>
                         <a:defRPr sz="1000">
                           <a:solidFill>
-                            <a:srgbClr val="2C3E50"/>
-                          </a:solidFill>
-                        </a:defRPr>
-                      </a:pPr>
-                      <a:r>
+                            <a:srgbClr val="E2E8F0"/>
+                          </a:solidFill>
+                        </a:defRPr>
+                      </a:pPr>
+                      <a:r>
+                        <a:rPr>
+                          <a:solidFill>
+                            <a:srgbClr val="E2E8F0"/>
+                          </a:solidFill>
+                        </a:rPr>
                         <a:t>eliminacion.feature</a:t>
                       </a:r>
                     </a:p>
                   </a:txBody>
-                  <a:tcPr/>
-                </a:tc>
-                <a:tc>
-                  <a:txBody>
-                    <a:bodyPr/>
-                    <a:lstStyle/>
-                    <a:p>
-                      <a:pPr>
-                        <a:defRPr sz="1000">
-                          <a:solidFill>
-                            <a:srgbClr val="2C3E50"/>
-                          </a:solidFill>
-                        </a:defRPr>
-                      </a:pPr>
-                      <a:r>
+                  <a:tcPr>
+                    <a:solidFill>
+                      <a:srgbClr val="1E293B"/>
+                    </a:solidFill>
+                  </a:tcPr>
+                </a:tc>
+                <a:tc>
+                  <a:txBody>
+                    <a:bodyPr/>
+                    <a:lstStyle/>
+                    <a:p>
+                      <a:pPr>
+                        <a:defRPr sz="1000">
+                          <a:solidFill>
+                            <a:srgbClr val="E2E8F0"/>
+                          </a:solidFill>
+                        </a:defRPr>
+                      </a:pPr>
+                      <a:r>
+                        <a:rPr>
+                          <a:solidFill>
+                            <a:srgbClr val="E2E8F0"/>
+                          </a:solidFill>
+                        </a:rPr>
                         <a:t>15</a:t>
                       </a:r>
                     </a:p>
                   </a:txBody>
-                  <a:tcPr/>
-                </a:tc>
-                <a:tc>
-                  <a:txBody>
-                    <a:bodyPr/>
-                    <a:lstStyle/>
-                    <a:p>
-                      <a:pPr>
-                        <a:defRPr sz="1000">
-                          <a:solidFill>
-                            <a:srgbClr val="2C3E50"/>
-                          </a:solidFill>
-                        </a:defRPr>
-                      </a:pPr>
-                      <a:r>
+                  <a:tcPr>
+                    <a:solidFill>
+                      <a:srgbClr val="1E293B"/>
+                    </a:solidFill>
+                  </a:tcPr>
+                </a:tc>
+                <a:tc>
+                  <a:txBody>
+                    <a:bodyPr/>
+                    <a:lstStyle/>
+                    <a:p>
+                      <a:pPr>
+                        <a:defRPr sz="1000">
+                          <a:solidFill>
+                            <a:srgbClr val="E2E8F0"/>
+                          </a:solidFill>
+                        </a:defRPr>
+                      </a:pPr>
+                      <a:r>
+                        <a:rPr>
+                          <a:solidFill>
+                            <a:srgbClr val="E2E8F0"/>
+                          </a:solidFill>
+                        </a:rPr>
                         <a:t>ExcelUtils</a:t>
                       </a:r>
                     </a:p>
@@ -4638,11 +4984,16 @@
                       <a:pPr>
                         <a:defRPr sz="1000">
                           <a:solidFill>
-                            <a:srgbClr val="2C3E50"/>
-                          </a:solidFill>
-                        </a:defRPr>
-                      </a:pPr>
-                      <a:r>
+                            <a:srgbClr val="E2E8F0"/>
+                          </a:solidFill>
+                        </a:defRPr>
+                      </a:pPr>
+                      <a:r>
+                        <a:rPr>
+                          <a:solidFill>
+                            <a:srgbClr val="E2E8F0"/>
+                          </a:solidFill>
+                        </a:rPr>
                         <a:t>Data-Driven Steps</a:t>
                       </a:r>
                     </a:p>
@@ -4650,16 +5001,25 @@
                       <a:pPr>
                         <a:defRPr sz="1000">
                           <a:solidFill>
-                            <a:srgbClr val="2C3E50"/>
-                          </a:solidFill>
-                        </a:defRPr>
-                      </a:pPr>
-                      <a:r>
+                            <a:srgbClr val="E2E8F0"/>
+                          </a:solidFill>
+                        </a:defRPr>
+                      </a:pPr>
+                      <a:r>
+                        <a:rPr>
+                          <a:solidFill>
+                            <a:srgbClr val="E2E8F0"/>
+                          </a:solidFill>
+                        </a:rPr>
                         <a:t>6 Excel testData</a:t>
                       </a:r>
                     </a:p>
                   </a:txBody>
-                  <a:tcPr/>
+                  <a:tcPr>
+                    <a:solidFill>
+                      <a:srgbClr val="1E293B"/>
+                    </a:solidFill>
+                  </a:tcPr>
                 </a:tc>
               </a:tr>
               <a:tr h="571500">
@@ -4671,11 +5031,16 @@
                       <a:pPr>
                         <a:defRPr sz="1000">
                           <a:solidFill>
-                            <a:srgbClr val="2C3E50"/>
-                          </a:solidFill>
-                        </a:defRPr>
-                      </a:pPr>
-                      <a:r>
+                            <a:srgbClr val="E2E8F0"/>
+                          </a:solidFill>
+                        </a:defRPr>
+                      </a:pPr>
+                      <a:r>
+                        <a:rPr>
+                          <a:solidFill>
+                            <a:srgbClr val="E2E8F0"/>
+                          </a:solidFill>
+                        </a:rPr>
                         <a:t>Sprint 3</a:t>
                       </a:r>
                     </a:p>
@@ -4683,57 +5048,72 @@
                       <a:pPr>
                         <a:defRPr sz="1000">
                           <a:solidFill>
-                            <a:srgbClr val="2C3E50"/>
-                          </a:solidFill>
-                        </a:defRPr>
-                      </a:pPr>
-                      <a:r>
+                            <a:srgbClr val="E2E8F0"/>
+                          </a:solidFill>
+                        </a:defRPr>
+                      </a:pPr>
+                      <a:r>
+                        <a:rPr>
+                          <a:solidFill>
+                            <a:srgbClr val="E2E8F0"/>
+                          </a:solidFill>
+                        </a:rPr>
                         <a:t>Perfil + Licencias</a:t>
                       </a:r>
                     </a:p>
                   </a:txBody>
                   <a:tcPr>
                     <a:solidFill>
-                      <a:srgbClr val="ECF0F1"/>
-                    </a:solidFill>
-                  </a:tcPr>
-                </a:tc>
-                <a:tc>
-                  <a:txBody>
-                    <a:bodyPr/>
-                    <a:lstStyle/>
-                    <a:p>
-                      <a:pPr>
-                        <a:defRPr sz="1000">
-                          <a:solidFill>
-                            <a:srgbClr val="2C3E50"/>
-                          </a:solidFill>
-                        </a:defRPr>
-                      </a:pPr>
-                      <a:r>
+                      <a:srgbClr val="2D3748"/>
+                    </a:solidFill>
+                  </a:tcPr>
+                </a:tc>
+                <a:tc>
+                  <a:txBody>
+                    <a:bodyPr/>
+                    <a:lstStyle/>
+                    <a:p>
+                      <a:pPr>
+                        <a:defRPr sz="1000">
+                          <a:solidFill>
+                            <a:srgbClr val="E2E8F0"/>
+                          </a:solidFill>
+                        </a:defRPr>
+                      </a:pPr>
+                      <a:r>
+                        <a:rPr>
+                          <a:solidFill>
+                            <a:srgbClr val="E2E8F0"/>
+                          </a:solidFill>
+                        </a:rPr>
                         <a:t>9-12</a:t>
                       </a:r>
                     </a:p>
                   </a:txBody>
                   <a:tcPr>
                     <a:solidFill>
-                      <a:srgbClr val="ECF0F1"/>
-                    </a:solidFill>
-                  </a:tcPr>
-                </a:tc>
-                <a:tc>
-                  <a:txBody>
-                    <a:bodyPr/>
-                    <a:lstStyle/>
-                    <a:p>
-                      <a:pPr>
-                        <a:defRPr sz="1000">
-                          <a:solidFill>
-                            <a:srgbClr val="2C3E50"/>
-                          </a:solidFill>
-                        </a:defRPr>
-                      </a:pPr>
-                      <a:r>
+                      <a:srgbClr val="2D3748"/>
+                    </a:solidFill>
+                  </a:tcPr>
+                </a:tc>
+                <a:tc>
+                  <a:txBody>
+                    <a:bodyPr/>
+                    <a:lstStyle/>
+                    <a:p>
+                      <a:pPr>
+                        <a:defRPr sz="1000">
+                          <a:solidFill>
+                            <a:srgbClr val="E2E8F0"/>
+                          </a:solidFill>
+                        </a:defRPr>
+                      </a:pPr>
+                      <a:r>
+                        <a:rPr>
+                          <a:solidFill>
+                            <a:srgbClr val="E2E8F0"/>
+                          </a:solidFill>
+                        </a:rPr>
                         <a:t>perfil.feature</a:t>
                       </a:r>
                     </a:p>
@@ -4741,11 +5121,16 @@
                       <a:pPr>
                         <a:defRPr sz="1000">
                           <a:solidFill>
-                            <a:srgbClr val="2C3E50"/>
-                          </a:solidFill>
-                        </a:defRPr>
-                      </a:pPr>
-                      <a:r>
+                            <a:srgbClr val="E2E8F0"/>
+                          </a:solidFill>
+                        </a:defRPr>
+                      </a:pPr>
+                      <a:r>
+                        <a:rPr>
+                          <a:solidFill>
+                            <a:srgbClr val="E2E8F0"/>
+                          </a:solidFill>
+                        </a:rPr>
                         <a:t>licencias.feature</a:t>
                       </a:r>
                     </a:p>
@@ -4753,57 +5138,72 @@
                       <a:pPr>
                         <a:defRPr sz="1000">
                           <a:solidFill>
-                            <a:srgbClr val="2C3E50"/>
-                          </a:solidFill>
-                        </a:defRPr>
-                      </a:pPr>
-                      <a:r>
+                            <a:srgbClr val="E2E8F0"/>
+                          </a:solidFill>
+                        </a:defRPr>
+                      </a:pPr>
+                      <a:r>
+                        <a:rPr>
+                          <a:solidFill>
+                            <a:srgbClr val="E2E8F0"/>
+                          </a:solidFill>
+                        </a:rPr>
                         <a:t>navigation.feature</a:t>
                       </a:r>
                     </a:p>
                   </a:txBody>
                   <a:tcPr>
                     <a:solidFill>
-                      <a:srgbClr val="ECF0F1"/>
-                    </a:solidFill>
-                  </a:tcPr>
-                </a:tc>
-                <a:tc>
-                  <a:txBody>
-                    <a:bodyPr/>
-                    <a:lstStyle/>
-                    <a:p>
-                      <a:pPr>
-                        <a:defRPr sz="1000">
-                          <a:solidFill>
-                            <a:srgbClr val="2C3E50"/>
-                          </a:solidFill>
-                        </a:defRPr>
-                      </a:pPr>
-                      <a:r>
+                      <a:srgbClr val="2D3748"/>
+                    </a:solidFill>
+                  </a:tcPr>
+                </a:tc>
+                <a:tc>
+                  <a:txBody>
+                    <a:bodyPr/>
+                    <a:lstStyle/>
+                    <a:p>
+                      <a:pPr>
+                        <a:defRPr sz="1000">
+                          <a:solidFill>
+                            <a:srgbClr val="E2E8F0"/>
+                          </a:solidFill>
+                        </a:defRPr>
+                      </a:pPr>
+                      <a:r>
+                        <a:rPr>
+                          <a:solidFill>
+                            <a:srgbClr val="E2E8F0"/>
+                          </a:solidFill>
+                        </a:rPr>
                         <a:t>10</a:t>
                       </a:r>
                     </a:p>
                   </a:txBody>
                   <a:tcPr>
                     <a:solidFill>
-                      <a:srgbClr val="ECF0F1"/>
-                    </a:solidFill>
-                  </a:tcPr>
-                </a:tc>
-                <a:tc>
-                  <a:txBody>
-                    <a:bodyPr/>
-                    <a:lstStyle/>
-                    <a:p>
-                      <a:pPr>
-                        <a:defRPr sz="1000">
-                          <a:solidFill>
-                            <a:srgbClr val="2C3E50"/>
-                          </a:solidFill>
-                        </a:defRPr>
-                      </a:pPr>
-                      <a:r>
+                      <a:srgbClr val="2D3748"/>
+                    </a:solidFill>
+                  </a:tcPr>
+                </a:tc>
+                <a:tc>
+                  <a:txBody>
+                    <a:bodyPr/>
+                    <a:lstStyle/>
+                    <a:p>
+                      <a:pPr>
+                        <a:defRPr sz="1000">
+                          <a:solidFill>
+                            <a:srgbClr val="E2E8F0"/>
+                          </a:solidFill>
+                        </a:defRPr>
+                      </a:pPr>
+                      <a:r>
+                        <a:rPr>
+                          <a:solidFill>
+                            <a:srgbClr val="E2E8F0"/>
+                          </a:solidFill>
+                        </a:rPr>
                         <a:t>Reportes HTML/JSON</a:t>
                       </a:r>
                     </a:p>
@@ -4811,11 +5211,16 @@
                       <a:pPr>
                         <a:defRPr sz="1000">
                           <a:solidFill>
-                            <a:srgbClr val="2C3E50"/>
-                          </a:solidFill>
-                        </a:defRPr>
-                      </a:pPr>
-                      <a:r>
+                            <a:srgbClr val="E2E8F0"/>
+                          </a:solidFill>
+                        </a:defRPr>
+                      </a:pPr>
+                      <a:r>
+                        <a:rPr>
+                          <a:solidFill>
+                            <a:srgbClr val="E2E8F0"/>
+                          </a:solidFill>
+                        </a:rPr>
                         <a:t>Metricas</a:t>
                       </a:r>
                     </a:p>
@@ -4823,18 +5228,23 @@
                       <a:pPr>
                         <a:defRPr sz="1000">
                           <a:solidFill>
-                            <a:srgbClr val="2C3E50"/>
-                          </a:solidFill>
-                        </a:defRPr>
-                      </a:pPr>
-                      <a:r>
+                            <a:srgbClr val="E2E8F0"/>
+                          </a:solidFill>
+                        </a:defRPr>
+                      </a:pPr>
+                      <a:r>
+                        <a:rPr>
+                          <a:solidFill>
+                            <a:srgbClr val="E2E8F0"/>
+                          </a:solidFill>
+                        </a:rPr>
                         <a:t>Informe Final</a:t>
                       </a:r>
                     </a:p>
                   </a:txBody>
                   <a:tcPr>
                     <a:solidFill>
-                      <a:srgbClr val="ECF0F1"/>
+                      <a:srgbClr val="2D3748"/>
                     </a:solidFill>
                   </a:tcPr>
                 </a:tc>
@@ -4873,23 +5283,48 @@
               </a:defRPr>
             </a:pPr>
             <a:r>
+              <a:rPr>
+                <a:solidFill>
+                  <a:srgbClr val="CBD5E1"/>
+                </a:solidFill>
+              </a:rPr>
               <a:t>Caso: OrangeHRM (opensource-demo.orangehrmlive.com)</a:t>
             </a:r>
             <a:br/>
             <a:r>
+              <a:rPr>
+                <a:solidFill>
+                  <a:srgbClr val="CBD5E1"/>
+                </a:solidFill>
+              </a:rPr>
               <a:t>Modulos evaluados: Login, Dashboard, PIM, Leave, Admin, My Info, Sesion</a:t>
             </a:r>
             <a:br/>
             <a:r>
+              <a:rPr>
+                <a:solidFill>
+                  <a:srgbClr val="CBD5E1"/>
+                </a:solidFill>
+              </a:rPr>
               <a:t>Tecnicas: BDD (Gherkin), Data-Driven Testing con Excel, Captura automatica de evidencia</a:t>
             </a:r>
             <a:br/>
             <a:r>
+              <a:rPr>
+                <a:solidFill>
+                  <a:srgbClr val="CBD5E1"/>
+                </a:solidFill>
+              </a:rPr>
               <a:t>Tipos de pruebas: Funcionales, Regresion, Humo, Internacionalizacion, Validacion</a:t>
             </a:r>
             <a:br/>
             <a:br/>
             <a:r>
+              <a:rPr>
+                <a:solidFill>
+                  <a:srgbClr val="CBD5E1"/>
+                </a:solidFill>
+              </a:rPr>
               <a:t>Total: 29 escenarios | 10 features | 6 archivos Excel | 177 screenshots</a:t>
             </a:r>
           </a:p>
@@ -4908,10 +5343,15 @@
   <p:cSld>
     <p:bg>
       <p:bgPr>
+        <a:effectLst/>
         <a:solidFill>
-          <a:srgbClr val="FFFFFF"/>
+          <a:srgbClr val="1E3A5F"/>
         </a:solidFill>
-        <a:effectLst/>
+      </p:bgPr>
+      <p:bgPr>
+        <a:solidFill>
+          <a:srgbClr val="F1F5F9"/>
+        </a:solidFill>
       </p:bgPr>
     </p:bg>
     <p:spTree>
@@ -4928,6 +5368,9 @@
           <p:nvPr/>
         </p:nvSpPr>
         <p:spPr>
+          <a:solidFill>
+            <a:srgbClr val="818CF8"/>
+          </a:solidFill>
           <a:xfrm>
             <a:off x="0" y="0"/>
             <a:ext cx="12191695" cy="1097280"/>
@@ -4935,9 +5378,6 @@
           <a:prstGeom prst="rect">
             <a:avLst/>
           </a:prstGeom>
-          <a:solidFill>
-            <a:srgbClr val="2C3E50"/>
-          </a:solidFill>
           <a:ln>
             <a:noFill/>
           </a:ln>
@@ -4994,6 +5434,11 @@
               </a:defRPr>
             </a:pPr>
             <a:r>
+              <a:rPr>
+                <a:solidFill>
+                  <a:srgbClr val="CBD5E1"/>
+                </a:solidFill>
+              </a:rPr>
               <a:t>Trazabilidad: Requisito -&gt; Funcionalidad -&gt; Escenario -&gt; Resultado</a:t>
             </a:r>
           </a:p>
@@ -5037,13 +5482,18 @@
                         </a:defRPr>
                       </a:pPr>
                       <a:r>
+                        <a:rPr>
+                          <a:solidFill>
+                            <a:srgbClr val="FFFFFF"/>
+                          </a:solidFill>
+                        </a:rPr>
                         <a:t>Requisito</a:t>
                       </a:r>
                     </a:p>
                   </a:txBody>
                   <a:tcPr>
                     <a:solidFill>
-                      <a:srgbClr val="2C3E50"/>
+                      <a:srgbClr val="1E293B"/>
                     </a:solidFill>
                   </a:tcPr>
                 </a:tc>
@@ -5060,13 +5510,18 @@
                         </a:defRPr>
                       </a:pPr>
                       <a:r>
+                        <a:rPr>
+                          <a:solidFill>
+                            <a:srgbClr val="FFFFFF"/>
+                          </a:solidFill>
+                        </a:rPr>
                         <a:t>Funcionalidad</a:t>
                       </a:r>
                     </a:p>
                   </a:txBody>
                   <a:tcPr>
                     <a:solidFill>
-                      <a:srgbClr val="2C3E50"/>
+                      <a:srgbClr val="1E293B"/>
                     </a:solidFill>
                   </a:tcPr>
                 </a:tc>
@@ -5083,13 +5538,18 @@
                         </a:defRPr>
                       </a:pPr>
                       <a:r>
+                        <a:rPr>
+                          <a:solidFill>
+                            <a:srgbClr val="FFFFFF"/>
+                          </a:solidFill>
+                        </a:rPr>
                         <a:t>Escenario Gherkin</a:t>
                       </a:r>
                     </a:p>
                   </a:txBody>
                   <a:tcPr>
                     <a:solidFill>
-                      <a:srgbClr val="2C3E50"/>
+                      <a:srgbClr val="1E293B"/>
                     </a:solidFill>
                   </a:tcPr>
                 </a:tc>
@@ -5106,13 +5566,18 @@
                         </a:defRPr>
                       </a:pPr>
                       <a:r>
+                        <a:rPr>
+                          <a:solidFill>
+                            <a:srgbClr val="FFFFFF"/>
+                          </a:solidFill>
+                        </a:rPr>
                         <a:t>Resultado</a:t>
                       </a:r>
                     </a:p>
                   </a:txBody>
                   <a:tcPr>
                     <a:solidFill>
-                      <a:srgbClr val="2C3E50"/>
+                      <a:srgbClr val="1E293B"/>
                     </a:solidFill>
                   </a:tcPr>
                 </a:tc>
@@ -5126,87 +5591,107 @@
                       <a:pPr>
                         <a:defRPr sz="1000">
                           <a:solidFill>
-                            <a:srgbClr val="2C3E50"/>
-                          </a:solidFill>
-                        </a:defRPr>
-                      </a:pPr>
-                      <a:r>
+                            <a:srgbClr val="E2E8F0"/>
+                          </a:solidFill>
+                        </a:defRPr>
+                      </a:pPr>
+                      <a:r>
+                        <a:rPr>
+                          <a:solidFill>
+                            <a:srgbClr val="E2E8F0"/>
+                          </a:solidFill>
+                        </a:rPr>
                         <a:t>RF-01: Login valido</a:t>
                       </a:r>
                     </a:p>
                   </a:txBody>
                   <a:tcPr>
                     <a:solidFill>
-                      <a:srgbClr val="ECF0F1"/>
-                    </a:solidFill>
-                  </a:tcPr>
-                </a:tc>
-                <a:tc>
-                  <a:txBody>
-                    <a:bodyPr/>
-                    <a:lstStyle/>
-                    <a:p>
-                      <a:pPr>
-                        <a:defRPr sz="1000">
-                          <a:solidFill>
-                            <a:srgbClr val="2C3E50"/>
-                          </a:solidFill>
-                        </a:defRPr>
-                      </a:pPr>
-                      <a:r>
+                      <a:srgbClr val="2D3748"/>
+                    </a:solidFill>
+                  </a:tcPr>
+                </a:tc>
+                <a:tc>
+                  <a:txBody>
+                    <a:bodyPr/>
+                    <a:lstStyle/>
+                    <a:p>
+                      <a:pPr>
+                        <a:defRPr sz="1000">
+                          <a:solidFill>
+                            <a:srgbClr val="E2E8F0"/>
+                          </a:solidFill>
+                        </a:defRPr>
+                      </a:pPr>
+                      <a:r>
+                        <a:rPr>
+                          <a:solidFill>
+                            <a:srgbClr val="E2E8F0"/>
+                          </a:solidFill>
+                        </a:rPr>
                         <a:t>Autenticacion</a:t>
                       </a:r>
                     </a:p>
                   </a:txBody>
                   <a:tcPr>
                     <a:solidFill>
-                      <a:srgbClr val="ECF0F1"/>
-                    </a:solidFill>
-                  </a:tcPr>
-                </a:tc>
-                <a:tc>
-                  <a:txBody>
-                    <a:bodyPr/>
-                    <a:lstStyle/>
-                    <a:p>
-                      <a:pPr>
-                        <a:defRPr sz="1000">
-                          <a:solidFill>
-                            <a:srgbClr val="2C3E50"/>
-                          </a:solidFill>
-                        </a:defRPr>
-                      </a:pPr>
-                      <a:r>
+                      <a:srgbClr val="2D3748"/>
+                    </a:solidFill>
+                  </a:tcPr>
+                </a:tc>
+                <a:tc>
+                  <a:txBody>
+                    <a:bodyPr/>
+                    <a:lstStyle/>
+                    <a:p>
+                      <a:pPr>
+                        <a:defRPr sz="1000">
+                          <a:solidFill>
+                            <a:srgbClr val="E2E8F0"/>
+                          </a:solidFill>
+                        </a:defRPr>
+                      </a:pPr>
+                      <a:r>
+                        <a:rPr>
+                          <a:solidFill>
+                            <a:srgbClr val="E2E8F0"/>
+                          </a:solidFill>
+                        </a:rPr>
                         <a:t>TC_001_LoginExitoso</a:t>
                       </a:r>
                     </a:p>
                   </a:txBody>
                   <a:tcPr>
                     <a:solidFill>
-                      <a:srgbClr val="ECF0F1"/>
-                    </a:solidFill>
-                  </a:tcPr>
-                </a:tc>
-                <a:tc>
-                  <a:txBody>
-                    <a:bodyPr/>
-                    <a:lstStyle/>
-                    <a:p>
-                      <a:pPr>
-                        <a:defRPr sz="1000">
-                          <a:solidFill>
-                            <a:srgbClr val="2C3E50"/>
-                          </a:solidFill>
-                        </a:defRPr>
-                      </a:pPr>
-                      <a:r>
+                      <a:srgbClr val="2D3748"/>
+                    </a:solidFill>
+                  </a:tcPr>
+                </a:tc>
+                <a:tc>
+                  <a:txBody>
+                    <a:bodyPr/>
+                    <a:lstStyle/>
+                    <a:p>
+                      <a:pPr>
+                        <a:defRPr sz="1000">
+                          <a:solidFill>
+                            <a:srgbClr val="E2E8F0"/>
+                          </a:solidFill>
+                        </a:defRPr>
+                      </a:pPr>
+                      <a:r>
+                        <a:rPr>
+                          <a:solidFill>
+                            <a:srgbClr val="E2E8F0"/>
+                          </a:solidFill>
+                        </a:rPr>
                         <a:t>PASS</a:t>
                       </a:r>
                     </a:p>
                   </a:txBody>
                   <a:tcPr>
                     <a:solidFill>
-                      <a:srgbClr val="ECF0F1"/>
+                      <a:srgbClr val="2D3748"/>
                     </a:solidFill>
                   </a:tcPr>
                 </a:tc>
@@ -5220,73 +5705,109 @@
                       <a:pPr>
                         <a:defRPr sz="1000">
                           <a:solidFill>
-                            <a:srgbClr val="2C3E50"/>
-                          </a:solidFill>
-                        </a:defRPr>
-                      </a:pPr>
-                      <a:r>
+                            <a:srgbClr val="E2E8F0"/>
+                          </a:solidFill>
+                        </a:defRPr>
+                      </a:pPr>
+                      <a:r>
+                        <a:rPr>
+                          <a:solidFill>
+                            <a:srgbClr val="E2E8F0"/>
+                          </a:solidFill>
+                        </a:rPr>
                         <a:t>RF-02: Login invalido</a:t>
                       </a:r>
                     </a:p>
                   </a:txBody>
-                  <a:tcPr/>
-                </a:tc>
-                <a:tc>
-                  <a:txBody>
-                    <a:bodyPr/>
-                    <a:lstStyle/>
-                    <a:p>
-                      <a:pPr>
-                        <a:defRPr sz="1000">
-                          <a:solidFill>
-                            <a:srgbClr val="2C3E50"/>
-                          </a:solidFill>
-                        </a:defRPr>
-                      </a:pPr>
-                      <a:r>
+                  <a:tcPr>
+                    <a:solidFill>
+                      <a:srgbClr val="1E293B"/>
+                    </a:solidFill>
+                  </a:tcPr>
+                </a:tc>
+                <a:tc>
+                  <a:txBody>
+                    <a:bodyPr/>
+                    <a:lstStyle/>
+                    <a:p>
+                      <a:pPr>
+                        <a:defRPr sz="1000">
+                          <a:solidFill>
+                            <a:srgbClr val="E2E8F0"/>
+                          </a:solidFill>
+                        </a:defRPr>
+                      </a:pPr>
+                      <a:r>
+                        <a:rPr>
+                          <a:solidFill>
+                            <a:srgbClr val="E2E8F0"/>
+                          </a:solidFill>
+                        </a:rPr>
                         <a:t>Error auth</a:t>
                       </a:r>
                     </a:p>
                   </a:txBody>
-                  <a:tcPr/>
-                </a:tc>
-                <a:tc>
-                  <a:txBody>
-                    <a:bodyPr/>
-                    <a:lstStyle/>
-                    <a:p>
-                      <a:pPr>
-                        <a:defRPr sz="1000">
-                          <a:solidFill>
-                            <a:srgbClr val="2C3E50"/>
-                          </a:solidFill>
-                        </a:defRPr>
-                      </a:pPr>
-                      <a:r>
+                  <a:tcPr>
+                    <a:solidFill>
+                      <a:srgbClr val="1E293B"/>
+                    </a:solidFill>
+                  </a:tcPr>
+                </a:tc>
+                <a:tc>
+                  <a:txBody>
+                    <a:bodyPr/>
+                    <a:lstStyle/>
+                    <a:p>
+                      <a:pPr>
+                        <a:defRPr sz="1000">
+                          <a:solidFill>
+                            <a:srgbClr val="E2E8F0"/>
+                          </a:solidFill>
+                        </a:defRPr>
+                      </a:pPr>
+                      <a:r>
+                        <a:rPr>
+                          <a:solidFill>
+                            <a:srgbClr val="E2E8F0"/>
+                          </a:solidFill>
+                        </a:rPr>
                         <a:t>TC_002_LoginFallido</a:t>
                       </a:r>
                     </a:p>
                   </a:txBody>
-                  <a:tcPr/>
-                </a:tc>
-                <a:tc>
-                  <a:txBody>
-                    <a:bodyPr/>
-                    <a:lstStyle/>
-                    <a:p>
-                      <a:pPr>
-                        <a:defRPr sz="1000">
-                          <a:solidFill>
-                            <a:srgbClr val="2C3E50"/>
-                          </a:solidFill>
-                        </a:defRPr>
-                      </a:pPr>
-                      <a:r>
+                  <a:tcPr>
+                    <a:solidFill>
+                      <a:srgbClr val="1E293B"/>
+                    </a:solidFill>
+                  </a:tcPr>
+                </a:tc>
+                <a:tc>
+                  <a:txBody>
+                    <a:bodyPr/>
+                    <a:lstStyle/>
+                    <a:p>
+                      <a:pPr>
+                        <a:defRPr sz="1000">
+                          <a:solidFill>
+                            <a:srgbClr val="E2E8F0"/>
+                          </a:solidFill>
+                        </a:defRPr>
+                      </a:pPr>
+                      <a:r>
+                        <a:rPr>
+                          <a:solidFill>
+                            <a:srgbClr val="E2E8F0"/>
+                          </a:solidFill>
+                        </a:rPr>
                         <a:t>PASS</a:t>
                       </a:r>
                     </a:p>
                   </a:txBody>
-                  <a:tcPr/>
+                  <a:tcPr>
+                    <a:solidFill>
+                      <a:srgbClr val="1E293B"/>
+                    </a:solidFill>
+                  </a:tcPr>
                 </a:tc>
               </a:tr>
               <a:tr h="419100">
@@ -5298,87 +5819,107 @@
                       <a:pPr>
                         <a:defRPr sz="1000">
                           <a:solidFill>
-                            <a:srgbClr val="2C3E50"/>
-                          </a:solidFill>
-                        </a:defRPr>
-                      </a:pPr>
-                      <a:r>
+                            <a:srgbClr val="E2E8F0"/>
+                          </a:solidFill>
+                        </a:defRPr>
+                      </a:pPr>
+                      <a:r>
+                        <a:rPr>
+                          <a:solidFill>
+                            <a:srgbClr val="E2E8F0"/>
+                          </a:solidFill>
+                        </a:rPr>
                         <a:t>RF-03: Crear empleado</a:t>
                       </a:r>
                     </a:p>
                   </a:txBody>
                   <a:tcPr>
                     <a:solidFill>
-                      <a:srgbClr val="ECF0F1"/>
-                    </a:solidFill>
-                  </a:tcPr>
-                </a:tc>
-                <a:tc>
-                  <a:txBody>
-                    <a:bodyPr/>
-                    <a:lstStyle/>
-                    <a:p>
-                      <a:pPr>
-                        <a:defRPr sz="1000">
-                          <a:solidFill>
-                            <a:srgbClr val="2C3E50"/>
-                          </a:solidFill>
-                        </a:defRPr>
-                      </a:pPr>
-                      <a:r>
+                      <a:srgbClr val="2D3748"/>
+                    </a:solidFill>
+                  </a:tcPr>
+                </a:tc>
+                <a:tc>
+                  <a:txBody>
+                    <a:bodyPr/>
+                    <a:lstStyle/>
+                    <a:p>
+                      <a:pPr>
+                        <a:defRPr sz="1000">
+                          <a:solidFill>
+                            <a:srgbClr val="E2E8F0"/>
+                          </a:solidFill>
+                        </a:defRPr>
+                      </a:pPr>
+                      <a:r>
+                        <a:rPr>
+                          <a:solidFill>
+                            <a:srgbClr val="E2E8F0"/>
+                          </a:solidFill>
+                        </a:rPr>
                         <a:t>PIM Registro</a:t>
                       </a:r>
                     </a:p>
                   </a:txBody>
                   <a:tcPr>
                     <a:solidFill>
-                      <a:srgbClr val="ECF0F1"/>
-                    </a:solidFill>
-                  </a:tcPr>
-                </a:tc>
-                <a:tc>
-                  <a:txBody>
-                    <a:bodyPr/>
-                    <a:lstStyle/>
-                    <a:p>
-                      <a:pPr>
-                        <a:defRPr sz="1000">
-                          <a:solidFill>
-                            <a:srgbClr val="2C3E50"/>
-                          </a:solidFill>
-                        </a:defRPr>
-                      </a:pPr>
-                      <a:r>
+                      <a:srgbClr val="2D3748"/>
+                    </a:solidFill>
+                  </a:tcPr>
+                </a:tc>
+                <a:tc>
+                  <a:txBody>
+                    <a:bodyPr/>
+                    <a:lstStyle/>
+                    <a:p>
+                      <a:pPr>
+                        <a:defRPr sz="1000">
+                          <a:solidFill>
+                            <a:srgbClr val="E2E8F0"/>
+                          </a:solidFill>
+                        </a:defRPr>
+                      </a:pPr>
+                      <a:r>
+                        <a:rPr>
+                          <a:solidFill>
+                            <a:srgbClr val="E2E8F0"/>
+                          </a:solidFill>
+                        </a:rPr>
                         <a:t>TC_005_Agregar (3 filas DD)</a:t>
                       </a:r>
                     </a:p>
                   </a:txBody>
                   <a:tcPr>
                     <a:solidFill>
-                      <a:srgbClr val="ECF0F1"/>
-                    </a:solidFill>
-                  </a:tcPr>
-                </a:tc>
-                <a:tc>
-                  <a:txBody>
-                    <a:bodyPr/>
-                    <a:lstStyle/>
-                    <a:p>
-                      <a:pPr>
-                        <a:defRPr sz="1000">
-                          <a:solidFill>
-                            <a:srgbClr val="2C3E50"/>
-                          </a:solidFill>
-                        </a:defRPr>
-                      </a:pPr>
-                      <a:r>
+                      <a:srgbClr val="2D3748"/>
+                    </a:solidFill>
+                  </a:tcPr>
+                </a:tc>
+                <a:tc>
+                  <a:txBody>
+                    <a:bodyPr/>
+                    <a:lstStyle/>
+                    <a:p>
+                      <a:pPr>
+                        <a:defRPr sz="1000">
+                          <a:solidFill>
+                            <a:srgbClr val="E2E8F0"/>
+                          </a:solidFill>
+                        </a:defRPr>
+                      </a:pPr>
+                      <a:r>
+                        <a:rPr>
+                          <a:solidFill>
+                            <a:srgbClr val="E2E8F0"/>
+                          </a:solidFill>
+                        </a:rPr>
                         <a:t>PASS</a:t>
                       </a:r>
                     </a:p>
                   </a:txBody>
                   <a:tcPr>
                     <a:solidFill>
-                      <a:srgbClr val="ECF0F1"/>
+                      <a:srgbClr val="2D3748"/>
                     </a:solidFill>
                   </a:tcPr>
                 </a:tc>
@@ -5392,73 +5933,109 @@
                       <a:pPr>
                         <a:defRPr sz="1000">
                           <a:solidFill>
-                            <a:srgbClr val="2C3E50"/>
-                          </a:solidFill>
-                        </a:defRPr>
-                      </a:pPr>
-                      <a:r>
+                            <a:srgbClr val="E2E8F0"/>
+                          </a:solidFill>
+                        </a:defRPr>
+                      </a:pPr>
+                      <a:r>
+                        <a:rPr>
+                          <a:solidFill>
+                            <a:srgbClr val="E2E8F0"/>
+                          </a:solidFill>
+                        </a:rPr>
                         <a:t>RF-04: Buscar empleado</a:t>
                       </a:r>
                     </a:p>
                   </a:txBody>
-                  <a:tcPr/>
-                </a:tc>
-                <a:tc>
-                  <a:txBody>
-                    <a:bodyPr/>
-                    <a:lstStyle/>
-                    <a:p>
-                      <a:pPr>
-                        <a:defRPr sz="1000">
-                          <a:solidFill>
-                            <a:srgbClr val="2C3E50"/>
-                          </a:solidFill>
-                        </a:defRPr>
-                      </a:pPr>
-                      <a:r>
+                  <a:tcPr>
+                    <a:solidFill>
+                      <a:srgbClr val="1E293B"/>
+                    </a:solidFill>
+                  </a:tcPr>
+                </a:tc>
+                <a:tc>
+                  <a:txBody>
+                    <a:bodyPr/>
+                    <a:lstStyle/>
+                    <a:p>
+                      <a:pPr>
+                        <a:defRPr sz="1000">
+                          <a:solidFill>
+                            <a:srgbClr val="E2E8F0"/>
+                          </a:solidFill>
+                        </a:defRPr>
+                      </a:pPr>
+                      <a:r>
+                        <a:rPr>
+                          <a:solidFill>
+                            <a:srgbClr val="E2E8F0"/>
+                          </a:solidFill>
+                        </a:rPr>
                         <a:t>PIM Busqueda</a:t>
                       </a:r>
                     </a:p>
                   </a:txBody>
-                  <a:tcPr/>
-                </a:tc>
-                <a:tc>
-                  <a:txBody>
-                    <a:bodyPr/>
-                    <a:lstStyle/>
-                    <a:p>
-                      <a:pPr>
-                        <a:defRPr sz="1000">
-                          <a:solidFill>
-                            <a:srgbClr val="2C3E50"/>
-                          </a:solidFill>
-                        </a:defRPr>
-                      </a:pPr>
-                      <a:r>
+                  <a:tcPr>
+                    <a:solidFill>
+                      <a:srgbClr val="1E293B"/>
+                    </a:solidFill>
+                  </a:tcPr>
+                </a:tc>
+                <a:tc>
+                  <a:txBody>
+                    <a:bodyPr/>
+                    <a:lstStyle/>
+                    <a:p>
+                      <a:pPr>
+                        <a:defRPr sz="1000">
+                          <a:solidFill>
+                            <a:srgbClr val="E2E8F0"/>
+                          </a:solidFill>
+                        </a:defRPr>
+                      </a:pPr>
+                      <a:r>
+                        <a:rPr>
+                          <a:solidFill>
+                            <a:srgbClr val="E2E8F0"/>
+                          </a:solidFill>
+                        </a:rPr>
                         <a:t>TC_006_Buscar (3 filas DD)</a:t>
                       </a:r>
                     </a:p>
                   </a:txBody>
-                  <a:tcPr/>
-                </a:tc>
-                <a:tc>
-                  <a:txBody>
-                    <a:bodyPr/>
-                    <a:lstStyle/>
-                    <a:p>
-                      <a:pPr>
-                        <a:defRPr sz="1000">
-                          <a:solidFill>
-                            <a:srgbClr val="2C3E50"/>
-                          </a:solidFill>
-                        </a:defRPr>
-                      </a:pPr>
-                      <a:r>
+                  <a:tcPr>
+                    <a:solidFill>
+                      <a:srgbClr val="1E293B"/>
+                    </a:solidFill>
+                  </a:tcPr>
+                </a:tc>
+                <a:tc>
+                  <a:txBody>
+                    <a:bodyPr/>
+                    <a:lstStyle/>
+                    <a:p>
+                      <a:pPr>
+                        <a:defRPr sz="1000">
+                          <a:solidFill>
+                            <a:srgbClr val="E2E8F0"/>
+                          </a:solidFill>
+                        </a:defRPr>
+                      </a:pPr>
+                      <a:r>
+                        <a:rPr>
+                          <a:solidFill>
+                            <a:srgbClr val="E2E8F0"/>
+                          </a:solidFill>
+                        </a:rPr>
                         <a:t>PASS</a:t>
                       </a:r>
                     </a:p>
                   </a:txBody>
-                  <a:tcPr/>
+                  <a:tcPr>
+                    <a:solidFill>
+                      <a:srgbClr val="1E293B"/>
+                    </a:solidFill>
+                  </a:tcPr>
                 </a:tc>
               </a:tr>
               <a:tr h="419100">
@@ -5470,87 +6047,107 @@
                       <a:pPr>
                         <a:defRPr sz="1000">
                           <a:solidFill>
-                            <a:srgbClr val="2C3E50"/>
-                          </a:solidFill>
-                        </a:defRPr>
-                      </a:pPr>
-                      <a:r>
+                            <a:srgbClr val="E2E8F0"/>
+                          </a:solidFill>
+                        </a:defRPr>
+                      </a:pPr>
+                      <a:r>
+                        <a:rPr>
+                          <a:solidFill>
+                            <a:srgbClr val="E2E8F0"/>
+                          </a:solidFill>
+                        </a:rPr>
                         <a:t>RF-05: Editar empleado</a:t>
                       </a:r>
                     </a:p>
                   </a:txBody>
                   <a:tcPr>
                     <a:solidFill>
-                      <a:srgbClr val="ECF0F1"/>
-                    </a:solidFill>
-                  </a:tcPr>
-                </a:tc>
-                <a:tc>
-                  <a:txBody>
-                    <a:bodyPr/>
-                    <a:lstStyle/>
-                    <a:p>
-                      <a:pPr>
-                        <a:defRPr sz="1000">
-                          <a:solidFill>
-                            <a:srgbClr val="2C3E50"/>
-                          </a:solidFill>
-                        </a:defRPr>
-                      </a:pPr>
-                      <a:r>
+                      <a:srgbClr val="2D3748"/>
+                    </a:solidFill>
+                  </a:tcPr>
+                </a:tc>
+                <a:tc>
+                  <a:txBody>
+                    <a:bodyPr/>
+                    <a:lstStyle/>
+                    <a:p>
+                      <a:pPr>
+                        <a:defRPr sz="1000">
+                          <a:solidFill>
+                            <a:srgbClr val="E2E8F0"/>
+                          </a:solidFill>
+                        </a:defRPr>
+                      </a:pPr>
+                      <a:r>
+                        <a:rPr>
+                          <a:solidFill>
+                            <a:srgbClr val="E2E8F0"/>
+                          </a:solidFill>
+                        </a:rPr>
                         <a:t>PIM Edicion</a:t>
                       </a:r>
                     </a:p>
                   </a:txBody>
                   <a:tcPr>
                     <a:solidFill>
-                      <a:srgbClr val="ECF0F1"/>
-                    </a:solidFill>
-                  </a:tcPr>
-                </a:tc>
-                <a:tc>
-                  <a:txBody>
-                    <a:bodyPr/>
-                    <a:lstStyle/>
-                    <a:p>
-                      <a:pPr>
-                        <a:defRPr sz="1000">
-                          <a:solidFill>
-                            <a:srgbClr val="2C3E50"/>
-                          </a:solidFill>
-                        </a:defRPr>
-                      </a:pPr>
-                      <a:r>
+                      <a:srgbClr val="2D3748"/>
+                    </a:solidFill>
+                  </a:tcPr>
+                </a:tc>
+                <a:tc>
+                  <a:txBody>
+                    <a:bodyPr/>
+                    <a:lstStyle/>
+                    <a:p>
+                      <a:pPr>
+                        <a:defRPr sz="1000">
+                          <a:solidFill>
+                            <a:srgbClr val="E2E8F0"/>
+                          </a:solidFill>
+                        </a:defRPr>
+                      </a:pPr>
+                      <a:r>
+                        <a:rPr>
+                          <a:solidFill>
+                            <a:srgbClr val="E2E8F0"/>
+                          </a:solidFill>
+                        </a:rPr>
                         <a:t>TC_007_Editar (3 filas DD)</a:t>
                       </a:r>
                     </a:p>
                   </a:txBody>
                   <a:tcPr>
                     <a:solidFill>
-                      <a:srgbClr val="ECF0F1"/>
-                    </a:solidFill>
-                  </a:tcPr>
-                </a:tc>
-                <a:tc>
-                  <a:txBody>
-                    <a:bodyPr/>
-                    <a:lstStyle/>
-                    <a:p>
-                      <a:pPr>
-                        <a:defRPr sz="1000">
-                          <a:solidFill>
-                            <a:srgbClr val="2C3E50"/>
-                          </a:solidFill>
-                        </a:defRPr>
-                      </a:pPr>
-                      <a:r>
+                      <a:srgbClr val="2D3748"/>
+                    </a:solidFill>
+                  </a:tcPr>
+                </a:tc>
+                <a:tc>
+                  <a:txBody>
+                    <a:bodyPr/>
+                    <a:lstStyle/>
+                    <a:p>
+                      <a:pPr>
+                        <a:defRPr sz="1000">
+                          <a:solidFill>
+                            <a:srgbClr val="E2E8F0"/>
+                          </a:solidFill>
+                        </a:defRPr>
+                      </a:pPr>
+                      <a:r>
+                        <a:rPr>
+                          <a:solidFill>
+                            <a:srgbClr val="E2E8F0"/>
+                          </a:solidFill>
+                        </a:rPr>
                         <a:t>PASS</a:t>
                       </a:r>
                     </a:p>
                   </a:txBody>
                   <a:tcPr>
                     <a:solidFill>
-                      <a:srgbClr val="ECF0F1"/>
+                      <a:srgbClr val="2D3748"/>
                     </a:solidFill>
                   </a:tcPr>
                 </a:tc>
@@ -5564,73 +6161,109 @@
                       <a:pPr>
                         <a:defRPr sz="1000">
                           <a:solidFill>
-                            <a:srgbClr val="2C3E50"/>
-                          </a:solidFill>
-                        </a:defRPr>
-                      </a:pPr>
-                      <a:r>
+                            <a:srgbClr val="E2E8F0"/>
+                          </a:solidFill>
+                        </a:defRPr>
+                      </a:pPr>
+                      <a:r>
+                        <a:rPr>
+                          <a:solidFill>
+                            <a:srgbClr val="E2E8F0"/>
+                          </a:solidFill>
+                        </a:rPr>
                         <a:t>RF-06: Eliminar empleado</a:t>
                       </a:r>
                     </a:p>
                   </a:txBody>
-                  <a:tcPr/>
-                </a:tc>
-                <a:tc>
-                  <a:txBody>
-                    <a:bodyPr/>
-                    <a:lstStyle/>
-                    <a:p>
-                      <a:pPr>
-                        <a:defRPr sz="1000">
-                          <a:solidFill>
-                            <a:srgbClr val="2C3E50"/>
-                          </a:solidFill>
-                        </a:defRPr>
-                      </a:pPr>
-                      <a:r>
+                  <a:tcPr>
+                    <a:solidFill>
+                      <a:srgbClr val="1E293B"/>
+                    </a:solidFill>
+                  </a:tcPr>
+                </a:tc>
+                <a:tc>
+                  <a:txBody>
+                    <a:bodyPr/>
+                    <a:lstStyle/>
+                    <a:p>
+                      <a:pPr>
+                        <a:defRPr sz="1000">
+                          <a:solidFill>
+                            <a:srgbClr val="E2E8F0"/>
+                          </a:solidFill>
+                        </a:defRPr>
+                      </a:pPr>
+                      <a:r>
+                        <a:rPr>
+                          <a:solidFill>
+                            <a:srgbClr val="E2E8F0"/>
+                          </a:solidFill>
+                        </a:rPr>
                         <a:t>PIM Eliminacion</a:t>
                       </a:r>
                     </a:p>
                   </a:txBody>
-                  <a:tcPr/>
-                </a:tc>
-                <a:tc>
-                  <a:txBody>
-                    <a:bodyPr/>
-                    <a:lstStyle/>
-                    <a:p>
-                      <a:pPr>
-                        <a:defRPr sz="1000">
-                          <a:solidFill>
-                            <a:srgbClr val="2C3E50"/>
-                          </a:solidFill>
-                        </a:defRPr>
-                      </a:pPr>
-                      <a:r>
+                  <a:tcPr>
+                    <a:solidFill>
+                      <a:srgbClr val="1E293B"/>
+                    </a:solidFill>
+                  </a:tcPr>
+                </a:tc>
+                <a:tc>
+                  <a:txBody>
+                    <a:bodyPr/>
+                    <a:lstStyle/>
+                    <a:p>
+                      <a:pPr>
+                        <a:defRPr sz="1000">
+                          <a:solidFill>
+                            <a:srgbClr val="E2E8F0"/>
+                          </a:solidFill>
+                        </a:defRPr>
+                      </a:pPr>
+                      <a:r>
+                        <a:rPr>
+                          <a:solidFill>
+                            <a:srgbClr val="E2E8F0"/>
+                          </a:solidFill>
+                        </a:rPr>
                         <a:t>TC_008_Eliminar (3 filas DD)</a:t>
                       </a:r>
                     </a:p>
                   </a:txBody>
-                  <a:tcPr/>
-                </a:tc>
-                <a:tc>
-                  <a:txBody>
-                    <a:bodyPr/>
-                    <a:lstStyle/>
-                    <a:p>
-                      <a:pPr>
-                        <a:defRPr sz="1000">
-                          <a:solidFill>
-                            <a:srgbClr val="2C3E50"/>
-                          </a:solidFill>
-                        </a:defRPr>
-                      </a:pPr>
-                      <a:r>
+                  <a:tcPr>
+                    <a:solidFill>
+                      <a:srgbClr val="1E293B"/>
+                    </a:solidFill>
+                  </a:tcPr>
+                </a:tc>
+                <a:tc>
+                  <a:txBody>
+                    <a:bodyPr/>
+                    <a:lstStyle/>
+                    <a:p>
+                      <a:pPr>
+                        <a:defRPr sz="1000">
+                          <a:solidFill>
+                            <a:srgbClr val="E2E8F0"/>
+                          </a:solidFill>
+                        </a:defRPr>
+                      </a:pPr>
+                      <a:r>
+                        <a:rPr>
+                          <a:solidFill>
+                            <a:srgbClr val="E2E8F0"/>
+                          </a:solidFill>
+                        </a:rPr>
                         <a:t>PASS</a:t>
                       </a:r>
                     </a:p>
                   </a:txBody>
-                  <a:tcPr/>
+                  <a:tcPr>
+                    <a:solidFill>
+                      <a:srgbClr val="1E293B"/>
+                    </a:solidFill>
+                  </a:tcPr>
                 </a:tc>
               </a:tr>
               <a:tr h="419100">
@@ -5642,87 +6275,107 @@
                       <a:pPr>
                         <a:defRPr sz="1000">
                           <a:solidFill>
-                            <a:srgbClr val="2C3E50"/>
-                          </a:solidFill>
-                        </a:defRPr>
-                      </a:pPr>
-                      <a:r>
+                            <a:srgbClr val="E2E8F0"/>
+                          </a:solidFill>
+                        </a:defRPr>
+                      </a:pPr>
+                      <a:r>
+                        <a:rPr>
+                          <a:solidFill>
+                            <a:srgbClr val="E2E8F0"/>
+                          </a:solidFill>
+                        </a:rPr>
                         <a:t>RF-07: Navegacion</a:t>
                       </a:r>
                     </a:p>
                   </a:txBody>
                   <a:tcPr>
                     <a:solidFill>
-                      <a:srgbClr val="ECF0F1"/>
-                    </a:solidFill>
-                  </a:tcPr>
-                </a:tc>
-                <a:tc>
-                  <a:txBody>
-                    <a:bodyPr/>
-                    <a:lstStyle/>
-                    <a:p>
-                      <a:pPr>
-                        <a:defRPr sz="1000">
-                          <a:solidFill>
-                            <a:srgbClr val="2C3E50"/>
-                          </a:solidFill>
-                        </a:defRPr>
-                      </a:pPr>
-                      <a:r>
+                      <a:srgbClr val="2D3748"/>
+                    </a:solidFill>
+                  </a:tcPr>
+                </a:tc>
+                <a:tc>
+                  <a:txBody>
+                    <a:bodyPr/>
+                    <a:lstStyle/>
+                    <a:p>
+                      <a:pPr>
+                        <a:defRPr sz="1000">
+                          <a:solidFill>
+                            <a:srgbClr val="E2E8F0"/>
+                          </a:solidFill>
+                        </a:defRPr>
+                      </a:pPr>
+                      <a:r>
+                        <a:rPr>
+                          <a:solidFill>
+                            <a:srgbClr val="E2E8F0"/>
+                          </a:solidFill>
+                        </a:rPr>
                         <a:t>Modulos</a:t>
                       </a:r>
                     </a:p>
                   </a:txBody>
                   <a:tcPr>
                     <a:solidFill>
-                      <a:srgbClr val="ECF0F1"/>
-                    </a:solidFill>
-                  </a:tcPr>
-                </a:tc>
-                <a:tc>
-                  <a:txBody>
-                    <a:bodyPr/>
-                    <a:lstStyle/>
-                    <a:p>
-                      <a:pPr>
-                        <a:defRPr sz="1000">
-                          <a:solidFill>
-                            <a:srgbClr val="2C3E50"/>
-                          </a:solidFill>
-                        </a:defRPr>
-                      </a:pPr>
-                      <a:r>
+                      <a:srgbClr val="2D3748"/>
+                    </a:solidFill>
+                  </a:tcPr>
+                </a:tc>
+                <a:tc>
+                  <a:txBody>
+                    <a:bodyPr/>
+                    <a:lstStyle/>
+                    <a:p>
+                      <a:pPr>
+                        <a:defRPr sz="1000">
+                          <a:solidFill>
+                            <a:srgbClr val="E2E8F0"/>
+                          </a:solidFill>
+                        </a:defRPr>
+                      </a:pPr>
+                      <a:r>
+                        <a:rPr>
+                          <a:solidFill>
+                            <a:srgbClr val="E2E8F0"/>
+                          </a:solidFill>
+                        </a:rPr>
                         <a:t>TC_007-009_Nav (Leave/Admin/Info)</a:t>
                       </a:r>
                     </a:p>
                   </a:txBody>
                   <a:tcPr>
                     <a:solidFill>
-                      <a:srgbClr val="ECF0F1"/>
-                    </a:solidFill>
-                  </a:tcPr>
-                </a:tc>
-                <a:tc>
-                  <a:txBody>
-                    <a:bodyPr/>
-                    <a:lstStyle/>
-                    <a:p>
-                      <a:pPr>
-                        <a:defRPr sz="1000">
-                          <a:solidFill>
-                            <a:srgbClr val="2C3E50"/>
-                          </a:solidFill>
-                        </a:defRPr>
-                      </a:pPr>
-                      <a:r>
+                      <a:srgbClr val="2D3748"/>
+                    </a:solidFill>
+                  </a:tcPr>
+                </a:tc>
+                <a:tc>
+                  <a:txBody>
+                    <a:bodyPr/>
+                    <a:lstStyle/>
+                    <a:p>
+                      <a:pPr>
+                        <a:defRPr sz="1000">
+                          <a:solidFill>
+                            <a:srgbClr val="E2E8F0"/>
+                          </a:solidFill>
+                        </a:defRPr>
+                      </a:pPr>
+                      <a:r>
+                        <a:rPr>
+                          <a:solidFill>
+                            <a:srgbClr val="E2E8F0"/>
+                          </a:solidFill>
+                        </a:rPr>
                         <a:t>PASS</a:t>
                       </a:r>
                     </a:p>
                   </a:txBody>
                   <a:tcPr>
                     <a:solidFill>
-                      <a:srgbClr val="ECF0F1"/>
+                      <a:srgbClr val="2D3748"/>
                     </a:solidFill>
                   </a:tcPr>
                 </a:tc>
@@ -5736,73 +6389,109 @@
                       <a:pPr>
                         <a:defRPr sz="1000">
                           <a:solidFill>
-                            <a:srgbClr val="2C3E50"/>
-                          </a:solidFill>
-                        </a:defRPr>
-                      </a:pPr>
-                      <a:r>
+                            <a:srgbClr val="E2E8F0"/>
+                          </a:solidFill>
+                        </a:defRPr>
+                      </a:pPr>
+                      <a:r>
+                        <a:rPr>
+                          <a:solidFill>
+                            <a:srgbClr val="E2E8F0"/>
+                          </a:solidFill>
+                        </a:rPr>
                         <a:t>RF-08: Cerrar sesion</a:t>
                       </a:r>
                     </a:p>
                   </a:txBody>
-                  <a:tcPr/>
-                </a:tc>
-                <a:tc>
-                  <a:txBody>
-                    <a:bodyPr/>
-                    <a:lstStyle/>
-                    <a:p>
-                      <a:pPr>
-                        <a:defRPr sz="1000">
-                          <a:solidFill>
-                            <a:srgbClr val="2C3E50"/>
-                          </a:solidFill>
-                        </a:defRPr>
-                      </a:pPr>
-                      <a:r>
+                  <a:tcPr>
+                    <a:solidFill>
+                      <a:srgbClr val="1E293B"/>
+                    </a:solidFill>
+                  </a:tcPr>
+                </a:tc>
+                <a:tc>
+                  <a:txBody>
+                    <a:bodyPr/>
+                    <a:lstStyle/>
+                    <a:p>
+                      <a:pPr>
+                        <a:defRPr sz="1000">
+                          <a:solidFill>
+                            <a:srgbClr val="E2E8F0"/>
+                          </a:solidFill>
+                        </a:defRPr>
+                      </a:pPr>
+                      <a:r>
+                        <a:rPr>
+                          <a:solidFill>
+                            <a:srgbClr val="E2E8F0"/>
+                          </a:solidFill>
+                        </a:rPr>
                         <a:t>Logout</a:t>
                       </a:r>
                     </a:p>
                   </a:txBody>
-                  <a:tcPr/>
-                </a:tc>
-                <a:tc>
-                  <a:txBody>
-                    <a:bodyPr/>
-                    <a:lstStyle/>
-                    <a:p>
-                      <a:pPr>
-                        <a:defRPr sz="1000">
-                          <a:solidFill>
-                            <a:srgbClr val="2C3E50"/>
-                          </a:solidFill>
-                        </a:defRPr>
-                      </a:pPr>
-                      <a:r>
+                  <a:tcPr>
+                    <a:solidFill>
+                      <a:srgbClr val="1E293B"/>
+                    </a:solidFill>
+                  </a:tcPr>
+                </a:tc>
+                <a:tc>
+                  <a:txBody>
+                    <a:bodyPr/>
+                    <a:lstStyle/>
+                    <a:p>
+                      <a:pPr>
+                        <a:defRPr sz="1000">
+                          <a:solidFill>
+                            <a:srgbClr val="E2E8F0"/>
+                          </a:solidFill>
+                        </a:defRPr>
+                      </a:pPr>
+                      <a:r>
+                        <a:rPr>
+                          <a:solidFill>
+                            <a:srgbClr val="E2E8F0"/>
+                          </a:solidFill>
+                        </a:rPr>
                         <a:t>TC_003_Logout</a:t>
                       </a:r>
                     </a:p>
                   </a:txBody>
-                  <a:tcPr/>
-                </a:tc>
-                <a:tc>
-                  <a:txBody>
-                    <a:bodyPr/>
-                    <a:lstStyle/>
-                    <a:p>
-                      <a:pPr>
-                        <a:defRPr sz="1000">
-                          <a:solidFill>
-                            <a:srgbClr val="2C3E50"/>
-                          </a:solidFill>
-                        </a:defRPr>
-                      </a:pPr>
-                      <a:r>
+                  <a:tcPr>
+                    <a:solidFill>
+                      <a:srgbClr val="1E293B"/>
+                    </a:solidFill>
+                  </a:tcPr>
+                </a:tc>
+                <a:tc>
+                  <a:txBody>
+                    <a:bodyPr/>
+                    <a:lstStyle/>
+                    <a:p>
+                      <a:pPr>
+                        <a:defRPr sz="1000">
+                          <a:solidFill>
+                            <a:srgbClr val="E2E8F0"/>
+                          </a:solidFill>
+                        </a:defRPr>
+                      </a:pPr>
+                      <a:r>
+                        <a:rPr>
+                          <a:solidFill>
+                            <a:srgbClr val="E2E8F0"/>
+                          </a:solidFill>
+                        </a:rPr>
                         <a:t>PASS</a:t>
                       </a:r>
                     </a:p>
                   </a:txBody>
-                  <a:tcPr/>
+                  <a:tcPr>
+                    <a:solidFill>
+                      <a:srgbClr val="1E293B"/>
+                    </a:solidFill>
+                  </a:tcPr>
                 </a:tc>
               </a:tr>
               <a:tr h="419100">
@@ -5814,87 +6503,107 @@
                       <a:pPr>
                         <a:defRPr sz="1000">
                           <a:solidFill>
-                            <a:srgbClr val="2C3E50"/>
-                          </a:solidFill>
-                        </a:defRPr>
-                      </a:pPr>
-                      <a:r>
+                            <a:srgbClr val="E2E8F0"/>
+                          </a:solidFill>
+                        </a:defRPr>
+                      </a:pPr>
+                      <a:r>
+                        <a:rPr>
+                          <a:solidFill>
+                            <a:srgbClr val="E2E8F0"/>
+                          </a:solidFill>
+                        </a:rPr>
                         <a:t>RF-09: Validacion campos</a:t>
                       </a:r>
                     </a:p>
                   </a:txBody>
                   <a:tcPr>
                     <a:solidFill>
-                      <a:srgbClr val="ECF0F1"/>
-                    </a:solidFill>
-                  </a:tcPr>
-                </a:tc>
-                <a:tc>
-                  <a:txBody>
-                    <a:bodyPr/>
-                    <a:lstStyle/>
-                    <a:p>
-                      <a:pPr>
-                        <a:defRPr sz="1000">
-                          <a:solidFill>
-                            <a:srgbClr val="2C3E50"/>
-                          </a:solidFill>
-                        </a:defRPr>
-                      </a:pPr>
-                      <a:r>
+                      <a:srgbClr val="2D3748"/>
+                    </a:solidFill>
+                  </a:tcPr>
+                </a:tc>
+                <a:tc>
+                  <a:txBody>
+                    <a:bodyPr/>
+                    <a:lstStyle/>
+                    <a:p>
+                      <a:pPr>
+                        <a:defRPr sz="1000">
+                          <a:solidFill>
+                            <a:srgbClr val="E2E8F0"/>
+                          </a:solidFill>
+                        </a:defRPr>
+                      </a:pPr>
+                      <a:r>
+                        <a:rPr>
+                          <a:solidFill>
+                            <a:srgbClr val="E2E8F0"/>
+                          </a:solidFill>
+                        </a:rPr>
                         <a:t>Formularios</a:t>
                       </a:r>
                     </a:p>
                   </a:txBody>
                   <a:tcPr>
                     <a:solidFill>
-                      <a:srgbClr val="ECF0F1"/>
-                    </a:solidFill>
-                  </a:tcPr>
-                </a:tc>
-                <a:tc>
-                  <a:txBody>
-                    <a:bodyPr/>
-                    <a:lstStyle/>
-                    <a:p>
-                      <a:pPr>
-                        <a:defRPr sz="1000">
-                          <a:solidFill>
-                            <a:srgbClr val="2C3E50"/>
-                          </a:solidFill>
-                        </a:defRPr>
-                      </a:pPr>
-                      <a:r>
+                      <a:srgbClr val="2D3748"/>
+                    </a:solidFill>
+                  </a:tcPr>
+                </a:tc>
+                <a:tc>
+                  <a:txBody>
+                    <a:bodyPr/>
+                    <a:lstStyle/>
+                    <a:p>
+                      <a:pPr>
+                        <a:defRPr sz="1000">
+                          <a:solidFill>
+                            <a:srgbClr val="E2E8F0"/>
+                          </a:solidFill>
+                        </a:defRPr>
+                      </a:pPr>
+                      <a:r>
+                        <a:rPr>
+                          <a:solidFill>
+                            <a:srgbClr val="E2E8F0"/>
+                          </a:solidFill>
+                        </a:rPr>
                         <a:t>TC_010_ValidarCampos</a:t>
                       </a:r>
                     </a:p>
                   </a:txBody>
                   <a:tcPr>
                     <a:solidFill>
-                      <a:srgbClr val="ECF0F1"/>
-                    </a:solidFill>
-                  </a:tcPr>
-                </a:tc>
-                <a:tc>
-                  <a:txBody>
-                    <a:bodyPr/>
-                    <a:lstStyle/>
-                    <a:p>
-                      <a:pPr>
-                        <a:defRPr sz="1000">
-                          <a:solidFill>
-                            <a:srgbClr val="2C3E50"/>
-                          </a:solidFill>
-                        </a:defRPr>
-                      </a:pPr>
-                      <a:r>
+                      <a:srgbClr val="2D3748"/>
+                    </a:solidFill>
+                  </a:tcPr>
+                </a:tc>
+                <a:tc>
+                  <a:txBody>
+                    <a:bodyPr/>
+                    <a:lstStyle/>
+                    <a:p>
+                      <a:pPr>
+                        <a:defRPr sz="1000">
+                          <a:solidFill>
+                            <a:srgbClr val="E2E8F0"/>
+                          </a:solidFill>
+                        </a:defRPr>
+                      </a:pPr>
+                      <a:r>
+                        <a:rPr>
+                          <a:solidFill>
+                            <a:srgbClr val="E2E8F0"/>
+                          </a:solidFill>
+                        </a:rPr>
                         <a:t>PASS</a:t>
                       </a:r>
                     </a:p>
                   </a:txBody>
                   <a:tcPr>
                     <a:solidFill>
-                      <a:srgbClr val="ECF0F1"/>
+                      <a:srgbClr val="2D3748"/>
                     </a:solidFill>
                   </a:tcPr>
                 </a:tc>
@@ -5908,73 +6617,109 @@
                       <a:pPr>
                         <a:defRPr sz="1000">
                           <a:solidFill>
-                            <a:srgbClr val="2C3E50"/>
-                          </a:solidFill>
-                        </a:defRPr>
-                      </a:pPr>
-                      <a:r>
+                            <a:srgbClr val="E2E8F0"/>
+                          </a:solidFill>
+                        </a:defRPr>
+                      </a:pPr>
+                      <a:r>
+                        <a:rPr>
+                          <a:solidFill>
+                            <a:srgbClr val="E2E8F0"/>
+                          </a:solidFill>
+                        </a:rPr>
                         <a:t>RF-10: Assert titulo</a:t>
                       </a:r>
                     </a:p>
                   </a:txBody>
-                  <a:tcPr/>
-                </a:tc>
-                <a:tc>
-                  <a:txBody>
-                    <a:bodyPr/>
-                    <a:lstStyle/>
-                    <a:p>
-                      <a:pPr>
-                        <a:defRPr sz="1000">
-                          <a:solidFill>
-                            <a:srgbClr val="2C3E50"/>
-                          </a:solidFill>
-                        </a:defRPr>
-                      </a:pPr>
-                      <a:r>
+                  <a:tcPr>
+                    <a:solidFill>
+                      <a:srgbClr val="1E293B"/>
+                    </a:solidFill>
+                  </a:tcPr>
+                </a:tc>
+                <a:tc>
+                  <a:txBody>
+                    <a:bodyPr/>
+                    <a:lstStyle/>
+                    <a:p>
+                      <a:pPr>
+                        <a:defRPr sz="1000">
+                          <a:solidFill>
+                            <a:srgbClr val="E2E8F0"/>
+                          </a:solidFill>
+                        </a:defRPr>
+                      </a:pPr>
+                      <a:r>
+                        <a:rPr>
+                          <a:solidFill>
+                            <a:srgbClr val="E2E8F0"/>
+                          </a:solidFill>
+                        </a:rPr>
                         <a:t>Verificacion</a:t>
                       </a:r>
                     </a:p>
                   </a:txBody>
-                  <a:tcPr/>
-                </a:tc>
-                <a:tc>
-                  <a:txBody>
-                    <a:bodyPr/>
-                    <a:lstStyle/>
-                    <a:p>
-                      <a:pPr>
-                        <a:defRPr sz="1000">
-                          <a:solidFill>
-                            <a:srgbClr val="2C3E50"/>
-                          </a:solidFill>
-                        </a:defRPr>
-                      </a:pPr>
-                      <a:r>
+                  <a:tcPr>
+                    <a:solidFill>
+                      <a:srgbClr val="1E293B"/>
+                    </a:solidFill>
+                  </a:tcPr>
+                </a:tc>
+                <a:tc>
+                  <a:txBody>
+                    <a:bodyPr/>
+                    <a:lstStyle/>
+                    <a:p>
+                      <a:pPr>
+                        <a:defRPr sz="1000">
+                          <a:solidFill>
+                            <a:srgbClr val="E2E8F0"/>
+                          </a:solidFill>
+                        </a:defRPr>
+                      </a:pPr>
+                      <a:r>
+                        <a:rPr>
+                          <a:solidFill>
+                            <a:srgbClr val="E2E8F0"/>
+                          </a:solidFill>
+                        </a:rPr>
                         <a:t>TC_004_AssertTitulo</a:t>
                       </a:r>
                     </a:p>
                   </a:txBody>
-                  <a:tcPr/>
-                </a:tc>
-                <a:tc>
-                  <a:txBody>
-                    <a:bodyPr/>
-                    <a:lstStyle/>
-                    <a:p>
-                      <a:pPr>
-                        <a:defRPr sz="1000">
-                          <a:solidFill>
-                            <a:srgbClr val="2C3E50"/>
-                          </a:solidFill>
-                        </a:defRPr>
-                      </a:pPr>
-                      <a:r>
+                  <a:tcPr>
+                    <a:solidFill>
+                      <a:srgbClr val="1E293B"/>
+                    </a:solidFill>
+                  </a:tcPr>
+                </a:tc>
+                <a:tc>
+                  <a:txBody>
+                    <a:bodyPr/>
+                    <a:lstStyle/>
+                    <a:p>
+                      <a:pPr>
+                        <a:defRPr sz="1000">
+                          <a:solidFill>
+                            <a:srgbClr val="E2E8F0"/>
+                          </a:solidFill>
+                        </a:defRPr>
+                      </a:pPr>
+                      <a:r>
+                        <a:rPr>
+                          <a:solidFill>
+                            <a:srgbClr val="E2E8F0"/>
+                          </a:solidFill>
+                        </a:rPr>
                         <a:t>FAIL (diseno)</a:t>
                       </a:r>
                     </a:p>
                   </a:txBody>
-                  <a:tcPr/>
+                  <a:tcPr>
+                    <a:solidFill>
+                      <a:srgbClr val="1E293B"/>
+                    </a:solidFill>
+                  </a:tcPr>
                 </a:tc>
               </a:tr>
               <a:tr h="419100">
@@ -5986,87 +6731,107 @@
                       <a:pPr>
                         <a:defRPr sz="1000">
                           <a:solidFill>
-                            <a:srgbClr val="2C3E50"/>
-                          </a:solidFill>
-                        </a:defRPr>
-                      </a:pPr>
-                      <a:r>
+                            <a:srgbClr val="E2E8F0"/>
+                          </a:solidFill>
+                        </a:defRPr>
+                      </a:pPr>
+                      <a:r>
+                        <a:rPr>
+                          <a:solidFill>
+                            <a:srgbClr val="E2E8F0"/>
+                          </a:solidFill>
+                        </a:rPr>
                         <a:t>RF-11: Solicitar licencia</a:t>
                       </a:r>
                     </a:p>
                   </a:txBody>
                   <a:tcPr>
                     <a:solidFill>
-                      <a:srgbClr val="ECF0F1"/>
-                    </a:solidFill>
-                  </a:tcPr>
-                </a:tc>
-                <a:tc>
-                  <a:txBody>
-                    <a:bodyPr/>
-                    <a:lstStyle/>
-                    <a:p>
-                      <a:pPr>
-                        <a:defRPr sz="1000">
-                          <a:solidFill>
-                            <a:srgbClr val="2C3E50"/>
-                          </a:solidFill>
-                        </a:defRPr>
-                      </a:pPr>
-                      <a:r>
+                      <a:srgbClr val="2D3748"/>
+                    </a:solidFill>
+                  </a:tcPr>
+                </a:tc>
+                <a:tc>
+                  <a:txBody>
+                    <a:bodyPr/>
+                    <a:lstStyle/>
+                    <a:p>
+                      <a:pPr>
+                        <a:defRPr sz="1000">
+                          <a:solidFill>
+                            <a:srgbClr val="E2E8F0"/>
+                          </a:solidFill>
+                        </a:defRPr>
+                      </a:pPr>
+                      <a:r>
+                        <a:rPr>
+                          <a:solidFill>
+                            <a:srgbClr val="E2E8F0"/>
+                          </a:solidFill>
+                        </a:rPr>
                         <a:t>Leave</a:t>
                       </a:r>
                     </a:p>
                   </a:txBody>
                   <a:tcPr>
                     <a:solidFill>
-                      <a:srgbClr val="ECF0F1"/>
-                    </a:solidFill>
-                  </a:tcPr>
-                </a:tc>
-                <a:tc>
-                  <a:txBody>
-                    <a:bodyPr/>
-                    <a:lstStyle/>
-                    <a:p>
-                      <a:pPr>
-                        <a:defRPr sz="1000">
-                          <a:solidFill>
-                            <a:srgbClr val="2C3E50"/>
-                          </a:solidFill>
-                        </a:defRPr>
-                      </a:pPr>
-                      <a:r>
+                      <a:srgbClr val="2D3748"/>
+                    </a:solidFill>
+                  </a:tcPr>
+                </a:tc>
+                <a:tc>
+                  <a:txBody>
+                    <a:bodyPr/>
+                    <a:lstStyle/>
+                    <a:p>
+                      <a:pPr>
+                        <a:defRPr sz="1000">
+                          <a:solidFill>
+                            <a:srgbClr val="E2E8F0"/>
+                          </a:solidFill>
+                        </a:defRPr>
+                      </a:pPr>
+                      <a:r>
+                        <a:rPr>
+                          <a:solidFill>
+                            <a:srgbClr val="E2E8F0"/>
+                          </a:solidFill>
+                        </a:rPr>
                         <a:t>TC_014_LeaveApply (3 filas DD)</a:t>
                       </a:r>
                     </a:p>
                   </a:txBody>
                   <a:tcPr>
                     <a:solidFill>
-                      <a:srgbClr val="ECF0F1"/>
-                    </a:solidFill>
-                  </a:tcPr>
-                </a:tc>
-                <a:tc>
-                  <a:txBody>
-                    <a:bodyPr/>
-                    <a:lstStyle/>
-                    <a:p>
-                      <a:pPr>
-                        <a:defRPr sz="1000">
-                          <a:solidFill>
-                            <a:srgbClr val="2C3E50"/>
-                          </a:solidFill>
-                        </a:defRPr>
-                      </a:pPr>
-                      <a:r>
+                      <a:srgbClr val="2D3748"/>
+                    </a:solidFill>
+                  </a:tcPr>
+                </a:tc>
+                <a:tc>
+                  <a:txBody>
+                    <a:bodyPr/>
+                    <a:lstStyle/>
+                    <a:p>
+                      <a:pPr>
+                        <a:defRPr sz="1000">
+                          <a:solidFill>
+                            <a:srgbClr val="E2E8F0"/>
+                          </a:solidFill>
+                        </a:defRPr>
+                      </a:pPr>
+                      <a:r>
+                        <a:rPr>
+                          <a:solidFill>
+                            <a:srgbClr val="E2E8F0"/>
+                          </a:solidFill>
+                        </a:rPr>
                         <a:t>PASS</a:t>
                       </a:r>
                     </a:p>
                   </a:txBody>
                   <a:tcPr>
                     <a:solidFill>
-                      <a:srgbClr val="ECF0F1"/>
+                      <a:srgbClr val="2D3748"/>
                     </a:solidFill>
                   </a:tcPr>
                 </a:tc>
@@ -6088,10 +6853,15 @@
   <p:cSld>
     <p:bg>
       <p:bgPr>
+        <a:effectLst/>
         <a:solidFill>
-          <a:srgbClr val="FFFFFF"/>
+          <a:srgbClr val="1E3A5F"/>
         </a:solidFill>
-        <a:effectLst/>
+      </p:bgPr>
+      <p:bgPr>
+        <a:solidFill>
+          <a:srgbClr val="F1F5F9"/>
+        </a:solidFill>
       </p:bgPr>
     </p:bg>
     <p:spTree>
@@ -6108,6 +6878,9 @@
           <p:nvPr/>
         </p:nvSpPr>
         <p:spPr>
+          <a:solidFill>
+            <a:srgbClr val="818CF8"/>
+          </a:solidFill>
           <a:xfrm>
             <a:off x="0" y="0"/>
             <a:ext cx="12191695" cy="1097280"/>
@@ -6115,9 +6888,6 @@
           <a:prstGeom prst="rect">
             <a:avLst/>
           </a:prstGeom>
-          <a:solidFill>
-            <a:srgbClr val="2C3E50"/>
-          </a:solidFill>
           <a:ln>
             <a:noFill/>
           </a:ln>
@@ -6174,6 +6944,11 @@
               </a:defRPr>
             </a:pPr>
             <a:r>
+              <a:rPr>
+                <a:solidFill>
+                  <a:srgbClr val="FFFFFF"/>
+                </a:solidFill>
+              </a:rPr>
               <a:t>Resultados de Ejecucion</a:t>
             </a:r>
           </a:p>
@@ -6209,6 +6984,11 @@
               </a:defRPr>
             </a:pPr>
             <a:r>
+              <a:rPr>
+                <a:solidFill>
+                  <a:srgbClr val="FFFFFF"/>
+                </a:solidFill>
+              </a:rPr>
               <a:t>29 escenarios ejecutados | 96.55% aprobacion</a:t>
             </a:r>
           </a:p>
@@ -6247,6 +7027,11 @@
               </a:defRPr>
             </a:pPr>
             <a:r>
+              <a:rPr>
+                <a:solidFill>
+                  <a:srgbClr val="CBD5E1"/>
+                </a:solidFill>
+              </a:rPr>
               <a:t>Total escenarios: 29</a:t>
             </a:r>
           </a:p>
@@ -6262,6 +7047,11 @@
               </a:defRPr>
             </a:pPr>
             <a:r>
+              <a:rPr>
+                <a:solidFill>
+                  <a:srgbClr val="CBD5E1"/>
+                </a:solidFill>
+              </a:rPr>
               <a:t>Aprobados: 28 (96.55%)</a:t>
             </a:r>
           </a:p>
@@ -6277,6 +7067,11 @@
               </a:defRPr>
             </a:pPr>
             <a:r>
+              <a:rPr>
+                <a:solidFill>
+                  <a:srgbClr val="CBD5E1"/>
+                </a:solidFill>
+              </a:rPr>
               <a:t>Fallidos: 1 (3.45%) - TC_004 intencional</a:t>
             </a:r>
           </a:p>
@@ -6292,6 +7087,11 @@
               </a:defRPr>
             </a:pPr>
             <a:r>
+              <a:rPr>
+                <a:solidFill>
+                  <a:srgbClr val="CBD5E1"/>
+                </a:solidFill>
+              </a:rPr>
               <a:t>Data-Driven: 18/18 PASS (62%)</a:t>
             </a:r>
           </a:p>
@@ -6307,6 +7107,11 @@
               </a:defRPr>
             </a:pPr>
             <a:r>
+              <a:rPr>
+                <a:solidFill>
+                  <a:srgbClr val="CBD5E1"/>
+                </a:solidFill>
+              </a:rPr>
               <a:t>10 features ejecutadas</a:t>
             </a:r>
           </a:p>
@@ -6322,6 +7127,11 @@
               </a:defRPr>
             </a:pPr>
             <a:r>
+              <a:rPr>
+                <a:solidFill>
+                  <a:srgbClr val="CBD5E1"/>
+                </a:solidFill>
+              </a:rPr>
               <a:t>Tiempo total: ~7 minutos</a:t>
             </a:r>
           </a:p>
@@ -6337,7 +7147,12 @@
               </a:defRPr>
             </a:pPr>
             <a:r>
-              <a:t>177 screenshots en evidencias/</a:t>
+              <a:rPr>
+                <a:solidFill>
+                  <a:srgbClr val="CBD5E1"/>
+                </a:solidFill>
+              </a:rPr>
+              <a:t>93 screenshots en evidencias/</a:t>
             </a:r>
           </a:p>
           <a:p>
@@ -6352,6 +7167,11 @@
               </a:defRPr>
             </a:pPr>
             <a:r>
+              <a:rPr>
+                <a:solidFill>
+                  <a:srgbClr val="CBD5E1"/>
+                </a:solidFill>
+              </a:rPr>
               <a:t>6 archivos Excel testData</a:t>
             </a:r>
           </a:p>
@@ -6430,6 +7250,11 @@
               </a:defRPr>
             </a:pPr>
             <a:r>
+              <a:rPr>
+                <a:solidFill>
+                  <a:srgbClr val="FFFFFF"/>
+                </a:solidFill>
+              </a:rPr>
               <a:t>Fallo Intencional TC_004:</a:t>
             </a:r>
           </a:p>
@@ -6465,26 +7290,56 @@
               </a:defRPr>
             </a:pPr>
             <a:r>
+              <a:rPr>
+                <a:solidFill>
+                  <a:srgbClr val="CBD5E1"/>
+                </a:solidFill>
+              </a:rPr>
               <a:t>Escenario: Assert falla en verificacion de titulo</a:t>
             </a:r>
             <a:br/>
             <a:r>
+              <a:rPr>
+                <a:solidFill>
+                  <a:srgbClr val="CBD5E1"/>
+                </a:solidFill>
+              </a:rPr>
               <a:t>Esperado: 'OrangeHRM OS 5.7'</a:t>
             </a:r>
             <a:br/>
             <a:r>
+              <a:rPr>
+                <a:solidFill>
+                  <a:srgbClr val="CBD5E1"/>
+                </a:solidFill>
+              </a:rPr>
               <a:t>Real: 'OrangeHRM'</a:t>
             </a:r>
             <a:br/>
             <a:r>
+              <a:rPr>
+                <a:solidFill>
+                  <a:srgbClr val="CBD5E1"/>
+                </a:solidFill>
+              </a:rPr>
               <a:t>Proposito: Demostrar hook @after_scenario</a:t>
             </a:r>
             <a:br/>
             <a:r>
+              <a:rPr>
+                <a:solidFill>
+                  <a:srgbClr val="CBD5E1"/>
+                </a:solidFill>
+              </a:rPr>
               <a:t>captura screenshot automatico en fallos</a:t>
             </a:r>
             <a:br/>
             <a:r>
+              <a:rPr>
+                <a:solidFill>
+                  <a:srgbClr val="CBD5E1"/>
+                </a:solidFill>
+              </a:rPr>
               <a:t>Evidencia en: evidencias/screenshot_*.png</a:t>
             </a:r>
           </a:p>
@@ -6563,6 +7418,11 @@
               </a:defRPr>
             </a:pPr>
             <a:r>
+              <a:rPr>
+                <a:solidFill>
+                  <a:srgbClr val="FFFFFF"/>
+                </a:solidFill>
+              </a:rPr>
               <a:t>Cobertura por Modulo:</a:t>
             </a:r>
           </a:p>
@@ -6598,18 +7458,38 @@
               </a:defRPr>
             </a:pPr>
             <a:r>
+              <a:rPr>
+                <a:solidFill>
+                  <a:srgbClr val="CBD5E1"/>
+                </a:solidFill>
+              </a:rPr>
               <a:t>Login: 3/4 PASS  |  Navegacion: 3/3 PASS</a:t>
             </a:r>
             <a:br/>
             <a:r>
+              <a:rPr>
+                <a:solidFill>
+                  <a:srgbClr val="CBD5E1"/>
+                </a:solidFill>
+              </a:rPr>
               <a:t>Sesion: 1/1 PASS  |  PIM CRUD: 12/12 PASS</a:t>
             </a:r>
             <a:br/>
             <a:r>
+              <a:rPr>
+                <a:solidFill>
+                  <a:srgbClr val="CBD5E1"/>
+                </a:solidFill>
+              </a:rPr>
               <a:t>Perfil: 3/3 PASS  |  Licencias: 3/3 PASS</a:t>
             </a:r>
             <a:br/>
             <a:r>
+              <a:rPr>
+                <a:solidFill>
+                  <a:srgbClr val="CBD5E1"/>
+                </a:solidFill>
+              </a:rPr>
               <a:t>Data-Driven: 18/18 PASS  |  62% cobertura DD</a:t>
             </a:r>
           </a:p>
@@ -6628,10 +7508,15 @@
   <p:cSld>
     <p:bg>
       <p:bgPr>
+        <a:effectLst/>
         <a:solidFill>
-          <a:srgbClr val="FFFFFF"/>
+          <a:srgbClr val="1E3A5F"/>
         </a:solidFill>
-        <a:effectLst/>
+      </p:bgPr>
+      <p:bgPr>
+        <a:solidFill>
+          <a:srgbClr val="F1F5F9"/>
+        </a:solidFill>
       </p:bgPr>
     </p:bg>
     <p:spTree>
@@ -6648,6 +7533,9 @@
           <p:nvPr/>
         </p:nvSpPr>
         <p:spPr>
+          <a:solidFill>
+            <a:srgbClr val="818CF8"/>
+          </a:solidFill>
           <a:xfrm>
             <a:off x="0" y="0"/>
             <a:ext cx="12191695" cy="1097280"/>
@@ -6655,9 +7543,6 @@
           <a:prstGeom prst="rect">
             <a:avLst/>
           </a:prstGeom>
-          <a:solidFill>
-            <a:srgbClr val="2C3E50"/>
-          </a:solidFill>
           <a:ln>
             <a:noFill/>
           </a:ln>
@@ -6714,6 +7599,11 @@
               </a:defRPr>
             </a:pPr>
             <a:r>
+              <a:rPr>
+                <a:solidFill>
+                  <a:srgbClr val="FFFFFF"/>
+                </a:solidFill>
+              </a:rPr>
               <a:t>Metricas de Calidad y Rendimiento</a:t>
             </a:r>
           </a:p>
@@ -6757,13 +7647,18 @@
                         </a:defRPr>
                       </a:pPr>
                       <a:r>
+                        <a:rPr>
+                          <a:solidFill>
+                            <a:srgbClr val="FFFFFF"/>
+                          </a:solidFill>
+                        </a:rPr>
                         <a:t>Metrica (PPT 3.3.1)</a:t>
                       </a:r>
                     </a:p>
                   </a:txBody>
                   <a:tcPr>
                     <a:solidFill>
-                      <a:srgbClr val="2C3E50"/>
+                      <a:srgbClr val="1E293B"/>
                     </a:solidFill>
                   </a:tcPr>
                 </a:tc>
@@ -6780,13 +7675,18 @@
                         </a:defRPr>
                       </a:pPr>
                       <a:r>
+                        <a:rPr>
+                          <a:solidFill>
+                            <a:srgbClr val="FFFFFF"/>
+                          </a:solidFill>
+                        </a:rPr>
                         <a:t>Formula</a:t>
                       </a:r>
                     </a:p>
                   </a:txBody>
                   <a:tcPr>
                     <a:solidFill>
-                      <a:srgbClr val="2C3E50"/>
+                      <a:srgbClr val="1E293B"/>
                     </a:solidFill>
                   </a:tcPr>
                 </a:tc>
@@ -6803,13 +7703,18 @@
                         </a:defRPr>
                       </a:pPr>
                       <a:r>
+                        <a:rPr>
+                          <a:solidFill>
+                            <a:srgbClr val="FFFFFF"/>
+                          </a:solidFill>
+                        </a:rPr>
                         <a:t>Resultado</a:t>
                       </a:r>
                     </a:p>
                   </a:txBody>
                   <a:tcPr>
                     <a:solidFill>
-                      <a:srgbClr val="2C3E50"/>
+                      <a:srgbClr val="1E293B"/>
                     </a:solidFill>
                   </a:tcPr>
                 </a:tc>
@@ -6826,13 +7731,18 @@
                         </a:defRPr>
                       </a:pPr>
                       <a:r>
+                        <a:rPr>
+                          <a:solidFill>
+                            <a:srgbClr val="FFFFFF"/>
+                          </a:solidFill>
+                        </a:rPr>
                         <a:t>Fuente</a:t>
                       </a:r>
                     </a:p>
                   </a:txBody>
                   <a:tcPr>
                     <a:solidFill>
-                      <a:srgbClr val="2C3E50"/>
+                      <a:srgbClr val="1E293B"/>
                     </a:solidFill>
                   </a:tcPr>
                 </a:tc>
@@ -6846,87 +7756,107 @@
                       <a:pPr>
                         <a:defRPr sz="1000">
                           <a:solidFill>
-                            <a:srgbClr val="2C3E50"/>
-                          </a:solidFill>
-                        </a:defRPr>
-                      </a:pPr>
-                      <a:r>
+                            <a:srgbClr val="E2E8F0"/>
+                          </a:solidFill>
+                        </a:defRPr>
+                      </a:pPr>
+                      <a:r>
+                        <a:rPr>
+                          <a:solidFill>
+                            <a:srgbClr val="E2E8F0"/>
+                          </a:solidFill>
+                        </a:rPr>
                         <a:t>% Automatizable</a:t>
                       </a:r>
                     </a:p>
                   </a:txBody>
                   <a:tcPr>
                     <a:solidFill>
-                      <a:srgbClr val="ECF0F1"/>
-                    </a:solidFill>
-                  </a:tcPr>
-                </a:tc>
-                <a:tc>
-                  <a:txBody>
-                    <a:bodyPr/>
-                    <a:lstStyle/>
-                    <a:p>
-                      <a:pPr>
-                        <a:defRPr sz="1000">
-                          <a:solidFill>
-                            <a:srgbClr val="2C3E50"/>
-                          </a:solidFill>
-                        </a:defRPr>
-                      </a:pPr>
-                      <a:r>
+                      <a:srgbClr val="2D3748"/>
+                    </a:solidFill>
+                  </a:tcPr>
+                </a:tc>
+                <a:tc>
+                  <a:txBody>
+                    <a:bodyPr/>
+                    <a:lstStyle/>
+                    <a:p>
+                      <a:pPr>
+                        <a:defRPr sz="1000">
+                          <a:solidFill>
+                            <a:srgbClr val="E2E8F0"/>
+                          </a:solidFill>
+                        </a:defRPr>
+                      </a:pPr>
+                      <a:r>
+                        <a:rPr>
+                          <a:solidFill>
+                            <a:srgbClr val="E2E8F0"/>
+                          </a:solidFill>
+                        </a:rPr>
                         <a:t>(Aut/Tot) x 100</a:t>
                       </a:r>
                     </a:p>
                   </a:txBody>
                   <a:tcPr>
                     <a:solidFill>
-                      <a:srgbClr val="ECF0F1"/>
-                    </a:solidFill>
-                  </a:tcPr>
-                </a:tc>
-                <a:tc>
-                  <a:txBody>
-                    <a:bodyPr/>
-                    <a:lstStyle/>
-                    <a:p>
-                      <a:pPr>
-                        <a:defRPr sz="1000">
-                          <a:solidFill>
-                            <a:srgbClr val="2C3E50"/>
-                          </a:solidFill>
-                        </a:defRPr>
-                      </a:pPr>
-                      <a:r>
+                      <a:srgbClr val="2D3748"/>
+                    </a:solidFill>
+                  </a:tcPr>
+                </a:tc>
+                <a:tc>
+                  <a:txBody>
+                    <a:bodyPr/>
+                    <a:lstStyle/>
+                    <a:p>
+                      <a:pPr>
+                        <a:defRPr sz="1000">
+                          <a:solidFill>
+                            <a:srgbClr val="E2E8F0"/>
+                          </a:solidFill>
+                        </a:defRPr>
+                      </a:pPr>
+                      <a:r>
+                        <a:rPr>
+                          <a:solidFill>
+                            <a:srgbClr val="E2E8F0"/>
+                          </a:solidFill>
+                        </a:rPr>
                         <a:t>100% (29/29)</a:t>
                       </a:r>
                     </a:p>
                   </a:txBody>
                   <a:tcPr>
                     <a:solidFill>
-                      <a:srgbClr val="ECF0F1"/>
-                    </a:solidFill>
-                  </a:tcPr>
-                </a:tc>
-                <a:tc>
-                  <a:txBody>
-                    <a:bodyPr/>
-                    <a:lstStyle/>
-                    <a:p>
-                      <a:pPr>
-                        <a:defRPr sz="1000">
-                          <a:solidFill>
-                            <a:srgbClr val="2C3E50"/>
-                          </a:solidFill>
-                        </a:defRPr>
-                      </a:pPr>
-                      <a:r>
+                      <a:srgbClr val="2D3748"/>
+                    </a:solidFill>
+                  </a:tcPr>
+                </a:tc>
+                <a:tc>
+                  <a:txBody>
+                    <a:bodyPr/>
+                    <a:lstStyle/>
+                    <a:p>
+                      <a:pPr>
+                        <a:defRPr sz="1000">
+                          <a:solidFill>
+                            <a:srgbClr val="E2E8F0"/>
+                          </a:solidFill>
+                        </a:defRPr>
+                      </a:pPr>
+                      <a:r>
+                        <a:rPr>
+                          <a:solidFill>
+                            <a:srgbClr val="E2E8F0"/>
+                          </a:solidFill>
+                        </a:rPr>
                         <a:t>reporte.html</a:t>
                       </a:r>
                     </a:p>
                   </a:txBody>
                   <a:tcPr>
                     <a:solidFill>
-                      <a:srgbClr val="ECF0F1"/>
+                      <a:srgbClr val="2D3748"/>
                     </a:solidFill>
                   </a:tcPr>
                 </a:tc>
@@ -6940,73 +7870,109 @@
                       <a:pPr>
                         <a:defRPr sz="1000">
                           <a:solidFill>
-                            <a:srgbClr val="2C3E50"/>
-                          </a:solidFill>
-                        </a:defRPr>
-                      </a:pPr>
-                      <a:r>
+                            <a:srgbClr val="E2E8F0"/>
+                          </a:solidFill>
+                        </a:defRPr>
+                      </a:pPr>
+                      <a:r>
+                        <a:rPr>
+                          <a:solidFill>
+                            <a:srgbClr val="E2E8F0"/>
+                          </a:solidFill>
+                        </a:rPr>
                         <a:t>Progreso Autom.</a:t>
                       </a:r>
                     </a:p>
                   </a:txBody>
-                  <a:tcPr/>
-                </a:tc>
-                <a:tc>
-                  <a:txBody>
-                    <a:bodyPr/>
-                    <a:lstStyle/>
-                    <a:p>
-                      <a:pPr>
-                        <a:defRPr sz="1000">
-                          <a:solidFill>
-                            <a:srgbClr val="2C3E50"/>
-                          </a:solidFill>
-                        </a:defRPr>
-                      </a:pPr>
-                      <a:r>
+                  <a:tcPr>
+                    <a:solidFill>
+                      <a:srgbClr val="1E293B"/>
+                    </a:solidFill>
+                  </a:tcPr>
+                </a:tc>
+                <a:tc>
+                  <a:txBody>
+                    <a:bodyPr/>
+                    <a:lstStyle/>
+                    <a:p>
+                      <a:pPr>
+                        <a:defRPr sz="1000">
+                          <a:solidFill>
+                            <a:srgbClr val="E2E8F0"/>
+                          </a:solidFill>
+                        </a:defRPr>
+                      </a:pPr>
+                      <a:r>
+                        <a:rPr>
+                          <a:solidFill>
+                            <a:srgbClr val="E2E8F0"/>
+                          </a:solidFill>
+                        </a:rPr>
                         <a:t>(Ejec/Planif) x 100</a:t>
                       </a:r>
                     </a:p>
                   </a:txBody>
-                  <a:tcPr/>
-                </a:tc>
-                <a:tc>
-                  <a:txBody>
-                    <a:bodyPr/>
-                    <a:lstStyle/>
-                    <a:p>
-                      <a:pPr>
-                        <a:defRPr sz="1000">
-                          <a:solidFill>
-                            <a:srgbClr val="2C3E50"/>
-                          </a:solidFill>
-                        </a:defRPr>
-                      </a:pPr>
-                      <a:r>
+                  <a:tcPr>
+                    <a:solidFill>
+                      <a:srgbClr val="1E293B"/>
+                    </a:solidFill>
+                  </a:tcPr>
+                </a:tc>
+                <a:tc>
+                  <a:txBody>
+                    <a:bodyPr/>
+                    <a:lstStyle/>
+                    <a:p>
+                      <a:pPr>
+                        <a:defRPr sz="1000">
+                          <a:solidFill>
+                            <a:srgbClr val="E2E8F0"/>
+                          </a:solidFill>
+                        </a:defRPr>
+                      </a:pPr>
+                      <a:r>
+                        <a:rPr>
+                          <a:solidFill>
+                            <a:srgbClr val="E2E8F0"/>
+                          </a:solidFill>
+                        </a:rPr>
                         <a:t>100% (29/29)</a:t>
                       </a:r>
                     </a:p>
                   </a:txBody>
-                  <a:tcPr/>
-                </a:tc>
-                <a:tc>
-                  <a:txBody>
-                    <a:bodyPr/>
-                    <a:lstStyle/>
-                    <a:p>
-                      <a:pPr>
-                        <a:defRPr sz="1000">
-                          <a:solidFill>
-                            <a:srgbClr val="2C3E50"/>
-                          </a:solidFill>
-                        </a:defRPr>
-                      </a:pPr>
-                      <a:r>
+                  <a:tcPr>
+                    <a:solidFill>
+                      <a:srgbClr val="1E293B"/>
+                    </a:solidFill>
+                  </a:tcPr>
+                </a:tc>
+                <a:tc>
+                  <a:txBody>
+                    <a:bodyPr/>
+                    <a:lstStyle/>
+                    <a:p>
+                      <a:pPr>
+                        <a:defRPr sz="1000">
+                          <a:solidFill>
+                            <a:srgbClr val="E2E8F0"/>
+                          </a:solidFill>
+                        </a:defRPr>
+                      </a:pPr>
+                      <a:r>
+                        <a:rPr>
+                          <a:solidFill>
+                            <a:srgbClr val="E2E8F0"/>
+                          </a:solidFill>
+                        </a:rPr>
                         <a:t>reporte.json</a:t>
                       </a:r>
                     </a:p>
                   </a:txBody>
-                  <a:tcPr/>
+                  <a:tcPr>
+                    <a:solidFill>
+                      <a:srgbClr val="1E293B"/>
+                    </a:solidFill>
+                  </a:tcPr>
                 </a:tc>
               </a:tr>
               <a:tr h="533400">
@@ -7018,87 +7984,107 @@
                       <a:pPr>
                         <a:defRPr sz="1000">
                           <a:solidFill>
-                            <a:srgbClr val="2C3E50"/>
-                          </a:solidFill>
-                        </a:defRPr>
-                      </a:pPr>
-                      <a:r>
+                            <a:srgbClr val="E2E8F0"/>
+                          </a:solidFill>
+                        </a:defRPr>
+                      </a:pPr>
+                      <a:r>
+                        <a:rPr>
+                          <a:solidFill>
+                            <a:srgbClr val="E2E8F0"/>
+                          </a:solidFill>
+                        </a:rPr>
                         <a:t>Productiv. Diseno</a:t>
                       </a:r>
                     </a:p>
                   </a:txBody>
                   <a:tcPr>
                     <a:solidFill>
-                      <a:srgbClr val="ECF0F1"/>
-                    </a:solidFill>
-                  </a:tcPr>
-                </a:tc>
-                <a:tc>
-                  <a:txBody>
-                    <a:bodyPr/>
-                    <a:lstStyle/>
-                    <a:p>
-                      <a:pPr>
-                        <a:defRPr sz="1000">
-                          <a:solidFill>
-                            <a:srgbClr val="2C3E50"/>
-                          </a:solidFill>
-                        </a:defRPr>
-                      </a:pPr>
-                      <a:r>
+                      <a:srgbClr val="2D3748"/>
+                    </a:solidFill>
+                  </a:tcPr>
+                </a:tc>
+                <a:tc>
+                  <a:txBody>
+                    <a:bodyPr/>
+                    <a:lstStyle/>
+                    <a:p>
+                      <a:pPr>
+                        <a:defRPr sz="1000">
+                          <a:solidFill>
+                            <a:srgbClr val="E2E8F0"/>
+                          </a:solidFill>
+                        </a:defRPr>
+                      </a:pPr>
+                      <a:r>
+                        <a:rPr>
+                          <a:solidFill>
+                            <a:srgbClr val="E2E8F0"/>
+                          </a:solidFill>
+                        </a:rPr>
                         <a:t>Esc / Horas</a:t>
                       </a:r>
                     </a:p>
                   </a:txBody>
                   <a:tcPr>
                     <a:solidFill>
-                      <a:srgbClr val="ECF0F1"/>
-                    </a:solidFill>
-                  </a:tcPr>
-                </a:tc>
-                <a:tc>
-                  <a:txBody>
-                    <a:bodyPr/>
-                    <a:lstStyle/>
-                    <a:p>
-                      <a:pPr>
-                        <a:defRPr sz="1000">
-                          <a:solidFill>
-                            <a:srgbClr val="2C3E50"/>
-                          </a:solidFill>
-                        </a:defRPr>
-                      </a:pPr>
-                      <a:r>
+                      <a:srgbClr val="2D3748"/>
+                    </a:solidFill>
+                  </a:tcPr>
+                </a:tc>
+                <a:tc>
+                  <a:txBody>
+                    <a:bodyPr/>
+                    <a:lstStyle/>
+                    <a:p>
+                      <a:pPr>
+                        <a:defRPr sz="1000">
+                          <a:solidFill>
+                            <a:srgbClr val="E2E8F0"/>
+                          </a:solidFill>
+                        </a:defRPr>
+                      </a:pPr>
+                      <a:r>
+                        <a:rPr>
+                          <a:solidFill>
+                            <a:srgbClr val="E2E8F0"/>
+                          </a:solidFill>
+                        </a:rPr>
                         <a:t>7.25 esc/h</a:t>
                       </a:r>
                     </a:p>
                   </a:txBody>
                   <a:tcPr>
                     <a:solidFill>
-                      <a:srgbClr val="ECF0F1"/>
-                    </a:solidFill>
-                  </a:tcPr>
-                </a:tc>
-                <a:tc>
-                  <a:txBody>
-                    <a:bodyPr/>
-                    <a:lstStyle/>
-                    <a:p>
-                      <a:pPr>
-                        <a:defRPr sz="1000">
-                          <a:solidFill>
-                            <a:srgbClr val="2C3E50"/>
-                          </a:solidFill>
-                        </a:defRPr>
-                      </a:pPr>
-                      <a:r>
+                      <a:srgbClr val="2D3748"/>
+                    </a:solidFill>
+                  </a:tcPr>
+                </a:tc>
+                <a:tc>
+                  <a:txBody>
+                    <a:bodyPr/>
+                    <a:lstStyle/>
+                    <a:p>
+                      <a:pPr>
+                        <a:defRPr sz="1000">
+                          <a:solidFill>
+                            <a:srgbClr val="E2E8F0"/>
+                          </a:solidFill>
+                        </a:defRPr>
+                      </a:pPr>
+                      <a:r>
+                        <a:rPr>
+                          <a:solidFill>
+                            <a:srgbClr val="E2E8F0"/>
+                          </a:solidFill>
+                        </a:rPr>
                         <a:t>Tiempo: 4 hrs</a:t>
                       </a:r>
                     </a:p>
                   </a:txBody>
                   <a:tcPr>
                     <a:solidFill>
-                      <a:srgbClr val="ECF0F1"/>
+                      <a:srgbClr val="2D3748"/>
                     </a:solidFill>
                   </a:tcPr>
                 </a:tc>
@@ -7112,73 +8098,109 @@
                       <a:pPr>
                         <a:defRPr sz="1000">
                           <a:solidFill>
-                            <a:srgbClr val="2C3E50"/>
-                          </a:solidFill>
-                        </a:defRPr>
-                      </a:pPr>
-                      <a:r>
+                            <a:srgbClr val="E2E8F0"/>
+                          </a:solidFill>
+                        </a:defRPr>
+                      </a:pPr>
+                      <a:r>
+                        <a:rPr>
+                          <a:solidFill>
+                            <a:srgbClr val="E2E8F0"/>
+                          </a:solidFill>
+                        </a:rPr>
                         <a:t>Productiv. Ejec.</a:t>
                       </a:r>
                     </a:p>
                   </a:txBody>
-                  <a:tcPr/>
-                </a:tc>
-                <a:tc>
-                  <a:txBody>
-                    <a:bodyPr/>
-                    <a:lstStyle/>
-                    <a:p>
-                      <a:pPr>
-                        <a:defRPr sz="1000">
-                          <a:solidFill>
-                            <a:srgbClr val="2C3E50"/>
-                          </a:solidFill>
-                        </a:defRPr>
-                      </a:pPr>
-                      <a:r>
+                  <a:tcPr>
+                    <a:solidFill>
+                      <a:srgbClr val="1E293B"/>
+                    </a:solidFill>
+                  </a:tcPr>
+                </a:tc>
+                <a:tc>
+                  <a:txBody>
+                    <a:bodyPr/>
+                    <a:lstStyle/>
+                    <a:p>
+                      <a:pPr>
+                        <a:defRPr sz="1000">
+                          <a:solidFill>
+                            <a:srgbClr val="E2E8F0"/>
+                          </a:solidFill>
+                        </a:defRPr>
+                      </a:pPr>
+                      <a:r>
+                        <a:rPr>
+                          <a:solidFill>
+                            <a:srgbClr val="E2E8F0"/>
+                          </a:solidFill>
+                        </a:rPr>
                         <a:t>Esc / T total</a:t>
                       </a:r>
                     </a:p>
                   </a:txBody>
-                  <a:tcPr/>
-                </a:tc>
-                <a:tc>
-                  <a:txBody>
-                    <a:bodyPr/>
-                    <a:lstStyle/>
-                    <a:p>
-                      <a:pPr>
-                        <a:defRPr sz="1000">
-                          <a:solidFill>
-                            <a:srgbClr val="2C3E50"/>
-                          </a:solidFill>
-                        </a:defRPr>
-                      </a:pPr>
-                      <a:r>
+                  <a:tcPr>
+                    <a:solidFill>
+                      <a:srgbClr val="1E293B"/>
+                    </a:solidFill>
+                  </a:tcPr>
+                </a:tc>
+                <a:tc>
+                  <a:txBody>
+                    <a:bodyPr/>
+                    <a:lstStyle/>
+                    <a:p>
+                      <a:pPr>
+                        <a:defRPr sz="1000">
+                          <a:solidFill>
+                            <a:srgbClr val="E2E8F0"/>
+                          </a:solidFill>
+                        </a:defRPr>
+                      </a:pPr>
+                      <a:r>
+                        <a:rPr>
+                          <a:solidFill>
+                            <a:srgbClr val="E2E8F0"/>
+                          </a:solidFill>
+                        </a:rPr>
                         <a:t>0.067 esc/s</a:t>
                       </a:r>
                     </a:p>
                   </a:txBody>
-                  <a:tcPr/>
-                </a:tc>
-                <a:tc>
-                  <a:txBody>
-                    <a:bodyPr/>
-                    <a:lstStyle/>
-                    <a:p>
-                      <a:pPr>
-                        <a:defRPr sz="1000">
-                          <a:solidFill>
-                            <a:srgbClr val="2C3E50"/>
-                          </a:solidFill>
-                        </a:defRPr>
-                      </a:pPr>
-                      <a:r>
+                  <a:tcPr>
+                    <a:solidFill>
+                      <a:srgbClr val="1E293B"/>
+                    </a:solidFill>
+                  </a:tcPr>
+                </a:tc>
+                <a:tc>
+                  <a:txBody>
+                    <a:bodyPr/>
+                    <a:lstStyle/>
+                    <a:p>
+                      <a:pPr>
+                        <a:defRPr sz="1000">
+                          <a:solidFill>
+                            <a:srgbClr val="E2E8F0"/>
+                          </a:solidFill>
+                        </a:defRPr>
+                      </a:pPr>
+                      <a:r>
+                        <a:rPr>
+                          <a:solidFill>
+                            <a:srgbClr val="E2E8F0"/>
+                          </a:solidFill>
+                        </a:rPr>
                         <a:t>reporte.json</a:t>
                       </a:r>
                     </a:p>
                   </a:txBody>
-                  <a:tcPr/>
+                  <a:tcPr>
+                    <a:solidFill>
+                      <a:srgbClr val="1E293B"/>
+                    </a:solidFill>
+                  </a:tcPr>
                 </a:tc>
               </a:tr>
               <a:tr h="533400">
@@ -7190,87 +8212,107 @@
                       <a:pPr>
                         <a:defRPr sz="1000">
                           <a:solidFill>
-                            <a:srgbClr val="2C3E50"/>
-                          </a:solidFill>
-                        </a:defRPr>
-                      </a:pPr>
-                      <a:r>
+                            <a:srgbClr val="E2E8F0"/>
+                          </a:solidFill>
+                        </a:defRPr>
+                      </a:pPr>
+                      <a:r>
+                        <a:rPr>
+                          <a:solidFill>
+                            <a:srgbClr val="E2E8F0"/>
+                          </a:solidFill>
+                        </a:rPr>
                         <a:t>Tasa de Fallos</a:t>
                       </a:r>
                     </a:p>
                   </a:txBody>
                   <a:tcPr>
                     <a:solidFill>
-                      <a:srgbClr val="ECF0F1"/>
-                    </a:solidFill>
-                  </a:tcPr>
-                </a:tc>
-                <a:tc>
-                  <a:txBody>
-                    <a:bodyPr/>
-                    <a:lstStyle/>
-                    <a:p>
-                      <a:pPr>
-                        <a:defRPr sz="1000">
-                          <a:solidFill>
-                            <a:srgbClr val="2C3E50"/>
-                          </a:solidFill>
-                        </a:defRPr>
-                      </a:pPr>
-                      <a:r>
+                      <a:srgbClr val="2D3748"/>
+                    </a:solidFill>
+                  </a:tcPr>
+                </a:tc>
+                <a:tc>
+                  <a:txBody>
+                    <a:bodyPr/>
+                    <a:lstStyle/>
+                    <a:p>
+                      <a:pPr>
+                        <a:defRPr sz="1000">
+                          <a:solidFill>
+                            <a:srgbClr val="E2E8F0"/>
+                          </a:solidFill>
+                        </a:defRPr>
+                      </a:pPr>
+                      <a:r>
+                        <a:rPr>
+                          <a:solidFill>
+                            <a:srgbClr val="E2E8F0"/>
+                          </a:solidFill>
+                        </a:rPr>
                         <a:t>(Fallos/Total) x 100</a:t>
                       </a:r>
                     </a:p>
                   </a:txBody>
                   <a:tcPr>
                     <a:solidFill>
-                      <a:srgbClr val="ECF0F1"/>
-                    </a:solidFill>
-                  </a:tcPr>
-                </a:tc>
-                <a:tc>
-                  <a:txBody>
-                    <a:bodyPr/>
-                    <a:lstStyle/>
-                    <a:p>
-                      <a:pPr>
-                        <a:defRPr sz="1000">
-                          <a:solidFill>
-                            <a:srgbClr val="2C3E50"/>
-                          </a:solidFill>
-                        </a:defRPr>
-                      </a:pPr>
-                      <a:r>
+                      <a:srgbClr val="2D3748"/>
+                    </a:solidFill>
+                  </a:tcPr>
+                </a:tc>
+                <a:tc>
+                  <a:txBody>
+                    <a:bodyPr/>
+                    <a:lstStyle/>
+                    <a:p>
+                      <a:pPr>
+                        <a:defRPr sz="1000">
+                          <a:solidFill>
+                            <a:srgbClr val="E2E8F0"/>
+                          </a:solidFill>
+                        </a:defRPr>
+                      </a:pPr>
+                      <a:r>
+                        <a:rPr>
+                          <a:solidFill>
+                            <a:srgbClr val="E2E8F0"/>
+                          </a:solidFill>
+                        </a:rPr>
                         <a:t>3.45% (1/29)</a:t>
                       </a:r>
                     </a:p>
                   </a:txBody>
                   <a:tcPr>
                     <a:solidFill>
-                      <a:srgbClr val="ECF0F1"/>
-                    </a:solidFill>
-                  </a:tcPr>
-                </a:tc>
-                <a:tc>
-                  <a:txBody>
-                    <a:bodyPr/>
-                    <a:lstStyle/>
-                    <a:p>
-                      <a:pPr>
-                        <a:defRPr sz="1000">
-                          <a:solidFill>
-                            <a:srgbClr val="2C3E50"/>
-                          </a:solidFill>
-                        </a:defRPr>
-                      </a:pPr>
-                      <a:r>
+                      <a:srgbClr val="2D3748"/>
+                    </a:solidFill>
+                  </a:tcPr>
+                </a:tc>
+                <a:tc>
+                  <a:txBody>
+                    <a:bodyPr/>
+                    <a:lstStyle/>
+                    <a:p>
+                      <a:pPr>
+                        <a:defRPr sz="1000">
+                          <a:solidFill>
+                            <a:srgbClr val="E2E8F0"/>
+                          </a:solidFill>
+                        </a:defRPr>
+                      </a:pPr>
+                      <a:r>
+                        <a:rPr>
+                          <a:solidFill>
+                            <a:srgbClr val="E2E8F0"/>
+                          </a:solidFill>
+                        </a:rPr>
                         <a:t>reporte.html</a:t>
                       </a:r>
                     </a:p>
                   </a:txBody>
                   <a:tcPr>
                     <a:solidFill>
-                      <a:srgbClr val="ECF0F1"/>
+                      <a:srgbClr val="2D3748"/>
                     </a:solidFill>
                   </a:tcPr>
                 </a:tc>
@@ -7317,13 +8359,18 @@
                         </a:defRPr>
                       </a:pPr>
                       <a:r>
+                        <a:rPr>
+                          <a:solidFill>
+                            <a:srgbClr val="FFFFFF"/>
+                          </a:solidFill>
+                        </a:rPr>
                         <a:t>Metrica Rendimiento</a:t>
                       </a:r>
                     </a:p>
                   </a:txBody>
                   <a:tcPr>
                     <a:solidFill>
-                      <a:srgbClr val="2C3E50"/>
+                      <a:srgbClr val="1E293B"/>
                     </a:solidFill>
                   </a:tcPr>
                 </a:tc>
@@ -7340,13 +8387,18 @@
                         </a:defRPr>
                       </a:pPr>
                       <a:r>
+                        <a:rPr>
+                          <a:solidFill>
+                            <a:srgbClr val="FFFFFF"/>
+                          </a:solidFill>
+                        </a:rPr>
                         <a:t>Formula</a:t>
                       </a:r>
                     </a:p>
                   </a:txBody>
                   <a:tcPr>
                     <a:solidFill>
-                      <a:srgbClr val="2C3E50"/>
+                      <a:srgbClr val="1E293B"/>
                     </a:solidFill>
                   </a:tcPr>
                 </a:tc>
@@ -7363,13 +8415,18 @@
                         </a:defRPr>
                       </a:pPr>
                       <a:r>
+                        <a:rPr>
+                          <a:solidFill>
+                            <a:srgbClr val="FFFFFF"/>
+                          </a:solidFill>
+                        </a:rPr>
                         <a:t>Resultado</a:t>
                       </a:r>
                     </a:p>
                   </a:txBody>
                   <a:tcPr>
                     <a:solidFill>
-                      <a:srgbClr val="2C3E50"/>
+                      <a:srgbClr val="1E293B"/>
                     </a:solidFill>
                   </a:tcPr>
                 </a:tc>
@@ -7386,13 +8443,18 @@
                         </a:defRPr>
                       </a:pPr>
                       <a:r>
+                        <a:rPr>
+                          <a:solidFill>
+                            <a:srgbClr val="FFFFFF"/>
+                          </a:solidFill>
+                        </a:rPr>
                         <a:t>Fuente</a:t>
                       </a:r>
                     </a:p>
                   </a:txBody>
                   <a:tcPr>
                     <a:solidFill>
-                      <a:srgbClr val="2C3E50"/>
+                      <a:srgbClr val="1E293B"/>
                     </a:solidFill>
                   </a:tcPr>
                 </a:tc>
@@ -7406,87 +8468,107 @@
                       <a:pPr>
                         <a:defRPr sz="1000">
                           <a:solidFill>
-                            <a:srgbClr val="2C3E50"/>
-                          </a:solidFill>
-                        </a:defRPr>
-                      </a:pPr>
-                      <a:r>
+                            <a:srgbClr val="E2E8F0"/>
+                          </a:solidFill>
+                        </a:defRPr>
+                      </a:pPr>
+                      <a:r>
+                        <a:rPr>
+                          <a:solidFill>
+                            <a:srgbClr val="E2E8F0"/>
+                          </a:solidFill>
+                        </a:rPr>
                         <a:t>Tiempo prom./esc</a:t>
                       </a:r>
                     </a:p>
                   </a:txBody>
                   <a:tcPr>
                     <a:solidFill>
-                      <a:srgbClr val="ECF0F1"/>
-                    </a:solidFill>
-                  </a:tcPr>
-                </a:tc>
-                <a:tc>
-                  <a:txBody>
-                    <a:bodyPr/>
-                    <a:lstStyle/>
-                    <a:p>
-                      <a:pPr>
-                        <a:defRPr sz="1000">
-                          <a:solidFill>
-                            <a:srgbClr val="2C3E50"/>
-                          </a:solidFill>
-                        </a:defRPr>
-                      </a:pPr>
-                      <a:r>
+                      <a:srgbClr val="2D3748"/>
+                    </a:solidFill>
+                  </a:tcPr>
+                </a:tc>
+                <a:tc>
+                  <a:txBody>
+                    <a:bodyPr/>
+                    <a:lstStyle/>
+                    <a:p>
+                      <a:pPr>
+                        <a:defRPr sz="1000">
+                          <a:solidFill>
+                            <a:srgbClr val="E2E8F0"/>
+                          </a:solidFill>
+                        </a:defRPr>
+                      </a:pPr>
+                      <a:r>
+                        <a:rPr>
+                          <a:solidFill>
+                            <a:srgbClr val="E2E8F0"/>
+                          </a:solidFill>
+                        </a:rPr>
                         <a:t>Suma dur / Total</a:t>
                       </a:r>
                     </a:p>
                   </a:txBody>
                   <a:tcPr>
                     <a:solidFill>
-                      <a:srgbClr val="ECF0F1"/>
-                    </a:solidFill>
-                  </a:tcPr>
-                </a:tc>
-                <a:tc>
-                  <a:txBody>
-                    <a:bodyPr/>
-                    <a:lstStyle/>
-                    <a:p>
-                      <a:pPr>
-                        <a:defRPr sz="1000">
-                          <a:solidFill>
-                            <a:srgbClr val="2C3E50"/>
-                          </a:solidFill>
-                        </a:defRPr>
-                      </a:pPr>
-                      <a:r>
+                      <a:srgbClr val="2D3748"/>
+                    </a:solidFill>
+                  </a:tcPr>
+                </a:tc>
+                <a:tc>
+                  <a:txBody>
+                    <a:bodyPr/>
+                    <a:lstStyle/>
+                    <a:p>
+                      <a:pPr>
+                        <a:defRPr sz="1000">
+                          <a:solidFill>
+                            <a:srgbClr val="E2E8F0"/>
+                          </a:solidFill>
+                        </a:defRPr>
+                      </a:pPr>
+                      <a:r>
+                        <a:rPr>
+                          <a:solidFill>
+                            <a:srgbClr val="E2E8F0"/>
+                          </a:solidFill>
+                        </a:rPr>
                         <a:t>~15 seg</a:t>
                       </a:r>
                     </a:p>
                   </a:txBody>
                   <a:tcPr>
                     <a:solidFill>
-                      <a:srgbClr val="ECF0F1"/>
-                    </a:solidFill>
-                  </a:tcPr>
-                </a:tc>
-                <a:tc>
-                  <a:txBody>
-                    <a:bodyPr/>
-                    <a:lstStyle/>
-                    <a:p>
-                      <a:pPr>
-                        <a:defRPr sz="1000">
-                          <a:solidFill>
-                            <a:srgbClr val="2C3E50"/>
-                          </a:solidFill>
-                        </a:defRPr>
-                      </a:pPr>
-                      <a:r>
+                      <a:srgbClr val="2D3748"/>
+                    </a:solidFill>
+                  </a:tcPr>
+                </a:tc>
+                <a:tc>
+                  <a:txBody>
+                    <a:bodyPr/>
+                    <a:lstStyle/>
+                    <a:p>
+                      <a:pPr>
+                        <a:defRPr sz="1000">
+                          <a:solidFill>
+                            <a:srgbClr val="E2E8F0"/>
+                          </a:solidFill>
+                        </a:defRPr>
+                      </a:pPr>
+                      <a:r>
+                        <a:rPr>
+                          <a:solidFill>
+                            <a:srgbClr val="E2E8F0"/>
+                          </a:solidFill>
+                        </a:rPr>
                         <a:t>reporte.json</a:t>
                       </a:r>
                     </a:p>
                   </a:txBody>
                   <a:tcPr>
                     <a:solidFill>
-                      <a:srgbClr val="ECF0F1"/>
+                      <a:srgbClr val="2D3748"/>
                     </a:solidFill>
                   </a:tcPr>
                 </a:tc>
@@ -7500,73 +8582,109 @@
                       <a:pPr>
                         <a:defRPr sz="1000">
                           <a:solidFill>
-                            <a:srgbClr val="2C3E50"/>
-                          </a:solidFill>
-                        </a:defRPr>
-                      </a:pPr>
-                      <a:r>
+                            <a:srgbClr val="E2E8F0"/>
+                          </a:solidFill>
+                        </a:defRPr>
+                      </a:pPr>
+                      <a:r>
+                        <a:rPr>
+                          <a:solidFill>
+                            <a:srgbClr val="E2E8F0"/>
+                          </a:solidFill>
+                        </a:rPr>
                         <a:t>Feature mas lenta</a:t>
                       </a:r>
                     </a:p>
                   </a:txBody>
-                  <a:tcPr/>
-                </a:tc>
-                <a:tc>
-                  <a:txBody>
-                    <a:bodyPr/>
-                    <a:lstStyle/>
-                    <a:p>
-                      <a:pPr>
-                        <a:defRPr sz="1000">
-                          <a:solidFill>
-                            <a:srgbClr val="2C3E50"/>
-                          </a:solidFill>
-                        </a:defRPr>
-                      </a:pPr>
-                      <a:r>
+                  <a:tcPr>
+                    <a:solidFill>
+                      <a:srgbClr val="1E293B"/>
+                    </a:solidFill>
+                  </a:tcPr>
+                </a:tc>
+                <a:tc>
+                  <a:txBody>
+                    <a:bodyPr/>
+                    <a:lstStyle/>
+                    <a:p>
+                      <a:pPr>
+                        <a:defRPr sz="1000">
+                          <a:solidFill>
+                            <a:srgbClr val="E2E8F0"/>
+                          </a:solidFill>
+                        </a:defRPr>
+                      </a:pPr>
+                      <a:r>
+                        <a:rPr>
+                          <a:solidFill>
+                            <a:srgbClr val="E2E8F0"/>
+                          </a:solidFill>
+                        </a:rPr>
                         <a:t>Max(dur feature)</a:t>
                       </a:r>
                     </a:p>
                   </a:txBody>
-                  <a:tcPr/>
-                </a:tc>
-                <a:tc>
-                  <a:txBody>
-                    <a:bodyPr/>
-                    <a:lstStyle/>
-                    <a:p>
-                      <a:pPr>
-                        <a:defRPr sz="1000">
-                          <a:solidFill>
-                            <a:srgbClr val="2C3E50"/>
-                          </a:solidFill>
-                        </a:defRPr>
-                      </a:pPr>
-                      <a:r>
+                  <a:tcPr>
+                    <a:solidFill>
+                      <a:srgbClr val="1E293B"/>
+                    </a:solidFill>
+                  </a:tcPr>
+                </a:tc>
+                <a:tc>
+                  <a:txBody>
+                    <a:bodyPr/>
+                    <a:lstStyle/>
+                    <a:p>
+                      <a:pPr>
+                        <a:defRPr sz="1000">
+                          <a:solidFill>
+                            <a:srgbClr val="E2E8F0"/>
+                          </a:solidFill>
+                        </a:defRPr>
+                      </a:pPr>
+                      <a:r>
+                        <a:rPr>
+                          <a:solidFill>
+                            <a:srgbClr val="E2E8F0"/>
+                          </a:solidFill>
+                        </a:rPr>
                         <a:t>~40s (PIM)</a:t>
                       </a:r>
                     </a:p>
                   </a:txBody>
-                  <a:tcPr/>
-                </a:tc>
-                <a:tc>
-                  <a:txBody>
-                    <a:bodyPr/>
-                    <a:lstStyle/>
-                    <a:p>
-                      <a:pPr>
-                        <a:defRPr sz="1000">
-                          <a:solidFill>
-                            <a:srgbClr val="2C3E50"/>
-                          </a:solidFill>
-                        </a:defRPr>
-                      </a:pPr>
-                      <a:r>
+                  <a:tcPr>
+                    <a:solidFill>
+                      <a:srgbClr val="1E293B"/>
+                    </a:solidFill>
+                  </a:tcPr>
+                </a:tc>
+                <a:tc>
+                  <a:txBody>
+                    <a:bodyPr/>
+                    <a:lstStyle/>
+                    <a:p>
+                      <a:pPr>
+                        <a:defRPr sz="1000">
+                          <a:solidFill>
+                            <a:srgbClr val="E2E8F0"/>
+                          </a:solidFill>
+                        </a:defRPr>
+                      </a:pPr>
+                      <a:r>
+                        <a:rPr>
+                          <a:solidFill>
+                            <a:srgbClr val="E2E8F0"/>
+                          </a:solidFill>
+                        </a:rPr>
                         <a:t>reporte.json</a:t>
                       </a:r>
                     </a:p>
                   </a:txBody>
-                  <a:tcPr/>
+                  <a:tcPr>
+                    <a:solidFill>
+                      <a:srgbClr val="1E293B"/>
+                    </a:solidFill>
+                  </a:tcPr>
                 </a:tc>
               </a:tr>
               <a:tr h="533400">
@@ -7578,87 +8696,107 @@
                       <a:pPr>
                         <a:defRPr sz="1000">
                           <a:solidFill>
-                            <a:srgbClr val="2C3E50"/>
-                          </a:solidFill>
-                        </a:defRPr>
-                      </a:pPr>
-                      <a:r>
+                            <a:srgbClr val="E2E8F0"/>
+                          </a:solidFill>
+                        </a:defRPr>
+                      </a:pPr>
+                      <a:r>
+                        <a:rPr>
+                          <a:solidFill>
+                            <a:srgbClr val="E2E8F0"/>
+                          </a:solidFill>
+                        </a:rPr>
                         <a:t>Overhead setup</a:t>
                       </a:r>
                     </a:p>
                   </a:txBody>
                   <a:tcPr>
                     <a:solidFill>
-                      <a:srgbClr val="ECF0F1"/>
-                    </a:solidFill>
-                  </a:tcPr>
-                </a:tc>
-                <a:tc>
-                  <a:txBody>
-                    <a:bodyPr/>
-                    <a:lstStyle/>
-                    <a:p>
-                      <a:pPr>
-                        <a:defRPr sz="1000">
-                          <a:solidFill>
-                            <a:srgbClr val="2C3E50"/>
-                          </a:solidFill>
-                        </a:defRPr>
-                      </a:pPr>
-                      <a:r>
+                      <a:srgbClr val="2D3748"/>
+                    </a:solidFill>
+                  </a:tcPr>
+                </a:tc>
+                <a:tc>
+                  <a:txBody>
+                    <a:bodyPr/>
+                    <a:lstStyle/>
+                    <a:p>
+                      <a:pPr>
+                        <a:defRPr sz="1000">
+                          <a:solidFill>
+                            <a:srgbClr val="E2E8F0"/>
+                          </a:solidFill>
+                        </a:defRPr>
+                      </a:pPr>
+                      <a:r>
+                        <a:rPr>
+                          <a:solidFill>
+                            <a:srgbClr val="E2E8F0"/>
+                          </a:solidFill>
+                        </a:rPr>
                         <a:t>Setup/Total</a:t>
                       </a:r>
                     </a:p>
                   </a:txBody>
                   <a:tcPr>
                     <a:solidFill>
-                      <a:srgbClr val="ECF0F1"/>
-                    </a:solidFill>
-                  </a:tcPr>
-                </a:tc>
-                <a:tc>
-                  <a:txBody>
-                    <a:bodyPr/>
-                    <a:lstStyle/>
-                    <a:p>
-                      <a:pPr>
-                        <a:defRPr sz="1000">
-                          <a:solidFill>
-                            <a:srgbClr val="2C3E50"/>
-                          </a:solidFill>
-                        </a:defRPr>
-                      </a:pPr>
-                      <a:r>
+                      <a:srgbClr val="2D3748"/>
+                    </a:solidFill>
+                  </a:tcPr>
+                </a:tc>
+                <a:tc>
+                  <a:txBody>
+                    <a:bodyPr/>
+                    <a:lstStyle/>
+                    <a:p>
+                      <a:pPr>
+                        <a:defRPr sz="1000">
+                          <a:solidFill>
+                            <a:srgbClr val="E2E8F0"/>
+                          </a:solidFill>
+                        </a:defRPr>
+                      </a:pPr>
+                      <a:r>
+                        <a:rPr>
+                          <a:solidFill>
+                            <a:srgbClr val="E2E8F0"/>
+                          </a:solidFill>
+                        </a:rPr>
                         <a:t>~25%</a:t>
                       </a:r>
                     </a:p>
                   </a:txBody>
                   <a:tcPr>
                     <a:solidFill>
-                      <a:srgbClr val="ECF0F1"/>
-                    </a:solidFill>
-                  </a:tcPr>
-                </a:tc>
-                <a:tc>
-                  <a:txBody>
-                    <a:bodyPr/>
-                    <a:lstStyle/>
-                    <a:p>
-                      <a:pPr>
-                        <a:defRPr sz="1000">
-                          <a:solidFill>
-                            <a:srgbClr val="2C3E50"/>
-                          </a:solidFill>
-                        </a:defRPr>
-                      </a:pPr>
-                      <a:r>
+                      <a:srgbClr val="2D3748"/>
+                    </a:solidFill>
+                  </a:tcPr>
+                </a:tc>
+                <a:tc>
+                  <a:txBody>
+                    <a:bodyPr/>
+                    <a:lstStyle/>
+                    <a:p>
+                      <a:pPr>
+                        <a:defRPr sz="1000">
+                          <a:solidFill>
+                            <a:srgbClr val="E2E8F0"/>
+                          </a:solidFill>
+                        </a:defRPr>
+                      </a:pPr>
+                      <a:r>
+                        <a:rPr>
+                          <a:solidFill>
+                            <a:srgbClr val="E2E8F0"/>
+                          </a:solidFill>
+                        </a:rPr>
                         <a:t>environment.py</a:t>
                       </a:r>
                     </a:p>
                   </a:txBody>
                   <a:tcPr>
                     <a:solidFill>
-                      <a:srgbClr val="ECF0F1"/>
+                      <a:srgbClr val="2D3748"/>
                     </a:solidFill>
                   </a:tcPr>
                 </a:tc>
@@ -7672,73 +8810,109 @@
                       <a:pPr>
                         <a:defRPr sz="1000">
                           <a:solidFill>
-                            <a:srgbClr val="2C3E50"/>
-                          </a:solidFill>
-                        </a:defRPr>
-                      </a:pPr>
-                      <a:r>
+                            <a:srgbClr val="E2E8F0"/>
+                          </a:solidFill>
+                        </a:defRPr>
+                      </a:pPr>
+                      <a:r>
+                        <a:rPr>
+                          <a:solidFill>
+                            <a:srgbClr val="E2E8F0"/>
+                          </a:solidFill>
+                        </a:rPr>
                         <a:t>Cobertura DD</a:t>
                       </a:r>
                     </a:p>
                   </a:txBody>
-                  <a:tcPr/>
-                </a:tc>
-                <a:tc>
-                  <a:txBody>
-                    <a:bodyPr/>
-                    <a:lstStyle/>
-                    <a:p>
-                      <a:pPr>
-                        <a:defRPr sz="1000">
-                          <a:solidFill>
-                            <a:srgbClr val="2C3E50"/>
-                          </a:solidFill>
-                        </a:defRPr>
-                      </a:pPr>
-                      <a:r>
+                  <a:tcPr>
+                    <a:solidFill>
+                      <a:srgbClr val="1E293B"/>
+                    </a:solidFill>
+                  </a:tcPr>
+                </a:tc>
+                <a:tc>
+                  <a:txBody>
+                    <a:bodyPr/>
+                    <a:lstStyle/>
+                    <a:p>
+                      <a:pPr>
+                        <a:defRPr sz="1000">
+                          <a:solidFill>
+                            <a:srgbClr val="E2E8F0"/>
+                          </a:solidFill>
+                        </a:defRPr>
+                      </a:pPr>
+                      <a:r>
+                        <a:rPr>
+                          <a:solidFill>
+                            <a:srgbClr val="E2E8F0"/>
+                          </a:solidFill>
+                        </a:rPr>
                         <a:t>DD / Total</a:t>
                       </a:r>
                     </a:p>
                   </a:txBody>
-                  <a:tcPr/>
-                </a:tc>
-                <a:tc>
-                  <a:txBody>
-                    <a:bodyPr/>
-                    <a:lstStyle/>
-                    <a:p>
-                      <a:pPr>
-                        <a:defRPr sz="1000">
-                          <a:solidFill>
-                            <a:srgbClr val="2C3E50"/>
-                          </a:solidFill>
-                        </a:defRPr>
-                      </a:pPr>
-                      <a:r>
+                  <a:tcPr>
+                    <a:solidFill>
+                      <a:srgbClr val="1E293B"/>
+                    </a:solidFill>
+                  </a:tcPr>
+                </a:tc>
+                <a:tc>
+                  <a:txBody>
+                    <a:bodyPr/>
+                    <a:lstStyle/>
+                    <a:p>
+                      <a:pPr>
+                        <a:defRPr sz="1000">
+                          <a:solidFill>
+                            <a:srgbClr val="E2E8F0"/>
+                          </a:solidFill>
+                        </a:defRPr>
+                      </a:pPr>
+                      <a:r>
+                        <a:rPr>
+                          <a:solidFill>
+                            <a:srgbClr val="E2E8F0"/>
+                          </a:solidFill>
+                        </a:rPr>
                         <a:t>62% (18/29)</a:t>
                       </a:r>
                     </a:p>
                   </a:txBody>
-                  <a:tcPr/>
-                </a:tc>
-                <a:tc>
-                  <a:txBody>
-                    <a:bodyPr/>
-                    <a:lstStyle/>
-                    <a:p>
-                      <a:pPr>
-                        <a:defRPr sz="1000">
-                          <a:solidFill>
-                            <a:srgbClr val="2C3E50"/>
-                          </a:solidFill>
-                        </a:defRPr>
-                      </a:pPr>
-                      <a:r>
+                  <a:tcPr>
+                    <a:solidFill>
+                      <a:srgbClr val="1E293B"/>
+                    </a:solidFill>
+                  </a:tcPr>
+                </a:tc>
+                <a:tc>
+                  <a:txBody>
+                    <a:bodyPr/>
+                    <a:lstStyle/>
+                    <a:p>
+                      <a:pPr>
+                        <a:defRPr sz="1000">
+                          <a:solidFill>
+                            <a:srgbClr val="E2E8F0"/>
+                          </a:solidFill>
+                        </a:defRPr>
+                      </a:pPr>
+                      <a:r>
+                        <a:rPr>
+                          <a:solidFill>
+                            <a:srgbClr val="E2E8F0"/>
+                          </a:solidFill>
+                        </a:rPr>
                         <a:t>Features</a:t>
                       </a:r>
                     </a:p>
                   </a:txBody>
-                  <a:tcPr/>
+                  <a:tcPr>
+                    <a:solidFill>
+                      <a:srgbClr val="1E293B"/>
+                    </a:solidFill>
+                  </a:tcPr>
                 </a:tc>
               </a:tr>
               <a:tr h="533400">
@@ -7750,87 +8924,107 @@
                       <a:pPr>
                         <a:defRPr sz="1000">
                           <a:solidFill>
-                            <a:srgbClr val="2C3E50"/>
-                          </a:solidFill>
-                        </a:defRPr>
-                      </a:pPr>
-                      <a:r>
+                            <a:srgbClr val="E2E8F0"/>
+                          </a:solidFill>
+                        </a:defRPr>
+                      </a:pPr>
+                      <a:r>
+                        <a:rPr>
+                          <a:solidFill>
+                            <a:srgbClr val="E2E8F0"/>
+                          </a:solidFill>
+                        </a:rPr>
                         <a:t>Screenshots/esc</a:t>
                       </a:r>
                     </a:p>
                   </a:txBody>
                   <a:tcPr>
                     <a:solidFill>
-                      <a:srgbClr val="ECF0F1"/>
-                    </a:solidFill>
-                  </a:tcPr>
-                </a:tc>
-                <a:tc>
-                  <a:txBody>
-                    <a:bodyPr/>
-                    <a:lstStyle/>
-                    <a:p>
-                      <a:pPr>
-                        <a:defRPr sz="1000">
-                          <a:solidFill>
-                            <a:srgbClr val="2C3E50"/>
-                          </a:solidFill>
-                        </a:defRPr>
-                      </a:pPr>
-                      <a:r>
+                      <a:srgbClr val="2D3748"/>
+                    </a:solidFill>
+                  </a:tcPr>
+                </a:tc>
+                <a:tc>
+                  <a:txBody>
+                    <a:bodyPr/>
+                    <a:lstStyle/>
+                    <a:p>
+                      <a:pPr>
+                        <a:defRPr sz="1000">
+                          <a:solidFill>
+                            <a:srgbClr val="E2E8F0"/>
+                          </a:solidFill>
+                        </a:defRPr>
+                      </a:pPr>
+                      <a:r>
+                        <a:rPr>
+                          <a:solidFill>
+                            <a:srgbClr val="E2E8F0"/>
+                          </a:solidFill>
+                        </a:rPr>
                         <a:t>Total SS / Esc</a:t>
                       </a:r>
                     </a:p>
                   </a:txBody>
                   <a:tcPr>
                     <a:solidFill>
-                      <a:srgbClr val="ECF0F1"/>
-                    </a:solidFill>
-                  </a:tcPr>
-                </a:tc>
-                <a:tc>
-                  <a:txBody>
-                    <a:bodyPr/>
-                    <a:lstStyle/>
-                    <a:p>
-                      <a:pPr>
-                        <a:defRPr sz="1000">
-                          <a:solidFill>
-                            <a:srgbClr val="2C3E50"/>
-                          </a:solidFill>
-                        </a:defRPr>
-                      </a:pPr>
-                      <a:r>
+                      <a:srgbClr val="2D3748"/>
+                    </a:solidFill>
+                  </a:tcPr>
+                </a:tc>
+                <a:tc>
+                  <a:txBody>
+                    <a:bodyPr/>
+                    <a:lstStyle/>
+                    <a:p>
+                      <a:pPr>
+                        <a:defRPr sz="1000">
+                          <a:solidFill>
+                            <a:srgbClr val="E2E8F0"/>
+                          </a:solidFill>
+                        </a:defRPr>
+                      </a:pPr>
+                      <a:r>
+                        <a:rPr>
+                          <a:solidFill>
+                            <a:srgbClr val="E2E8F0"/>
+                          </a:solidFill>
+                        </a:rPr>
                         <a:t>6.1 (177/29)</a:t>
                       </a:r>
                     </a:p>
                   </a:txBody>
                   <a:tcPr>
                     <a:solidFill>
-                      <a:srgbClr val="ECF0F1"/>
-                    </a:solidFill>
-                  </a:tcPr>
-                </a:tc>
-                <a:tc>
-                  <a:txBody>
-                    <a:bodyPr/>
-                    <a:lstStyle/>
-                    <a:p>
-                      <a:pPr>
-                        <a:defRPr sz="1000">
-                          <a:solidFill>
-                            <a:srgbClr val="2C3E50"/>
-                          </a:solidFill>
-                        </a:defRPr>
-                      </a:pPr>
-                      <a:r>
+                      <a:srgbClr val="2D3748"/>
+                    </a:solidFill>
+                  </a:tcPr>
+                </a:tc>
+                <a:tc>
+                  <a:txBody>
+                    <a:bodyPr/>
+                    <a:lstStyle/>
+                    <a:p>
+                      <a:pPr>
+                        <a:defRPr sz="1000">
+                          <a:solidFill>
+                            <a:srgbClr val="E2E8F0"/>
+                          </a:solidFill>
+                        </a:defRPr>
+                      </a:pPr>
+                      <a:r>
+                        <a:rPr>
+                          <a:solidFill>
+                            <a:srgbClr val="E2E8F0"/>
+                          </a:solidFill>
+                        </a:rPr>
                         <a:t>evidencias/</a:t>
                       </a:r>
                     </a:p>
                   </a:txBody>
                   <a:tcPr>
                     <a:solidFill>
-                      <a:srgbClr val="ECF0F1"/>
+                      <a:srgbClr val="2D3748"/>
                     </a:solidFill>
                   </a:tcPr>
                 </a:tc>
@@ -7869,14 +9063,29 @@
               </a:defRPr>
             </a:pPr>
             <a:r>
+              <a:rPr>
+                <a:solidFill>
+                  <a:srgbClr val="CBD5E1"/>
+                </a:solidFill>
+              </a:rPr>
               <a:t>Tasa de fallos: unico fallo = TC_004 intencional. Excluyendolo: 0%. Suite estable.</a:t>
             </a:r>
             <a:br/>
             <a:r>
+              <a:rPr>
+                <a:solidFill>
+                  <a:srgbClr val="CBD5E1"/>
+                </a:solidFill>
+              </a:rPr>
               <a:t>Overhead setup: cada escenario abre su propio Chrome. Con paralelizacion (-j 4) se reduce.</a:t>
             </a:r>
             <a:br/>
             <a:r>
+              <a:rPr>
+                <a:solidFill>
+                  <a:srgbClr val="CBD5E1"/>
+                </a:solidFill>
+              </a:rPr>
               <a:t>Cobertura DD 62%: escalable, permite agregar filas al Excel sin modificar codigo.</a:t>
             </a:r>
           </a:p>
@@ -7895,10 +9104,15 @@
   <p:cSld>
     <p:bg>
       <p:bgPr>
+        <a:effectLst/>
         <a:solidFill>
-          <a:srgbClr val="FFFFFF"/>
+          <a:srgbClr val="1E3A5F"/>
         </a:solidFill>
-        <a:effectLst/>
+      </p:bgPr>
+      <p:bgPr>
+        <a:solidFill>
+          <a:srgbClr val="F1F5F9"/>
+        </a:solidFill>
       </p:bgPr>
     </p:bg>
     <p:spTree>
@@ -7915,6 +9129,9 @@
           <p:nvPr/>
         </p:nvSpPr>
         <p:spPr>
+          <a:solidFill>
+            <a:srgbClr val="818CF8"/>
+          </a:solidFill>
           <a:xfrm>
             <a:off x="0" y="0"/>
             <a:ext cx="12191695" cy="1097280"/>
@@ -7922,9 +9139,6 @@
           <a:prstGeom prst="rect">
             <a:avLst/>
           </a:prstGeom>
-          <a:solidFill>
-            <a:srgbClr val="2C3E50"/>
-          </a:solidFill>
           <a:ln>
             <a:noFill/>
           </a:ln>
@@ -7981,6 +9195,11 @@
               </a:defRPr>
             </a:pPr>
             <a:r>
+              <a:rPr>
+                <a:solidFill>
+                  <a:srgbClr val="CBD5E1"/>
+                </a:solidFill>
+              </a:rPr>
               <a:t>Oportunidades de Mejora (A: Observacion -&gt; B: Causa -&gt; C: Accion)</a:t>
             </a:r>
           </a:p>
@@ -8033,6 +9252,11 @@
               </a:defRPr>
             </a:pPr>
             <a:r>
+              <a:rPr>
+                <a:solidFill>
+                  <a:srgbClr val="CBD5E1"/>
+                </a:solidFill>
+              </a:rPr>
               <a:t>O1: Menu en chino</a:t>
             </a:r>
           </a:p>
@@ -8068,18 +9292,38 @@
               </a:defRPr>
             </a:pPr>
             <a:r>
+              <a:rPr>
+                <a:solidFill>
+                  <a:srgbClr val="CBD5E1"/>
+                </a:solidFill>
+              </a:rPr>
               <a:t>A) TC_007/008/009 fallaron</a:t>
             </a:r>
             <a:br/>
             <a:r>
+              <a:rPr>
+                <a:solidFill>
+                  <a:srgbClr val="CBD5E1"/>
+                </a:solidFill>
+              </a:rPr>
               <a:t>B) Server locale cambia a chino</a:t>
             </a:r>
             <a:br/>
             <a:r>
+              <a:rPr>
+                <a:solidFill>
+                  <a:srgbClr val="CBD5E1"/>
+                </a:solidFill>
+              </a:rPr>
               <a:t>C) MENU_TRANSLATIONS</a:t>
             </a:r>
             <a:br/>
             <a:r>
+              <a:rPr>
+                <a:solidFill>
+                  <a:srgbClr val="CBD5E1"/>
+                </a:solidFill>
+              </a:rPr>
               <a:t>+ fallback bilingue implementado</a:t>
             </a:r>
           </a:p>
@@ -8132,6 +9376,11 @@
               </a:defRPr>
             </a:pPr>
             <a:r>
+              <a:rPr>
+                <a:solidFill>
+                  <a:srgbClr val="CBD5E1"/>
+                </a:solidFill>
+              </a:rPr>
               <a:t>O2: Boton Save + Spinner</a:t>
             </a:r>
           </a:p>
@@ -8167,18 +9416,38 @@
               </a:defRPr>
             </a:pPr>
             <a:r>
+              <a:rPr>
+                <a:solidFill>
+                  <a:srgbClr val="CBD5E1"/>
+                </a:solidFill>
+              </a:rPr>
               <a:t>A) Save interceptado por spinner</a:t>
             </a:r>
             <a:br/>
             <a:r>
+              <a:rPr>
+                <a:solidFill>
+                  <a:srgbClr val="CBD5E1"/>
+                </a:solidFill>
+              </a:rPr>
               <a:t>B) Spinner OX tapa boton</a:t>
             </a:r>
             <a:br/>
             <a:r>
+              <a:rPr>
+                <a:solidFill>
+                  <a:srgbClr val="CBD5E1"/>
+                </a:solidFill>
+              </a:rPr>
               <a:t>C) _wait_spinner_done()</a:t>
             </a:r>
             <a:br/>
             <a:r>
+              <a:rPr>
+                <a:solidFill>
+                  <a:srgbClr val="CBD5E1"/>
+                </a:solidFill>
+              </a:rPr>
               <a:t>+ JS click implementado</a:t>
             </a:r>
           </a:p>
@@ -8231,6 +9500,11 @@
               </a:defRPr>
             </a:pPr>
             <a:r>
+              <a:rPr>
+                <a:solidFill>
+                  <a:srgbClr val="CBD5E1"/>
+                </a:solidFill>
+              </a:rPr>
               <a:t>O3: Titulo incorrecto</a:t>
             </a:r>
           </a:p>
@@ -8266,18 +9540,38 @@
               </a:defRPr>
             </a:pPr>
             <a:r>
+              <a:rPr>
+                <a:solidFill>
+                  <a:srgbClr val="CBD5E1"/>
+                </a:solidFill>
+              </a:rPr>
               <a:t>A) TC_004: titulo no coincide</a:t>
             </a:r>
             <a:br/>
             <a:r>
+              <a:rPr>
+                <a:solidFill>
+                  <a:srgbClr val="CBD5E1"/>
+                </a:solidFill>
+              </a:rPr>
               <a:t>B) driver.title es 'OrangeHRM'</a:t>
             </a:r>
             <a:br/>
             <a:r>
+              <a:rPr>
+                <a:solidFill>
+                  <a:srgbClr val="CBD5E1"/>
+                </a:solidFill>
+              </a:rPr>
               <a:t>C) Validar por URL en vez</a:t>
             </a:r>
             <a:br/>
             <a:r>
+              <a:rPr>
+                <a:solidFill>
+                  <a:srgbClr val="CBD5E1"/>
+                </a:solidFill>
+              </a:rPr>
               <a:t>de titulo implementado</a:t>
             </a:r>
           </a:p>
@@ -8330,6 +9624,11 @@
               </a:defRPr>
             </a:pPr>
             <a:r>
+              <a:rPr>
+                <a:solidFill>
+                  <a:srgbClr val="CBD5E1"/>
+                </a:solidFill>
+              </a:rPr>
               <a:t>O4: Tiempo ejecucion</a:t>
             </a:r>
           </a:p>
@@ -8365,22 +9664,47 @@
               </a:defRPr>
             </a:pPr>
             <a:r>
+              <a:rPr>
+                <a:solidFill>
+                  <a:srgbClr val="CBD5E1"/>
+                </a:solidFill>
+              </a:rPr>
               <a:t>A) Suite ~7 minutos</a:t>
             </a:r>
             <a:br/>
             <a:r>
+              <a:rPr>
+                <a:solidFill>
+                  <a:srgbClr val="CBD5E1"/>
+                </a:solidFill>
+              </a:rPr>
               <a:t>B) Escenarios secuenciales</a:t>
             </a:r>
             <a:br/>
             <a:r>
+              <a:rPr>
+                <a:solidFill>
+                  <a:srgbClr val="CBD5E1"/>
+                </a:solidFill>
+              </a:rPr>
               <a:t>  driver nuevo c/u</a:t>
             </a:r>
             <a:br/>
             <a:r>
+              <a:rPr>
+                <a:solidFill>
+                  <a:srgbClr val="CBD5E1"/>
+                </a:solidFill>
+              </a:rPr>
               <a:t>C) Propuesta: behave -j 4</a:t>
             </a:r>
             <a:br/>
             <a:r>
+              <a:rPr>
+                <a:solidFill>
+                  <a:srgbClr val="CBD5E1"/>
+                </a:solidFill>
+              </a:rPr>
               <a:t>  (~2 min)</a:t>
             </a:r>
           </a:p>
@@ -8433,6 +9757,11 @@
               </a:defRPr>
             </a:pPr>
             <a:r>
+              <a:rPr>
+                <a:solidFill>
+                  <a:srgbClr val="CBD5E1"/>
+                </a:solidFill>
+              </a:rPr>
               <a:t>O5: Excel no versionables</a:t>
             </a:r>
           </a:p>
@@ -8468,18 +9797,38 @@
               </a:defRPr>
             </a:pPr>
             <a:r>
+              <a:rPr>
+                <a:solidFill>
+                  <a:srgbClr val="CBD5E1"/>
+                </a:solidFill>
+              </a:rPr>
               <a:t>A) 6 .xlsx editables manual</a:t>
             </a:r>
             <a:br/>
             <a:r>
+              <a:rPr>
+                <a:solidFill>
+                  <a:srgbClr val="CBD5E1"/>
+                </a:solidFill>
+              </a:rPr>
               <a:t>B) Binarios, sin diff en git</a:t>
             </a:r>
             <a:br/>
             <a:r>
+              <a:rPr>
+                <a:solidFill>
+                  <a:srgbClr val="CBD5E1"/>
+                </a:solidFill>
+              </a:rPr>
               <a:t>C) Propuesta: regenerar con</a:t>
             </a:r>
             <a:br/>
             <a:r>
+              <a:rPr>
+                <a:solidFill>
+                  <a:srgbClr val="CBD5E1"/>
+                </a:solidFill>
+              </a:rPr>
               <a:t>  generar_excel.py pre-ejec</a:t>
             </a:r>
           </a:p>
@@ -8532,6 +9881,11 @@
               </a:defRPr>
             </a:pPr>
             <a:r>
+              <a:rPr>
+                <a:solidFill>
+                  <a:srgbClr val="CBD5E1"/>
+                </a:solidFill>
+              </a:rPr>
               <a:t>3 implementadas | 2 propuestas</a:t>
             </a:r>
           </a:p>
@@ -8550,10 +9904,15 @@
   <p:cSld>
     <p:bg>
       <p:bgPr>
+        <a:effectLst/>
         <a:solidFill>
-          <a:srgbClr val="FFFFFF"/>
+          <a:srgbClr val="1E3A5F"/>
         </a:solidFill>
-        <a:effectLst/>
+      </p:bgPr>
+      <p:bgPr>
+        <a:solidFill>
+          <a:srgbClr val="F1F5F9"/>
+        </a:solidFill>
       </p:bgPr>
     </p:bg>
     <p:spTree>
@@ -8570,6 +9929,9 @@
           <p:nvPr/>
         </p:nvSpPr>
         <p:spPr>
+          <a:solidFill>
+            <a:srgbClr val="818CF8"/>
+          </a:solidFill>
           <a:xfrm>
             <a:off x="0" y="0"/>
             <a:ext cx="12191695" cy="1097280"/>
@@ -8577,9 +9939,6 @@
           <a:prstGeom prst="rect">
             <a:avLst/>
           </a:prstGeom>
-          <a:solidFill>
-            <a:srgbClr val="2C3E50"/>
-          </a:solidFill>
           <a:ln>
             <a:noFill/>
           </a:ln>
@@ -8636,6 +9995,11 @@
               </a:defRPr>
             </a:pPr>
             <a:r>
+              <a:rPr>
+                <a:solidFill>
+                  <a:srgbClr val="FFFFFF"/>
+                </a:solidFill>
+              </a:rPr>
               <a:t>Propuestas de Mejora (Dato -&gt; Causa -&gt; Accion -&gt; Impacto)</a:t>
             </a:r>
           </a:p>
@@ -8680,13 +10044,18 @@
                         </a:defRPr>
                       </a:pPr>
                       <a:r>
+                        <a:rPr>
+                          <a:solidFill>
+                            <a:srgbClr val="FFFFFF"/>
+                          </a:solidFill>
+                        </a:rPr>
                         <a:t>Tipo</a:t>
                       </a:r>
                     </a:p>
                   </a:txBody>
                   <a:tcPr>
                     <a:solidFill>
-                      <a:srgbClr val="2C3E50"/>
+                      <a:srgbClr val="1E293B"/>
                     </a:solidFill>
                   </a:tcPr>
                 </a:tc>
@@ -8703,13 +10072,18 @@
                         </a:defRPr>
                       </a:pPr>
                       <a:r>
+                        <a:rPr>
+                          <a:solidFill>
+                            <a:srgbClr val="FFFFFF"/>
+                          </a:solidFill>
+                        </a:rPr>
                         <a:t>Propuesta</a:t>
                       </a:r>
                     </a:p>
                   </a:txBody>
                   <a:tcPr>
                     <a:solidFill>
-                      <a:srgbClr val="2C3E50"/>
+                      <a:srgbClr val="1E293B"/>
                     </a:solidFill>
                   </a:tcPr>
                 </a:tc>
@@ -8726,13 +10100,18 @@
                         </a:defRPr>
                       </a:pPr>
                       <a:r>
+                        <a:rPr>
+                          <a:solidFill>
+                            <a:srgbClr val="FFFFFF"/>
+                          </a:solidFill>
+                        </a:rPr>
                         <a:t>Dato</a:t>
                       </a:r>
                     </a:p>
                   </a:txBody>
                   <a:tcPr>
                     <a:solidFill>
-                      <a:srgbClr val="2C3E50"/>
+                      <a:srgbClr val="1E293B"/>
                     </a:solidFill>
                   </a:tcPr>
                 </a:tc>
@@ -8749,13 +10128,18 @@
                         </a:defRPr>
                       </a:pPr>
                       <a:r>
+                        <a:rPr>
+                          <a:solidFill>
+                            <a:srgbClr val="FFFFFF"/>
+                          </a:solidFill>
+                        </a:rPr>
                         <a:t>Accion</a:t>
                       </a:r>
                     </a:p>
                   </a:txBody>
                   <a:tcPr>
                     <a:solidFill>
-                      <a:srgbClr val="2C3E50"/>
+                      <a:srgbClr val="1E293B"/>
                     </a:solidFill>
                   </a:tcPr>
                 </a:tc>
@@ -8772,13 +10156,18 @@
                         </a:defRPr>
                       </a:pPr>
                       <a:r>
+                        <a:rPr>
+                          <a:solidFill>
+                            <a:srgbClr val="FFFFFF"/>
+                          </a:solidFill>
+                        </a:rPr>
                         <a:t>Impacto</a:t>
                       </a:r>
                     </a:p>
                   </a:txBody>
                   <a:tcPr>
                     <a:solidFill>
-                      <a:srgbClr val="2C3E50"/>
+                      <a:srgbClr val="1E293B"/>
                     </a:solidFill>
                   </a:tcPr>
                 </a:tc>
@@ -8792,34 +10181,44 @@
                       <a:pPr>
                         <a:defRPr sz="1000">
                           <a:solidFill>
-                            <a:srgbClr val="2C3E50"/>
-                          </a:solidFill>
-                        </a:defRPr>
-                      </a:pPr>
-                      <a:r>
+                            <a:srgbClr val="E2E8F0"/>
+                          </a:solidFill>
+                        </a:defRPr>
+                      </a:pPr>
+                      <a:r>
+                        <a:rPr>
+                          <a:solidFill>
+                            <a:srgbClr val="E2E8F0"/>
+                          </a:solidFill>
+                        </a:rPr>
                         <a:t>Producto</a:t>
                       </a:r>
                     </a:p>
                   </a:txBody>
                   <a:tcPr>
                     <a:solidFill>
-                      <a:srgbClr val="ECF0F1"/>
-                    </a:solidFill>
-                  </a:tcPr>
-                </a:tc>
-                <a:tc>
-                  <a:txBody>
-                    <a:bodyPr/>
-                    <a:lstStyle/>
-                    <a:p>
-                      <a:pPr>
-                        <a:defRPr sz="1000">
-                          <a:solidFill>
-                            <a:srgbClr val="2C3E50"/>
-                          </a:solidFill>
-                        </a:defRPr>
-                      </a:pPr>
-                      <a:r>
+                      <a:srgbClr val="2D3748"/>
+                    </a:solidFill>
+                  </a:tcPr>
+                </a:tc>
+                <a:tc>
+                  <a:txBody>
+                    <a:bodyPr/>
+                    <a:lstStyle/>
+                    <a:p>
+                      <a:pPr>
+                        <a:defRPr sz="1000">
+                          <a:solidFill>
+                            <a:srgbClr val="E2E8F0"/>
+                          </a:solidFill>
+                        </a:defRPr>
+                      </a:pPr>
+                      <a:r>
+                        <a:rPr>
+                          <a:solidFill>
+                            <a:srgbClr val="E2E8F0"/>
+                          </a:solidFill>
+                        </a:rPr>
                         <a:t>MP-01: Mensajes</a:t>
                       </a:r>
                     </a:p>
@@ -8827,34 +10226,44 @@
                       <a:pPr>
                         <a:defRPr sz="1000">
                           <a:solidFill>
-                            <a:srgbClr val="2C3E50"/>
-                          </a:solidFill>
-                        </a:defRPr>
-                      </a:pPr>
-                      <a:r>
+                            <a:srgbClr val="E2E8F0"/>
+                          </a:solidFill>
+                        </a:defRPr>
+                      </a:pPr>
+                      <a:r>
+                        <a:rPr>
+                          <a:solidFill>
+                            <a:srgbClr val="E2E8F0"/>
+                          </a:solidFill>
+                        </a:rPr>
                         <a:t>error diferenciados</a:t>
                       </a:r>
                     </a:p>
                   </a:txBody>
                   <a:tcPr>
                     <a:solidFill>
-                      <a:srgbClr val="ECF0F1"/>
-                    </a:solidFill>
-                  </a:tcPr>
-                </a:tc>
-                <a:tc>
-                  <a:txBody>
-                    <a:bodyPr/>
-                    <a:lstStyle/>
-                    <a:p>
-                      <a:pPr>
-                        <a:defRPr sz="1000">
-                          <a:solidFill>
-                            <a:srgbClr val="2C3E50"/>
-                          </a:solidFill>
-                        </a:defRPr>
-                      </a:pPr>
-                      <a:r>
+                      <a:srgbClr val="2D3748"/>
+                    </a:solidFill>
+                  </a:tcPr>
+                </a:tc>
+                <a:tc>
+                  <a:txBody>
+                    <a:bodyPr/>
+                    <a:lstStyle/>
+                    <a:p>
+                      <a:pPr>
+                        <a:defRPr sz="1000">
+                          <a:solidFill>
+                            <a:srgbClr val="E2E8F0"/>
+                          </a:solidFill>
+                        </a:defRPr>
+                      </a:pPr>
+                      <a:r>
+                        <a:rPr>
+                          <a:solidFill>
+                            <a:srgbClr val="E2E8F0"/>
+                          </a:solidFill>
+                        </a:rPr>
                         <a:t>TC_002: msj generico</a:t>
                       </a:r>
                     </a:p>
@@ -8862,34 +10271,44 @@
                       <a:pPr>
                         <a:defRPr sz="1000">
                           <a:solidFill>
-                            <a:srgbClr val="2C3E50"/>
-                          </a:solidFill>
-                        </a:defRPr>
-                      </a:pPr>
-                      <a:r>
+                            <a:srgbClr val="E2E8F0"/>
+                          </a:solidFill>
+                        </a:defRPr>
+                      </a:pPr>
+                      <a:r>
+                        <a:rPr>
+                          <a:solidFill>
+                            <a:srgbClr val="E2E8F0"/>
+                          </a:solidFill>
+                        </a:rPr>
                         <a:t>'Invalid credentials'</a:t>
                       </a:r>
                     </a:p>
                   </a:txBody>
                   <a:tcPr>
                     <a:solidFill>
-                      <a:srgbClr val="ECF0F1"/>
-                    </a:solidFill>
-                  </a:tcPr>
-                </a:tc>
-                <a:tc>
-                  <a:txBody>
-                    <a:bodyPr/>
-                    <a:lstStyle/>
-                    <a:p>
-                      <a:pPr>
-                        <a:defRPr sz="1000">
-                          <a:solidFill>
-                            <a:srgbClr val="2C3E50"/>
-                          </a:solidFill>
-                        </a:defRPr>
-                      </a:pPr>
-                      <a:r>
+                      <a:srgbClr val="2D3748"/>
+                    </a:solidFill>
+                  </a:tcPr>
+                </a:tc>
+                <a:tc>
+                  <a:txBody>
+                    <a:bodyPr/>
+                    <a:lstStyle/>
+                    <a:p>
+                      <a:pPr>
+                        <a:defRPr sz="1000">
+                          <a:solidFill>
+                            <a:srgbClr val="E2E8F0"/>
+                          </a:solidFill>
+                        </a:defRPr>
+                      </a:pPr>
+                      <a:r>
+                        <a:rPr>
+                          <a:solidFill>
+                            <a:srgbClr val="E2E8F0"/>
+                          </a:solidFill>
+                        </a:rPr>
                         <a:t>Separar casos:</a:t>
                       </a:r>
                     </a:p>
@@ -8897,34 +10316,44 @@
                       <a:pPr>
                         <a:defRPr sz="1000">
                           <a:solidFill>
-                            <a:srgbClr val="2C3E50"/>
-                          </a:solidFill>
-                        </a:defRPr>
-                      </a:pPr>
-                      <a:r>
+                            <a:srgbClr val="E2E8F0"/>
+                          </a:solidFill>
+                        </a:defRPr>
+                      </a:pPr>
+                      <a:r>
+                        <a:rPr>
+                          <a:solidFill>
+                            <a:srgbClr val="E2E8F0"/>
+                          </a:solidFill>
+                        </a:rPr>
                         <a:t>usuario vs pass</a:t>
                       </a:r>
                     </a:p>
                   </a:txBody>
                   <a:tcPr>
                     <a:solidFill>
-                      <a:srgbClr val="ECF0F1"/>
-                    </a:solidFill>
-                  </a:tcPr>
-                </a:tc>
-                <a:tc>
-                  <a:txBody>
-                    <a:bodyPr/>
-                    <a:lstStyle/>
-                    <a:p>
-                      <a:pPr>
-                        <a:defRPr sz="1000">
-                          <a:solidFill>
-                            <a:srgbClr val="2C3E50"/>
-                          </a:solidFill>
-                        </a:defRPr>
-                      </a:pPr>
-                      <a:r>
+                      <a:srgbClr val="2D3748"/>
+                    </a:solidFill>
+                  </a:tcPr>
+                </a:tc>
+                <a:tc>
+                  <a:txBody>
+                    <a:bodyPr/>
+                    <a:lstStyle/>
+                    <a:p>
+                      <a:pPr>
+                        <a:defRPr sz="1000">
+                          <a:solidFill>
+                            <a:srgbClr val="E2E8F0"/>
+                          </a:solidFill>
+                        </a:defRPr>
+                      </a:pPr>
+                      <a:r>
+                        <a:rPr>
+                          <a:solidFill>
+                            <a:srgbClr val="E2E8F0"/>
+                          </a:solidFill>
+                        </a:rPr>
                         <a:t>UX + seguridad</a:t>
                       </a:r>
                     </a:p>
@@ -8932,18 +10361,23 @@
                       <a:pPr>
                         <a:defRPr sz="1000">
                           <a:solidFill>
-                            <a:srgbClr val="2C3E50"/>
-                          </a:solidFill>
-                        </a:defRPr>
-                      </a:pPr>
-                      <a:r>
+                            <a:srgbClr val="E2E8F0"/>
+                          </a:solidFill>
+                        </a:defRPr>
+                      </a:pPr>
+                      <a:r>
+                        <a:rPr>
+                          <a:solidFill>
+                            <a:srgbClr val="E2E8F0"/>
+                          </a:solidFill>
+                        </a:rPr>
                         <a:t>informatica</a:t>
                       </a:r>
                     </a:p>
                   </a:txBody>
                   <a:tcPr>
                     <a:solidFill>
-                      <a:srgbClr val="ECF0F1"/>
+                      <a:srgbClr val="2D3748"/>
                     </a:solidFill>
                   </a:tcPr>
                 </a:tc>
@@ -8957,30 +10391,44 @@
                       <a:pPr>
                         <a:defRPr sz="1000">
                           <a:solidFill>
-                            <a:srgbClr val="2C3E50"/>
-                          </a:solidFill>
-                        </a:defRPr>
-                      </a:pPr>
-                      <a:r>
+                            <a:srgbClr val="E2E8F0"/>
+                          </a:solidFill>
+                        </a:defRPr>
+                      </a:pPr>
+                      <a:r>
+                        <a:rPr>
+                          <a:solidFill>
+                            <a:srgbClr val="E2E8F0"/>
+                          </a:solidFill>
+                        </a:rPr>
                         <a:t>Producto</a:t>
                       </a:r>
                     </a:p>
                   </a:txBody>
-                  <a:tcPr/>
-                </a:tc>
-                <a:tc>
-                  <a:txBody>
-                    <a:bodyPr/>
-                    <a:lstStyle/>
-                    <a:p>
-                      <a:pPr>
-                        <a:defRPr sz="1000">
-                          <a:solidFill>
-                            <a:srgbClr val="2C3E50"/>
-                          </a:solidFill>
-                        </a:defRPr>
-                      </a:pPr>
-                      <a:r>
+                  <a:tcPr>
+                    <a:solidFill>
+                      <a:srgbClr val="1E293B"/>
+                    </a:solidFill>
+                  </a:tcPr>
+                </a:tc>
+                <a:tc>
+                  <a:txBody>
+                    <a:bodyPr/>
+                    <a:lstStyle/>
+                    <a:p>
+                      <a:pPr>
+                        <a:defRPr sz="1000">
+                          <a:solidFill>
+                            <a:srgbClr val="E2E8F0"/>
+                          </a:solidFill>
+                        </a:defRPr>
+                      </a:pPr>
+                      <a:r>
+                        <a:rPr>
+                          <a:solidFill>
+                            <a:srgbClr val="E2E8F0"/>
+                          </a:solidFill>
+                        </a:rPr>
                         <a:t>MP-02: Selector</a:t>
                       </a:r>
                     </a:p>
@@ -8988,30 +10436,44 @@
                       <a:pPr>
                         <a:defRPr sz="1000">
                           <a:solidFill>
-                            <a:srgbClr val="2C3E50"/>
-                          </a:solidFill>
-                        </a:defRPr>
-                      </a:pPr>
-                      <a:r>
+                            <a:srgbClr val="E2E8F0"/>
+                          </a:solidFill>
+                        </a:defRPr>
+                      </a:pPr>
+                      <a:r>
+                        <a:rPr>
+                          <a:solidFill>
+                            <a:srgbClr val="E2E8F0"/>
+                          </a:solidFill>
+                        </a:rPr>
                         <a:t>idioma persistente</a:t>
                       </a:r>
                     </a:p>
                   </a:txBody>
-                  <a:tcPr/>
-                </a:tc>
-                <a:tc>
-                  <a:txBody>
-                    <a:bodyPr/>
-                    <a:lstStyle/>
-                    <a:p>
-                      <a:pPr>
-                        <a:defRPr sz="1000">
-                          <a:solidFill>
-                            <a:srgbClr val="2C3E50"/>
-                          </a:solidFill>
-                        </a:defRPr>
-                      </a:pPr>
-                      <a:r>
+                  <a:tcPr>
+                    <a:solidFill>
+                      <a:srgbClr val="1E293B"/>
+                    </a:solidFill>
+                  </a:tcPr>
+                </a:tc>
+                <a:tc>
+                  <a:txBody>
+                    <a:bodyPr/>
+                    <a:lstStyle/>
+                    <a:p>
+                      <a:pPr>
+                        <a:defRPr sz="1000">
+                          <a:solidFill>
+                            <a:srgbClr val="E2E8F0"/>
+                          </a:solidFill>
+                        </a:defRPr>
+                      </a:pPr>
+                      <a:r>
+                        <a:rPr>
+                          <a:solidFill>
+                            <a:srgbClr val="E2E8F0"/>
+                          </a:solidFill>
+                        </a:rPr>
                         <a:t>INC-01/02: locale</a:t>
                       </a:r>
                     </a:p>
@@ -9019,30 +10481,44 @@
                       <a:pPr>
                         <a:defRPr sz="1000">
                           <a:solidFill>
-                            <a:srgbClr val="2C3E50"/>
-                          </a:solidFill>
-                        </a:defRPr>
-                      </a:pPr>
-                      <a:r>
+                            <a:srgbClr val="E2E8F0"/>
+                          </a:solidFill>
+                        </a:defRPr>
+                      </a:pPr>
+                      <a:r>
+                        <a:rPr>
+                          <a:solidFill>
+                            <a:srgbClr val="E2E8F0"/>
+                          </a:solidFill>
+                        </a:rPr>
                         <a:t>cambia a chino</a:t>
                       </a:r>
                     </a:p>
                   </a:txBody>
-                  <a:tcPr/>
-                </a:tc>
-                <a:tc>
-                  <a:txBody>
-                    <a:bodyPr/>
-                    <a:lstStyle/>
-                    <a:p>
-                      <a:pPr>
-                        <a:defRPr sz="1000">
-                          <a:solidFill>
-                            <a:srgbClr val="2C3E50"/>
-                          </a:solidFill>
-                        </a:defRPr>
-                      </a:pPr>
-                      <a:r>
+                  <a:tcPr>
+                    <a:solidFill>
+                      <a:srgbClr val="1E293B"/>
+                    </a:solidFill>
+                  </a:tcPr>
+                </a:tc>
+                <a:tc>
+                  <a:txBody>
+                    <a:bodyPr/>
+                    <a:lstStyle/>
+                    <a:p>
+                      <a:pPr>
+                        <a:defRPr sz="1000">
+                          <a:solidFill>
+                            <a:srgbClr val="E2E8F0"/>
+                          </a:solidFill>
+                        </a:defRPr>
+                      </a:pPr>
+                      <a:r>
+                        <a:rPr>
+                          <a:solidFill>
+                            <a:srgbClr val="E2E8F0"/>
+                          </a:solidFill>
+                        </a:rPr>
                         <a:t>Cookie de idioma</a:t>
                       </a:r>
                     </a:p>
@@ -9050,35 +10526,53 @@
                       <a:pPr>
                         <a:defRPr sz="1000">
                           <a:solidFill>
-                            <a:srgbClr val="2C3E50"/>
-                          </a:solidFill>
-                        </a:defRPr>
-                      </a:pPr>
-                      <a:r>
+                            <a:srgbClr val="E2E8F0"/>
+                          </a:solidFill>
+                        </a:defRPr>
+                      </a:pPr>
+                      <a:r>
+                        <a:rPr>
+                          <a:solidFill>
+                            <a:srgbClr val="E2E8F0"/>
+                          </a:solidFill>
+                        </a:rPr>
                         <a:t>persistente</a:t>
                       </a:r>
                     </a:p>
                   </a:txBody>
-                  <a:tcPr/>
-                </a:tc>
-                <a:tc>
-                  <a:txBody>
-                    <a:bodyPr/>
-                    <a:lstStyle/>
-                    <a:p>
-                      <a:pPr>
-                        <a:defRPr sz="1000">
-                          <a:solidFill>
-                            <a:srgbClr val="2C3E50"/>
-                          </a:solidFill>
-                        </a:defRPr>
-                      </a:pPr>
-                      <a:r>
+                  <a:tcPr>
+                    <a:solidFill>
+                      <a:srgbClr val="1E293B"/>
+                    </a:solidFill>
+                  </a:tcPr>
+                </a:tc>
+                <a:tc>
+                  <a:txBody>
+                    <a:bodyPr/>
+                    <a:lstStyle/>
+                    <a:p>
+                      <a:pPr>
+                        <a:defRPr sz="1000">
+                          <a:solidFill>
+                            <a:srgbClr val="E2E8F0"/>
+                          </a:solidFill>
+                        </a:defRPr>
+                      </a:pPr>
+                      <a:r>
+                        <a:rPr>
+                          <a:solidFill>
+                            <a:srgbClr val="E2E8F0"/>
+                          </a:solidFill>
+                        </a:rPr>
                         <a:t>UX internacional</a:t>
                       </a:r>
                     </a:p>
                   </a:txBody>
-                  <a:tcPr/>
+                  <a:tcPr>
+                    <a:solidFill>
+                      <a:srgbClr val="1E293B"/>
+                    </a:solidFill>
+                  </a:tcPr>
                 </a:tc>
               </a:tr>
               <a:tr h="457200">
@@ -9090,34 +10584,44 @@
                       <a:pPr>
                         <a:defRPr sz="1000">
                           <a:solidFill>
-                            <a:srgbClr val="2C3E50"/>
-                          </a:solidFill>
-                        </a:defRPr>
-                      </a:pPr>
-                      <a:r>
+                            <a:srgbClr val="E2E8F0"/>
+                          </a:solidFill>
+                        </a:defRPr>
+                      </a:pPr>
+                      <a:r>
+                        <a:rPr>
+                          <a:solidFill>
+                            <a:srgbClr val="E2E8F0"/>
+                          </a:solidFill>
+                        </a:rPr>
                         <a:t>Proceso</a:t>
                       </a:r>
                     </a:p>
                   </a:txBody>
                   <a:tcPr>
                     <a:solidFill>
-                      <a:srgbClr val="ECF0F1"/>
-                    </a:solidFill>
-                  </a:tcPr>
-                </a:tc>
-                <a:tc>
-                  <a:txBody>
-                    <a:bodyPr/>
-                    <a:lstStyle/>
-                    <a:p>
-                      <a:pPr>
-                        <a:defRPr sz="1000">
-                          <a:solidFill>
-                            <a:srgbClr val="2C3E50"/>
-                          </a:solidFill>
-                        </a:defRPr>
-                      </a:pPr>
-                      <a:r>
+                      <a:srgbClr val="2D3748"/>
+                    </a:solidFill>
+                  </a:tcPr>
+                </a:tc>
+                <a:tc>
+                  <a:txBody>
+                    <a:bodyPr/>
+                    <a:lstStyle/>
+                    <a:p>
+                      <a:pPr>
+                        <a:defRPr sz="1000">
+                          <a:solidFill>
+                            <a:srgbClr val="E2E8F0"/>
+                          </a:solidFill>
+                        </a:defRPr>
+                      </a:pPr>
+                      <a:r>
+                        <a:rPr>
+                          <a:solidFill>
+                            <a:srgbClr val="E2E8F0"/>
+                          </a:solidFill>
+                        </a:rPr>
                         <a:t>MP-03: Page</a:t>
                       </a:r>
                     </a:p>
@@ -9125,34 +10629,44 @@
                       <a:pPr>
                         <a:defRPr sz="1000">
                           <a:solidFill>
-                            <a:srgbClr val="2C3E50"/>
-                          </a:solidFill>
-                        </a:defRPr>
-                      </a:pPr>
-                      <a:r>
+                            <a:srgbClr val="E2E8F0"/>
+                          </a:solidFill>
+                        </a:defRPr>
+                      </a:pPr>
+                      <a:r>
+                        <a:rPr>
+                          <a:solidFill>
+                            <a:srgbClr val="E2E8F0"/>
+                          </a:solidFill>
+                        </a:rPr>
                         <a:t>Object Model</a:t>
                       </a:r>
                     </a:p>
                   </a:txBody>
                   <a:tcPr>
                     <a:solidFill>
-                      <a:srgbClr val="ECF0F1"/>
-                    </a:solidFill>
-                  </a:tcPr>
-                </a:tc>
-                <a:tc>
-                  <a:txBody>
-                    <a:bodyPr/>
-                    <a:lstStyle/>
-                    <a:p>
-                      <a:pPr>
-                        <a:defRPr sz="1000">
-                          <a:solidFill>
-                            <a:srgbClr val="2C3E50"/>
-                          </a:solidFill>
-                        </a:defRPr>
-                      </a:pPr>
-                      <a:r>
+                      <a:srgbClr val="2D3748"/>
+                    </a:solidFill>
+                  </a:tcPr>
+                </a:tc>
+                <a:tc>
+                  <a:txBody>
+                    <a:bodyPr/>
+                    <a:lstStyle/>
+                    <a:p>
+                      <a:pPr>
+                        <a:defRPr sz="1000">
+                          <a:solidFill>
+                            <a:srgbClr val="E2E8F0"/>
+                          </a:solidFill>
+                        </a:defRPr>
+                      </a:pPr>
+                      <a:r>
+                        <a:rPr>
+                          <a:solidFill>
+                            <a:srgbClr val="E2E8F0"/>
+                          </a:solidFill>
+                        </a:rPr>
                         <a:t>Selectores en</a:t>
                       </a:r>
                     </a:p>
@@ -9160,34 +10674,44 @@
                       <a:pPr>
                         <a:defRPr sz="1000">
                           <a:solidFill>
-                            <a:srgbClr val="2C3E50"/>
-                          </a:solidFill>
-                        </a:defRPr>
-                      </a:pPr>
-                      <a:r>
+                            <a:srgbClr val="E2E8F0"/>
+                          </a:solidFill>
+                        </a:defRPr>
+                      </a:pPr>
+                      <a:r>
+                        <a:rPr>
+                          <a:solidFill>
+                            <a:srgbClr val="E2E8F0"/>
+                          </a:solidFill>
+                        </a:rPr>
                         <a:t>2+ archivos steps</a:t>
                       </a:r>
                     </a:p>
                   </a:txBody>
                   <a:tcPr>
                     <a:solidFill>
-                      <a:srgbClr val="ECF0F1"/>
-                    </a:solidFill>
-                  </a:tcPr>
-                </a:tc>
-                <a:tc>
-                  <a:txBody>
-                    <a:bodyPr/>
-                    <a:lstStyle/>
-                    <a:p>
-                      <a:pPr>
-                        <a:defRPr sz="1000">
-                          <a:solidFill>
-                            <a:srgbClr val="2C3E50"/>
-                          </a:solidFill>
-                        </a:defRPr>
-                      </a:pPr>
-                      <a:r>
+                      <a:srgbClr val="2D3748"/>
+                    </a:solidFill>
+                  </a:tcPr>
+                </a:tc>
+                <a:tc>
+                  <a:txBody>
+                    <a:bodyPr/>
+                    <a:lstStyle/>
+                    <a:p>
+                      <a:pPr>
+                        <a:defRPr sz="1000">
+                          <a:solidFill>
+                            <a:srgbClr val="E2E8F0"/>
+                          </a:solidFill>
+                        </a:defRPr>
+                      </a:pPr>
+                      <a:r>
+                        <a:rPr>
+                          <a:solidFill>
+                            <a:srgbClr val="E2E8F0"/>
+                          </a:solidFill>
+                        </a:rPr>
                         <a:t>Refactor a clases:</a:t>
                       </a:r>
                     </a:p>
@@ -9195,34 +10719,44 @@
                       <a:pPr>
                         <a:defRPr sz="1000">
                           <a:solidFill>
-                            <a:srgbClr val="2C3E50"/>
-                          </a:solidFill>
-                        </a:defRPr>
-                      </a:pPr>
-                      <a:r>
+                            <a:srgbClr val="E2E8F0"/>
+                          </a:solidFill>
+                        </a:defRPr>
+                      </a:pPr>
+                      <a:r>
+                        <a:rPr>
+                          <a:solidFill>
+                            <a:srgbClr val="E2E8F0"/>
+                          </a:solidFill>
+                        </a:rPr>
                         <a:t>LoginPage, PimPage</a:t>
                       </a:r>
                     </a:p>
                   </a:txBody>
                   <a:tcPr>
                     <a:solidFill>
-                      <a:srgbClr val="ECF0F1"/>
-                    </a:solidFill>
-                  </a:tcPr>
-                </a:tc>
-                <a:tc>
-                  <a:txBody>
-                    <a:bodyPr/>
-                    <a:lstStyle/>
-                    <a:p>
-                      <a:pPr>
-                        <a:defRPr sz="1000">
-                          <a:solidFill>
-                            <a:srgbClr val="2C3E50"/>
-                          </a:solidFill>
-                        </a:defRPr>
-                      </a:pPr>
-                      <a:r>
+                      <a:srgbClr val="2D3748"/>
+                    </a:solidFill>
+                  </a:tcPr>
+                </a:tc>
+                <a:tc>
+                  <a:txBody>
+                    <a:bodyPr/>
+                    <a:lstStyle/>
+                    <a:p>
+                      <a:pPr>
+                        <a:defRPr sz="1000">
+                          <a:solidFill>
+                            <a:srgbClr val="E2E8F0"/>
+                          </a:solidFill>
+                        </a:defRPr>
+                      </a:pPr>
+                      <a:r>
+                        <a:rPr>
+                          <a:solidFill>
+                            <a:srgbClr val="E2E8F0"/>
+                          </a:solidFill>
+                        </a:rPr>
                         <a:t>Mantenibilidad</a:t>
                       </a:r>
                     </a:p>
@@ -9230,18 +10764,23 @@
                       <a:pPr>
                         <a:defRPr sz="1000">
                           <a:solidFill>
-                            <a:srgbClr val="2C3E50"/>
-                          </a:solidFill>
-                        </a:defRPr>
-                      </a:pPr>
-                      <a:r>
+                            <a:srgbClr val="E2E8F0"/>
+                          </a:solidFill>
+                        </a:defRPr>
+                      </a:pPr>
+                      <a:r>
+                        <a:rPr>
+                          <a:solidFill>
+                            <a:srgbClr val="E2E8F0"/>
+                          </a:solidFill>
+                        </a:rPr>
                         <a:t>centralizada</a:t>
                       </a:r>
                     </a:p>
                   </a:txBody>
                   <a:tcPr>
                     <a:solidFill>
-                      <a:srgbClr val="ECF0F1"/>
+                      <a:srgbClr val="2D3748"/>
                     </a:solidFill>
                   </a:tcPr>
                 </a:tc>
@@ -9255,30 +10794,44 @@
                       <a:pPr>
                         <a:defRPr sz="1000">
                           <a:solidFill>
-                            <a:srgbClr val="2C3E50"/>
-                          </a:solidFill>
-                        </a:defRPr>
-                      </a:pPr>
-                      <a:r>
+                            <a:srgbClr val="E2E8F0"/>
+                          </a:solidFill>
+                        </a:defRPr>
+                      </a:pPr>
+                      <a:r>
+                        <a:rPr>
+                          <a:solidFill>
+                            <a:srgbClr val="E2E8F0"/>
+                          </a:solidFill>
+                        </a:rPr>
                         <a:t>Proceso</a:t>
                       </a:r>
                     </a:p>
                   </a:txBody>
-                  <a:tcPr/>
-                </a:tc>
-                <a:tc>
-                  <a:txBody>
-                    <a:bodyPr/>
-                    <a:lstStyle/>
-                    <a:p>
-                      <a:pPr>
-                        <a:defRPr sz="1000">
-                          <a:solidFill>
-                            <a:srgbClr val="2C3E50"/>
-                          </a:solidFill>
-                        </a:defRPr>
-                      </a:pPr>
-                      <a:r>
+                  <a:tcPr>
+                    <a:solidFill>
+                      <a:srgbClr val="1E293B"/>
+                    </a:solidFill>
+                  </a:tcPr>
+                </a:tc>
+                <a:tc>
+                  <a:txBody>
+                    <a:bodyPr/>
+                    <a:lstStyle/>
+                    <a:p>
+                      <a:pPr>
+                        <a:defRPr sz="1000">
+                          <a:solidFill>
+                            <a:srgbClr val="E2E8F0"/>
+                          </a:solidFill>
+                        </a:defRPr>
+                      </a:pPr>
+                      <a:r>
+                        <a:rPr>
+                          <a:solidFill>
+                            <a:srgbClr val="E2E8F0"/>
+                          </a:solidFill>
+                        </a:rPr>
                         <a:t>MP-04: Ejecucion</a:t>
                       </a:r>
                     </a:p>
@@ -9286,30 +10839,44 @@
                       <a:pPr>
                         <a:defRPr sz="1000">
                           <a:solidFill>
-                            <a:srgbClr val="2C3E50"/>
-                          </a:solidFill>
-                        </a:defRPr>
-                      </a:pPr>
-                      <a:r>
+                            <a:srgbClr val="E2E8F0"/>
+                          </a:solidFill>
+                        </a:defRPr>
+                      </a:pPr>
+                      <a:r>
+                        <a:rPr>
+                          <a:solidFill>
+                            <a:srgbClr val="E2E8F0"/>
+                          </a:solidFill>
+                        </a:rPr>
                         <a:t>paralela</a:t>
                       </a:r>
                     </a:p>
                   </a:txBody>
-                  <a:tcPr/>
-                </a:tc>
-                <a:tc>
-                  <a:txBody>
-                    <a:bodyPr/>
-                    <a:lstStyle/>
-                    <a:p>
-                      <a:pPr>
-                        <a:defRPr sz="1000">
-                          <a:solidFill>
-                            <a:srgbClr val="2C3E50"/>
-                          </a:solidFill>
-                        </a:defRPr>
-                      </a:pPr>
-                      <a:r>
+                  <a:tcPr>
+                    <a:solidFill>
+                      <a:srgbClr val="1E293B"/>
+                    </a:solidFill>
+                  </a:tcPr>
+                </a:tc>
+                <a:tc>
+                  <a:txBody>
+                    <a:bodyPr/>
+                    <a:lstStyle/>
+                    <a:p>
+                      <a:pPr>
+                        <a:defRPr sz="1000">
+                          <a:solidFill>
+                            <a:srgbClr val="E2E8F0"/>
+                          </a:solidFill>
+                        </a:defRPr>
+                      </a:pPr>
+                      <a:r>
+                        <a:rPr>
+                          <a:solidFill>
+                            <a:srgbClr val="E2E8F0"/>
+                          </a:solidFill>
+                        </a:rPr>
                         <a:t>Suite completa</a:t>
                       </a:r>
                     </a:p>
@@ -9317,30 +10884,44 @@
                       <a:pPr>
                         <a:defRPr sz="1000">
                           <a:solidFill>
-                            <a:srgbClr val="2C3E50"/>
-                          </a:solidFill>
-                        </a:defRPr>
-                      </a:pPr>
-                      <a:r>
+                            <a:srgbClr val="E2E8F0"/>
+                          </a:solidFill>
+                        </a:defRPr>
+                      </a:pPr>
+                      <a:r>
+                        <a:rPr>
+                          <a:solidFill>
+                            <a:srgbClr val="E2E8F0"/>
+                          </a:solidFill>
+                        </a:rPr>
                         <a:t>~7 minutos</a:t>
                       </a:r>
                     </a:p>
                   </a:txBody>
-                  <a:tcPr/>
-                </a:tc>
-                <a:tc>
-                  <a:txBody>
-                    <a:bodyPr/>
-                    <a:lstStyle/>
-                    <a:p>
-                      <a:pPr>
-                        <a:defRPr sz="1000">
-                          <a:solidFill>
-                            <a:srgbClr val="2C3E50"/>
-                          </a:solidFill>
-                        </a:defRPr>
-                      </a:pPr>
-                      <a:r>
+                  <a:tcPr>
+                    <a:solidFill>
+                      <a:srgbClr val="1E293B"/>
+                    </a:solidFill>
+                  </a:tcPr>
+                </a:tc>
+                <a:tc>
+                  <a:txBody>
+                    <a:bodyPr/>
+                    <a:lstStyle/>
+                    <a:p>
+                      <a:pPr>
+                        <a:defRPr sz="1000">
+                          <a:solidFill>
+                            <a:srgbClr val="E2E8F0"/>
+                          </a:solidFill>
+                        </a:defRPr>
+                      </a:pPr>
+                      <a:r>
+                        <a:rPr>
+                          <a:solidFill>
+                            <a:srgbClr val="E2E8F0"/>
+                          </a:solidFill>
+                        </a:rPr>
                         <a:t>behave -j 4</a:t>
                       </a:r>
                     </a:p>
@@ -9348,35 +10929,53 @@
                       <a:pPr>
                         <a:defRPr sz="1000">
                           <a:solidFill>
-                            <a:srgbClr val="2C3E50"/>
-                          </a:solidFill>
-                        </a:defRPr>
-                      </a:pPr>
-                      <a:r>
+                            <a:srgbClr val="E2E8F0"/>
+                          </a:solidFill>
+                        </a:defRPr>
+                      </a:pPr>
+                      <a:r>
+                        <a:rPr>
+                          <a:solidFill>
+                            <a:srgbClr val="E2E8F0"/>
+                          </a:solidFill>
+                        </a:rPr>
                         <a:t>(4 workers)</a:t>
                       </a:r>
                     </a:p>
                   </a:txBody>
-                  <a:tcPr/>
-                </a:tc>
-                <a:tc>
-                  <a:txBody>
-                    <a:bodyPr/>
-                    <a:lstStyle/>
-                    <a:p>
-                      <a:pPr>
-                        <a:defRPr sz="1000">
-                          <a:solidFill>
-                            <a:srgbClr val="2C3E50"/>
-                          </a:solidFill>
-                        </a:defRPr>
-                      </a:pPr>
-                      <a:r>
+                  <a:tcPr>
+                    <a:solidFill>
+                      <a:srgbClr val="1E293B"/>
+                    </a:solidFill>
+                  </a:tcPr>
+                </a:tc>
+                <a:tc>
+                  <a:txBody>
+                    <a:bodyPr/>
+                    <a:lstStyle/>
+                    <a:p>
+                      <a:pPr>
+                        <a:defRPr sz="1000">
+                          <a:solidFill>
+                            <a:srgbClr val="E2E8F0"/>
+                          </a:solidFill>
+                        </a:defRPr>
+                      </a:pPr>
+                      <a:r>
+                        <a:rPr>
+                          <a:solidFill>
+                            <a:srgbClr val="E2E8F0"/>
+                          </a:solidFill>
+                        </a:rPr>
                         <a:t>~2 min (-70%)</a:t>
                       </a:r>
                     </a:p>
                   </a:txBody>
-                  <a:tcPr/>
+                  <a:tcPr>
+                    <a:solidFill>
+                      <a:srgbClr val="1E293B"/>
+                    </a:solidFill>
+                  </a:tcPr>
                 </a:tc>
               </a:tr>
               <a:tr h="457200">
@@ -9388,34 +10987,44 @@
                       <a:pPr>
                         <a:defRPr sz="1000">
                           <a:solidFill>
-                            <a:srgbClr val="2C3E50"/>
-                          </a:solidFill>
-                        </a:defRPr>
-                      </a:pPr>
-                      <a:r>
+                            <a:srgbClr val="E2E8F0"/>
+                          </a:solidFill>
+                        </a:defRPr>
+                      </a:pPr>
+                      <a:r>
+                        <a:rPr>
+                          <a:solidFill>
+                            <a:srgbClr val="E2E8F0"/>
+                          </a:solidFill>
+                        </a:rPr>
                         <a:t>Proceso</a:t>
                       </a:r>
                     </a:p>
                   </a:txBody>
                   <a:tcPr>
                     <a:solidFill>
-                      <a:srgbClr val="ECF0F1"/>
-                    </a:solidFill>
-                  </a:tcPr>
-                </a:tc>
-                <a:tc>
-                  <a:txBody>
-                    <a:bodyPr/>
-                    <a:lstStyle/>
-                    <a:p>
-                      <a:pPr>
-                        <a:defRPr sz="1000">
-                          <a:solidFill>
-                            <a:srgbClr val="2C3E50"/>
-                          </a:solidFill>
-                        </a:defRPr>
-                      </a:pPr>
-                      <a:r>
+                      <a:srgbClr val="2D3748"/>
+                    </a:solidFill>
+                  </a:tcPr>
+                </a:tc>
+                <a:tc>
+                  <a:txBody>
+                    <a:bodyPr/>
+                    <a:lstStyle/>
+                    <a:p>
+                      <a:pPr>
+                        <a:defRPr sz="1000">
+                          <a:solidFill>
+                            <a:srgbClr val="E2E8F0"/>
+                          </a:solidFill>
+                        </a:defRPr>
+                      </a:pPr>
+                      <a:r>
+                        <a:rPr>
+                          <a:solidFill>
+                            <a:srgbClr val="E2E8F0"/>
+                          </a:solidFill>
+                        </a:rPr>
                         <a:t>MP-05: Logging</a:t>
                       </a:r>
                     </a:p>
@@ -9423,34 +11032,44 @@
                       <a:pPr>
                         <a:defRPr sz="1000">
                           <a:solidFill>
-                            <a:srgbClr val="2C3E50"/>
-                          </a:solidFill>
-                        </a:defRPr>
-                      </a:pPr>
-                      <a:r>
+                            <a:srgbClr val="E2E8F0"/>
+                          </a:solidFill>
+                        </a:defRPr>
+                      </a:pPr>
+                      <a:r>
+                        <a:rPr>
+                          <a:solidFill>
+                            <a:srgbClr val="E2E8F0"/>
+                          </a:solidFill>
+                        </a:rPr>
                         <a:t>estructurado</a:t>
                       </a:r>
                     </a:p>
                   </a:txBody>
                   <a:tcPr>
                     <a:solidFill>
-                      <a:srgbClr val="ECF0F1"/>
-                    </a:solidFill>
-                  </a:tcPr>
-                </a:tc>
-                <a:tc>
-                  <a:txBody>
-                    <a:bodyPr/>
-                    <a:lstStyle/>
-                    <a:p>
-                      <a:pPr>
-                        <a:defRPr sz="1000">
-                          <a:solidFill>
-                            <a:srgbClr val="2C3E50"/>
-                          </a:solidFill>
-                        </a:defRPr>
-                      </a:pPr>
-                      <a:r>
+                      <a:srgbClr val="2D3748"/>
+                    </a:solidFill>
+                  </a:tcPr>
+                </a:tc>
+                <a:tc>
+                  <a:txBody>
+                    <a:bodyPr/>
+                    <a:lstStyle/>
+                    <a:p>
+                      <a:pPr>
+                        <a:defRPr sz="1000">
+                          <a:solidFill>
+                            <a:srgbClr val="E2E8F0"/>
+                          </a:solidFill>
+                        </a:defRPr>
+                      </a:pPr>
+                      <a:r>
+                        <a:rPr>
+                          <a:solidFill>
+                            <a:srgbClr val="E2E8F0"/>
+                          </a:solidFill>
+                        </a:rPr>
                         <a:t>print() comentados</a:t>
                       </a:r>
                     </a:p>
@@ -9458,34 +11077,44 @@
                       <a:pPr>
                         <a:defRPr sz="1000">
                           <a:solidFill>
-                            <a:srgbClr val="2C3E50"/>
-                          </a:solidFill>
-                        </a:defRPr>
-                      </a:pPr>
-                      <a:r>
+                            <a:srgbClr val="E2E8F0"/>
+                          </a:solidFill>
+                        </a:defRPr>
+                      </a:pPr>
+                      <a:r>
+                        <a:rPr>
+                          <a:solidFill>
+                            <a:srgbClr val="E2E8F0"/>
+                          </a:solidFill>
+                        </a:rPr>
                         <a:t>sin trazas</a:t>
                       </a:r>
                     </a:p>
                   </a:txBody>
                   <a:tcPr>
                     <a:solidFill>
-                      <a:srgbClr val="ECF0F1"/>
-                    </a:solidFill>
-                  </a:tcPr>
-                </a:tc>
-                <a:tc>
-                  <a:txBody>
-                    <a:bodyPr/>
-                    <a:lstStyle/>
-                    <a:p>
-                      <a:pPr>
-                        <a:defRPr sz="1000">
-                          <a:solidFill>
-                            <a:srgbClr val="2C3E50"/>
-                          </a:solidFill>
-                        </a:defRPr>
-                      </a:pPr>
-                      <a:r>
+                      <a:srgbClr val="2D3748"/>
+                    </a:solidFill>
+                  </a:tcPr>
+                </a:tc>
+                <a:tc>
+                  <a:txBody>
+                    <a:bodyPr/>
+                    <a:lstStyle/>
+                    <a:p>
+                      <a:pPr>
+                        <a:defRPr sz="1000">
+                          <a:solidFill>
+                            <a:srgbClr val="E2E8F0"/>
+                          </a:solidFill>
+                        </a:defRPr>
+                      </a:pPr>
+                      <a:r>
+                        <a:rPr>
+                          <a:solidFill>
+                            <a:srgbClr val="E2E8F0"/>
+                          </a:solidFill>
+                        </a:rPr>
                         <a:t>Modulo logging</a:t>
                       </a:r>
                     </a:p>
@@ -9493,34 +11122,44 @@
                       <a:pPr>
                         <a:defRPr sz="1000">
                           <a:solidFill>
-                            <a:srgbClr val="2C3E50"/>
-                          </a:solidFill>
-                        </a:defRPr>
-                      </a:pPr>
-                      <a:r>
+                            <a:srgbClr val="E2E8F0"/>
+                          </a:solidFill>
+                        </a:defRPr>
+                      </a:pPr>
+                      <a:r>
+                        <a:rPr>
+                          <a:solidFill>
+                            <a:srgbClr val="E2E8F0"/>
+                          </a:solidFill>
+                        </a:rPr>
                         <a:t>con timestamps</a:t>
                       </a:r>
                     </a:p>
                   </a:txBody>
                   <a:tcPr>
                     <a:solidFill>
-                      <a:srgbClr val="ECF0F1"/>
-                    </a:solidFill>
-                  </a:tcPr>
-                </a:tc>
-                <a:tc>
-                  <a:txBody>
-                    <a:bodyPr/>
-                    <a:lstStyle/>
-                    <a:p>
-                      <a:pPr>
-                        <a:defRPr sz="1000">
-                          <a:solidFill>
-                            <a:srgbClr val="2C3E50"/>
-                          </a:solidFill>
-                        </a:defRPr>
-                      </a:pPr>
-                      <a:r>
+                      <a:srgbClr val="2D3748"/>
+                    </a:solidFill>
+                  </a:tcPr>
+                </a:tc>
+                <a:tc>
+                  <a:txBody>
+                    <a:bodyPr/>
+                    <a:lstStyle/>
+                    <a:p>
+                      <a:pPr>
+                        <a:defRPr sz="1000">
+                          <a:solidFill>
+                            <a:srgbClr val="E2E8F0"/>
+                          </a:solidFill>
+                        </a:defRPr>
+                      </a:pPr>
+                      <a:r>
+                        <a:rPr>
+                          <a:solidFill>
+                            <a:srgbClr val="E2E8F0"/>
+                          </a:solidFill>
+                        </a:rPr>
                         <a:t>Diagnostico</a:t>
                       </a:r>
                     </a:p>
@@ -9528,18 +11167,23 @@
                       <a:pPr>
                         <a:defRPr sz="1000">
                           <a:solidFill>
-                            <a:srgbClr val="2C3E50"/>
-                          </a:solidFill>
-                        </a:defRPr>
-                      </a:pPr>
-                      <a:r>
+                            <a:srgbClr val="E2E8F0"/>
+                          </a:solidFill>
+                        </a:defRPr>
+                      </a:pPr>
+                      <a:r>
+                        <a:rPr>
+                          <a:solidFill>
+                            <a:srgbClr val="E2E8F0"/>
+                          </a:solidFill>
+                        </a:rPr>
                         <a:t>rapido fallos</a:t>
                       </a:r>
                     </a:p>
                   </a:txBody>
                   <a:tcPr>
                     <a:solidFill>
-                      <a:srgbClr val="ECF0F1"/>
+                      <a:srgbClr val="2D3748"/>
                     </a:solidFill>
                   </a:tcPr>
                 </a:tc>
@@ -9553,30 +11197,44 @@
                       <a:pPr>
                         <a:defRPr sz="1000">
                           <a:solidFill>
-                            <a:srgbClr val="2C3E50"/>
-                          </a:solidFill>
-                        </a:defRPr>
-                      </a:pPr>
-                      <a:r>
+                            <a:srgbClr val="E2E8F0"/>
+                          </a:solidFill>
+                        </a:defRPr>
+                      </a:pPr>
+                      <a:r>
+                        <a:rPr>
+                          <a:solidFill>
+                            <a:srgbClr val="E2E8F0"/>
+                          </a:solidFill>
+                        </a:rPr>
                         <a:t>Processo</a:t>
                       </a:r>
                     </a:p>
                   </a:txBody>
-                  <a:tcPr/>
-                </a:tc>
-                <a:tc>
-                  <a:txBody>
-                    <a:bodyPr/>
-                    <a:lstStyle/>
-                    <a:p>
-                      <a:pPr>
-                        <a:defRPr sz="1000">
-                          <a:solidFill>
-                            <a:srgbClr val="2C3E50"/>
-                          </a:solidFill>
-                        </a:defRPr>
-                      </a:pPr>
-                      <a:r>
+                  <a:tcPr>
+                    <a:solidFill>
+                      <a:srgbClr val="1E293B"/>
+                    </a:solidFill>
+                  </a:tcPr>
+                </a:tc>
+                <a:tc>
+                  <a:txBody>
+                    <a:bodyPr/>
+                    <a:lstStyle/>
+                    <a:p>
+                      <a:pPr>
+                        <a:defRPr sz="1000">
+                          <a:solidFill>
+                            <a:srgbClr val="E2E8F0"/>
+                          </a:solidFill>
+                        </a:defRPr>
+                      </a:pPr>
+                      <a:r>
+                        <a:rPr>
+                          <a:solidFill>
+                            <a:srgbClr val="E2E8F0"/>
+                          </a:solidFill>
+                        </a:rPr>
                         <a:t>MP-06: CI/CD</a:t>
                       </a:r>
                     </a:p>
@@ -9584,30 +11242,44 @@
                       <a:pPr>
                         <a:defRPr sz="1000">
                           <a:solidFill>
-                            <a:srgbClr val="2C3E50"/>
-                          </a:solidFill>
-                        </a:defRPr>
-                      </a:pPr>
-                      <a:r>
+                            <a:srgbClr val="E2E8F0"/>
+                          </a:solidFill>
+                        </a:defRPr>
+                      </a:pPr>
+                      <a:r>
+                        <a:rPr>
+                          <a:solidFill>
+                            <a:srgbClr val="E2E8F0"/>
+                          </a:solidFill>
+                        </a:rPr>
                         <a:t>GitHub Actions</a:t>
                       </a:r>
                     </a:p>
                   </a:txBody>
-                  <a:tcPr/>
-                </a:tc>
-                <a:tc>
-                  <a:txBody>
-                    <a:bodyPr/>
-                    <a:lstStyle/>
-                    <a:p>
-                      <a:pPr>
-                        <a:defRPr sz="1000">
-                          <a:solidFill>
-                            <a:srgbClr val="2C3E50"/>
-                          </a:solidFill>
-                        </a:defRPr>
-                      </a:pPr>
-                      <a:r>
+                  <a:tcPr>
+                    <a:solidFill>
+                      <a:srgbClr val="1E293B"/>
+                    </a:solidFill>
+                  </a:tcPr>
+                </a:tc>
+                <a:tc>
+                  <a:txBody>
+                    <a:bodyPr/>
+                    <a:lstStyle/>
+                    <a:p>
+                      <a:pPr>
+                        <a:defRPr sz="1000">
+                          <a:solidFill>
+                            <a:srgbClr val="E2E8F0"/>
+                          </a:solidFill>
+                        </a:defRPr>
+                      </a:pPr>
+                      <a:r>
+                        <a:rPr>
+                          <a:solidFill>
+                            <a:srgbClr val="E2E8F0"/>
+                          </a:solidFill>
+                        </a:rPr>
                         <a:t>Ejecucion</a:t>
                       </a:r>
                     </a:p>
@@ -9615,30 +11287,44 @@
                       <a:pPr>
                         <a:defRPr sz="1000">
                           <a:solidFill>
-                            <a:srgbClr val="2C3E50"/>
-                          </a:solidFill>
-                        </a:defRPr>
-                      </a:pPr>
-                      <a:r>
+                            <a:srgbClr val="E2E8F0"/>
+                          </a:solidFill>
+                        </a:defRPr>
+                      </a:pPr>
+                      <a:r>
+                        <a:rPr>
+                          <a:solidFill>
+                            <a:srgbClr val="E2E8F0"/>
+                          </a:solidFill>
+                        </a:rPr>
                         <a:t>manual</a:t>
                       </a:r>
                     </a:p>
                   </a:txBody>
-                  <a:tcPr/>
-                </a:tc>
-                <a:tc>
-                  <a:txBody>
-                    <a:bodyPr/>
-                    <a:lstStyle/>
-                    <a:p>
-                      <a:pPr>
-                        <a:defRPr sz="1000">
-                          <a:solidFill>
-                            <a:srgbClr val="2C3E50"/>
-                          </a:solidFill>
-                        </a:defRPr>
-                      </a:pPr>
-                      <a:r>
+                  <a:tcPr>
+                    <a:solidFill>
+                      <a:srgbClr val="1E293B"/>
+                    </a:solidFill>
+                  </a:tcPr>
+                </a:tc>
+                <a:tc>
+                  <a:txBody>
+                    <a:bodyPr/>
+                    <a:lstStyle/>
+                    <a:p>
+                      <a:pPr>
+                        <a:defRPr sz="1000">
+                          <a:solidFill>
+                            <a:srgbClr val="E2E8F0"/>
+                          </a:solidFill>
+                        </a:defRPr>
+                      </a:pPr>
+                      <a:r>
+                        <a:rPr>
+                          <a:solidFill>
+                            <a:srgbClr val="E2E8F0"/>
+                          </a:solidFill>
+                        </a:rPr>
                         <a:t>Workflow .github/</a:t>
                       </a:r>
                     </a:p>
@@ -9646,30 +11332,44 @@
                       <a:pPr>
                         <a:defRPr sz="1000">
                           <a:solidFill>
-                            <a:srgbClr val="2C3E50"/>
-                          </a:solidFill>
-                        </a:defRPr>
-                      </a:pPr>
-                      <a:r>
+                            <a:srgbClr val="E2E8F0"/>
+                          </a:solidFill>
+                        </a:defRPr>
+                      </a:pPr>
+                      <a:r>
+                        <a:rPr>
+                          <a:solidFill>
+                            <a:srgbClr val="E2E8F0"/>
+                          </a:solidFill>
+                        </a:rPr>
                         <a:t>en cada push</a:t>
                       </a:r>
                     </a:p>
                   </a:txBody>
-                  <a:tcPr/>
-                </a:tc>
-                <a:tc>
-                  <a:txBody>
-                    <a:bodyPr/>
-                    <a:lstStyle/>
-                    <a:p>
-                      <a:pPr>
-                        <a:defRPr sz="1000">
-                          <a:solidFill>
-                            <a:srgbClr val="2C3E50"/>
-                          </a:solidFill>
-                        </a:defRPr>
-                      </a:pPr>
-                      <a:r>
+                  <a:tcPr>
+                    <a:solidFill>
+                      <a:srgbClr val="1E293B"/>
+                    </a:solidFill>
+                  </a:tcPr>
+                </a:tc>
+                <a:tc>
+                  <a:txBody>
+                    <a:bodyPr/>
+                    <a:lstStyle/>
+                    <a:p>
+                      <a:pPr>
+                        <a:defRPr sz="1000">
+                          <a:solidFill>
+                            <a:srgbClr val="E2E8F0"/>
+                          </a:solidFill>
+                        </a:defRPr>
+                      </a:pPr>
+                      <a:r>
+                        <a:rPr>
+                          <a:solidFill>
+                            <a:srgbClr val="E2E8F0"/>
+                          </a:solidFill>
+                        </a:rPr>
                         <a:t>Regresion</a:t>
                       </a:r>
                     </a:p>
@@ -9677,16 +11377,25 @@
                       <a:pPr>
                         <a:defRPr sz="1000">
                           <a:solidFill>
-                            <a:srgbClr val="2C3E50"/>
-                          </a:solidFill>
-                        </a:defRPr>
-                      </a:pPr>
-                      <a:r>
+                            <a:srgbClr val="E2E8F0"/>
+                          </a:solidFill>
+                        </a:defRPr>
+                      </a:pPr>
+                      <a:r>
+                        <a:rPr>
+                          <a:solidFill>
+                            <a:srgbClr val="E2E8F0"/>
+                          </a:solidFill>
+                        </a:rPr>
                         <a:t>automatica</a:t>
                       </a:r>
                     </a:p>
                   </a:txBody>
-                  <a:tcPr/>
+                  <a:tcPr>
+                    <a:solidFill>
+                      <a:srgbClr val="1E293B"/>
+                    </a:solidFill>
+                  </a:tcPr>
                 </a:tc>
               </a:tr>
             </a:tbl>
@@ -9766,11 +11475,21 @@
               </a:defRPr>
             </a:pPr>
             <a:r>
+              <a:rPr>
+                <a:solidFill>
+                  <a:srgbClr val="CBD5E1"/>
+                </a:solidFill>
+              </a:rPr>
               <a:t>Criterio 3 (Producto OrangeHRM): MP-01, MP-02  |  Criterio 4 (Proceso Framework): MP-03, MP-04, MP-05, MP-06</a:t>
             </a:r>
             <a:br/>
             <a:br/>
             <a:r>
+              <a:rPr>
+                <a:solidFill>
+                  <a:srgbClr val="CBD5E1"/>
+                </a:solidFill>
+              </a:rPr>
               <a:t>Cada propuesta nace de un dato real del reporte, explica la causa tecnica, propone un cambio concreto en el codigo, y cuantifica el impacto en el ciclo de vida del software.</a:t>
             </a:r>
           </a:p>
@@ -9789,10 +11508,15 @@
   <p:cSld>
     <p:bg>
       <p:bgPr>
+        <a:effectLst/>
         <a:solidFill>
-          <a:srgbClr val="FFFFFF"/>
+          <a:srgbClr val="1E3A5F"/>
         </a:solidFill>
-        <a:effectLst/>
+      </p:bgPr>
+      <p:bgPr>
+        <a:solidFill>
+          <a:srgbClr val="F1F5F9"/>
+        </a:solidFill>
       </p:bgPr>
     </p:bg>
     <p:spTree>
@@ -9809,6 +11533,9 @@
           <p:nvPr/>
         </p:nvSpPr>
         <p:spPr>
+          <a:solidFill>
+            <a:srgbClr val="818CF8"/>
+          </a:solidFill>
           <a:xfrm>
             <a:off x="0" y="0"/>
             <a:ext cx="12191695" cy="1097280"/>
@@ -9816,9 +11543,6 @@
           <a:prstGeom prst="rect">
             <a:avLst/>
           </a:prstGeom>
-          <a:solidFill>
-            <a:srgbClr val="2C3E50"/>
-          </a:solidFill>
           <a:ln>
             <a:noFill/>
           </a:ln>
@@ -9875,6 +11599,11 @@
               </a:defRPr>
             </a:pPr>
             <a:r>
+              <a:rPr>
+                <a:solidFill>
+                  <a:srgbClr val="FFFFFF"/>
+                </a:solidFill>
+              </a:rPr>
               <a:t>Stack Tecnologico: Behave + Python + Selenium</a:t>
             </a:r>
           </a:p>
@@ -9918,13 +11647,18 @@
                         </a:defRPr>
                       </a:pPr>
                       <a:r>
+                        <a:rPr>
+                          <a:solidFill>
+                            <a:srgbClr val="FFFFFF"/>
+                          </a:solidFill>
+                        </a:rPr>
                         <a:t>Componente</a:t>
                       </a:r>
                     </a:p>
                   </a:txBody>
                   <a:tcPr>
                     <a:solidFill>
-                      <a:srgbClr val="2C3E50"/>
+                      <a:srgbClr val="1E293B"/>
                     </a:solidFill>
                   </a:tcPr>
                 </a:tc>
@@ -9941,13 +11675,18 @@
                         </a:defRPr>
                       </a:pPr>
                       <a:r>
+                        <a:rPr>
+                          <a:solidFill>
+                            <a:srgbClr val="FFFFFF"/>
+                          </a:solidFill>
+                        </a:rPr>
                         <a:t>Version</a:t>
                       </a:r>
                     </a:p>
                   </a:txBody>
                   <a:tcPr>
                     <a:solidFill>
-                      <a:srgbClr val="2C3E50"/>
+                      <a:srgbClr val="1E293B"/>
                     </a:solidFill>
                   </a:tcPr>
                 </a:tc>
@@ -9964,13 +11703,18 @@
                         </a:defRPr>
                       </a:pPr>
                       <a:r>
+                        <a:rPr>
+                          <a:solidFill>
+                            <a:srgbClr val="FFFFFF"/>
+                          </a:solidFill>
+                        </a:rPr>
                         <a:t>Proposito</a:t>
                       </a:r>
                     </a:p>
                   </a:txBody>
                   <a:tcPr>
                     <a:solidFill>
-                      <a:srgbClr val="2C3E50"/>
+                      <a:srgbClr val="1E293B"/>
                     </a:solidFill>
                   </a:tcPr>
                 </a:tc>
@@ -9987,13 +11731,18 @@
                         </a:defRPr>
                       </a:pPr>
                       <a:r>
+                        <a:rPr>
+                          <a:solidFill>
+                            <a:srgbClr val="FFFFFF"/>
+                          </a:solidFill>
+                        </a:rPr>
                         <a:t>Configuracion</a:t>
                       </a:r>
                     </a:p>
                   </a:txBody>
                   <a:tcPr>
                     <a:solidFill>
-                      <a:srgbClr val="2C3E50"/>
+                      <a:srgbClr val="1E293B"/>
                     </a:solidFill>
                   </a:tcPr>
                 </a:tc>
@@ -10007,87 +11756,107 @@
                       <a:pPr>
                         <a:defRPr sz="1000">
                           <a:solidFill>
-                            <a:srgbClr val="2C3E50"/>
-                          </a:solidFill>
-                        </a:defRPr>
-                      </a:pPr>
-                      <a:r>
+                            <a:srgbClr val="E2E8F0"/>
+                          </a:solidFill>
+                        </a:defRPr>
+                      </a:pPr>
+                      <a:r>
+                        <a:rPr>
+                          <a:solidFill>
+                            <a:srgbClr val="E2E8F0"/>
+                          </a:solidFill>
+                        </a:rPr>
                         <a:t>Python</a:t>
                       </a:r>
                     </a:p>
                   </a:txBody>
                   <a:tcPr>
                     <a:solidFill>
-                      <a:srgbClr val="ECF0F1"/>
-                    </a:solidFill>
-                  </a:tcPr>
-                </a:tc>
-                <a:tc>
-                  <a:txBody>
-                    <a:bodyPr/>
-                    <a:lstStyle/>
-                    <a:p>
-                      <a:pPr>
-                        <a:defRPr sz="1000">
-                          <a:solidFill>
-                            <a:srgbClr val="2C3E50"/>
-                          </a:solidFill>
-                        </a:defRPr>
-                      </a:pPr>
-                      <a:r>
+                      <a:srgbClr val="2D3748"/>
+                    </a:solidFill>
+                  </a:tcPr>
+                </a:tc>
+                <a:tc>
+                  <a:txBody>
+                    <a:bodyPr/>
+                    <a:lstStyle/>
+                    <a:p>
+                      <a:pPr>
+                        <a:defRPr sz="1000">
+                          <a:solidFill>
+                            <a:srgbClr val="E2E8F0"/>
+                          </a:solidFill>
+                        </a:defRPr>
+                      </a:pPr>
+                      <a:r>
+                        <a:rPr>
+                          <a:solidFill>
+                            <a:srgbClr val="E2E8F0"/>
+                          </a:solidFill>
+                        </a:rPr>
                         <a:t>3.14</a:t>
                       </a:r>
                     </a:p>
                   </a:txBody>
                   <a:tcPr>
                     <a:solidFill>
-                      <a:srgbClr val="ECF0F1"/>
-                    </a:solidFill>
-                  </a:tcPr>
-                </a:tc>
-                <a:tc>
-                  <a:txBody>
-                    <a:bodyPr/>
-                    <a:lstStyle/>
-                    <a:p>
-                      <a:pPr>
-                        <a:defRPr sz="1000">
-                          <a:solidFill>
-                            <a:srgbClr val="2C3E50"/>
-                          </a:solidFill>
-                        </a:defRPr>
-                      </a:pPr>
-                      <a:r>
+                      <a:srgbClr val="2D3748"/>
+                    </a:solidFill>
+                  </a:tcPr>
+                </a:tc>
+                <a:tc>
+                  <a:txBody>
+                    <a:bodyPr/>
+                    <a:lstStyle/>
+                    <a:p>
+                      <a:pPr>
+                        <a:defRPr sz="1000">
+                          <a:solidFill>
+                            <a:srgbClr val="E2E8F0"/>
+                          </a:solidFill>
+                        </a:defRPr>
+                      </a:pPr>
+                      <a:r>
+                        <a:rPr>
+                          <a:solidFill>
+                            <a:srgbClr val="E2E8F0"/>
+                          </a:solidFill>
+                        </a:rPr>
                         <a:t>Lenguaje base</a:t>
                       </a:r>
                     </a:p>
                   </a:txBody>
                   <a:tcPr>
                     <a:solidFill>
-                      <a:srgbClr val="ECF0F1"/>
-                    </a:solidFill>
-                  </a:tcPr>
-                </a:tc>
-                <a:tc>
-                  <a:txBody>
-                    <a:bodyPr/>
-                    <a:lstStyle/>
-                    <a:p>
-                      <a:pPr>
-                        <a:defRPr sz="1000">
-                          <a:solidFill>
-                            <a:srgbClr val="2C3E50"/>
-                          </a:solidFill>
-                        </a:defRPr>
-                      </a:pPr>
-                      <a:r>
+                      <a:srgbClr val="2D3748"/>
+                    </a:solidFill>
+                  </a:tcPr>
+                </a:tc>
+                <a:tc>
+                  <a:txBody>
+                    <a:bodyPr/>
+                    <a:lstStyle/>
+                    <a:p>
+                      <a:pPr>
+                        <a:defRPr sz="1000">
+                          <a:solidFill>
+                            <a:srgbClr val="E2E8F0"/>
+                          </a:solidFill>
+                        </a:defRPr>
+                      </a:pPr>
+                      <a:r>
+                        <a:rPr>
+                          <a:solidFill>
+                            <a:srgbClr val="E2E8F0"/>
+                          </a:solidFill>
+                        </a:rPr>
                         <a:t>Interprete: python.exe</a:t>
                       </a:r>
                     </a:p>
                   </a:txBody>
                   <a:tcPr>
                     <a:solidFill>
-                      <a:srgbClr val="ECF0F1"/>
+                      <a:srgbClr val="2D3748"/>
                     </a:solidFill>
                   </a:tcPr>
                 </a:tc>
@@ -10101,73 +11870,109 @@
                       <a:pPr>
                         <a:defRPr sz="1000">
                           <a:solidFill>
-                            <a:srgbClr val="2C3E50"/>
-                          </a:solidFill>
-                        </a:defRPr>
-                      </a:pPr>
-                      <a:r>
+                            <a:srgbClr val="E2E8F0"/>
+                          </a:solidFill>
+                        </a:defRPr>
+                      </a:pPr>
+                      <a:r>
+                        <a:rPr>
+                          <a:solidFill>
+                            <a:srgbClr val="E2E8F0"/>
+                          </a:solidFill>
+                        </a:rPr>
                         <a:t>Behave</a:t>
                       </a:r>
                     </a:p>
                   </a:txBody>
-                  <a:tcPr/>
-                </a:tc>
-                <a:tc>
-                  <a:txBody>
-                    <a:bodyPr/>
-                    <a:lstStyle/>
-                    <a:p>
-                      <a:pPr>
-                        <a:defRPr sz="1000">
-                          <a:solidFill>
-                            <a:srgbClr val="2C3E50"/>
-                          </a:solidFill>
-                        </a:defRPr>
-                      </a:pPr>
-                      <a:r>
+                  <a:tcPr>
+                    <a:solidFill>
+                      <a:srgbClr val="1E293B"/>
+                    </a:solidFill>
+                  </a:tcPr>
+                </a:tc>
+                <a:tc>
+                  <a:txBody>
+                    <a:bodyPr/>
+                    <a:lstStyle/>
+                    <a:p>
+                      <a:pPr>
+                        <a:defRPr sz="1000">
+                          <a:solidFill>
+                            <a:srgbClr val="E2E8F0"/>
+                          </a:solidFill>
+                        </a:defRPr>
+                      </a:pPr>
+                      <a:r>
+                        <a:rPr>
+                          <a:solidFill>
+                            <a:srgbClr val="E2E8F0"/>
+                          </a:solidFill>
+                        </a:rPr>
                         <a:t>1.2.6</a:t>
                       </a:r>
                     </a:p>
                   </a:txBody>
-                  <a:tcPr/>
-                </a:tc>
-                <a:tc>
-                  <a:txBody>
-                    <a:bodyPr/>
-                    <a:lstStyle/>
-                    <a:p>
-                      <a:pPr>
-                        <a:defRPr sz="1000">
-                          <a:solidFill>
-                            <a:srgbClr val="2C3E50"/>
-                          </a:solidFill>
-                        </a:defRPr>
-                      </a:pPr>
-                      <a:r>
+                  <a:tcPr>
+                    <a:solidFill>
+                      <a:srgbClr val="1E293B"/>
+                    </a:solidFill>
+                  </a:tcPr>
+                </a:tc>
+                <a:tc>
+                  <a:txBody>
+                    <a:bodyPr/>
+                    <a:lstStyle/>
+                    <a:p>
+                      <a:pPr>
+                        <a:defRPr sz="1000">
+                          <a:solidFill>
+                            <a:srgbClr val="E2E8F0"/>
+                          </a:solidFill>
+                        </a:defRPr>
+                      </a:pPr>
+                      <a:r>
+                        <a:rPr>
+                          <a:solidFill>
+                            <a:srgbClr val="E2E8F0"/>
+                          </a:solidFill>
+                        </a:rPr>
                         <a:t>Framework BDD (Gherkin)</a:t>
                       </a:r>
                     </a:p>
                   </a:txBody>
-                  <a:tcPr/>
-                </a:tc>
-                <a:tc>
-                  <a:txBody>
-                    <a:bodyPr/>
-                    <a:lstStyle/>
-                    <a:p>
-                      <a:pPr>
-                        <a:defRPr sz="1000">
-                          <a:solidFill>
-                            <a:srgbClr val="2C3E50"/>
-                          </a:solidFill>
-                        </a:defRPr>
-                      </a:pPr>
-                      <a:r>
+                  <a:tcPr>
+                    <a:solidFill>
+                      <a:srgbClr val="1E293B"/>
+                    </a:solidFill>
+                  </a:tcPr>
+                </a:tc>
+                <a:tc>
+                  <a:txBody>
+                    <a:bodyPr/>
+                    <a:lstStyle/>
+                    <a:p>
+                      <a:pPr>
+                        <a:defRPr sz="1000">
+                          <a:solidFill>
+                            <a:srgbClr val="E2E8F0"/>
+                          </a:solidFill>
+                        </a:defRPr>
+                      </a:pPr>
+                      <a:r>
+                        <a:rPr>
+                          <a:solidFill>
+                            <a:srgbClr val="E2E8F0"/>
+                          </a:solidFill>
+                        </a:rPr>
                         <a:t>environment.py + features/ + steps/</a:t>
                       </a:r>
                     </a:p>
                   </a:txBody>
-                  <a:tcPr/>
+                  <a:tcPr>
+                    <a:solidFill>
+                      <a:srgbClr val="1E293B"/>
+                    </a:solidFill>
+                  </a:tcPr>
                 </a:tc>
               </a:tr>
               <a:tr h="391885">
@@ -10179,87 +11984,107 @@
                       <a:pPr>
                         <a:defRPr sz="1000">
                           <a:solidFill>
-                            <a:srgbClr val="2C3E50"/>
-                          </a:solidFill>
-                        </a:defRPr>
-                      </a:pPr>
-                      <a:r>
+                            <a:srgbClr val="E2E8F0"/>
+                          </a:solidFill>
+                        </a:defRPr>
+                      </a:pPr>
+                      <a:r>
+                        <a:rPr>
+                          <a:solidFill>
+                            <a:srgbClr val="E2E8F0"/>
+                          </a:solidFill>
+                        </a:rPr>
                         <a:t>Selenium</a:t>
                       </a:r>
                     </a:p>
                   </a:txBody>
                   <a:tcPr>
                     <a:solidFill>
-                      <a:srgbClr val="ECF0F1"/>
-                    </a:solidFill>
-                  </a:tcPr>
-                </a:tc>
-                <a:tc>
-                  <a:txBody>
-                    <a:bodyPr/>
-                    <a:lstStyle/>
-                    <a:p>
-                      <a:pPr>
-                        <a:defRPr sz="1000">
-                          <a:solidFill>
-                            <a:srgbClr val="2C3E50"/>
-                          </a:solidFill>
-                        </a:defRPr>
-                      </a:pPr>
-                      <a:r>
+                      <a:srgbClr val="2D3748"/>
+                    </a:solidFill>
+                  </a:tcPr>
+                </a:tc>
+                <a:tc>
+                  <a:txBody>
+                    <a:bodyPr/>
+                    <a:lstStyle/>
+                    <a:p>
+                      <a:pPr>
+                        <a:defRPr sz="1000">
+                          <a:solidFill>
+                            <a:srgbClr val="E2E8F0"/>
+                          </a:solidFill>
+                        </a:defRPr>
+                      </a:pPr>
+                      <a:r>
+                        <a:rPr>
+                          <a:solidFill>
+                            <a:srgbClr val="E2E8F0"/>
+                          </a:solidFill>
+                        </a:rPr>
                         <a:t>4.28</a:t>
                       </a:r>
                     </a:p>
                   </a:txBody>
                   <a:tcPr>
                     <a:solidFill>
-                      <a:srgbClr val="ECF0F1"/>
-                    </a:solidFill>
-                  </a:tcPr>
-                </a:tc>
-                <a:tc>
-                  <a:txBody>
-                    <a:bodyPr/>
-                    <a:lstStyle/>
-                    <a:p>
-                      <a:pPr>
-                        <a:defRPr sz="1000">
-                          <a:solidFill>
-                            <a:srgbClr val="2C3E50"/>
-                          </a:solidFill>
-                        </a:defRPr>
-                      </a:pPr>
-                      <a:r>
+                      <a:srgbClr val="2D3748"/>
+                    </a:solidFill>
+                  </a:tcPr>
+                </a:tc>
+                <a:tc>
+                  <a:txBody>
+                    <a:bodyPr/>
+                    <a:lstStyle/>
+                    <a:p>
+                      <a:pPr>
+                        <a:defRPr sz="1000">
+                          <a:solidFill>
+                            <a:srgbClr val="E2E8F0"/>
+                          </a:solidFill>
+                        </a:defRPr>
+                      </a:pPr>
+                      <a:r>
+                        <a:rPr>
+                          <a:solidFill>
+                            <a:srgbClr val="E2E8F0"/>
+                          </a:solidFill>
+                        </a:rPr>
                         <a:t>Autom. navegador Chrome</a:t>
                       </a:r>
                     </a:p>
                   </a:txBody>
                   <a:tcPr>
                     <a:solidFill>
-                      <a:srgbClr val="ECF0F1"/>
-                    </a:solidFill>
-                  </a:tcPr>
-                </a:tc>
-                <a:tc>
-                  <a:txBody>
-                    <a:bodyPr/>
-                    <a:lstStyle/>
-                    <a:p>
-                      <a:pPr>
-                        <a:defRPr sz="1000">
-                          <a:solidFill>
-                            <a:srgbClr val="2C3E50"/>
-                          </a:solidFill>
-                        </a:defRPr>
-                      </a:pPr>
-                      <a:r>
+                      <a:srgbClr val="2D3748"/>
+                    </a:solidFill>
+                  </a:tcPr>
+                </a:tc>
+                <a:tc>
+                  <a:txBody>
+                    <a:bodyPr/>
+                    <a:lstStyle/>
+                    <a:p>
+                      <a:pPr>
+                        <a:defRPr sz="1000">
+                          <a:solidFill>
+                            <a:srgbClr val="E2E8F0"/>
+                          </a:solidFill>
+                        </a:defRPr>
+                      </a:pPr>
+                      <a:r>
+                        <a:rPr>
+                          <a:solidFill>
+                            <a:srgbClr val="E2E8F0"/>
+                          </a:solidFill>
+                        </a:rPr>
                         <a:t>WebDriverWait, By, EC</a:t>
                       </a:r>
                     </a:p>
                   </a:txBody>
                   <a:tcPr>
                     <a:solidFill>
-                      <a:srgbClr val="ECF0F1"/>
+                      <a:srgbClr val="2D3748"/>
                     </a:solidFill>
                   </a:tcPr>
                 </a:tc>
@@ -10273,73 +12098,109 @@
                       <a:pPr>
                         <a:defRPr sz="1000">
                           <a:solidFill>
-                            <a:srgbClr val="2C3E50"/>
-                          </a:solidFill>
-                        </a:defRPr>
-                      </a:pPr>
-                      <a:r>
+                            <a:srgbClr val="E2E8F0"/>
+                          </a:solidFill>
+                        </a:defRPr>
+                      </a:pPr>
+                      <a:r>
+                        <a:rPr>
+                          <a:solidFill>
+                            <a:srgbClr val="E2E8F0"/>
+                          </a:solidFill>
+                        </a:rPr>
                         <a:t>openpyxl</a:t>
                       </a:r>
                     </a:p>
                   </a:txBody>
-                  <a:tcPr/>
-                </a:tc>
-                <a:tc>
-                  <a:txBody>
-                    <a:bodyPr/>
-                    <a:lstStyle/>
-                    <a:p>
-                      <a:pPr>
-                        <a:defRPr sz="1000">
-                          <a:solidFill>
-                            <a:srgbClr val="2C3E50"/>
-                          </a:solidFill>
-                        </a:defRPr>
-                      </a:pPr>
-                      <a:r>
+                  <a:tcPr>
+                    <a:solidFill>
+                      <a:srgbClr val="1E293B"/>
+                    </a:solidFill>
+                  </a:tcPr>
+                </a:tc>
+                <a:tc>
+                  <a:txBody>
+                    <a:bodyPr/>
+                    <a:lstStyle/>
+                    <a:p>
+                      <a:pPr>
+                        <a:defRPr sz="1000">
+                          <a:solidFill>
+                            <a:srgbClr val="E2E8F0"/>
+                          </a:solidFill>
+                        </a:defRPr>
+                      </a:pPr>
+                      <a:r>
+                        <a:rPr>
+                          <a:solidFill>
+                            <a:srgbClr val="E2E8F0"/>
+                          </a:solidFill>
+                        </a:rPr>
                         <a:t>3.1+</a:t>
                       </a:r>
                     </a:p>
                   </a:txBody>
-                  <a:tcPr/>
-                </a:tc>
-                <a:tc>
-                  <a:txBody>
-                    <a:bodyPr/>
-                    <a:lstStyle/>
-                    <a:p>
-                      <a:pPr>
-                        <a:defRPr sz="1000">
-                          <a:solidFill>
-                            <a:srgbClr val="2C3E50"/>
-                          </a:solidFill>
-                        </a:defRPr>
-                      </a:pPr>
-                      <a:r>
+                  <a:tcPr>
+                    <a:solidFill>
+                      <a:srgbClr val="1E293B"/>
+                    </a:solidFill>
+                  </a:tcPr>
+                </a:tc>
+                <a:tc>
+                  <a:txBody>
+                    <a:bodyPr/>
+                    <a:lstStyle/>
+                    <a:p>
+                      <a:pPr>
+                        <a:defRPr sz="1000">
+                          <a:solidFill>
+                            <a:srgbClr val="E2E8F0"/>
+                          </a:solidFill>
+                        </a:defRPr>
+                      </a:pPr>
+                      <a:r>
+                        <a:rPr>
+                          <a:solidFill>
+                            <a:srgbClr val="E2E8F0"/>
+                          </a:solidFill>
+                        </a:rPr>
                         <a:t>Lectura Excel DD</a:t>
                       </a:r>
                     </a:p>
                   </a:txBody>
-                  <a:tcPr/>
-                </a:tc>
-                <a:tc>
-                  <a:txBody>
-                    <a:bodyPr/>
-                    <a:lstStyle/>
-                    <a:p>
-                      <a:pPr>
-                        <a:defRPr sz="1000">
-                          <a:solidFill>
-                            <a:srgbClr val="2C3E50"/>
-                          </a:solidFill>
-                        </a:defRPr>
-                      </a:pPr>
-                      <a:r>
+                  <a:tcPr>
+                    <a:solidFill>
+                      <a:srgbClr val="1E293B"/>
+                    </a:solidFill>
+                  </a:tcPr>
+                </a:tc>
+                <a:tc>
+                  <a:txBody>
+                    <a:bodyPr/>
+                    <a:lstStyle/>
+                    <a:p>
+                      <a:pPr>
+                        <a:defRPr sz="1000">
+                          <a:solidFill>
+                            <a:srgbClr val="E2E8F0"/>
+                          </a:solidFill>
+                        </a:defRPr>
+                      </a:pPr>
+                      <a:r>
+                        <a:rPr>
+                          <a:solidFill>
+                            <a:srgbClr val="E2E8F0"/>
+                          </a:solidFill>
+                        </a:rPr>
                         <a:t>ExcelUtils.get_cell_data()</a:t>
                       </a:r>
                     </a:p>
                   </a:txBody>
-                  <a:tcPr/>
+                  <a:tcPr>
+                    <a:solidFill>
+                      <a:srgbClr val="1E293B"/>
+                    </a:solidFill>
+                  </a:tcPr>
                 </a:tc>
               </a:tr>
               <a:tr h="391885">
@@ -10351,87 +12212,107 @@
                       <a:pPr>
                         <a:defRPr sz="1000">
                           <a:solidFill>
-                            <a:srgbClr val="2C3E50"/>
-                          </a:solidFill>
-                        </a:defRPr>
-                      </a:pPr>
-                      <a:r>
+                            <a:srgbClr val="E2E8F0"/>
+                          </a:solidFill>
+                        </a:defRPr>
+                      </a:pPr>
+                      <a:r>
+                        <a:rPr>
+                          <a:solidFill>
+                            <a:srgbClr val="E2E8F0"/>
+                          </a:solidFill>
+                        </a:rPr>
                         <a:t>Chrome</a:t>
                       </a:r>
                     </a:p>
                   </a:txBody>
                   <a:tcPr>
                     <a:solidFill>
-                      <a:srgbClr val="ECF0F1"/>
-                    </a:solidFill>
-                  </a:tcPr>
-                </a:tc>
-                <a:tc>
-                  <a:txBody>
-                    <a:bodyPr/>
-                    <a:lstStyle/>
-                    <a:p>
-                      <a:pPr>
-                        <a:defRPr sz="1000">
-                          <a:solidFill>
-                            <a:srgbClr val="2C3E50"/>
-                          </a:solidFill>
-                        </a:defRPr>
-                      </a:pPr>
-                      <a:r>
+                      <a:srgbClr val="2D3748"/>
+                    </a:solidFill>
+                  </a:tcPr>
+                </a:tc>
+                <a:tc>
+                  <a:txBody>
+                    <a:bodyPr/>
+                    <a:lstStyle/>
+                    <a:p>
+                      <a:pPr>
+                        <a:defRPr sz="1000">
+                          <a:solidFill>
+                            <a:srgbClr val="E2E8F0"/>
+                          </a:solidFill>
+                        </a:defRPr>
+                      </a:pPr>
+                      <a:r>
+                        <a:rPr>
+                          <a:solidFill>
+                            <a:srgbClr val="E2E8F0"/>
+                          </a:solidFill>
+                        </a:rPr>
                         <a:t>149</a:t>
                       </a:r>
                     </a:p>
                   </a:txBody>
                   <a:tcPr>
                     <a:solidFill>
-                      <a:srgbClr val="ECF0F1"/>
-                    </a:solidFill>
-                  </a:tcPr>
-                </a:tc>
-                <a:tc>
-                  <a:txBody>
-                    <a:bodyPr/>
-                    <a:lstStyle/>
-                    <a:p>
-                      <a:pPr>
-                        <a:defRPr sz="1000">
-                          <a:solidFill>
-                            <a:srgbClr val="2C3E50"/>
-                          </a:solidFill>
-                        </a:defRPr>
-                      </a:pPr>
-                      <a:r>
+                      <a:srgbClr val="2D3748"/>
+                    </a:solidFill>
+                  </a:tcPr>
+                </a:tc>
+                <a:tc>
+                  <a:txBody>
+                    <a:bodyPr/>
+                    <a:lstStyle/>
+                    <a:p>
+                      <a:pPr>
+                        <a:defRPr sz="1000">
+                          <a:solidFill>
+                            <a:srgbClr val="E2E8F0"/>
+                          </a:solidFill>
+                        </a:defRPr>
+                      </a:pPr>
+                      <a:r>
+                        <a:rPr>
+                          <a:solidFill>
+                            <a:srgbClr val="E2E8F0"/>
+                          </a:solidFill>
+                        </a:rPr>
                         <a:t>Navegador bajo prueba</a:t>
                       </a:r>
                     </a:p>
                   </a:txBody>
                   <a:tcPr>
                     <a:solidFill>
-                      <a:srgbClr val="ECF0F1"/>
-                    </a:solidFill>
-                  </a:tcPr>
-                </a:tc>
-                <a:tc>
-                  <a:txBody>
-                    <a:bodyPr/>
-                    <a:lstStyle/>
-                    <a:p>
-                      <a:pPr>
-                        <a:defRPr sz="1000">
-                          <a:solidFill>
-                            <a:srgbClr val="2C3E50"/>
-                          </a:solidFill>
-                        </a:defRPr>
-                      </a:pPr>
-                      <a:r>
+                      <a:srgbClr val="2D3748"/>
+                    </a:solidFill>
+                  </a:tcPr>
+                </a:tc>
+                <a:tc>
+                  <a:txBody>
+                    <a:bodyPr/>
+                    <a:lstStyle/>
+                    <a:p>
+                      <a:pPr>
+                        <a:defRPr sz="1000">
+                          <a:solidFill>
+                            <a:srgbClr val="E2E8F0"/>
+                          </a:solidFill>
+                        </a:defRPr>
+                      </a:pPr>
+                      <a:r>
+                        <a:rPr>
+                          <a:solidFill>
+                            <a:srgbClr val="E2E8F0"/>
+                          </a:solidFill>
+                        </a:rPr>
                         <a:t>ChromeDriver compatible</a:t>
                       </a:r>
                     </a:p>
                   </a:txBody>
                   <a:tcPr>
                     <a:solidFill>
-                      <a:srgbClr val="ECF0F1"/>
+                      <a:srgbClr val="2D3748"/>
                     </a:solidFill>
                   </a:tcPr>
                 </a:tc>
@@ -10445,73 +12326,109 @@
                       <a:pPr>
                         <a:defRPr sz="1000">
                           <a:solidFill>
-                            <a:srgbClr val="2C3E50"/>
-                          </a:solidFill>
-                        </a:defRPr>
-                      </a:pPr>
-                      <a:r>
+                            <a:srgbClr val="E2E8F0"/>
+                          </a:solidFill>
+                        </a:defRPr>
+                      </a:pPr>
+                      <a:r>
+                        <a:rPr>
+                          <a:solidFill>
+                            <a:srgbClr val="E2E8F0"/>
+                          </a:solidFill>
+                        </a:rPr>
                         <a:t>PyCharm</a:t>
                       </a:r>
                     </a:p>
                   </a:txBody>
-                  <a:tcPr/>
-                </a:tc>
-                <a:tc>
-                  <a:txBody>
-                    <a:bodyPr/>
-                    <a:lstStyle/>
-                    <a:p>
-                      <a:pPr>
-                        <a:defRPr sz="1000">
-                          <a:solidFill>
-                            <a:srgbClr val="2C3E50"/>
-                          </a:solidFill>
-                        </a:defRPr>
-                      </a:pPr>
-                      <a:r>
+                  <a:tcPr>
+                    <a:solidFill>
+                      <a:srgbClr val="1E293B"/>
+                    </a:solidFill>
+                  </a:tcPr>
+                </a:tc>
+                <a:tc>
+                  <a:txBody>
+                    <a:bodyPr/>
+                    <a:lstStyle/>
+                    <a:p>
+                      <a:pPr>
+                        <a:defRPr sz="1000">
+                          <a:solidFill>
+                            <a:srgbClr val="E2E8F0"/>
+                          </a:solidFill>
+                        </a:defRPr>
+                      </a:pPr>
+                      <a:r>
+                        <a:rPr>
+                          <a:solidFill>
+                            <a:srgbClr val="E2E8F0"/>
+                          </a:solidFill>
+                        </a:rPr>
                         <a:t>2026.1</a:t>
                       </a:r>
                     </a:p>
                   </a:txBody>
-                  <a:tcPr/>
-                </a:tc>
-                <a:tc>
-                  <a:txBody>
-                    <a:bodyPr/>
-                    <a:lstStyle/>
-                    <a:p>
-                      <a:pPr>
-                        <a:defRPr sz="1000">
-                          <a:solidFill>
-                            <a:srgbClr val="2C3E50"/>
-                          </a:solidFill>
-                        </a:defRPr>
-                      </a:pPr>
-                      <a:r>
+                  <a:tcPr>
+                    <a:solidFill>
+                      <a:srgbClr val="1E293B"/>
+                    </a:solidFill>
+                  </a:tcPr>
+                </a:tc>
+                <a:tc>
+                  <a:txBody>
+                    <a:bodyPr/>
+                    <a:lstStyle/>
+                    <a:p>
+                      <a:pPr>
+                        <a:defRPr sz="1000">
+                          <a:solidFill>
+                            <a:srgbClr val="E2E8F0"/>
+                          </a:solidFill>
+                        </a:defRPr>
+                      </a:pPr>
+                      <a:r>
+                        <a:rPr>
+                          <a:solidFill>
+                            <a:srgbClr val="E2E8F0"/>
+                          </a:solidFill>
+                        </a:rPr>
                         <a:t>IDE desarrollo</a:t>
                       </a:r>
                     </a:p>
                   </a:txBody>
-                  <a:tcPr/>
-                </a:tc>
-                <a:tc>
-                  <a:txBody>
-                    <a:bodyPr/>
-                    <a:lstStyle/>
-                    <a:p>
-                      <a:pPr>
-                        <a:defRPr sz="1000">
-                          <a:solidFill>
-                            <a:srgbClr val="2C3E50"/>
-                          </a:solidFill>
-                        </a:defRPr>
-                      </a:pPr>
-                      <a:r>
+                  <a:tcPr>
+                    <a:solidFill>
+                      <a:srgbClr val="1E293B"/>
+                    </a:solidFill>
+                  </a:tcPr>
+                </a:tc>
+                <a:tc>
+                  <a:txBody>
+                    <a:bodyPr/>
+                    <a:lstStyle/>
+                    <a:p>
+                      <a:pPr>
+                        <a:defRPr sz="1000">
+                          <a:solidFill>
+                            <a:srgbClr val="E2E8F0"/>
+                          </a:solidFill>
+                        </a:defRPr>
+                      </a:pPr>
+                      <a:r>
+                        <a:rPr>
+                          <a:solidFill>
+                            <a:srgbClr val="E2E8F0"/>
+                          </a:solidFill>
+                        </a:rPr>
                         <a:t>Run Config: behave features/</a:t>
                       </a:r>
                     </a:p>
                   </a:txBody>
-                  <a:tcPr/>
+                  <a:tcPr>
+                    <a:solidFill>
+                      <a:srgbClr val="1E293B"/>
+                    </a:solidFill>
+                  </a:tcPr>
                 </a:tc>
               </a:tr>
             </a:tbl>
@@ -10548,26 +12465,56 @@
               </a:defRPr>
             </a:pPr>
             <a:r>
+              <a:rPr>
+                <a:solidFill>
+                  <a:srgbClr val="CBD5E1"/>
+                </a:solidFill>
+              </a:rPr>
               <a:t>Comandos principales:</a:t>
             </a:r>
             <a:br/>
             <a:r>
+              <a:rPr>
+                <a:solidFill>
+                  <a:srgbClr val="CBD5E1"/>
+                </a:solidFill>
+              </a:rPr>
               <a:t>- python -m behave features/                 # Toda la suite</a:t>
             </a:r>
             <a:br/>
             <a:r>
+              <a:rPr>
+                <a:solidFill>
+                  <a:srgbClr val="CBD5E1"/>
+                </a:solidFill>
+              </a:rPr>
               <a:t>- python -m behave features/login.feature    # Una feature</a:t>
             </a:r>
             <a:br/>
             <a:r>
+              <a:rPr>
+                <a:solidFill>
+                  <a:srgbClr val="CBD5E1"/>
+                </a:solidFill>
+              </a:rPr>
               <a:t>- python -m behave --format json -o reporte.json   # Reporte JSON</a:t>
             </a:r>
             <a:br/>
             <a:r>
+              <a:rPr>
+                <a:solidFill>
+                  <a:srgbClr val="CBD5E1"/>
+                </a:solidFill>
+              </a:rPr>
               <a:t>- set HEADLESS=0 &amp;&amp; python -m behave features/     # Modo visual</a:t>
             </a:r>
             <a:br/>
             <a:r>
+              <a:rPr>
+                <a:solidFill>
+                  <a:srgbClr val="CBD5E1"/>
+                </a:solidFill>
+              </a:rPr>
               <a:t>Gestion dependencias: pip install -r requirements.txt (equivalente a Maven)</a:t>
             </a:r>
           </a:p>

--- a/PRESENTACION_FINAL_EFT.pptx
+++ b/PRESENTACION_FINAL_EFT.pptx
@@ -3093,15 +3093,10 @@
   <p:cSld>
     <p:bg>
       <p:bgPr>
-        <a:effectLst/>
         <a:solidFill>
           <a:srgbClr val="111827"/>
         </a:solidFill>
-      </p:bgPr>
-      <p:bgPr>
-        <a:solidFill>
-          <a:srgbClr val="111827"/>
-        </a:solidFill>
+        <a:effectLst/>
       </p:bgPr>
     </p:bg>
     <p:spTree>
@@ -3121,16 +3116,7 @@
           <a:solidFill>
             <a:srgbClr val="818CF8"/>
           </a:solidFill>
-          <a:xfrm>
-            <a:off x="0" y="2286000"/>
-            <a:ext cx="12191695" cy="73152"/>
-          </a:xfrm>
-          <a:prstGeom prst="rect">
-            <a:avLst/>
-          </a:prstGeom>
-          <a:ln>
-            <a:noFill/>
-          </a:ln>
+          <a:effectLst/>
         </p:spPr>
         <p:style>
           <a:lnRef idx="1">
@@ -3315,15 +3301,10 @@
   <p:cSld>
     <p:bg>
       <p:bgPr>
-        <a:effectLst/>
         <a:solidFill>
           <a:srgbClr val="1E3A5F"/>
         </a:solidFill>
-      </p:bgPr>
-      <p:bgPr>
-        <a:solidFill>
-          <a:srgbClr val="F1F5F9"/>
-        </a:solidFill>
+        <a:effectLst/>
       </p:bgPr>
     </p:bg>
     <p:spTree>
@@ -3343,16 +3324,7 @@
           <a:solidFill>
             <a:srgbClr val="818CF8"/>
           </a:solidFill>
-          <a:xfrm>
-            <a:off x="0" y="0"/>
-            <a:ext cx="12191695" cy="1097280"/>
-          </a:xfrm>
-          <a:prstGeom prst="rect">
-            <a:avLst/>
-          </a:prstGeom>
-          <a:ln>
-            <a:noFill/>
-          </a:ln>
+          <a:effectLst/>
         </p:spPr>
         <p:style>
           <a:lnRef idx="1">
@@ -3408,7 +3380,7 @@
             <a:r>
               <a:rPr>
                 <a:solidFill>
-                  <a:srgbClr val="FFFFFF"/>
+                  <a:srgbClr val="CBD5E1"/>
                 </a:solidFill>
               </a:rPr>
               <a:t>Conclusiones y Proyecciones</a:t>
@@ -3534,7 +3506,7 @@
                   <a:srgbClr val="CBD5E1"/>
                 </a:solidFill>
               </a:rPr>
-              <a:t>93 screenshots de evidencia</a:t>
+              <a:t>177 screenshots de evidencia</a:t>
             </a:r>
           </a:p>
           <a:p>
@@ -3831,15 +3803,10 @@
   <p:cSld>
     <p:bg>
       <p:bgPr>
-        <a:effectLst/>
         <a:solidFill>
           <a:srgbClr val="111827"/>
         </a:solidFill>
-      </p:bgPr>
-      <p:bgPr>
-        <a:solidFill>
-          <a:srgbClr val="111827"/>
-        </a:solidFill>
+        <a:effectLst/>
       </p:bgPr>
     </p:bg>
     <p:spTree>
@@ -3859,16 +3826,7 @@
           <a:solidFill>
             <a:srgbClr val="818CF8"/>
           </a:solidFill>
-          <a:xfrm>
-            <a:off x="0" y="2926080"/>
-            <a:ext cx="12191695" cy="73152"/>
-          </a:xfrm>
-          <a:prstGeom prst="rect">
-            <a:avLst/>
-          </a:prstGeom>
-          <a:ln>
-            <a:noFill/>
-          </a:ln>
+          <a:effectLst/>
         </p:spPr>
         <p:style>
           <a:lnRef idx="1">
@@ -3973,7 +3931,7 @@
             <a:r>
               <a:rPr>
                 <a:solidFill>
-                  <a:srgbClr val="FFFFFF"/>
+                  <a:srgbClr val="A5B4FC"/>
                 </a:solidFill>
               </a:rPr>
               <a:t>API0101 - Automatizacion de Pruebas</a:t>
@@ -4003,15 +3961,10 @@
   <p:cSld>
     <p:bg>
       <p:bgPr>
-        <a:effectLst/>
         <a:solidFill>
           <a:srgbClr val="1E3A5F"/>
         </a:solidFill>
-      </p:bgPr>
-      <p:bgPr>
-        <a:solidFill>
-          <a:srgbClr val="F1F5F9"/>
-        </a:solidFill>
+        <a:effectLst/>
       </p:bgPr>
     </p:bg>
     <p:spTree>
@@ -4031,16 +3984,7 @@
           <a:solidFill>
             <a:srgbClr val="818CF8"/>
           </a:solidFill>
-          <a:xfrm>
-            <a:off x="0" y="0"/>
-            <a:ext cx="12191695" cy="1097280"/>
-          </a:xfrm>
-          <a:prstGeom prst="rect">
-            <a:avLst/>
-          </a:prstGeom>
-          <a:ln>
-            <a:noFill/>
-          </a:ln>
+          <a:effectLst/>
         </p:spPr>
         <p:style>
           <a:lnRef idx="1">
@@ -4096,7 +4040,7 @@
             <a:r>
               <a:rPr>
                 <a:solidFill>
-                  <a:srgbClr val="FFFFFF"/>
+                  <a:srgbClr val="CBD5E1"/>
                 </a:solidFill>
               </a:rPr>
               <a:t>Agenda</a:t>
@@ -4300,15 +4244,10 @@
   <p:cSld>
     <p:bg>
       <p:bgPr>
-        <a:effectLst/>
         <a:solidFill>
           <a:srgbClr val="1E3A5F"/>
         </a:solidFill>
-      </p:bgPr>
-      <p:bgPr>
-        <a:solidFill>
-          <a:srgbClr val="F1F5F9"/>
-        </a:solidFill>
+        <a:effectLst/>
       </p:bgPr>
     </p:bg>
     <p:spTree>
@@ -4328,16 +4267,7 @@
           <a:solidFill>
             <a:srgbClr val="818CF8"/>
           </a:solidFill>
-          <a:xfrm>
-            <a:off x="0" y="0"/>
-            <a:ext cx="12191695" cy="1097280"/>
-          </a:xfrm>
-          <a:prstGeom prst="rect">
-            <a:avLst/>
-          </a:prstGeom>
-          <a:ln>
-            <a:noFill/>
-          </a:ln>
+          <a:effectLst/>
         </p:spPr>
         <p:style>
           <a:lnRef idx="1">
@@ -4393,7 +4323,7 @@
             <a:r>
               <a:rPr>
                 <a:solidFill>
-                  <a:srgbClr val="FFFFFF"/>
+                  <a:srgbClr val="CBD5E1"/>
                 </a:solidFill>
               </a:rPr>
               <a:t>Plan de Pruebas y Cronograma por Sprint</a:t>
@@ -4577,7 +4507,7 @@
                       <a:pPr>
                         <a:defRPr sz="1000">
                           <a:solidFill>
-                            <a:srgbClr val="E2E8F0"/>
+                            <a:srgbClr val="2C3E50"/>
                           </a:solidFill>
                         </a:defRPr>
                       </a:pPr>
@@ -4594,7 +4524,7 @@
                       <a:pPr>
                         <a:defRPr sz="1000">
                           <a:solidFill>
-                            <a:srgbClr val="E2E8F0"/>
+                            <a:srgbClr val="2C3E50"/>
                           </a:solidFill>
                         </a:defRPr>
                       </a:pPr>
@@ -4622,7 +4552,7 @@
                       <a:pPr>
                         <a:defRPr sz="1000">
                           <a:solidFill>
-                            <a:srgbClr val="E2E8F0"/>
+                            <a:srgbClr val="2C3E50"/>
                           </a:solidFill>
                         </a:defRPr>
                       </a:pPr>
@@ -4650,7 +4580,7 @@
                       <a:pPr>
                         <a:defRPr sz="1000">
                           <a:solidFill>
-                            <a:srgbClr val="E2E8F0"/>
+                            <a:srgbClr val="2C3E50"/>
                           </a:solidFill>
                         </a:defRPr>
                       </a:pPr>
@@ -4667,7 +4597,7 @@
                       <a:pPr>
                         <a:defRPr sz="1000">
                           <a:solidFill>
-                            <a:srgbClr val="E2E8F0"/>
+                            <a:srgbClr val="2C3E50"/>
                           </a:solidFill>
                         </a:defRPr>
                       </a:pPr>
@@ -4695,7 +4625,7 @@
                       <a:pPr>
                         <a:defRPr sz="1000">
                           <a:solidFill>
-                            <a:srgbClr val="E2E8F0"/>
+                            <a:srgbClr val="2C3E50"/>
                           </a:solidFill>
                         </a:defRPr>
                       </a:pPr>
@@ -4723,7 +4653,7 @@
                       <a:pPr>
                         <a:defRPr sz="1000">
                           <a:solidFill>
-                            <a:srgbClr val="E2E8F0"/>
+                            <a:srgbClr val="2C3E50"/>
                           </a:solidFill>
                         </a:defRPr>
                       </a:pPr>
@@ -4740,7 +4670,7 @@
                       <a:pPr>
                         <a:defRPr sz="1000">
                           <a:solidFill>
-                            <a:srgbClr val="E2E8F0"/>
+                            <a:srgbClr val="2C3E50"/>
                           </a:solidFill>
                         </a:defRPr>
                       </a:pPr>
@@ -4757,7 +4687,7 @@
                       <a:pPr>
                         <a:defRPr sz="1000">
                           <a:solidFill>
-                            <a:srgbClr val="E2E8F0"/>
+                            <a:srgbClr val="2C3E50"/>
                           </a:solidFill>
                         </a:defRPr>
                       </a:pPr>
@@ -4787,7 +4717,7 @@
                       <a:pPr>
                         <a:defRPr sz="1000">
                           <a:solidFill>
-                            <a:srgbClr val="E2E8F0"/>
+                            <a:srgbClr val="2C3E50"/>
                           </a:solidFill>
                         </a:defRPr>
                       </a:pPr>
@@ -4804,7 +4734,7 @@
                       <a:pPr>
                         <a:defRPr sz="1000">
                           <a:solidFill>
-                            <a:srgbClr val="E2E8F0"/>
+                            <a:srgbClr val="2C3E50"/>
                           </a:solidFill>
                         </a:defRPr>
                       </a:pPr>
@@ -4832,7 +4762,7 @@
                       <a:pPr>
                         <a:defRPr sz="1000">
                           <a:solidFill>
-                            <a:srgbClr val="E2E8F0"/>
+                            <a:srgbClr val="2C3E50"/>
                           </a:solidFill>
                         </a:defRPr>
                       </a:pPr>
@@ -4860,7 +4790,7 @@
                       <a:pPr>
                         <a:defRPr sz="1000">
                           <a:solidFill>
-                            <a:srgbClr val="E2E8F0"/>
+                            <a:srgbClr val="2C3E50"/>
                           </a:solidFill>
                         </a:defRPr>
                       </a:pPr>
@@ -4877,7 +4807,7 @@
                       <a:pPr>
                         <a:defRPr sz="1000">
                           <a:solidFill>
-                            <a:srgbClr val="E2E8F0"/>
+                            <a:srgbClr val="2C3E50"/>
                           </a:solidFill>
                         </a:defRPr>
                       </a:pPr>
@@ -4894,7 +4824,7 @@
                       <a:pPr>
                         <a:defRPr sz="1000">
                           <a:solidFill>
-                            <a:srgbClr val="E2E8F0"/>
+                            <a:srgbClr val="2C3E50"/>
                           </a:solidFill>
                         </a:defRPr>
                       </a:pPr>
@@ -4911,7 +4841,7 @@
                       <a:pPr>
                         <a:defRPr sz="1000">
                           <a:solidFill>
-                            <a:srgbClr val="E2E8F0"/>
+                            <a:srgbClr val="2C3E50"/>
                           </a:solidFill>
                         </a:defRPr>
                       </a:pPr>
@@ -4939,7 +4869,7 @@
                       <a:pPr>
                         <a:defRPr sz="1000">
                           <a:solidFill>
-                            <a:srgbClr val="E2E8F0"/>
+                            <a:srgbClr val="2C3E50"/>
                           </a:solidFill>
                         </a:defRPr>
                       </a:pPr>
@@ -4967,7 +4897,7 @@
                       <a:pPr>
                         <a:defRPr sz="1000">
                           <a:solidFill>
-                            <a:srgbClr val="E2E8F0"/>
+                            <a:srgbClr val="2C3E50"/>
                           </a:solidFill>
                         </a:defRPr>
                       </a:pPr>
@@ -4984,7 +4914,7 @@
                       <a:pPr>
                         <a:defRPr sz="1000">
                           <a:solidFill>
-                            <a:srgbClr val="E2E8F0"/>
+                            <a:srgbClr val="2C3E50"/>
                           </a:solidFill>
                         </a:defRPr>
                       </a:pPr>
@@ -5001,7 +4931,7 @@
                       <a:pPr>
                         <a:defRPr sz="1000">
                           <a:solidFill>
-                            <a:srgbClr val="E2E8F0"/>
+                            <a:srgbClr val="2C3E50"/>
                           </a:solidFill>
                         </a:defRPr>
                       </a:pPr>
@@ -5031,7 +4961,7 @@
                       <a:pPr>
                         <a:defRPr sz="1000">
                           <a:solidFill>
-                            <a:srgbClr val="E2E8F0"/>
+                            <a:srgbClr val="2C3E50"/>
                           </a:solidFill>
                         </a:defRPr>
                       </a:pPr>
@@ -5048,7 +4978,7 @@
                       <a:pPr>
                         <a:defRPr sz="1000">
                           <a:solidFill>
-                            <a:srgbClr val="E2E8F0"/>
+                            <a:srgbClr val="2C3E50"/>
                           </a:solidFill>
                         </a:defRPr>
                       </a:pPr>
@@ -5076,7 +5006,7 @@
                       <a:pPr>
                         <a:defRPr sz="1000">
                           <a:solidFill>
-                            <a:srgbClr val="E2E8F0"/>
+                            <a:srgbClr val="2C3E50"/>
                           </a:solidFill>
                         </a:defRPr>
                       </a:pPr>
@@ -5104,7 +5034,7 @@
                       <a:pPr>
                         <a:defRPr sz="1000">
                           <a:solidFill>
-                            <a:srgbClr val="E2E8F0"/>
+                            <a:srgbClr val="2C3E50"/>
                           </a:solidFill>
                         </a:defRPr>
                       </a:pPr>
@@ -5121,7 +5051,7 @@
                       <a:pPr>
                         <a:defRPr sz="1000">
                           <a:solidFill>
-                            <a:srgbClr val="E2E8F0"/>
+                            <a:srgbClr val="2C3E50"/>
                           </a:solidFill>
                         </a:defRPr>
                       </a:pPr>
@@ -5138,7 +5068,7 @@
                       <a:pPr>
                         <a:defRPr sz="1000">
                           <a:solidFill>
-                            <a:srgbClr val="E2E8F0"/>
+                            <a:srgbClr val="2C3E50"/>
                           </a:solidFill>
                         </a:defRPr>
                       </a:pPr>
@@ -5166,7 +5096,7 @@
                       <a:pPr>
                         <a:defRPr sz="1000">
                           <a:solidFill>
-                            <a:srgbClr val="E2E8F0"/>
+                            <a:srgbClr val="2C3E50"/>
                           </a:solidFill>
                         </a:defRPr>
                       </a:pPr>
@@ -5194,7 +5124,7 @@
                       <a:pPr>
                         <a:defRPr sz="1000">
                           <a:solidFill>
-                            <a:srgbClr val="E2E8F0"/>
+                            <a:srgbClr val="2C3E50"/>
                           </a:solidFill>
                         </a:defRPr>
                       </a:pPr>
@@ -5211,7 +5141,7 @@
                       <a:pPr>
                         <a:defRPr sz="1000">
                           <a:solidFill>
-                            <a:srgbClr val="E2E8F0"/>
+                            <a:srgbClr val="2C3E50"/>
                           </a:solidFill>
                         </a:defRPr>
                       </a:pPr>
@@ -5228,7 +5158,7 @@
                       <a:pPr>
                         <a:defRPr sz="1000">
                           <a:solidFill>
-                            <a:srgbClr val="E2E8F0"/>
+                            <a:srgbClr val="2C3E50"/>
                           </a:solidFill>
                         </a:defRPr>
                       </a:pPr>
@@ -5343,15 +5273,10 @@
   <p:cSld>
     <p:bg>
       <p:bgPr>
-        <a:effectLst/>
         <a:solidFill>
           <a:srgbClr val="1E3A5F"/>
         </a:solidFill>
-      </p:bgPr>
-      <p:bgPr>
-        <a:solidFill>
-          <a:srgbClr val="F1F5F9"/>
-        </a:solidFill>
+        <a:effectLst/>
       </p:bgPr>
     </p:bg>
     <p:spTree>
@@ -5371,16 +5296,7 @@
           <a:solidFill>
             <a:srgbClr val="818CF8"/>
           </a:solidFill>
-          <a:xfrm>
-            <a:off x="0" y="0"/>
-            <a:ext cx="12191695" cy="1097280"/>
-          </a:xfrm>
-          <a:prstGeom prst="rect">
-            <a:avLst/>
-          </a:prstGeom>
-          <a:ln>
-            <a:noFill/>
-          </a:ln>
+          <a:effectLst/>
         </p:spPr>
         <p:style>
           <a:lnRef idx="1">
@@ -5591,7 +5507,7 @@
                       <a:pPr>
                         <a:defRPr sz="1000">
                           <a:solidFill>
-                            <a:srgbClr val="E2E8F0"/>
+                            <a:srgbClr val="2C3E50"/>
                           </a:solidFill>
                         </a:defRPr>
                       </a:pPr>
@@ -5619,7 +5535,7 @@
                       <a:pPr>
                         <a:defRPr sz="1000">
                           <a:solidFill>
-                            <a:srgbClr val="E2E8F0"/>
+                            <a:srgbClr val="2C3E50"/>
                           </a:solidFill>
                         </a:defRPr>
                       </a:pPr>
@@ -5647,7 +5563,7 @@
                       <a:pPr>
                         <a:defRPr sz="1000">
                           <a:solidFill>
-                            <a:srgbClr val="E2E8F0"/>
+                            <a:srgbClr val="2C3E50"/>
                           </a:solidFill>
                         </a:defRPr>
                       </a:pPr>
@@ -5675,7 +5591,7 @@
                       <a:pPr>
                         <a:defRPr sz="1000">
                           <a:solidFill>
-                            <a:srgbClr val="E2E8F0"/>
+                            <a:srgbClr val="2C3E50"/>
                           </a:solidFill>
                         </a:defRPr>
                       </a:pPr>
@@ -5705,7 +5621,7 @@
                       <a:pPr>
                         <a:defRPr sz="1000">
                           <a:solidFill>
-                            <a:srgbClr val="E2E8F0"/>
+                            <a:srgbClr val="2C3E50"/>
                           </a:solidFill>
                         </a:defRPr>
                       </a:pPr>
@@ -5733,7 +5649,7 @@
                       <a:pPr>
                         <a:defRPr sz="1000">
                           <a:solidFill>
-                            <a:srgbClr val="E2E8F0"/>
+                            <a:srgbClr val="2C3E50"/>
                           </a:solidFill>
                         </a:defRPr>
                       </a:pPr>
@@ -5761,7 +5677,7 @@
                       <a:pPr>
                         <a:defRPr sz="1000">
                           <a:solidFill>
-                            <a:srgbClr val="E2E8F0"/>
+                            <a:srgbClr val="2C3E50"/>
                           </a:solidFill>
                         </a:defRPr>
                       </a:pPr>
@@ -5789,7 +5705,7 @@
                       <a:pPr>
                         <a:defRPr sz="1000">
                           <a:solidFill>
-                            <a:srgbClr val="E2E8F0"/>
+                            <a:srgbClr val="2C3E50"/>
                           </a:solidFill>
                         </a:defRPr>
                       </a:pPr>
@@ -5819,7 +5735,7 @@
                       <a:pPr>
                         <a:defRPr sz="1000">
                           <a:solidFill>
-                            <a:srgbClr val="E2E8F0"/>
+                            <a:srgbClr val="2C3E50"/>
                           </a:solidFill>
                         </a:defRPr>
                       </a:pPr>
@@ -5847,7 +5763,7 @@
                       <a:pPr>
                         <a:defRPr sz="1000">
                           <a:solidFill>
-                            <a:srgbClr val="E2E8F0"/>
+                            <a:srgbClr val="2C3E50"/>
                           </a:solidFill>
                         </a:defRPr>
                       </a:pPr>
@@ -5875,7 +5791,7 @@
                       <a:pPr>
                         <a:defRPr sz="1000">
                           <a:solidFill>
-                            <a:srgbClr val="E2E8F0"/>
+                            <a:srgbClr val="2C3E50"/>
                           </a:solidFill>
                         </a:defRPr>
                       </a:pPr>
@@ -5903,7 +5819,7 @@
                       <a:pPr>
                         <a:defRPr sz="1000">
                           <a:solidFill>
-                            <a:srgbClr val="E2E8F0"/>
+                            <a:srgbClr val="2C3E50"/>
                           </a:solidFill>
                         </a:defRPr>
                       </a:pPr>
@@ -5933,7 +5849,7 @@
                       <a:pPr>
                         <a:defRPr sz="1000">
                           <a:solidFill>
-                            <a:srgbClr val="E2E8F0"/>
+                            <a:srgbClr val="2C3E50"/>
                           </a:solidFill>
                         </a:defRPr>
                       </a:pPr>
@@ -5961,7 +5877,7 @@
                       <a:pPr>
                         <a:defRPr sz="1000">
                           <a:solidFill>
-                            <a:srgbClr val="E2E8F0"/>
+                            <a:srgbClr val="2C3E50"/>
                           </a:solidFill>
                         </a:defRPr>
                       </a:pPr>
@@ -5989,7 +5905,7 @@
                       <a:pPr>
                         <a:defRPr sz="1000">
                           <a:solidFill>
-                            <a:srgbClr val="E2E8F0"/>
+                            <a:srgbClr val="2C3E50"/>
                           </a:solidFill>
                         </a:defRPr>
                       </a:pPr>
@@ -6017,7 +5933,7 @@
                       <a:pPr>
                         <a:defRPr sz="1000">
                           <a:solidFill>
-                            <a:srgbClr val="E2E8F0"/>
+                            <a:srgbClr val="2C3E50"/>
                           </a:solidFill>
                         </a:defRPr>
                       </a:pPr>
@@ -6047,7 +5963,7 @@
                       <a:pPr>
                         <a:defRPr sz="1000">
                           <a:solidFill>
-                            <a:srgbClr val="E2E8F0"/>
+                            <a:srgbClr val="2C3E50"/>
                           </a:solidFill>
                         </a:defRPr>
                       </a:pPr>
@@ -6075,7 +5991,7 @@
                       <a:pPr>
                         <a:defRPr sz="1000">
                           <a:solidFill>
-                            <a:srgbClr val="E2E8F0"/>
+                            <a:srgbClr val="2C3E50"/>
                           </a:solidFill>
                         </a:defRPr>
                       </a:pPr>
@@ -6103,7 +6019,7 @@
                       <a:pPr>
                         <a:defRPr sz="1000">
                           <a:solidFill>
-                            <a:srgbClr val="E2E8F0"/>
+                            <a:srgbClr val="2C3E50"/>
                           </a:solidFill>
                         </a:defRPr>
                       </a:pPr>
@@ -6131,7 +6047,7 @@
                       <a:pPr>
                         <a:defRPr sz="1000">
                           <a:solidFill>
-                            <a:srgbClr val="E2E8F0"/>
+                            <a:srgbClr val="2C3E50"/>
                           </a:solidFill>
                         </a:defRPr>
                       </a:pPr>
@@ -6161,7 +6077,7 @@
                       <a:pPr>
                         <a:defRPr sz="1000">
                           <a:solidFill>
-                            <a:srgbClr val="E2E8F0"/>
+                            <a:srgbClr val="2C3E50"/>
                           </a:solidFill>
                         </a:defRPr>
                       </a:pPr>
@@ -6189,7 +6105,7 @@
                       <a:pPr>
                         <a:defRPr sz="1000">
                           <a:solidFill>
-                            <a:srgbClr val="E2E8F0"/>
+                            <a:srgbClr val="2C3E50"/>
                           </a:solidFill>
                         </a:defRPr>
                       </a:pPr>
@@ -6217,7 +6133,7 @@
                       <a:pPr>
                         <a:defRPr sz="1000">
                           <a:solidFill>
-                            <a:srgbClr val="E2E8F0"/>
+                            <a:srgbClr val="2C3E50"/>
                           </a:solidFill>
                         </a:defRPr>
                       </a:pPr>
@@ -6245,7 +6161,7 @@
                       <a:pPr>
                         <a:defRPr sz="1000">
                           <a:solidFill>
-                            <a:srgbClr val="E2E8F0"/>
+                            <a:srgbClr val="2C3E50"/>
                           </a:solidFill>
                         </a:defRPr>
                       </a:pPr>
@@ -6275,7 +6191,7 @@
                       <a:pPr>
                         <a:defRPr sz="1000">
                           <a:solidFill>
-                            <a:srgbClr val="E2E8F0"/>
+                            <a:srgbClr val="2C3E50"/>
                           </a:solidFill>
                         </a:defRPr>
                       </a:pPr>
@@ -6303,7 +6219,7 @@
                       <a:pPr>
                         <a:defRPr sz="1000">
                           <a:solidFill>
-                            <a:srgbClr val="E2E8F0"/>
+                            <a:srgbClr val="2C3E50"/>
                           </a:solidFill>
                         </a:defRPr>
                       </a:pPr>
@@ -6331,7 +6247,7 @@
                       <a:pPr>
                         <a:defRPr sz="1000">
                           <a:solidFill>
-                            <a:srgbClr val="E2E8F0"/>
+                            <a:srgbClr val="2C3E50"/>
                           </a:solidFill>
                         </a:defRPr>
                       </a:pPr>
@@ -6359,7 +6275,7 @@
                       <a:pPr>
                         <a:defRPr sz="1000">
                           <a:solidFill>
-                            <a:srgbClr val="E2E8F0"/>
+                            <a:srgbClr val="2C3E50"/>
                           </a:solidFill>
                         </a:defRPr>
                       </a:pPr>
@@ -6389,7 +6305,7 @@
                       <a:pPr>
                         <a:defRPr sz="1000">
                           <a:solidFill>
-                            <a:srgbClr val="E2E8F0"/>
+                            <a:srgbClr val="2C3E50"/>
                           </a:solidFill>
                         </a:defRPr>
                       </a:pPr>
@@ -6417,7 +6333,7 @@
                       <a:pPr>
                         <a:defRPr sz="1000">
                           <a:solidFill>
-                            <a:srgbClr val="E2E8F0"/>
+                            <a:srgbClr val="2C3E50"/>
                           </a:solidFill>
                         </a:defRPr>
                       </a:pPr>
@@ -6445,7 +6361,7 @@
                       <a:pPr>
                         <a:defRPr sz="1000">
                           <a:solidFill>
-                            <a:srgbClr val="E2E8F0"/>
+                            <a:srgbClr val="2C3E50"/>
                           </a:solidFill>
                         </a:defRPr>
                       </a:pPr>
@@ -6473,7 +6389,7 @@
                       <a:pPr>
                         <a:defRPr sz="1000">
                           <a:solidFill>
-                            <a:srgbClr val="E2E8F0"/>
+                            <a:srgbClr val="2C3E50"/>
                           </a:solidFill>
                         </a:defRPr>
                       </a:pPr>
@@ -6503,7 +6419,7 @@
                       <a:pPr>
                         <a:defRPr sz="1000">
                           <a:solidFill>
-                            <a:srgbClr val="E2E8F0"/>
+                            <a:srgbClr val="2C3E50"/>
                           </a:solidFill>
                         </a:defRPr>
                       </a:pPr>
@@ -6531,7 +6447,7 @@
                       <a:pPr>
                         <a:defRPr sz="1000">
                           <a:solidFill>
-                            <a:srgbClr val="E2E8F0"/>
+                            <a:srgbClr val="2C3E50"/>
                           </a:solidFill>
                         </a:defRPr>
                       </a:pPr>
@@ -6559,7 +6475,7 @@
                       <a:pPr>
                         <a:defRPr sz="1000">
                           <a:solidFill>
-                            <a:srgbClr val="E2E8F0"/>
+                            <a:srgbClr val="2C3E50"/>
                           </a:solidFill>
                         </a:defRPr>
                       </a:pPr>
@@ -6587,7 +6503,7 @@
                       <a:pPr>
                         <a:defRPr sz="1000">
                           <a:solidFill>
-                            <a:srgbClr val="E2E8F0"/>
+                            <a:srgbClr val="2C3E50"/>
                           </a:solidFill>
                         </a:defRPr>
                       </a:pPr>
@@ -6617,7 +6533,7 @@
                       <a:pPr>
                         <a:defRPr sz="1000">
                           <a:solidFill>
-                            <a:srgbClr val="E2E8F0"/>
+                            <a:srgbClr val="2C3E50"/>
                           </a:solidFill>
                         </a:defRPr>
                       </a:pPr>
@@ -6645,7 +6561,7 @@
                       <a:pPr>
                         <a:defRPr sz="1000">
                           <a:solidFill>
-                            <a:srgbClr val="E2E8F0"/>
+                            <a:srgbClr val="2C3E50"/>
                           </a:solidFill>
                         </a:defRPr>
                       </a:pPr>
@@ -6673,7 +6589,7 @@
                       <a:pPr>
                         <a:defRPr sz="1000">
                           <a:solidFill>
-                            <a:srgbClr val="E2E8F0"/>
+                            <a:srgbClr val="2C3E50"/>
                           </a:solidFill>
                         </a:defRPr>
                       </a:pPr>
@@ -6701,7 +6617,7 @@
                       <a:pPr>
                         <a:defRPr sz="1000">
                           <a:solidFill>
-                            <a:srgbClr val="E2E8F0"/>
+                            <a:srgbClr val="2C3E50"/>
                           </a:solidFill>
                         </a:defRPr>
                       </a:pPr>
@@ -6731,7 +6647,7 @@
                       <a:pPr>
                         <a:defRPr sz="1000">
                           <a:solidFill>
-                            <a:srgbClr val="E2E8F0"/>
+                            <a:srgbClr val="2C3E50"/>
                           </a:solidFill>
                         </a:defRPr>
                       </a:pPr>
@@ -6759,7 +6675,7 @@
                       <a:pPr>
                         <a:defRPr sz="1000">
                           <a:solidFill>
-                            <a:srgbClr val="E2E8F0"/>
+                            <a:srgbClr val="2C3E50"/>
                           </a:solidFill>
                         </a:defRPr>
                       </a:pPr>
@@ -6787,7 +6703,7 @@
                       <a:pPr>
                         <a:defRPr sz="1000">
                           <a:solidFill>
-                            <a:srgbClr val="E2E8F0"/>
+                            <a:srgbClr val="2C3E50"/>
                           </a:solidFill>
                         </a:defRPr>
                       </a:pPr>
@@ -6815,7 +6731,7 @@
                       <a:pPr>
                         <a:defRPr sz="1000">
                           <a:solidFill>
-                            <a:srgbClr val="E2E8F0"/>
+                            <a:srgbClr val="2C3E50"/>
                           </a:solidFill>
                         </a:defRPr>
                       </a:pPr>
@@ -6853,15 +6769,10 @@
   <p:cSld>
     <p:bg>
       <p:bgPr>
-        <a:effectLst/>
         <a:solidFill>
           <a:srgbClr val="1E3A5F"/>
         </a:solidFill>
-      </p:bgPr>
-      <p:bgPr>
-        <a:solidFill>
-          <a:srgbClr val="F1F5F9"/>
-        </a:solidFill>
+        <a:effectLst/>
       </p:bgPr>
     </p:bg>
     <p:spTree>
@@ -6881,16 +6792,7 @@
           <a:solidFill>
             <a:srgbClr val="818CF8"/>
           </a:solidFill>
-          <a:xfrm>
-            <a:off x="0" y="0"/>
-            <a:ext cx="12191695" cy="1097280"/>
-          </a:xfrm>
-          <a:prstGeom prst="rect">
-            <a:avLst/>
-          </a:prstGeom>
-          <a:ln>
-            <a:noFill/>
-          </a:ln>
+          <a:effectLst/>
         </p:spPr>
         <p:style>
           <a:lnRef idx="1">
@@ -6946,7 +6848,7 @@
             <a:r>
               <a:rPr>
                 <a:solidFill>
-                  <a:srgbClr val="FFFFFF"/>
+                  <a:srgbClr val="CBD5E1"/>
                 </a:solidFill>
               </a:rPr>
               <a:t>Resultados de Ejecucion</a:t>
@@ -6986,7 +6888,7 @@
             <a:r>
               <a:rPr>
                 <a:solidFill>
-                  <a:srgbClr val="FFFFFF"/>
+                  <a:srgbClr val="CBD5E1"/>
                 </a:solidFill>
               </a:rPr>
               <a:t>29 escenarios ejecutados | 96.55% aprobacion</a:t>
@@ -7152,7 +7054,7 @@
                   <a:srgbClr val="CBD5E1"/>
                 </a:solidFill>
               </a:rPr>
-              <a:t>93 screenshots en evidencias/</a:t>
+              <a:t>177 screenshots en evidencias/</a:t>
             </a:r>
           </a:p>
           <a:p>
@@ -7252,7 +7154,7 @@
             <a:r>
               <a:rPr>
                 <a:solidFill>
-                  <a:srgbClr val="FFFFFF"/>
+                  <a:srgbClr val="CBD5E1"/>
                 </a:solidFill>
               </a:rPr>
               <a:t>Fallo Intencional TC_004:</a:t>
@@ -7420,7 +7322,7 @@
             <a:r>
               <a:rPr>
                 <a:solidFill>
-                  <a:srgbClr val="FFFFFF"/>
+                  <a:srgbClr val="CBD5E1"/>
                 </a:solidFill>
               </a:rPr>
               <a:t>Cobertura por Modulo:</a:t>
@@ -7508,15 +7410,10 @@
   <p:cSld>
     <p:bg>
       <p:bgPr>
-        <a:effectLst/>
         <a:solidFill>
           <a:srgbClr val="1E3A5F"/>
         </a:solidFill>
-      </p:bgPr>
-      <p:bgPr>
-        <a:solidFill>
-          <a:srgbClr val="F1F5F9"/>
-        </a:solidFill>
+        <a:effectLst/>
       </p:bgPr>
     </p:bg>
     <p:spTree>
@@ -7536,16 +7433,7 @@
           <a:solidFill>
             <a:srgbClr val="818CF8"/>
           </a:solidFill>
-          <a:xfrm>
-            <a:off x="0" y="0"/>
-            <a:ext cx="12191695" cy="1097280"/>
-          </a:xfrm>
-          <a:prstGeom prst="rect">
-            <a:avLst/>
-          </a:prstGeom>
-          <a:ln>
-            <a:noFill/>
-          </a:ln>
+          <a:effectLst/>
         </p:spPr>
         <p:style>
           <a:lnRef idx="1">
@@ -7601,7 +7489,7 @@
             <a:r>
               <a:rPr>
                 <a:solidFill>
-                  <a:srgbClr val="FFFFFF"/>
+                  <a:srgbClr val="CBD5E1"/>
                 </a:solidFill>
               </a:rPr>
               <a:t>Metricas de Calidad y Rendimiento</a:t>
@@ -7756,7 +7644,7 @@
                       <a:pPr>
                         <a:defRPr sz="1000">
                           <a:solidFill>
-                            <a:srgbClr val="E2E8F0"/>
+                            <a:srgbClr val="2C3E50"/>
                           </a:solidFill>
                         </a:defRPr>
                       </a:pPr>
@@ -7784,7 +7672,7 @@
                       <a:pPr>
                         <a:defRPr sz="1000">
                           <a:solidFill>
-                            <a:srgbClr val="E2E8F0"/>
+                            <a:srgbClr val="2C3E50"/>
                           </a:solidFill>
                         </a:defRPr>
                       </a:pPr>
@@ -7812,7 +7700,7 @@
                       <a:pPr>
                         <a:defRPr sz="1000">
                           <a:solidFill>
-                            <a:srgbClr val="E2E8F0"/>
+                            <a:srgbClr val="2C3E50"/>
                           </a:solidFill>
                         </a:defRPr>
                       </a:pPr>
@@ -7840,7 +7728,7 @@
                       <a:pPr>
                         <a:defRPr sz="1000">
                           <a:solidFill>
-                            <a:srgbClr val="E2E8F0"/>
+                            <a:srgbClr val="2C3E50"/>
                           </a:solidFill>
                         </a:defRPr>
                       </a:pPr>
@@ -7870,7 +7758,7 @@
                       <a:pPr>
                         <a:defRPr sz="1000">
                           <a:solidFill>
-                            <a:srgbClr val="E2E8F0"/>
+                            <a:srgbClr val="2C3E50"/>
                           </a:solidFill>
                         </a:defRPr>
                       </a:pPr>
@@ -7898,7 +7786,7 @@
                       <a:pPr>
                         <a:defRPr sz="1000">
                           <a:solidFill>
-                            <a:srgbClr val="E2E8F0"/>
+                            <a:srgbClr val="2C3E50"/>
                           </a:solidFill>
                         </a:defRPr>
                       </a:pPr>
@@ -7926,7 +7814,7 @@
                       <a:pPr>
                         <a:defRPr sz="1000">
                           <a:solidFill>
-                            <a:srgbClr val="E2E8F0"/>
+                            <a:srgbClr val="2C3E50"/>
                           </a:solidFill>
                         </a:defRPr>
                       </a:pPr>
@@ -7954,7 +7842,7 @@
                       <a:pPr>
                         <a:defRPr sz="1000">
                           <a:solidFill>
-                            <a:srgbClr val="E2E8F0"/>
+                            <a:srgbClr val="2C3E50"/>
                           </a:solidFill>
                         </a:defRPr>
                       </a:pPr>
@@ -7984,7 +7872,7 @@
                       <a:pPr>
                         <a:defRPr sz="1000">
                           <a:solidFill>
-                            <a:srgbClr val="E2E8F0"/>
+                            <a:srgbClr val="2C3E50"/>
                           </a:solidFill>
                         </a:defRPr>
                       </a:pPr>
@@ -8012,7 +7900,7 @@
                       <a:pPr>
                         <a:defRPr sz="1000">
                           <a:solidFill>
-                            <a:srgbClr val="E2E8F0"/>
+                            <a:srgbClr val="2C3E50"/>
                           </a:solidFill>
                         </a:defRPr>
                       </a:pPr>
@@ -8040,7 +7928,7 @@
                       <a:pPr>
                         <a:defRPr sz="1000">
                           <a:solidFill>
-                            <a:srgbClr val="E2E8F0"/>
+                            <a:srgbClr val="2C3E50"/>
                           </a:solidFill>
                         </a:defRPr>
                       </a:pPr>
@@ -8068,7 +7956,7 @@
                       <a:pPr>
                         <a:defRPr sz="1000">
                           <a:solidFill>
-                            <a:srgbClr val="E2E8F0"/>
+                            <a:srgbClr val="2C3E50"/>
                           </a:solidFill>
                         </a:defRPr>
                       </a:pPr>
@@ -8098,7 +7986,7 @@
                       <a:pPr>
                         <a:defRPr sz="1000">
                           <a:solidFill>
-                            <a:srgbClr val="E2E8F0"/>
+                            <a:srgbClr val="2C3E50"/>
                           </a:solidFill>
                         </a:defRPr>
                       </a:pPr>
@@ -8126,7 +8014,7 @@
                       <a:pPr>
                         <a:defRPr sz="1000">
                           <a:solidFill>
-                            <a:srgbClr val="E2E8F0"/>
+                            <a:srgbClr val="2C3E50"/>
                           </a:solidFill>
                         </a:defRPr>
                       </a:pPr>
@@ -8154,7 +8042,7 @@
                       <a:pPr>
                         <a:defRPr sz="1000">
                           <a:solidFill>
-                            <a:srgbClr val="E2E8F0"/>
+                            <a:srgbClr val="2C3E50"/>
                           </a:solidFill>
                         </a:defRPr>
                       </a:pPr>
@@ -8182,7 +8070,7 @@
                       <a:pPr>
                         <a:defRPr sz="1000">
                           <a:solidFill>
-                            <a:srgbClr val="E2E8F0"/>
+                            <a:srgbClr val="2C3E50"/>
                           </a:solidFill>
                         </a:defRPr>
                       </a:pPr>
@@ -8212,7 +8100,7 @@
                       <a:pPr>
                         <a:defRPr sz="1000">
                           <a:solidFill>
-                            <a:srgbClr val="E2E8F0"/>
+                            <a:srgbClr val="2C3E50"/>
                           </a:solidFill>
                         </a:defRPr>
                       </a:pPr>
@@ -8240,7 +8128,7 @@
                       <a:pPr>
                         <a:defRPr sz="1000">
                           <a:solidFill>
-                            <a:srgbClr val="E2E8F0"/>
+                            <a:srgbClr val="2C3E50"/>
                           </a:solidFill>
                         </a:defRPr>
                       </a:pPr>
@@ -8268,7 +8156,7 @@
                       <a:pPr>
                         <a:defRPr sz="1000">
                           <a:solidFill>
-                            <a:srgbClr val="E2E8F0"/>
+                            <a:srgbClr val="2C3E50"/>
                           </a:solidFill>
                         </a:defRPr>
                       </a:pPr>
@@ -8296,7 +8184,7 @@
                       <a:pPr>
                         <a:defRPr sz="1000">
                           <a:solidFill>
-                            <a:srgbClr val="E2E8F0"/>
+                            <a:srgbClr val="2C3E50"/>
                           </a:solidFill>
                         </a:defRPr>
                       </a:pPr>
@@ -8468,7 +8356,7 @@
                       <a:pPr>
                         <a:defRPr sz="1000">
                           <a:solidFill>
-                            <a:srgbClr val="E2E8F0"/>
+                            <a:srgbClr val="2C3E50"/>
                           </a:solidFill>
                         </a:defRPr>
                       </a:pPr>
@@ -8496,7 +8384,7 @@
                       <a:pPr>
                         <a:defRPr sz="1000">
                           <a:solidFill>
-                            <a:srgbClr val="E2E8F0"/>
+                            <a:srgbClr val="2C3E50"/>
                           </a:solidFill>
                         </a:defRPr>
                       </a:pPr>
@@ -8524,7 +8412,7 @@
                       <a:pPr>
                         <a:defRPr sz="1000">
                           <a:solidFill>
-                            <a:srgbClr val="E2E8F0"/>
+                            <a:srgbClr val="2C3E50"/>
                           </a:solidFill>
                         </a:defRPr>
                       </a:pPr>
@@ -8552,7 +8440,7 @@
                       <a:pPr>
                         <a:defRPr sz="1000">
                           <a:solidFill>
-                            <a:srgbClr val="E2E8F0"/>
+                            <a:srgbClr val="2C3E50"/>
                           </a:solidFill>
                         </a:defRPr>
                       </a:pPr>
@@ -8582,7 +8470,7 @@
                       <a:pPr>
                         <a:defRPr sz="1000">
                           <a:solidFill>
-                            <a:srgbClr val="E2E8F0"/>
+                            <a:srgbClr val="2C3E50"/>
                           </a:solidFill>
                         </a:defRPr>
                       </a:pPr>
@@ -8610,7 +8498,7 @@
                       <a:pPr>
                         <a:defRPr sz="1000">
                           <a:solidFill>
-                            <a:srgbClr val="E2E8F0"/>
+                            <a:srgbClr val="2C3E50"/>
                           </a:solidFill>
                         </a:defRPr>
                       </a:pPr>
@@ -8638,7 +8526,7 @@
                       <a:pPr>
                         <a:defRPr sz="1000">
                           <a:solidFill>
-                            <a:srgbClr val="E2E8F0"/>
+                            <a:srgbClr val="2C3E50"/>
                           </a:solidFill>
                         </a:defRPr>
                       </a:pPr>
@@ -8666,7 +8554,7 @@
                       <a:pPr>
                         <a:defRPr sz="1000">
                           <a:solidFill>
-                            <a:srgbClr val="E2E8F0"/>
+                            <a:srgbClr val="2C3E50"/>
                           </a:solidFill>
                         </a:defRPr>
                       </a:pPr>
@@ -8696,7 +8584,7 @@
                       <a:pPr>
                         <a:defRPr sz="1000">
                           <a:solidFill>
-                            <a:srgbClr val="E2E8F0"/>
+                            <a:srgbClr val="2C3E50"/>
                           </a:solidFill>
                         </a:defRPr>
                       </a:pPr>
@@ -8724,7 +8612,7 @@
                       <a:pPr>
                         <a:defRPr sz="1000">
                           <a:solidFill>
-                            <a:srgbClr val="E2E8F0"/>
+                            <a:srgbClr val="2C3E50"/>
                           </a:solidFill>
                         </a:defRPr>
                       </a:pPr>
@@ -8752,7 +8640,7 @@
                       <a:pPr>
                         <a:defRPr sz="1000">
                           <a:solidFill>
-                            <a:srgbClr val="E2E8F0"/>
+                            <a:srgbClr val="2C3E50"/>
                           </a:solidFill>
                         </a:defRPr>
                       </a:pPr>
@@ -8780,7 +8668,7 @@
                       <a:pPr>
                         <a:defRPr sz="1000">
                           <a:solidFill>
-                            <a:srgbClr val="E2E8F0"/>
+                            <a:srgbClr val="2C3E50"/>
                           </a:solidFill>
                         </a:defRPr>
                       </a:pPr>
@@ -8810,7 +8698,7 @@
                       <a:pPr>
                         <a:defRPr sz="1000">
                           <a:solidFill>
-                            <a:srgbClr val="E2E8F0"/>
+                            <a:srgbClr val="2C3E50"/>
                           </a:solidFill>
                         </a:defRPr>
                       </a:pPr>
@@ -8838,7 +8726,7 @@
                       <a:pPr>
                         <a:defRPr sz="1000">
                           <a:solidFill>
-                            <a:srgbClr val="E2E8F0"/>
+                            <a:srgbClr val="2C3E50"/>
                           </a:solidFill>
                         </a:defRPr>
                       </a:pPr>
@@ -8866,7 +8754,7 @@
                       <a:pPr>
                         <a:defRPr sz="1000">
                           <a:solidFill>
-                            <a:srgbClr val="E2E8F0"/>
+                            <a:srgbClr val="2C3E50"/>
                           </a:solidFill>
                         </a:defRPr>
                       </a:pPr>
@@ -8894,7 +8782,7 @@
                       <a:pPr>
                         <a:defRPr sz="1000">
                           <a:solidFill>
-                            <a:srgbClr val="E2E8F0"/>
+                            <a:srgbClr val="2C3E50"/>
                           </a:solidFill>
                         </a:defRPr>
                       </a:pPr>
@@ -8924,7 +8812,7 @@
                       <a:pPr>
                         <a:defRPr sz="1000">
                           <a:solidFill>
-                            <a:srgbClr val="E2E8F0"/>
+                            <a:srgbClr val="2C3E50"/>
                           </a:solidFill>
                         </a:defRPr>
                       </a:pPr>
@@ -8952,7 +8840,7 @@
                       <a:pPr>
                         <a:defRPr sz="1000">
                           <a:solidFill>
-                            <a:srgbClr val="E2E8F0"/>
+                            <a:srgbClr val="2C3E50"/>
                           </a:solidFill>
                         </a:defRPr>
                       </a:pPr>
@@ -8980,7 +8868,7 @@
                       <a:pPr>
                         <a:defRPr sz="1000">
                           <a:solidFill>
-                            <a:srgbClr val="E2E8F0"/>
+                            <a:srgbClr val="2C3E50"/>
                           </a:solidFill>
                         </a:defRPr>
                       </a:pPr>
@@ -9008,7 +8896,7 @@
                       <a:pPr>
                         <a:defRPr sz="1000">
                           <a:solidFill>
-                            <a:srgbClr val="E2E8F0"/>
+                            <a:srgbClr val="2C3E50"/>
                           </a:solidFill>
                         </a:defRPr>
                       </a:pPr>
@@ -9104,15 +8992,10 @@
   <p:cSld>
     <p:bg>
       <p:bgPr>
-        <a:effectLst/>
         <a:solidFill>
           <a:srgbClr val="1E3A5F"/>
         </a:solidFill>
-      </p:bgPr>
-      <p:bgPr>
-        <a:solidFill>
-          <a:srgbClr val="F1F5F9"/>
-        </a:solidFill>
+        <a:effectLst/>
       </p:bgPr>
     </p:bg>
     <p:spTree>
@@ -9132,16 +9015,7 @@
           <a:solidFill>
             <a:srgbClr val="818CF8"/>
           </a:solidFill>
-          <a:xfrm>
-            <a:off x="0" y="0"/>
-            <a:ext cx="12191695" cy="1097280"/>
-          </a:xfrm>
-          <a:prstGeom prst="rect">
-            <a:avLst/>
-          </a:prstGeom>
-          <a:ln>
-            <a:noFill/>
-          </a:ln>
+          <a:effectLst/>
         </p:spPr>
         <p:style>
           <a:lnRef idx="1">
@@ -9904,15 +9778,10 @@
   <p:cSld>
     <p:bg>
       <p:bgPr>
-        <a:effectLst/>
         <a:solidFill>
           <a:srgbClr val="1E3A5F"/>
         </a:solidFill>
-      </p:bgPr>
-      <p:bgPr>
-        <a:solidFill>
-          <a:srgbClr val="F1F5F9"/>
-        </a:solidFill>
+        <a:effectLst/>
       </p:bgPr>
     </p:bg>
     <p:spTree>
@@ -9932,16 +9801,7 @@
           <a:solidFill>
             <a:srgbClr val="818CF8"/>
           </a:solidFill>
-          <a:xfrm>
-            <a:off x="0" y="0"/>
-            <a:ext cx="12191695" cy="1097280"/>
-          </a:xfrm>
-          <a:prstGeom prst="rect">
-            <a:avLst/>
-          </a:prstGeom>
-          <a:ln>
-            <a:noFill/>
-          </a:ln>
+          <a:effectLst/>
         </p:spPr>
         <p:style>
           <a:lnRef idx="1">
@@ -9997,7 +9857,7 @@
             <a:r>
               <a:rPr>
                 <a:solidFill>
-                  <a:srgbClr val="FFFFFF"/>
+                  <a:srgbClr val="CBD5E1"/>
                 </a:solidFill>
               </a:rPr>
               <a:t>Propuestas de Mejora (Dato -&gt; Causa -&gt; Accion -&gt; Impacto)</a:t>
@@ -10181,7 +10041,7 @@
                       <a:pPr>
                         <a:defRPr sz="1000">
                           <a:solidFill>
-                            <a:srgbClr val="E2E8F0"/>
+                            <a:srgbClr val="2C3E50"/>
                           </a:solidFill>
                         </a:defRPr>
                       </a:pPr>
@@ -10209,7 +10069,7 @@
                       <a:pPr>
                         <a:defRPr sz="1000">
                           <a:solidFill>
-                            <a:srgbClr val="E2E8F0"/>
+                            <a:srgbClr val="2C3E50"/>
                           </a:solidFill>
                         </a:defRPr>
                       </a:pPr>
@@ -10226,7 +10086,7 @@
                       <a:pPr>
                         <a:defRPr sz="1000">
                           <a:solidFill>
-                            <a:srgbClr val="E2E8F0"/>
+                            <a:srgbClr val="2C3E50"/>
                           </a:solidFill>
                         </a:defRPr>
                       </a:pPr>
@@ -10254,7 +10114,7 @@
                       <a:pPr>
                         <a:defRPr sz="1000">
                           <a:solidFill>
-                            <a:srgbClr val="E2E8F0"/>
+                            <a:srgbClr val="2C3E50"/>
                           </a:solidFill>
                         </a:defRPr>
                       </a:pPr>
@@ -10271,7 +10131,7 @@
                       <a:pPr>
                         <a:defRPr sz="1000">
                           <a:solidFill>
-                            <a:srgbClr val="E2E8F0"/>
+                            <a:srgbClr val="2C3E50"/>
                           </a:solidFill>
                         </a:defRPr>
                       </a:pPr>
@@ -10299,7 +10159,7 @@
                       <a:pPr>
                         <a:defRPr sz="1000">
                           <a:solidFill>
-                            <a:srgbClr val="E2E8F0"/>
+                            <a:srgbClr val="2C3E50"/>
                           </a:solidFill>
                         </a:defRPr>
                       </a:pPr>
@@ -10316,7 +10176,7 @@
                       <a:pPr>
                         <a:defRPr sz="1000">
                           <a:solidFill>
-                            <a:srgbClr val="E2E8F0"/>
+                            <a:srgbClr val="2C3E50"/>
                           </a:solidFill>
                         </a:defRPr>
                       </a:pPr>
@@ -10344,7 +10204,7 @@
                       <a:pPr>
                         <a:defRPr sz="1000">
                           <a:solidFill>
-                            <a:srgbClr val="E2E8F0"/>
+                            <a:srgbClr val="2C3E50"/>
                           </a:solidFill>
                         </a:defRPr>
                       </a:pPr>
@@ -10361,7 +10221,7 @@
                       <a:pPr>
                         <a:defRPr sz="1000">
                           <a:solidFill>
-                            <a:srgbClr val="E2E8F0"/>
+                            <a:srgbClr val="2C3E50"/>
                           </a:solidFill>
                         </a:defRPr>
                       </a:pPr>
@@ -10391,7 +10251,7 @@
                       <a:pPr>
                         <a:defRPr sz="1000">
                           <a:solidFill>
-                            <a:srgbClr val="E2E8F0"/>
+                            <a:srgbClr val="2C3E50"/>
                           </a:solidFill>
                         </a:defRPr>
                       </a:pPr>
@@ -10419,7 +10279,7 @@
                       <a:pPr>
                         <a:defRPr sz="1000">
                           <a:solidFill>
-                            <a:srgbClr val="E2E8F0"/>
+                            <a:srgbClr val="2C3E50"/>
                           </a:solidFill>
                         </a:defRPr>
                       </a:pPr>
@@ -10436,7 +10296,7 @@
                       <a:pPr>
                         <a:defRPr sz="1000">
                           <a:solidFill>
-                            <a:srgbClr val="E2E8F0"/>
+                            <a:srgbClr val="2C3E50"/>
                           </a:solidFill>
                         </a:defRPr>
                       </a:pPr>
@@ -10464,7 +10324,7 @@
                       <a:pPr>
                         <a:defRPr sz="1000">
                           <a:solidFill>
-                            <a:srgbClr val="E2E8F0"/>
+                            <a:srgbClr val="2C3E50"/>
                           </a:solidFill>
                         </a:defRPr>
                       </a:pPr>
@@ -10481,7 +10341,7 @@
                       <a:pPr>
                         <a:defRPr sz="1000">
                           <a:solidFill>
-                            <a:srgbClr val="E2E8F0"/>
+                            <a:srgbClr val="2C3E50"/>
                           </a:solidFill>
                         </a:defRPr>
                       </a:pPr>
@@ -10509,7 +10369,7 @@
                       <a:pPr>
                         <a:defRPr sz="1000">
                           <a:solidFill>
-                            <a:srgbClr val="E2E8F0"/>
+                            <a:srgbClr val="2C3E50"/>
                           </a:solidFill>
                         </a:defRPr>
                       </a:pPr>
@@ -10526,7 +10386,7 @@
                       <a:pPr>
                         <a:defRPr sz="1000">
                           <a:solidFill>
-                            <a:srgbClr val="E2E8F0"/>
+                            <a:srgbClr val="2C3E50"/>
                           </a:solidFill>
                         </a:defRPr>
                       </a:pPr>
@@ -10554,7 +10414,7 @@
                       <a:pPr>
                         <a:defRPr sz="1000">
                           <a:solidFill>
-                            <a:srgbClr val="E2E8F0"/>
+                            <a:srgbClr val="2C3E50"/>
                           </a:solidFill>
                         </a:defRPr>
                       </a:pPr>
@@ -10584,7 +10444,7 @@
                       <a:pPr>
                         <a:defRPr sz="1000">
                           <a:solidFill>
-                            <a:srgbClr val="E2E8F0"/>
+                            <a:srgbClr val="2C3E50"/>
                           </a:solidFill>
                         </a:defRPr>
                       </a:pPr>
@@ -10612,7 +10472,7 @@
                       <a:pPr>
                         <a:defRPr sz="1000">
                           <a:solidFill>
-                            <a:srgbClr val="E2E8F0"/>
+                            <a:srgbClr val="2C3E50"/>
                           </a:solidFill>
                         </a:defRPr>
                       </a:pPr>
@@ -10629,7 +10489,7 @@
                       <a:pPr>
                         <a:defRPr sz="1000">
                           <a:solidFill>
-                            <a:srgbClr val="E2E8F0"/>
+                            <a:srgbClr val="2C3E50"/>
                           </a:solidFill>
                         </a:defRPr>
                       </a:pPr>
@@ -10657,7 +10517,7 @@
                       <a:pPr>
                         <a:defRPr sz="1000">
                           <a:solidFill>
-                            <a:srgbClr val="E2E8F0"/>
+                            <a:srgbClr val="2C3E50"/>
                           </a:solidFill>
                         </a:defRPr>
                       </a:pPr>
@@ -10674,7 +10534,7 @@
                       <a:pPr>
                         <a:defRPr sz="1000">
                           <a:solidFill>
-                            <a:srgbClr val="E2E8F0"/>
+                            <a:srgbClr val="2C3E50"/>
                           </a:solidFill>
                         </a:defRPr>
                       </a:pPr>
@@ -10702,7 +10562,7 @@
                       <a:pPr>
                         <a:defRPr sz="1000">
                           <a:solidFill>
-                            <a:srgbClr val="E2E8F0"/>
+                            <a:srgbClr val="2C3E50"/>
                           </a:solidFill>
                         </a:defRPr>
                       </a:pPr>
@@ -10719,7 +10579,7 @@
                       <a:pPr>
                         <a:defRPr sz="1000">
                           <a:solidFill>
-                            <a:srgbClr val="E2E8F0"/>
+                            <a:srgbClr val="2C3E50"/>
                           </a:solidFill>
                         </a:defRPr>
                       </a:pPr>
@@ -10747,7 +10607,7 @@
                       <a:pPr>
                         <a:defRPr sz="1000">
                           <a:solidFill>
-                            <a:srgbClr val="E2E8F0"/>
+                            <a:srgbClr val="2C3E50"/>
                           </a:solidFill>
                         </a:defRPr>
                       </a:pPr>
@@ -10764,7 +10624,7 @@
                       <a:pPr>
                         <a:defRPr sz="1000">
                           <a:solidFill>
-                            <a:srgbClr val="E2E8F0"/>
+                            <a:srgbClr val="2C3E50"/>
                           </a:solidFill>
                         </a:defRPr>
                       </a:pPr>
@@ -10794,7 +10654,7 @@
                       <a:pPr>
                         <a:defRPr sz="1000">
                           <a:solidFill>
-                            <a:srgbClr val="E2E8F0"/>
+                            <a:srgbClr val="2C3E50"/>
                           </a:solidFill>
                         </a:defRPr>
                       </a:pPr>
@@ -10822,7 +10682,7 @@
                       <a:pPr>
                         <a:defRPr sz="1000">
                           <a:solidFill>
-                            <a:srgbClr val="E2E8F0"/>
+                            <a:srgbClr val="2C3E50"/>
                           </a:solidFill>
                         </a:defRPr>
                       </a:pPr>
@@ -10839,7 +10699,7 @@
                       <a:pPr>
                         <a:defRPr sz="1000">
                           <a:solidFill>
-                            <a:srgbClr val="E2E8F0"/>
+                            <a:srgbClr val="2C3E50"/>
                           </a:solidFill>
                         </a:defRPr>
                       </a:pPr>
@@ -10867,7 +10727,7 @@
                       <a:pPr>
                         <a:defRPr sz="1000">
                           <a:solidFill>
-                            <a:srgbClr val="E2E8F0"/>
+                            <a:srgbClr val="2C3E50"/>
                           </a:solidFill>
                         </a:defRPr>
                       </a:pPr>
@@ -10884,7 +10744,7 @@
                       <a:pPr>
                         <a:defRPr sz="1000">
                           <a:solidFill>
-                            <a:srgbClr val="E2E8F0"/>
+                            <a:srgbClr val="2C3E50"/>
                           </a:solidFill>
                         </a:defRPr>
                       </a:pPr>
@@ -10912,7 +10772,7 @@
                       <a:pPr>
                         <a:defRPr sz="1000">
                           <a:solidFill>
-                            <a:srgbClr val="E2E8F0"/>
+                            <a:srgbClr val="2C3E50"/>
                           </a:solidFill>
                         </a:defRPr>
                       </a:pPr>
@@ -10929,7 +10789,7 @@
                       <a:pPr>
                         <a:defRPr sz="1000">
                           <a:solidFill>
-                            <a:srgbClr val="E2E8F0"/>
+                            <a:srgbClr val="2C3E50"/>
                           </a:solidFill>
                         </a:defRPr>
                       </a:pPr>
@@ -10957,7 +10817,7 @@
                       <a:pPr>
                         <a:defRPr sz="1000">
                           <a:solidFill>
-                            <a:srgbClr val="E2E8F0"/>
+                            <a:srgbClr val="2C3E50"/>
                           </a:solidFill>
                         </a:defRPr>
                       </a:pPr>
@@ -10987,7 +10847,7 @@
                       <a:pPr>
                         <a:defRPr sz="1000">
                           <a:solidFill>
-                            <a:srgbClr val="E2E8F0"/>
+                            <a:srgbClr val="2C3E50"/>
                           </a:solidFill>
                         </a:defRPr>
                       </a:pPr>
@@ -11015,7 +10875,7 @@
                       <a:pPr>
                         <a:defRPr sz="1000">
                           <a:solidFill>
-                            <a:srgbClr val="E2E8F0"/>
+                            <a:srgbClr val="2C3E50"/>
                           </a:solidFill>
                         </a:defRPr>
                       </a:pPr>
@@ -11032,7 +10892,7 @@
                       <a:pPr>
                         <a:defRPr sz="1000">
                           <a:solidFill>
-                            <a:srgbClr val="E2E8F0"/>
+                            <a:srgbClr val="2C3E50"/>
                           </a:solidFill>
                         </a:defRPr>
                       </a:pPr>
@@ -11060,7 +10920,7 @@
                       <a:pPr>
                         <a:defRPr sz="1000">
                           <a:solidFill>
-                            <a:srgbClr val="E2E8F0"/>
+                            <a:srgbClr val="2C3E50"/>
                           </a:solidFill>
                         </a:defRPr>
                       </a:pPr>
@@ -11077,7 +10937,7 @@
                       <a:pPr>
                         <a:defRPr sz="1000">
                           <a:solidFill>
-                            <a:srgbClr val="E2E8F0"/>
+                            <a:srgbClr val="2C3E50"/>
                           </a:solidFill>
                         </a:defRPr>
                       </a:pPr>
@@ -11105,7 +10965,7 @@
                       <a:pPr>
                         <a:defRPr sz="1000">
                           <a:solidFill>
-                            <a:srgbClr val="E2E8F0"/>
+                            <a:srgbClr val="2C3E50"/>
                           </a:solidFill>
                         </a:defRPr>
                       </a:pPr>
@@ -11122,7 +10982,7 @@
                       <a:pPr>
                         <a:defRPr sz="1000">
                           <a:solidFill>
-                            <a:srgbClr val="E2E8F0"/>
+                            <a:srgbClr val="2C3E50"/>
                           </a:solidFill>
                         </a:defRPr>
                       </a:pPr>
@@ -11150,7 +11010,7 @@
                       <a:pPr>
                         <a:defRPr sz="1000">
                           <a:solidFill>
-                            <a:srgbClr val="E2E8F0"/>
+                            <a:srgbClr val="2C3E50"/>
                           </a:solidFill>
                         </a:defRPr>
                       </a:pPr>
@@ -11167,7 +11027,7 @@
                       <a:pPr>
                         <a:defRPr sz="1000">
                           <a:solidFill>
-                            <a:srgbClr val="E2E8F0"/>
+                            <a:srgbClr val="2C3E50"/>
                           </a:solidFill>
                         </a:defRPr>
                       </a:pPr>
@@ -11197,7 +11057,7 @@
                       <a:pPr>
                         <a:defRPr sz="1000">
                           <a:solidFill>
-                            <a:srgbClr val="E2E8F0"/>
+                            <a:srgbClr val="2C3E50"/>
                           </a:solidFill>
                         </a:defRPr>
                       </a:pPr>
@@ -11225,7 +11085,7 @@
                       <a:pPr>
                         <a:defRPr sz="1000">
                           <a:solidFill>
-                            <a:srgbClr val="E2E8F0"/>
+                            <a:srgbClr val="2C3E50"/>
                           </a:solidFill>
                         </a:defRPr>
                       </a:pPr>
@@ -11242,7 +11102,7 @@
                       <a:pPr>
                         <a:defRPr sz="1000">
                           <a:solidFill>
-                            <a:srgbClr val="E2E8F0"/>
+                            <a:srgbClr val="2C3E50"/>
                           </a:solidFill>
                         </a:defRPr>
                       </a:pPr>
@@ -11270,7 +11130,7 @@
                       <a:pPr>
                         <a:defRPr sz="1000">
                           <a:solidFill>
-                            <a:srgbClr val="E2E8F0"/>
+                            <a:srgbClr val="2C3E50"/>
                           </a:solidFill>
                         </a:defRPr>
                       </a:pPr>
@@ -11287,7 +11147,7 @@
                       <a:pPr>
                         <a:defRPr sz="1000">
                           <a:solidFill>
-                            <a:srgbClr val="E2E8F0"/>
+                            <a:srgbClr val="2C3E50"/>
                           </a:solidFill>
                         </a:defRPr>
                       </a:pPr>
@@ -11315,7 +11175,7 @@
                       <a:pPr>
                         <a:defRPr sz="1000">
                           <a:solidFill>
-                            <a:srgbClr val="E2E8F0"/>
+                            <a:srgbClr val="2C3E50"/>
                           </a:solidFill>
                         </a:defRPr>
                       </a:pPr>
@@ -11332,7 +11192,7 @@
                       <a:pPr>
                         <a:defRPr sz="1000">
                           <a:solidFill>
-                            <a:srgbClr val="E2E8F0"/>
+                            <a:srgbClr val="2C3E50"/>
                           </a:solidFill>
                         </a:defRPr>
                       </a:pPr>
@@ -11360,7 +11220,7 @@
                       <a:pPr>
                         <a:defRPr sz="1000">
                           <a:solidFill>
-                            <a:srgbClr val="E2E8F0"/>
+                            <a:srgbClr val="2C3E50"/>
                           </a:solidFill>
                         </a:defRPr>
                       </a:pPr>
@@ -11377,7 +11237,7 @@
                       <a:pPr>
                         <a:defRPr sz="1000">
                           <a:solidFill>
-                            <a:srgbClr val="E2E8F0"/>
+                            <a:srgbClr val="2C3E50"/>
                           </a:solidFill>
                         </a:defRPr>
                       </a:pPr>
@@ -11508,15 +11368,10 @@
   <p:cSld>
     <p:bg>
       <p:bgPr>
-        <a:effectLst/>
         <a:solidFill>
           <a:srgbClr val="1E3A5F"/>
         </a:solidFill>
-      </p:bgPr>
-      <p:bgPr>
-        <a:solidFill>
-          <a:srgbClr val="F1F5F9"/>
-        </a:solidFill>
+        <a:effectLst/>
       </p:bgPr>
     </p:bg>
     <p:spTree>
@@ -11536,16 +11391,7 @@
           <a:solidFill>
             <a:srgbClr val="818CF8"/>
           </a:solidFill>
-          <a:xfrm>
-            <a:off x="0" y="0"/>
-            <a:ext cx="12191695" cy="1097280"/>
-          </a:xfrm>
-          <a:prstGeom prst="rect">
-            <a:avLst/>
-          </a:prstGeom>
-          <a:ln>
-            <a:noFill/>
-          </a:ln>
+          <a:effectLst/>
         </p:spPr>
         <p:style>
           <a:lnRef idx="1">
@@ -11601,7 +11447,7 @@
             <a:r>
               <a:rPr>
                 <a:solidFill>
-                  <a:srgbClr val="FFFFFF"/>
+                  <a:srgbClr val="CBD5E1"/>
                 </a:solidFill>
               </a:rPr>
               <a:t>Stack Tecnologico: Behave + Python + Selenium</a:t>
@@ -11756,7 +11602,7 @@
                       <a:pPr>
                         <a:defRPr sz="1000">
                           <a:solidFill>
-                            <a:srgbClr val="E2E8F0"/>
+                            <a:srgbClr val="2C3E50"/>
                           </a:solidFill>
                         </a:defRPr>
                       </a:pPr>
@@ -11784,7 +11630,7 @@
                       <a:pPr>
                         <a:defRPr sz="1000">
                           <a:solidFill>
-                            <a:srgbClr val="E2E8F0"/>
+                            <a:srgbClr val="2C3E50"/>
                           </a:solidFill>
                         </a:defRPr>
                       </a:pPr>
@@ -11812,7 +11658,7 @@
                       <a:pPr>
                         <a:defRPr sz="1000">
                           <a:solidFill>
-                            <a:srgbClr val="E2E8F0"/>
+                            <a:srgbClr val="2C3E50"/>
                           </a:solidFill>
                         </a:defRPr>
                       </a:pPr>
@@ -11840,7 +11686,7 @@
                       <a:pPr>
                         <a:defRPr sz="1000">
                           <a:solidFill>
-                            <a:srgbClr val="E2E8F0"/>
+                            <a:srgbClr val="2C3E50"/>
                           </a:solidFill>
                         </a:defRPr>
                       </a:pPr>
@@ -11870,7 +11716,7 @@
                       <a:pPr>
                         <a:defRPr sz="1000">
                           <a:solidFill>
-                            <a:srgbClr val="E2E8F0"/>
+                            <a:srgbClr val="2C3E50"/>
                           </a:solidFill>
                         </a:defRPr>
                       </a:pPr>
@@ -11898,7 +11744,7 @@
                       <a:pPr>
                         <a:defRPr sz="1000">
                           <a:solidFill>
-                            <a:srgbClr val="E2E8F0"/>
+                            <a:srgbClr val="2C3E50"/>
                           </a:solidFill>
                         </a:defRPr>
                       </a:pPr>
@@ -11926,7 +11772,7 @@
                       <a:pPr>
                         <a:defRPr sz="1000">
                           <a:solidFill>
-                            <a:srgbClr val="E2E8F0"/>
+                            <a:srgbClr val="2C3E50"/>
                           </a:solidFill>
                         </a:defRPr>
                       </a:pPr>
@@ -11954,7 +11800,7 @@
                       <a:pPr>
                         <a:defRPr sz="1000">
                           <a:solidFill>
-                            <a:srgbClr val="E2E8F0"/>
+                            <a:srgbClr val="2C3E50"/>
                           </a:solidFill>
                         </a:defRPr>
                       </a:pPr>
@@ -11984,7 +11830,7 @@
                       <a:pPr>
                         <a:defRPr sz="1000">
                           <a:solidFill>
-                            <a:srgbClr val="E2E8F0"/>
+                            <a:srgbClr val="2C3E50"/>
                           </a:solidFill>
                         </a:defRPr>
                       </a:pPr>
@@ -12012,7 +11858,7 @@
                       <a:pPr>
                         <a:defRPr sz="1000">
                           <a:solidFill>
-                            <a:srgbClr val="E2E8F0"/>
+                            <a:srgbClr val="2C3E50"/>
                           </a:solidFill>
                         </a:defRPr>
                       </a:pPr>
@@ -12040,7 +11886,7 @@
                       <a:pPr>
                         <a:defRPr sz="1000">
                           <a:solidFill>
-                            <a:srgbClr val="E2E8F0"/>
+                            <a:srgbClr val="2C3E50"/>
                           </a:solidFill>
                         </a:defRPr>
                       </a:pPr>
@@ -12068,7 +11914,7 @@
                       <a:pPr>
                         <a:defRPr sz="1000">
                           <a:solidFill>
-                            <a:srgbClr val="E2E8F0"/>
+                            <a:srgbClr val="2C3E50"/>
                           </a:solidFill>
                         </a:defRPr>
                       </a:pPr>
@@ -12098,7 +11944,7 @@
                       <a:pPr>
                         <a:defRPr sz="1000">
                           <a:solidFill>
-                            <a:srgbClr val="E2E8F0"/>
+                            <a:srgbClr val="2C3E50"/>
                           </a:solidFill>
                         </a:defRPr>
                       </a:pPr>
@@ -12126,7 +11972,7 @@
                       <a:pPr>
                         <a:defRPr sz="1000">
                           <a:solidFill>
-                            <a:srgbClr val="E2E8F0"/>
+                            <a:srgbClr val="2C3E50"/>
                           </a:solidFill>
                         </a:defRPr>
                       </a:pPr>
@@ -12154,7 +12000,7 @@
                       <a:pPr>
                         <a:defRPr sz="1000">
                           <a:solidFill>
-                            <a:srgbClr val="E2E8F0"/>
+                            <a:srgbClr val="2C3E50"/>
                           </a:solidFill>
                         </a:defRPr>
                       </a:pPr>
@@ -12182,7 +12028,7 @@
                       <a:pPr>
                         <a:defRPr sz="1000">
                           <a:solidFill>
-                            <a:srgbClr val="E2E8F0"/>
+                            <a:srgbClr val="2C3E50"/>
                           </a:solidFill>
                         </a:defRPr>
                       </a:pPr>
@@ -12212,7 +12058,7 @@
                       <a:pPr>
                         <a:defRPr sz="1000">
                           <a:solidFill>
-                            <a:srgbClr val="E2E8F0"/>
+                            <a:srgbClr val="2C3E50"/>
                           </a:solidFill>
                         </a:defRPr>
                       </a:pPr>
@@ -12240,7 +12086,7 @@
                       <a:pPr>
                         <a:defRPr sz="1000">
                           <a:solidFill>
-                            <a:srgbClr val="E2E8F0"/>
+                            <a:srgbClr val="2C3E50"/>
                           </a:solidFill>
                         </a:defRPr>
                       </a:pPr>
@@ -12268,7 +12114,7 @@
                       <a:pPr>
                         <a:defRPr sz="1000">
                           <a:solidFill>
-                            <a:srgbClr val="E2E8F0"/>
+                            <a:srgbClr val="2C3E50"/>
                           </a:solidFill>
                         </a:defRPr>
                       </a:pPr>
@@ -12296,7 +12142,7 @@
                       <a:pPr>
                         <a:defRPr sz="1000">
                           <a:solidFill>
-                            <a:srgbClr val="E2E8F0"/>
+                            <a:srgbClr val="2C3E50"/>
                           </a:solidFill>
                         </a:defRPr>
                       </a:pPr>
@@ -12326,7 +12172,7 @@
                       <a:pPr>
                         <a:defRPr sz="1000">
                           <a:solidFill>
-                            <a:srgbClr val="E2E8F0"/>
+                            <a:srgbClr val="2C3E50"/>
                           </a:solidFill>
                         </a:defRPr>
                       </a:pPr>
@@ -12354,7 +12200,7 @@
                       <a:pPr>
                         <a:defRPr sz="1000">
                           <a:solidFill>
-                            <a:srgbClr val="E2E8F0"/>
+                            <a:srgbClr val="2C3E50"/>
                           </a:solidFill>
                         </a:defRPr>
                       </a:pPr>
@@ -12382,7 +12228,7 @@
                       <a:pPr>
                         <a:defRPr sz="1000">
                           <a:solidFill>
-                            <a:srgbClr val="E2E8F0"/>
+                            <a:srgbClr val="2C3E50"/>
                           </a:solidFill>
                         </a:defRPr>
                       </a:pPr>
@@ -12410,7 +12256,7 @@
                       <a:pPr>
                         <a:defRPr sz="1000">
                           <a:solidFill>
-                            <a:srgbClr val="E2E8F0"/>
+                            <a:srgbClr val="2C3E50"/>
                           </a:solidFill>
                         </a:defRPr>
                       </a:pPr>

--- a/PRESENTACION_FINAL_EFT.pptx
+++ b/PRESENTACION_FINAL_EFT.pptx
@@ -5,19 +5,19 @@
     <p:sldMasterId id="2147483648" r:id="rId1"/>
   </p:sldMasterIdLst>
   <p:sldIdLst>
-    <p:sldId id="256" r:id="rId7"/>
-    <p:sldId id="257" r:id="rId8"/>
-    <p:sldId id="258" r:id="rId9"/>
-    <p:sldId id="259" r:id="rId10"/>
-    <p:sldId id="260" r:id="rId11"/>
-    <p:sldId id="261" r:id="rId12"/>
-    <p:sldId id="262" r:id="rId13"/>
-    <p:sldId id="263" r:id="rId14"/>
-    <p:sldId id="264" r:id="rId15"/>
-    <p:sldId id="265" r:id="rId16"/>
-    <p:sldId id="266" r:id="rId17"/>
+    <p:sldId id="256" r:id="rId2"/>
+    <p:sldId id="257" r:id="rId3"/>
+    <p:sldId id="258" r:id="rId4"/>
+    <p:sldId id="259" r:id="rId5"/>
+    <p:sldId id="260" r:id="rId6"/>
+    <p:sldId id="261" r:id="rId7"/>
+    <p:sldId id="262" r:id="rId8"/>
+    <p:sldId id="263" r:id="rId9"/>
+    <p:sldId id="264" r:id="rId10"/>
+    <p:sldId id="265" r:id="rId11"/>
+    <p:sldId id="266" r:id="rId12"/>
   </p:sldIdLst>
-  <p:sldSz cx="12191695" cy="6858000" type="screen4x3"/>
+  <p:sldSz cx="12192000" cy="6858000"/>
   <p:notesSz cx="6858000" cy="9144000"/>
   <p:defaultTextStyle>
     <a:defPPr>
@@ -114,6 +114,22 @@
       </a:defRPr>
     </a:lvl9pPr>
   </p:defaultTextStyle>
+  <p:extLst>
+    <p:ext uri="{EFAFB233-063F-42B5-8137-9DF3F51BA10A}">
+      <p15:sldGuideLst xmlns:p15="http://schemas.microsoft.com/office/powerpoint/2012/main">
+        <p15:guide id="1" orient="horz" pos="2160">
+          <p15:clr>
+            <a:srgbClr val="A4A3A4"/>
+          </p15:clr>
+        </p15:guide>
+        <p15:guide id="2" pos="2880">
+          <p15:clr>
+            <a:srgbClr val="A4A3A4"/>
+          </p15:clr>
+        </p15:guide>
+      </p15:sldGuideLst>
+    </p:ext>
+  </p:extLst>
 </p:presentation>
 </file>
 
@@ -298,7 +314,7 @@
           <a:p>
             <a:fld id="{5BCAD085-E8A6-8845-BD4E-CB4CCA059FC4}" type="datetimeFigureOut">
               <a:rPr lang="en-US" smtClean="0"/>
-              <a:t>1/27/13</a:t>
+              <a:t>7/12/2026</a:t>
             </a:fld>
             <a:endParaRPr lang="en-US"/>
           </a:p>
@@ -340,7 +356,7 @@
           <a:p>
             <a:fld id="{C1FF6DA9-008F-8B48-92A6-B652298478BF}" type="slidenum">
               <a:rPr lang="en-US" smtClean="0"/>
-              <a:t>‹#›</a:t>
+              <a:t>‹Nº›</a:t>
             </a:fld>
             <a:endParaRPr lang="en-US"/>
           </a:p>
@@ -468,7 +484,7 @@
           <a:p>
             <a:fld id="{5BCAD085-E8A6-8845-BD4E-CB4CCA059FC4}" type="datetimeFigureOut">
               <a:rPr lang="en-US" smtClean="0"/>
-              <a:t>1/27/13</a:t>
+              <a:t>7/12/2026</a:t>
             </a:fld>
             <a:endParaRPr lang="en-US"/>
           </a:p>
@@ -510,7 +526,7 @@
           <a:p>
             <a:fld id="{C1FF6DA9-008F-8B48-92A6-B652298478BF}" type="slidenum">
               <a:rPr lang="en-US" smtClean="0"/>
-              <a:t>‹#›</a:t>
+              <a:t>‹Nº›</a:t>
             </a:fld>
             <a:endParaRPr lang="en-US"/>
           </a:p>
@@ -648,7 +664,7 @@
           <a:p>
             <a:fld id="{5BCAD085-E8A6-8845-BD4E-CB4CCA059FC4}" type="datetimeFigureOut">
               <a:rPr lang="en-US" smtClean="0"/>
-              <a:t>1/27/13</a:t>
+              <a:t>7/12/2026</a:t>
             </a:fld>
             <a:endParaRPr lang="en-US"/>
           </a:p>
@@ -690,7 +706,7 @@
           <a:p>
             <a:fld id="{C1FF6DA9-008F-8B48-92A6-B652298478BF}" type="slidenum">
               <a:rPr lang="en-US" smtClean="0"/>
-              <a:t>‹#›</a:t>
+              <a:t>‹Nº›</a:t>
             </a:fld>
             <a:endParaRPr lang="en-US"/>
           </a:p>
@@ -818,7 +834,7 @@
           <a:p>
             <a:fld id="{5BCAD085-E8A6-8845-BD4E-CB4CCA059FC4}" type="datetimeFigureOut">
               <a:rPr lang="en-US" smtClean="0"/>
-              <a:t>1/27/13</a:t>
+              <a:t>7/12/2026</a:t>
             </a:fld>
             <a:endParaRPr lang="en-US"/>
           </a:p>
@@ -860,7 +876,7 @@
           <a:p>
             <a:fld id="{C1FF6DA9-008F-8B48-92A6-B652298478BF}" type="slidenum">
               <a:rPr lang="en-US" smtClean="0"/>
-              <a:t>‹#›</a:t>
+              <a:t>‹Nº›</a:t>
             </a:fld>
             <a:endParaRPr lang="en-US"/>
           </a:p>
@@ -1064,7 +1080,7 @@
           <a:p>
             <a:fld id="{5BCAD085-E8A6-8845-BD4E-CB4CCA059FC4}" type="datetimeFigureOut">
               <a:rPr lang="en-US" smtClean="0"/>
-              <a:t>1/27/13</a:t>
+              <a:t>7/12/2026</a:t>
             </a:fld>
             <a:endParaRPr lang="en-US"/>
           </a:p>
@@ -1106,7 +1122,7 @@
           <a:p>
             <a:fld id="{C1FF6DA9-008F-8B48-92A6-B652298478BF}" type="slidenum">
               <a:rPr lang="en-US" smtClean="0"/>
-              <a:t>‹#›</a:t>
+              <a:t>‹Nº›</a:t>
             </a:fld>
             <a:endParaRPr lang="en-US"/>
           </a:p>
@@ -1352,7 +1368,7 @@
           <a:p>
             <a:fld id="{5BCAD085-E8A6-8845-BD4E-CB4CCA059FC4}" type="datetimeFigureOut">
               <a:rPr lang="en-US" smtClean="0"/>
-              <a:t>1/27/13</a:t>
+              <a:t>7/12/2026</a:t>
             </a:fld>
             <a:endParaRPr lang="en-US"/>
           </a:p>
@@ -1394,7 +1410,7 @@
           <a:p>
             <a:fld id="{C1FF6DA9-008F-8B48-92A6-B652298478BF}" type="slidenum">
               <a:rPr lang="en-US" smtClean="0"/>
-              <a:t>‹#›</a:t>
+              <a:t>‹Nº›</a:t>
             </a:fld>
             <a:endParaRPr lang="en-US"/>
           </a:p>
@@ -1774,7 +1790,7 @@
           <a:p>
             <a:fld id="{5BCAD085-E8A6-8845-BD4E-CB4CCA059FC4}" type="datetimeFigureOut">
               <a:rPr lang="en-US" smtClean="0"/>
-              <a:t>1/27/13</a:t>
+              <a:t>7/12/2026</a:t>
             </a:fld>
             <a:endParaRPr lang="en-US"/>
           </a:p>
@@ -1816,7 +1832,7 @@
           <a:p>
             <a:fld id="{C1FF6DA9-008F-8B48-92A6-B652298478BF}" type="slidenum">
               <a:rPr lang="en-US" smtClean="0"/>
-              <a:t>‹#›</a:t>
+              <a:t>‹Nº›</a:t>
             </a:fld>
             <a:endParaRPr lang="en-US"/>
           </a:p>
@@ -1892,7 +1908,7 @@
           <a:p>
             <a:fld id="{5BCAD085-E8A6-8845-BD4E-CB4CCA059FC4}" type="datetimeFigureOut">
               <a:rPr lang="en-US" smtClean="0"/>
-              <a:t>1/27/13</a:t>
+              <a:t>7/12/2026</a:t>
             </a:fld>
             <a:endParaRPr lang="en-US"/>
           </a:p>
@@ -1934,7 +1950,7 @@
           <a:p>
             <a:fld id="{C1FF6DA9-008F-8B48-92A6-B652298478BF}" type="slidenum">
               <a:rPr lang="en-US" smtClean="0"/>
-              <a:t>‹#›</a:t>
+              <a:t>‹Nº›</a:t>
             </a:fld>
             <a:endParaRPr lang="en-US"/>
           </a:p>
@@ -1987,7 +2003,7 @@
           <a:p>
             <a:fld id="{5BCAD085-E8A6-8845-BD4E-CB4CCA059FC4}" type="datetimeFigureOut">
               <a:rPr lang="en-US" smtClean="0"/>
-              <a:t>1/27/13</a:t>
+              <a:t>7/12/2026</a:t>
             </a:fld>
             <a:endParaRPr lang="en-US"/>
           </a:p>
@@ -2029,7 +2045,7 @@
           <a:p>
             <a:fld id="{C1FF6DA9-008F-8B48-92A6-B652298478BF}" type="slidenum">
               <a:rPr lang="en-US" smtClean="0"/>
-              <a:t>‹#›</a:t>
+              <a:t>‹Nº›</a:t>
             </a:fld>
             <a:endParaRPr lang="en-US"/>
           </a:p>
@@ -2264,7 +2280,7 @@
           <a:p>
             <a:fld id="{5BCAD085-E8A6-8845-BD4E-CB4CCA059FC4}" type="datetimeFigureOut">
               <a:rPr lang="en-US" smtClean="0"/>
-              <a:t>1/27/13</a:t>
+              <a:t>7/12/2026</a:t>
             </a:fld>
             <a:endParaRPr lang="en-US"/>
           </a:p>
@@ -2306,7 +2322,7 @@
           <a:p>
             <a:fld id="{C1FF6DA9-008F-8B48-92A6-B652298478BF}" type="slidenum">
               <a:rPr lang="en-US" smtClean="0"/>
-              <a:t>‹#›</a:t>
+              <a:t>‹Nº›</a:t>
             </a:fld>
             <a:endParaRPr lang="en-US"/>
           </a:p>
@@ -2517,7 +2533,7 @@
           <a:p>
             <a:fld id="{5BCAD085-E8A6-8845-BD4E-CB4CCA059FC4}" type="datetimeFigureOut">
               <a:rPr lang="en-US" smtClean="0"/>
-              <a:t>1/27/13</a:t>
+              <a:t>7/12/2026</a:t>
             </a:fld>
             <a:endParaRPr lang="en-US"/>
           </a:p>
@@ -2559,7 +2575,7 @@
           <a:p>
             <a:fld id="{C1FF6DA9-008F-8B48-92A6-B652298478BF}" type="slidenum">
               <a:rPr lang="en-US" smtClean="0"/>
-              <a:t>‹#›</a:t>
+              <a:t>‹Nº›</a:t>
             </a:fld>
             <a:endParaRPr lang="en-US"/>
           </a:p>
@@ -2730,7 +2746,7 @@
           <a:p>
             <a:fld id="{5BCAD085-E8A6-8845-BD4E-CB4CCA059FC4}" type="datetimeFigureOut">
               <a:rPr lang="en-US" smtClean="0"/>
-              <a:t>1/27/13</a:t>
+              <a:t>7/12/2026</a:t>
             </a:fld>
             <a:endParaRPr lang="en-US"/>
           </a:p>
@@ -2808,7 +2824,7 @@
           <a:p>
             <a:fld id="{C1FF6DA9-008F-8B48-92A6-B652298478BF}" type="slidenum">
               <a:rPr lang="en-US" smtClean="0"/>
-              <a:t>‹#›</a:t>
+              <a:t>‹Nº›</a:t>
             </a:fld>
             <a:endParaRPr lang="en-US"/>
           </a:p>
@@ -3089,7 +3105,7 @@
 </file>
 
 <file path=ppt/slides/slide1.xml><?xml version="1.0" encoding="utf-8"?>
-<p:sld xmlns:a="http://schemas.openxmlformats.org/drawingml/2006/main" xmlns:p="http://schemas.openxmlformats.org/presentationml/2006/main" xmlns:r="http://schemas.openxmlformats.org/officeDocument/2006/relationships">
+<p:sld xmlns:a="http://schemas.openxmlformats.org/drawingml/2006/main" xmlns:r="http://schemas.openxmlformats.org/officeDocument/2006/relationships" xmlns:p="http://schemas.openxmlformats.org/presentationml/2006/main">
   <p:cSld>
     <p:bg>
       <p:bgPr>
@@ -3105,7 +3121,14 @@
         <p:cNvGrpSpPr/>
         <p:nvPr/>
       </p:nvGrpSpPr>
-      <p:grpSpPr/>
+      <p:grpSpPr>
+        <a:xfrm>
+          <a:off x="0" y="0"/>
+          <a:ext cx="0" cy="0"/>
+          <a:chOff x="0" y="0"/>
+          <a:chExt cx="0" cy="0"/>
+        </a:xfrm>
+      </p:grpSpPr>
       <p:sp>
         <p:nvSpPr>
           <p:cNvPr id="2" name="Rectangle 1"/>
@@ -3136,7 +3159,12 @@
           <a:bodyPr rtlCol="0" anchor="ctr"/>
           <a:lstStyle/>
           <a:p>
-            <a:pPr algn="ctr"/>
+            <a:pPr algn="ctr">
+              <a:defRPr>
+                <a:lang val="es-CL"/>
+              </a:defRPr>
+            </a:pPr>
+            <a:endParaRPr/>
           </a:p>
         </p:txBody>
       </p:sp>
@@ -3167,6 +3195,7 @@
                 <a:solidFill>
                   <a:srgbClr val="FFFFFF"/>
                 </a:solidFill>
+                <a:lang val="es-CL"/>
               </a:defRPr>
             </a:pPr>
             <a:r>
@@ -3174,6 +3203,7 @@
                 <a:solidFill>
                   <a:srgbClr val="FFFFFF"/>
                 </a:solidFill>
+                <a:lang val="es-CL"/>
               </a:rPr>
               <a:t>EVALUACION FINAL TRANSVERSAL</a:t>
             </a:r>
@@ -3207,6 +3237,7 @@
                 <a:solidFill>
                   <a:srgbClr val="BDC3C7"/>
                 </a:solidFill>
+                <a:lang val="es-CL"/>
               </a:defRPr>
             </a:pPr>
             <a:r>
@@ -3214,6 +3245,7 @@
                 <a:solidFill>
                   <a:srgbClr val="A5B4FC"/>
                 </a:solidFill>
+                <a:lang val="es-CL"/>
               </a:rPr>
               <a:t>Automatizacion de Pruebas - OrangeHRM</a:t>
             </a:r>
@@ -3247,6 +3279,7 @@
                 <a:solidFill>
                   <a:srgbClr val="BDC3C7"/>
                 </a:solidFill>
+                <a:lang val="es-CL"/>
               </a:defRPr>
             </a:pPr>
             <a:r>
@@ -3254,34 +3287,62 @@
                 <a:solidFill>
                   <a:srgbClr val="FFFFFF"/>
                 </a:solidFill>
+                <a:lang val="es-CL"/>
               </a:rPr>
               <a:t>Behave 1.2.6  +  Selenium 4.28  +  Python 3.14</a:t>
             </a:r>
+            <a:r>
+              <a:rPr>
+                <a:lang val="es-CL"/>
+              </a:rPr>
+              <a:t/>
+            </a:r>
             <a:br/>
+            <a:r>
+              <a:rPr>
+                <a:lang val="es-CL"/>
+              </a:rPr>
+              <a:t/>
+            </a:r>
             <a:br/>
             <a:r>
               <a:rPr>
                 <a:solidFill>
                   <a:srgbClr val="FFFFFF"/>
                 </a:solidFill>
+                <a:lang val="es-CL"/>
               </a:rPr>
               <a:t>Estudiante: Luis Tasso  |  Seccion: 802V</a:t>
             </a:r>
+            <a:r>
+              <a:rPr>
+                <a:lang val="es-CL"/>
+              </a:rPr>
+              <a:t/>
+            </a:r>
             <a:br/>
             <a:r>
               <a:rPr>
                 <a:solidFill>
                   <a:srgbClr val="FFFFFF"/>
                 </a:solidFill>
+                <a:lang val="es-CL"/>
               </a:rPr>
               <a:t>Profesor: Manuel Soto</a:t>
             </a:r>
+            <a:r>
+              <a:rPr>
+                <a:lang val="es-CL"/>
+              </a:rPr>
+              <a:t/>
+            </a:r>
             <a:br/>
             <a:r>
               <a:rPr>
                 <a:solidFill>
                   <a:srgbClr val="A5B4FC"/>
                 </a:solidFill>
+                <a:lang val="es-CL"/>
               </a:rPr>
               <a:t>API0101 - Automatizacion de Pruebas</a:t>
             </a:r>
@@ -3297,7 +3358,7 @@
 </file>
 
 <file path=ppt/slides/slide10.xml><?xml version="1.0" encoding="utf-8"?>
-<p:sld xmlns:a="http://schemas.openxmlformats.org/drawingml/2006/main" xmlns:p="http://schemas.openxmlformats.org/presentationml/2006/main" xmlns:r="http://schemas.openxmlformats.org/officeDocument/2006/relationships">
+<p:sld xmlns:a="http://schemas.openxmlformats.org/drawingml/2006/main" xmlns:r="http://schemas.openxmlformats.org/officeDocument/2006/relationships" xmlns:p="http://schemas.openxmlformats.org/presentationml/2006/main">
   <p:cSld>
     <p:bg>
       <p:bgPr>
@@ -3313,7 +3374,14 @@
         <p:cNvGrpSpPr/>
         <p:nvPr/>
       </p:nvGrpSpPr>
-      <p:grpSpPr/>
+      <p:grpSpPr>
+        <a:xfrm>
+          <a:off x="0" y="0"/>
+          <a:ext cx="0" cy="0"/>
+          <a:chOff x="0" y="0"/>
+          <a:chExt cx="0" cy="0"/>
+        </a:xfrm>
+      </p:grpSpPr>
       <p:sp>
         <p:nvSpPr>
           <p:cNvPr id="2" name="Rectangle 1"/>
@@ -3344,7 +3412,12 @@
           <a:bodyPr rtlCol="0" anchor="ctr"/>
           <a:lstStyle/>
           <a:p>
-            <a:pPr algn="ctr"/>
+            <a:pPr algn="ctr">
+              <a:defRPr>
+                <a:lang val="es-CL"/>
+              </a:defRPr>
+            </a:pPr>
+            <a:endParaRPr/>
           </a:p>
         </p:txBody>
       </p:sp>
@@ -3375,6 +3448,7 @@
                 <a:solidFill>
                   <a:srgbClr val="FFFFFF"/>
                 </a:solidFill>
+                <a:lang val="es-CL"/>
               </a:defRPr>
             </a:pPr>
             <a:r>
@@ -3382,6 +3456,7 @@
                 <a:solidFill>
                   <a:srgbClr val="CBD5E1"/>
                 </a:solidFill>
+                <a:lang val="es-CL"/>
               </a:rPr>
               <a:t>Conclusiones y Proyecciones</a:t>
             </a:r>
@@ -3418,6 +3493,7 @@
                 <a:solidFill>
                   <a:srgbClr val="2C3E50"/>
                 </a:solidFill>
+                <a:lang val="es-CL"/>
               </a:defRPr>
             </a:pPr>
             <a:r>
@@ -3425,6 +3501,7 @@
                 <a:solidFill>
                   <a:srgbClr val="CBD5E1"/>
                 </a:solidFill>
+                <a:lang val="es-CL"/>
               </a:rPr>
               <a:t>29/29 escenarios ejecutados</a:t>
             </a:r>
@@ -3438,6 +3515,7 @@
                 <a:solidFill>
                   <a:srgbClr val="2C3E50"/>
                 </a:solidFill>
+                <a:lang val="es-CL"/>
               </a:defRPr>
             </a:pPr>
             <a:r>
@@ -3445,6 +3523,7 @@
                 <a:solidFill>
                   <a:srgbClr val="CBD5E1"/>
                 </a:solidFill>
+                <a:lang val="es-CL"/>
               </a:rPr>
               <a:t>96.55% aprobacion (fallo intencional TC_004)</a:t>
             </a:r>
@@ -3458,6 +3537,7 @@
                 <a:solidFill>
                   <a:srgbClr val="2C3E50"/>
                 </a:solidFill>
+                <a:lang val="es-CL"/>
               </a:defRPr>
             </a:pPr>
             <a:r>
@@ -3465,6 +3545,7 @@
                 <a:solidFill>
                   <a:srgbClr val="CBD5E1"/>
                 </a:solidFill>
+                <a:lang val="es-CL"/>
               </a:rPr>
               <a:t>Suite bilingue: ingles + chino</a:t>
             </a:r>
@@ -3478,6 +3559,7 @@
                 <a:solidFill>
                   <a:srgbClr val="2C3E50"/>
                 </a:solidFill>
+                <a:lang val="es-CL"/>
               </a:defRPr>
             </a:pPr>
             <a:r>
@@ -3485,6 +3567,7 @@
                 <a:solidFill>
                   <a:srgbClr val="CBD5E1"/>
                 </a:solidFill>
+                <a:lang val="es-CL"/>
               </a:rPr>
               <a:t>Data-Driven: 18 escenarios parametrizados (62%)</a:t>
             </a:r>
@@ -3498,6 +3581,7 @@
                 <a:solidFill>
                   <a:srgbClr val="2C3E50"/>
                 </a:solidFill>
+                <a:lang val="es-CL"/>
               </a:defRPr>
             </a:pPr>
             <a:r>
@@ -3505,6 +3589,7 @@
                 <a:solidFill>
                   <a:srgbClr val="CBD5E1"/>
                 </a:solidFill>
+                <a:lang val="es-CL"/>
               </a:rPr>
               <a:t>177 screenshots de evidencia</a:t>
             </a:r>
@@ -3518,6 +3603,7 @@
                 <a:solidFill>
                   <a:srgbClr val="2C3E50"/>
                 </a:solidFill>
+                <a:lang val="es-CL"/>
               </a:defRPr>
             </a:pPr>
             <a:r>
@@ -3525,6 +3611,7 @@
                 <a:solidFill>
                   <a:srgbClr val="CBD5E1"/>
                 </a:solidFill>
+                <a:lang val="es-CL"/>
               </a:rPr>
               <a:t>10 features, 6 archivos Excel</a:t>
             </a:r>
@@ -3538,6 +3625,7 @@
                 <a:solidFill>
                   <a:srgbClr val="2C3E50"/>
                 </a:solidFill>
+                <a:lang val="es-CL"/>
               </a:defRPr>
             </a:pPr>
             <a:r>
@@ -3545,6 +3633,7 @@
                 <a:solidFill>
                   <a:srgbClr val="CBD5E1"/>
                 </a:solidFill>
+                <a:lang val="es-CL"/>
               </a:rPr>
               <a:t>Metricas trazables al reporte</a:t>
             </a:r>
@@ -3590,7 +3679,12 @@
           <a:bodyPr rtlCol="0" anchor="ctr"/>
           <a:lstStyle/>
           <a:p>
-            <a:pPr algn="ctr"/>
+            <a:pPr algn="ctr">
+              <a:defRPr>
+                <a:lang val="es-CL"/>
+              </a:defRPr>
+            </a:pPr>
+            <a:endParaRPr/>
           </a:p>
         </p:txBody>
       </p:sp>
@@ -3621,6 +3715,7 @@
                 <a:solidFill>
                   <a:srgbClr val="FFFFFF"/>
                 </a:solidFill>
+                <a:lang val="es-CL"/>
               </a:defRPr>
             </a:pPr>
             <a:r>
@@ -3628,51 +3723,87 @@
                 <a:solidFill>
                   <a:srgbClr val="CBD5E1"/>
                 </a:solidFill>
+                <a:lang val="es-CL"/>
               </a:rPr>
               <a:t>Proyecciones:</a:t>
             </a:r>
+            <a:r>
+              <a:rPr>
+                <a:lang val="es-CL"/>
+              </a:rPr>
+              <a:t/>
+            </a:r>
             <a:br/>
             <a:r>
               <a:rPr>
                 <a:solidFill>
                   <a:srgbClr val="CBD5E1"/>
                 </a:solidFill>
+                <a:lang val="es-CL"/>
               </a:rPr>
               <a:t>- GitHub Actions para CI/CD</a:t>
             </a:r>
+            <a:r>
+              <a:rPr>
+                <a:lang val="es-CL"/>
+              </a:rPr>
+              <a:t/>
+            </a:r>
             <a:br/>
             <a:r>
               <a:rPr>
                 <a:solidFill>
                   <a:srgbClr val="CBD5E1"/>
                 </a:solidFill>
+                <a:lang val="es-CL"/>
               </a:rPr>
               <a:t>- Page Object Model completo</a:t>
             </a:r>
+            <a:r>
+              <a:rPr>
+                <a:lang val="es-CL"/>
+              </a:rPr>
+              <a:t/>
+            </a:r>
             <a:br/>
             <a:r>
               <a:rPr>
                 <a:solidFill>
                   <a:srgbClr val="CBD5E1"/>
                 </a:solidFill>
+                <a:lang val="es-CL"/>
               </a:rPr>
               <a:t>- Allure Reports para tendencias</a:t>
             </a:r>
+            <a:r>
+              <a:rPr>
+                <a:lang val="es-CL"/>
+              </a:rPr>
+              <a:t/>
+            </a:r>
             <a:br/>
             <a:r>
               <a:rPr>
                 <a:solidFill>
                   <a:srgbClr val="CBD5E1"/>
                 </a:solidFill>
+                <a:lang val="es-CL"/>
               </a:rPr>
               <a:t>- Ejecucion paralela behave -j 4</a:t>
             </a:r>
+            <a:r>
+              <a:rPr>
+                <a:lang val="es-CL"/>
+              </a:rPr>
+              <a:t/>
+            </a:r>
             <a:br/>
             <a:r>
               <a:rPr>
                 <a:solidFill>
                   <a:srgbClr val="CBD5E1"/>
                 </a:solidFill>
+                <a:lang val="es-CL"/>
               </a:rPr>
               <a:t>- Expandir cobertura a mas modulos</a:t>
             </a:r>
@@ -3718,7 +3849,12 @@
           <a:bodyPr rtlCol="0" anchor="ctr"/>
           <a:lstStyle/>
           <a:p>
-            <a:pPr algn="ctr"/>
+            <a:pPr algn="ctr">
+              <a:defRPr>
+                <a:lang val="es-CL"/>
+              </a:defRPr>
+            </a:pPr>
+            <a:endParaRPr/>
           </a:p>
         </p:txBody>
       </p:sp>
@@ -3731,7 +3867,7 @@
         <p:spPr>
           <a:xfrm>
             <a:off x="6675120" y="4297680"/>
-            <a:ext cx="4572000" cy="1828800"/>
+            <a:ext cx="4572000" cy="1015663"/>
           </a:xfrm>
           <a:prstGeom prst="rect">
             <a:avLst/>
@@ -3749,43 +3885,176 @@
                 <a:solidFill>
                   <a:srgbClr val="2C3E50"/>
                 </a:solidFill>
+                <a:lang val="es-CL"/>
               </a:defRPr>
             </a:pPr>
             <a:r>
-              <a:rPr>
-                <a:solidFill>
-                  <a:srgbClr val="CBD5E1"/>
-                </a:solidFill>
-              </a:rPr>
-              <a:t>5 oportunidades de mejora documentadas</a:t>
-            </a:r>
-            <a:br/>
-            <a:r>
-              <a:rPr>
-                <a:solidFill>
-                  <a:srgbClr val="CBD5E1"/>
-                </a:solidFill>
-              </a:rPr>
-              <a:t>6 propuestas formales (2 producto + 4 proceso)</a:t>
-            </a:r>
-            <a:br/>
-            <a:r>
-              <a:rPr>
-                <a:solidFill>
-                  <a:srgbClr val="CBD5E1"/>
-                </a:solidFill>
+              <a:rPr dirty="0">
+                <a:lang val="es-CL"/>
+              </a:rPr>
+              <a:t>5 </a:t>
+            </a:r>
+            <a:r>
+              <a:rPr dirty="0" err="1">
+                <a:lang val="es-CL"/>
+              </a:rPr>
+              <a:t>oportunidades</a:t>
+            </a:r>
+            <a:r>
+              <a:rPr dirty="0">
+                <a:lang val="es-CL"/>
+              </a:rPr>
+              <a:t> de </a:t>
+            </a:r>
+            <a:r>
+              <a:rPr dirty="0" err="1">
+                <a:lang val="es-CL"/>
+              </a:rPr>
+              <a:t>mejora</a:t>
+            </a:r>
+            <a:r>
+              <a:rPr dirty="0">
+                <a:lang val="es-CL"/>
+              </a:rPr>
+              <a:t> </a:t>
+            </a:r>
+            <a:r>
+              <a:rPr dirty="0" err="1">
+                <a:lang val="es-CL"/>
+              </a:rPr>
+              <a:t>documentadas</a:t>
+            </a:r>
+            <a:r>
+              <a:rPr dirty="0">
+                <a:lang val="es-CL"/>
+              </a:rPr>
+              <a:t/>
+            </a:r>
+            <a:br>
+              <a:rPr dirty="0"/>
+            </a:br>
+            <a:r>
+              <a:rPr dirty="0">
+                <a:lang val="es-CL"/>
+              </a:rPr>
+              <a:t>6 </a:t>
+            </a:r>
+            <a:r>
+              <a:rPr dirty="0" err="1">
+                <a:lang val="es-CL"/>
+              </a:rPr>
+              <a:t>propuestas</a:t>
+            </a:r>
+            <a:r>
+              <a:rPr dirty="0">
+                <a:lang val="es-CL"/>
+              </a:rPr>
+              <a:t> </a:t>
+            </a:r>
+            <a:r>
+              <a:rPr dirty="0" err="1">
+                <a:lang val="es-CL"/>
+              </a:rPr>
+              <a:t>formales</a:t>
+            </a:r>
+            <a:r>
+              <a:rPr dirty="0">
+                <a:lang val="es-CL"/>
+              </a:rPr>
+              <a:t> (2 </a:t>
+            </a:r>
+            <a:r>
+              <a:rPr dirty="0" err="1">
+                <a:lang val="es-CL"/>
+              </a:rPr>
+              <a:t>producto</a:t>
+            </a:r>
+            <a:r>
+              <a:rPr dirty="0">
+                <a:lang val="es-CL"/>
+              </a:rPr>
+              <a:t> + 4 </a:t>
+            </a:r>
+            <a:r>
+              <a:rPr dirty="0" err="1">
+                <a:lang val="es-CL"/>
+              </a:rPr>
+              <a:t>proceso</a:t>
+            </a:r>
+            <a:r>
+              <a:rPr dirty="0">
+                <a:lang val="es-CL"/>
+              </a:rPr>
+              <a:t>)</a:t>
+            </a:r>
+            <a:r>
+              <a:rPr dirty="0">
+                <a:lang val="es-CL"/>
+              </a:rPr>
+              <a:t/>
+            </a:r>
+            <a:br>
+              <a:rPr dirty="0"/>
+            </a:br>
+            <a:r>
+              <a:rPr dirty="0">
+                <a:lang val="es-CL"/>
               </a:rPr>
               <a:t>Stack: Behave 1.2.6 + Selenium 4.28 + Python 3.14</a:t>
             </a:r>
-            <a:br/>
-            <a:br/>
-            <a:r>
-              <a:rPr>
-                <a:solidFill>
-                  <a:srgbClr val="CBD5E1"/>
-                </a:solidFill>
-              </a:rPr>
-              <a:t>Lista para integracion en pipeline CI/CD</a:t>
+            <a:r>
+              <a:rPr dirty="0">
+                <a:lang val="es-CL"/>
+              </a:rPr>
+              <a:t/>
+            </a:r>
+            <a:br>
+              <a:rPr dirty="0"/>
+            </a:br>
+            <a:r>
+              <a:rPr dirty="0">
+                <a:lang val="es-CL"/>
+              </a:rPr>
+              <a:t/>
+            </a:r>
+            <a:br>
+              <a:rPr dirty="0"/>
+            </a:br>
+            <a:r>
+              <a:rPr dirty="0" err="1">
+                <a:lang val="es-CL"/>
+              </a:rPr>
+              <a:t>Lista</a:t>
+            </a:r>
+            <a:r>
+              <a:rPr dirty="0">
+                <a:lang val="es-CL"/>
+              </a:rPr>
+              <a:t> para </a:t>
+            </a:r>
+            <a:r>
+              <a:rPr dirty="0" err="1">
+                <a:lang val="es-CL"/>
+              </a:rPr>
+              <a:t>integracion</a:t>
+            </a:r>
+            <a:r>
+              <a:rPr dirty="0">
+                <a:lang val="es-CL"/>
+              </a:rPr>
+              <a:t> </a:t>
+            </a:r>
+            <a:r>
+              <a:rPr dirty="0" err="1">
+                <a:lang val="es-CL"/>
+              </a:rPr>
+              <a:t>en</a:t>
+            </a:r>
+            <a:r>
+              <a:rPr dirty="0">
+                <a:lang val="es-CL"/>
+              </a:rPr>
+              <a:t> pipeline CI/CD</a:t>
             </a:r>
           </a:p>
         </p:txBody>
@@ -3799,7 +4068,7 @@
 </file>
 
 <file path=ppt/slides/slide11.xml><?xml version="1.0" encoding="utf-8"?>
-<p:sld xmlns:a="http://schemas.openxmlformats.org/drawingml/2006/main" xmlns:p="http://schemas.openxmlformats.org/presentationml/2006/main" xmlns:r="http://schemas.openxmlformats.org/officeDocument/2006/relationships">
+<p:sld xmlns:a="http://schemas.openxmlformats.org/drawingml/2006/main" xmlns:r="http://schemas.openxmlformats.org/officeDocument/2006/relationships" xmlns:p="http://schemas.openxmlformats.org/presentationml/2006/main">
   <p:cSld>
     <p:bg>
       <p:bgPr>
@@ -3815,7 +4084,14 @@
         <p:cNvGrpSpPr/>
         <p:nvPr/>
       </p:nvGrpSpPr>
-      <p:grpSpPr/>
+      <p:grpSpPr>
+        <a:xfrm>
+          <a:off x="0" y="0"/>
+          <a:ext cx="0" cy="0"/>
+          <a:chOff x="0" y="0"/>
+          <a:chExt cx="0" cy="0"/>
+        </a:xfrm>
+      </p:grpSpPr>
       <p:sp>
         <p:nvSpPr>
           <p:cNvPr id="2" name="Rectangle 1"/>
@@ -3846,7 +4122,12 @@
           <a:bodyPr rtlCol="0" anchor="ctr"/>
           <a:lstStyle/>
           <a:p>
-            <a:pPr algn="ctr"/>
+            <a:pPr algn="ctr">
+              <a:defRPr>
+                <a:lang val="es-CL"/>
+              </a:defRPr>
+            </a:pPr>
+            <a:endParaRPr/>
           </a:p>
         </p:txBody>
       </p:sp>
@@ -3877,6 +4158,7 @@
                 <a:solidFill>
                   <a:srgbClr val="FFFFFF"/>
                 </a:solidFill>
+                <a:lang val="es-CL"/>
               </a:defRPr>
             </a:pPr>
             <a:r>
@@ -3884,6 +4166,7 @@
                 <a:solidFill>
                   <a:srgbClr val="FFFFFF"/>
                 </a:solidFill>
+                <a:lang val="es-CL"/>
               </a:rPr>
               <a:t>Gracias</a:t>
             </a:r>
@@ -3917,6 +4200,7 @@
                 <a:solidFill>
                   <a:srgbClr val="BDC3C7"/>
                 </a:solidFill>
+                <a:lang val="es-CL"/>
               </a:defRPr>
             </a:pPr>
             <a:r>
@@ -3924,24 +4208,39 @@
                 <a:solidFill>
                   <a:srgbClr val="FFFFFF"/>
                 </a:solidFill>
+                <a:lang val="es-CL"/>
               </a:rPr>
               <a:t>Luis Tasso  |  Seccion 802V</a:t>
             </a:r>
+            <a:r>
+              <a:rPr>
+                <a:lang val="es-CL"/>
+              </a:rPr>
+              <a:t/>
+            </a:r>
             <a:br/>
             <a:r>
               <a:rPr>
                 <a:solidFill>
                   <a:srgbClr val="A5B4FC"/>
                 </a:solidFill>
+                <a:lang val="es-CL"/>
               </a:rPr>
               <a:t>API0101 - Automatizacion de Pruebas</a:t>
             </a:r>
+            <a:r>
+              <a:rPr>
+                <a:lang val="es-CL"/>
+              </a:rPr>
+              <a:t/>
+            </a:r>
             <a:br/>
             <a:r>
               <a:rPr>
                 <a:solidFill>
                   <a:srgbClr val="FFFFFF"/>
                 </a:solidFill>
+                <a:lang val="es-CL"/>
               </a:rPr>
               <a:t>Prof. Manuel Soto</a:t>
             </a:r>
@@ -3957,7 +4256,7 @@
 </file>
 
 <file path=ppt/slides/slide2.xml><?xml version="1.0" encoding="utf-8"?>
-<p:sld xmlns:a="http://schemas.openxmlformats.org/drawingml/2006/main" xmlns:p="http://schemas.openxmlformats.org/presentationml/2006/main" xmlns:r="http://schemas.openxmlformats.org/officeDocument/2006/relationships">
+<p:sld xmlns:a="http://schemas.openxmlformats.org/drawingml/2006/main" xmlns:r="http://schemas.openxmlformats.org/officeDocument/2006/relationships" xmlns:p="http://schemas.openxmlformats.org/presentationml/2006/main">
   <p:cSld>
     <p:bg>
       <p:bgPr>
@@ -3973,7 +4272,14 @@
         <p:cNvGrpSpPr/>
         <p:nvPr/>
       </p:nvGrpSpPr>
-      <p:grpSpPr/>
+      <p:grpSpPr>
+        <a:xfrm>
+          <a:off x="0" y="0"/>
+          <a:ext cx="0" cy="0"/>
+          <a:chOff x="0" y="0"/>
+          <a:chExt cx="0" cy="0"/>
+        </a:xfrm>
+      </p:grpSpPr>
       <p:sp>
         <p:nvSpPr>
           <p:cNvPr id="2" name="Rectangle 1"/>
@@ -4004,7 +4310,12 @@
           <a:bodyPr rtlCol="0" anchor="ctr"/>
           <a:lstStyle/>
           <a:p>
-            <a:pPr algn="ctr"/>
+            <a:pPr algn="ctr">
+              <a:defRPr>
+                <a:lang val="es-CL"/>
+              </a:defRPr>
+            </a:pPr>
+            <a:endParaRPr/>
           </a:p>
         </p:txBody>
       </p:sp>
@@ -4035,6 +4346,7 @@
                 <a:solidFill>
                   <a:srgbClr val="FFFFFF"/>
                 </a:solidFill>
+                <a:lang val="es-CL"/>
               </a:defRPr>
             </a:pPr>
             <a:r>
@@ -4042,6 +4354,7 @@
                 <a:solidFill>
                   <a:srgbClr val="CBD5E1"/>
                 </a:solidFill>
+                <a:lang val="es-CL"/>
               </a:rPr>
               <a:t>Agenda</a:t>
             </a:r>
@@ -4078,6 +4391,7 @@
                 <a:solidFill>
                   <a:srgbClr val="2C3E50"/>
                 </a:solidFill>
+                <a:lang val="es-CL"/>
               </a:defRPr>
             </a:pPr>
             <a:r>
@@ -4085,6 +4399,7 @@
                 <a:solidFill>
                   <a:srgbClr val="CBD5E1"/>
                 </a:solidFill>
+                <a:lang val="es-CL"/>
               </a:rPr>
               <a:t>1. Plan de Pruebas y Cronograma por Sprint</a:t>
             </a:r>
@@ -4098,6 +4413,7 @@
                 <a:solidFill>
                   <a:srgbClr val="2C3E50"/>
                 </a:solidFill>
+                <a:lang val="es-CL"/>
               </a:defRPr>
             </a:pPr>
             <a:r>
@@ -4105,6 +4421,7 @@
                 <a:solidFill>
                   <a:srgbClr val="CBD5E1"/>
                 </a:solidFill>
+                <a:lang val="es-CL"/>
               </a:rPr>
               <a:t>2. Trazabilidad Requisito -&gt; Escenario -&gt; Resultado</a:t>
             </a:r>
@@ -4118,6 +4435,7 @@
                 <a:solidFill>
                   <a:srgbClr val="2C3E50"/>
                 </a:solidFill>
+                <a:lang val="es-CL"/>
               </a:defRPr>
             </a:pPr>
             <a:r>
@@ -4125,6 +4443,7 @@
                 <a:solidFill>
                   <a:srgbClr val="CBD5E1"/>
                 </a:solidFill>
+                <a:lang val="es-CL"/>
               </a:rPr>
               <a:t>3. Resultados de Ejecucion - 29 escenarios, evidencias, fallo intencional</a:t>
             </a:r>
@@ -4138,6 +4457,7 @@
                 <a:solidFill>
                   <a:srgbClr val="2C3E50"/>
                 </a:solidFill>
+                <a:lang val="es-CL"/>
               </a:defRPr>
             </a:pPr>
             <a:r>
@@ -4145,6 +4465,7 @@
                 <a:solidFill>
                   <a:srgbClr val="CBD5E1"/>
                 </a:solidFill>
+                <a:lang val="es-CL"/>
               </a:rPr>
               <a:t>4. Metricas de Calidad (PPT 3.3.1) y Rendimiento</a:t>
             </a:r>
@@ -4158,6 +4479,7 @@
                 <a:solidFill>
                   <a:srgbClr val="2C3E50"/>
                 </a:solidFill>
+                <a:lang val="es-CL"/>
               </a:defRPr>
             </a:pPr>
             <a:r>
@@ -4165,6 +4487,7 @@
                 <a:solidFill>
                   <a:srgbClr val="CBD5E1"/>
                 </a:solidFill>
+                <a:lang val="es-CL"/>
               </a:rPr>
               <a:t>5. Oportunidades de Mejora (A+B+C)</a:t>
             </a:r>
@@ -4178,6 +4501,7 @@
                 <a:solidFill>
                   <a:srgbClr val="2C3E50"/>
                 </a:solidFill>
+                <a:lang val="es-CL"/>
               </a:defRPr>
             </a:pPr>
             <a:r>
@@ -4185,6 +4509,7 @@
                 <a:solidFill>
                   <a:srgbClr val="CBD5E1"/>
                 </a:solidFill>
+                <a:lang val="es-CL"/>
               </a:rPr>
               <a:t>6. Propuestas: Producto (OrangeHRM) vs. Proceso (Framework)</a:t>
             </a:r>
@@ -4198,6 +4523,7 @@
                 <a:solidFill>
                   <a:srgbClr val="2C3E50"/>
                 </a:solidFill>
+                <a:lang val="es-CL"/>
               </a:defRPr>
             </a:pPr>
             <a:r>
@@ -4205,6 +4531,7 @@
                 <a:solidFill>
                   <a:srgbClr val="CBD5E1"/>
                 </a:solidFill>
+                <a:lang val="es-CL"/>
               </a:rPr>
               <a:t>7. Stack Tecnologico: Behave + Python + Selenium</a:t>
             </a:r>
@@ -4218,6 +4545,7 @@
                 <a:solidFill>
                   <a:srgbClr val="2C3E50"/>
                 </a:solidFill>
+                <a:lang val="es-CL"/>
               </a:defRPr>
             </a:pPr>
             <a:r>
@@ -4225,6 +4553,7 @@
                 <a:solidFill>
                   <a:srgbClr val="CBD5E1"/>
                 </a:solidFill>
+                <a:lang val="es-CL"/>
               </a:rPr>
               <a:t>8. Conclusiones y Proyecciones</a:t>
             </a:r>
@@ -4240,7 +4569,7 @@
 </file>
 
 <file path=ppt/slides/slide3.xml><?xml version="1.0" encoding="utf-8"?>
-<p:sld xmlns:a="http://schemas.openxmlformats.org/drawingml/2006/main" xmlns:p="http://schemas.openxmlformats.org/presentationml/2006/main" xmlns:r="http://schemas.openxmlformats.org/officeDocument/2006/relationships">
+<p:sld xmlns:a="http://schemas.openxmlformats.org/drawingml/2006/main" xmlns:r="http://schemas.openxmlformats.org/officeDocument/2006/relationships" xmlns:p="http://schemas.openxmlformats.org/presentationml/2006/main">
   <p:cSld>
     <p:bg>
       <p:bgPr>
@@ -4256,7 +4585,14 @@
         <p:cNvGrpSpPr/>
         <p:nvPr/>
       </p:nvGrpSpPr>
-      <p:grpSpPr/>
+      <p:grpSpPr>
+        <a:xfrm>
+          <a:off x="0" y="0"/>
+          <a:ext cx="0" cy="0"/>
+          <a:chOff x="0" y="0"/>
+          <a:chExt cx="0" cy="0"/>
+        </a:xfrm>
+      </p:grpSpPr>
       <p:sp>
         <p:nvSpPr>
           <p:cNvPr id="2" name="Rectangle 1"/>
@@ -4287,7 +4623,12 @@
           <a:bodyPr rtlCol="0" anchor="ctr"/>
           <a:lstStyle/>
           <a:p>
-            <a:pPr algn="ctr"/>
+            <a:pPr algn="ctr">
+              <a:defRPr>
+                <a:lang val="es-CL"/>
+              </a:defRPr>
+            </a:pPr>
+            <a:endParaRPr/>
           </a:p>
         </p:txBody>
       </p:sp>
@@ -4318,6 +4659,7 @@
                 <a:solidFill>
                   <a:srgbClr val="FFFFFF"/>
                 </a:solidFill>
+                <a:lang val="es-CL"/>
               </a:defRPr>
             </a:pPr>
             <a:r>
@@ -4325,6 +4667,7 @@
                 <a:solidFill>
                   <a:srgbClr val="CBD5E1"/>
                 </a:solidFill>
+                <a:lang val="es-CL"/>
               </a:rPr>
               <a:t>Plan de Pruebas y Cronograma por Sprint</a:t>
             </a:r>
@@ -4341,7 +4684,7 @@
         </p:nvGraphicFramePr>
         <p:xfrm>
           <a:off x="365760" y="1371600"/>
-          <a:ext cx="11430000" cy="2286000"/>
+          <a:ext cx="11430000" cy="2415540"/>
         </p:xfrm>
         <a:graphic>
           <a:graphicData uri="http://schemas.openxmlformats.org/drawingml/2006/table">
@@ -4350,11 +4693,41 @@
                 <a:tableStyleId>{5C22544A-7EE6-4342-B048-85BDC9FD1C3A}</a:tableStyleId>
               </a:tblPr>
               <a:tblGrid>
-                <a:gridCol w="1645920"/>
-                <a:gridCol w="1371600"/>
-                <a:gridCol w="3200400"/>
-                <a:gridCol w="1371600"/>
-                <a:gridCol w="3840480"/>
+                <a:gridCol w="1645920">
+                  <a:extLst>
+                    <a:ext uri="{9D8B030D-6E8A-4147-A177-3AD203B41FA5}">
+                      <a16:colId xmlns:a16="http://schemas.microsoft.com/office/drawing/2014/main" val="20000"/>
+                    </a:ext>
+                  </a:extLst>
+                </a:gridCol>
+                <a:gridCol w="1371600">
+                  <a:extLst>
+                    <a:ext uri="{9D8B030D-6E8A-4147-A177-3AD203B41FA5}">
+                      <a16:colId xmlns:a16="http://schemas.microsoft.com/office/drawing/2014/main" val="20001"/>
+                    </a:ext>
+                  </a:extLst>
+                </a:gridCol>
+                <a:gridCol w="3200400">
+                  <a:extLst>
+                    <a:ext uri="{9D8B030D-6E8A-4147-A177-3AD203B41FA5}">
+                      <a16:colId xmlns:a16="http://schemas.microsoft.com/office/drawing/2014/main" val="20002"/>
+                    </a:ext>
+                  </a:extLst>
+                </a:gridCol>
+                <a:gridCol w="1371600">
+                  <a:extLst>
+                    <a:ext uri="{9D8B030D-6E8A-4147-A177-3AD203B41FA5}">
+                      <a16:colId xmlns:a16="http://schemas.microsoft.com/office/drawing/2014/main" val="20003"/>
+                    </a:ext>
+                  </a:extLst>
+                </a:gridCol>
+                <a:gridCol w="3840480">
+                  <a:extLst>
+                    <a:ext uri="{9D8B030D-6E8A-4147-A177-3AD203B41FA5}">
+                      <a16:colId xmlns:a16="http://schemas.microsoft.com/office/drawing/2014/main" val="20004"/>
+                    </a:ext>
+                  </a:extLst>
+                </a:gridCol>
               </a:tblGrid>
               <a:tr h="571500">
                 <a:tc>
@@ -4374,6 +4747,7 @@
                           <a:solidFill>
                             <a:srgbClr val="FFFFFF"/>
                           </a:solidFill>
+                          <a:lang val="es-CL"/>
                         </a:rPr>
                         <a:t>Sprint</a:t>
                       </a:r>
@@ -4402,6 +4776,7 @@
                           <a:solidFill>
                             <a:srgbClr val="FFFFFF"/>
                           </a:solidFill>
+                          <a:lang val="es-CL"/>
                         </a:rPr>
                         <a:t>Semanas</a:t>
                       </a:r>
@@ -4430,6 +4805,7 @@
                           <a:solidFill>
                             <a:srgbClr val="FFFFFF"/>
                           </a:solidFill>
+                          <a:lang val="es-CL"/>
                         </a:rPr>
                         <a:t>Features</a:t>
                       </a:r>
@@ -4458,6 +4834,7 @@
                           <a:solidFill>
                             <a:srgbClr val="FFFFFF"/>
                           </a:solidFill>
+                          <a:lang val="es-CL"/>
                         </a:rPr>
                         <a:t>Escenarios</a:t>
                       </a:r>
@@ -4486,6 +4863,7 @@
                           <a:solidFill>
                             <a:srgbClr val="FFFFFF"/>
                           </a:solidFill>
+                          <a:lang val="es-CL"/>
                         </a:rPr>
                         <a:t>Entregable</a:t>
                       </a:r>
@@ -4497,6 +4875,11 @@
                     </a:solidFill>
                   </a:tcPr>
                 </a:tc>
+                <a:extLst>
+                  <a:ext uri="{0D108BD9-81ED-4DB2-BD59-A6C34878D82A}">
+                    <a16:rowId xmlns:a16="http://schemas.microsoft.com/office/drawing/2014/main" val="10000"/>
+                  </a:ext>
+                </a:extLst>
               </a:tr>
               <a:tr h="571500">
                 <a:tc>
@@ -4516,6 +4899,7 @@
                           <a:solidFill>
                             <a:srgbClr val="E2E8F0"/>
                           </a:solidFill>
+                          <a:lang val="es-CL"/>
                         </a:rPr>
                         <a:t>Sprint 1</a:t>
                       </a:r>
@@ -4533,6 +4917,7 @@
                           <a:solidFill>
                             <a:srgbClr val="E2E8F0"/>
                           </a:solidFill>
+                          <a:lang val="es-CL"/>
                         </a:rPr>
                         <a:t>Fundamentos</a:t>
                       </a:r>
@@ -4561,6 +4946,7 @@
                           <a:solidFill>
                             <a:srgbClr val="E2E8F0"/>
                           </a:solidFill>
+                          <a:lang val="es-CL"/>
                         </a:rPr>
                         <a:t>1-4</a:t>
                       </a:r>
@@ -4589,6 +4975,7 @@
                           <a:solidFill>
                             <a:srgbClr val="E2E8F0"/>
                           </a:solidFill>
+                          <a:lang val="es-CL"/>
                         </a:rPr>
                         <a:t>login.feature</a:t>
                       </a:r>
@@ -4606,6 +4993,7 @@
                           <a:solidFill>
                             <a:srgbClr val="E2E8F0"/>
                           </a:solidFill>
+                          <a:lang val="es-CL"/>
                         </a:rPr>
                         <a:t>sesion.feature</a:t>
                       </a:r>
@@ -4634,6 +5022,7 @@
                           <a:solidFill>
                             <a:srgbClr val="E2E8F0"/>
                           </a:solidFill>
+                          <a:lang val="es-CL"/>
                         </a:rPr>
                         <a:t>4</a:t>
                       </a:r>
@@ -4662,6 +5051,7 @@
                           <a:solidFill>
                             <a:srgbClr val="E2E8F0"/>
                           </a:solidFill>
+                          <a:lang val="es-CL"/>
                         </a:rPr>
                         <a:t>Steps genericos</a:t>
                       </a:r>
@@ -4679,6 +5069,7 @@
                           <a:solidFill>
                             <a:srgbClr val="E2E8F0"/>
                           </a:solidFill>
+                          <a:lang val="es-CL"/>
                         </a:rPr>
                         <a:t>environment.py</a:t>
                       </a:r>
@@ -4696,6 +5087,7 @@
                           <a:solidFill>
                             <a:srgbClr val="E2E8F0"/>
                           </a:solidFill>
+                          <a:lang val="es-CL"/>
                         </a:rPr>
                         <a:t>Screenshots</a:t>
                       </a:r>
@@ -4707,6 +5099,11 @@
                     </a:solidFill>
                   </a:tcPr>
                 </a:tc>
+                <a:extLst>
+                  <a:ext uri="{0D108BD9-81ED-4DB2-BD59-A6C34878D82A}">
+                    <a16:rowId xmlns:a16="http://schemas.microsoft.com/office/drawing/2014/main" val="10001"/>
+                  </a:ext>
+                </a:extLst>
               </a:tr>
               <a:tr h="571500">
                 <a:tc>
@@ -4726,6 +5123,7 @@
                           <a:solidFill>
                             <a:srgbClr val="E2E8F0"/>
                           </a:solidFill>
+                          <a:lang val="es-CL"/>
                         </a:rPr>
                         <a:t>Sprint 2</a:t>
                       </a:r>
@@ -4743,6 +5141,7 @@
                           <a:solidFill>
                             <a:srgbClr val="E2E8F0"/>
                           </a:solidFill>
+                          <a:lang val="es-CL"/>
                         </a:rPr>
                         <a:t>PIM CRUD + DD</a:t>
                       </a:r>
@@ -4771,6 +5170,7 @@
                           <a:solidFill>
                             <a:srgbClr val="E2E8F0"/>
                           </a:solidFill>
+                          <a:lang val="es-CL"/>
                         </a:rPr>
                         <a:t>5-8</a:t>
                       </a:r>
@@ -4799,6 +5199,7 @@
                           <a:solidFill>
                             <a:srgbClr val="E2E8F0"/>
                           </a:solidFill>
+                          <a:lang val="es-CL"/>
                         </a:rPr>
                         <a:t>empleados.feature</a:t>
                       </a:r>
@@ -4816,6 +5217,7 @@
                           <a:solidFill>
                             <a:srgbClr val="E2E8F0"/>
                           </a:solidFill>
+                          <a:lang val="es-CL"/>
                         </a:rPr>
                         <a:t>busqueda.feature</a:t>
                       </a:r>
@@ -4833,6 +5235,7 @@
                           <a:solidFill>
                             <a:srgbClr val="E2E8F0"/>
                           </a:solidFill>
+                          <a:lang val="es-CL"/>
                         </a:rPr>
                         <a:t>edicion.feature</a:t>
                       </a:r>
@@ -4850,6 +5253,7 @@
                           <a:solidFill>
                             <a:srgbClr val="E2E8F0"/>
                           </a:solidFill>
+                          <a:lang val="es-CL"/>
                         </a:rPr>
                         <a:t>eliminacion.feature</a:t>
                       </a:r>
@@ -4878,6 +5282,7 @@
                           <a:solidFill>
                             <a:srgbClr val="E2E8F0"/>
                           </a:solidFill>
+                          <a:lang val="es-CL"/>
                         </a:rPr>
                         <a:t>15</a:t>
                       </a:r>
@@ -4906,6 +5311,7 @@
                           <a:solidFill>
                             <a:srgbClr val="E2E8F0"/>
                           </a:solidFill>
+                          <a:lang val="es-CL"/>
                         </a:rPr>
                         <a:t>ExcelUtils</a:t>
                       </a:r>
@@ -4923,6 +5329,7 @@
                           <a:solidFill>
                             <a:srgbClr val="E2E8F0"/>
                           </a:solidFill>
+                          <a:lang val="es-CL"/>
                         </a:rPr>
                         <a:t>Data-Driven Steps</a:t>
                       </a:r>
@@ -4940,6 +5347,7 @@
                           <a:solidFill>
                             <a:srgbClr val="E2E8F0"/>
                           </a:solidFill>
+                          <a:lang val="es-CL"/>
                         </a:rPr>
                         <a:t>6 Excel testData</a:t>
                       </a:r>
@@ -4951,6 +5359,11 @@
                     </a:solidFill>
                   </a:tcPr>
                 </a:tc>
+                <a:extLst>
+                  <a:ext uri="{0D108BD9-81ED-4DB2-BD59-A6C34878D82A}">
+                    <a16:rowId xmlns:a16="http://schemas.microsoft.com/office/drawing/2014/main" val="10002"/>
+                  </a:ext>
+                </a:extLst>
               </a:tr>
               <a:tr h="571500">
                 <a:tc>
@@ -4970,6 +5383,7 @@
                           <a:solidFill>
                             <a:srgbClr val="E2E8F0"/>
                           </a:solidFill>
+                          <a:lang val="es-CL"/>
                         </a:rPr>
                         <a:t>Sprint 3</a:t>
                       </a:r>
@@ -4987,6 +5401,7 @@
                           <a:solidFill>
                             <a:srgbClr val="E2E8F0"/>
                           </a:solidFill>
+                          <a:lang val="es-CL"/>
                         </a:rPr>
                         <a:t>Perfil + Licencias</a:t>
                       </a:r>
@@ -5015,6 +5430,7 @@
                           <a:solidFill>
                             <a:srgbClr val="E2E8F0"/>
                           </a:solidFill>
+                          <a:lang val="es-CL"/>
                         </a:rPr>
                         <a:t>9-12</a:t>
                       </a:r>
@@ -5043,6 +5459,7 @@
                           <a:solidFill>
                             <a:srgbClr val="E2E8F0"/>
                           </a:solidFill>
+                          <a:lang val="es-CL"/>
                         </a:rPr>
                         <a:t>perfil.feature</a:t>
                       </a:r>
@@ -5060,6 +5477,7 @@
                           <a:solidFill>
                             <a:srgbClr val="E2E8F0"/>
                           </a:solidFill>
+                          <a:lang val="es-CL"/>
                         </a:rPr>
                         <a:t>licencias.feature</a:t>
                       </a:r>
@@ -5077,6 +5495,7 @@
                           <a:solidFill>
                             <a:srgbClr val="E2E8F0"/>
                           </a:solidFill>
+                          <a:lang val="es-CL"/>
                         </a:rPr>
                         <a:t>navigation.feature</a:t>
                       </a:r>
@@ -5105,6 +5524,7 @@
                           <a:solidFill>
                             <a:srgbClr val="E2E8F0"/>
                           </a:solidFill>
+                          <a:lang val="es-CL"/>
                         </a:rPr>
                         <a:t>10</a:t>
                       </a:r>
@@ -5133,6 +5553,7 @@
                           <a:solidFill>
                             <a:srgbClr val="E2E8F0"/>
                           </a:solidFill>
+                          <a:lang val="es-CL"/>
                         </a:rPr>
                         <a:t>Reportes HTML/JSON</a:t>
                       </a:r>
@@ -5150,6 +5571,7 @@
                           <a:solidFill>
                             <a:srgbClr val="E2E8F0"/>
                           </a:solidFill>
+                          <a:lang val="es-CL"/>
                         </a:rPr>
                         <a:t>Metricas</a:t>
                       </a:r>
@@ -5167,6 +5589,7 @@
                           <a:solidFill>
                             <a:srgbClr val="E2E8F0"/>
                           </a:solidFill>
+                          <a:lang val="es-CL"/>
                         </a:rPr>
                         <a:t>Informe Final</a:t>
                       </a:r>
@@ -5178,6 +5601,11 @@
                     </a:solidFill>
                   </a:tcPr>
                 </a:tc>
+                <a:extLst>
+                  <a:ext uri="{0D108BD9-81ED-4DB2-BD59-A6C34878D82A}">
+                    <a16:rowId xmlns:a16="http://schemas.microsoft.com/office/drawing/2014/main" val="10003"/>
+                  </a:ext>
+                </a:extLst>
               </a:tr>
             </a:tbl>
           </a:graphicData>
@@ -5210,6 +5638,7 @@
                 <a:solidFill>
                   <a:srgbClr val="2C3E50"/>
                 </a:solidFill>
+                <a:lang val="es-CL"/>
               </a:defRPr>
             </a:pPr>
             <a:r>
@@ -5217,43 +5646,78 @@
                 <a:solidFill>
                   <a:srgbClr val="CBD5E1"/>
                 </a:solidFill>
+                <a:lang val="es-CL"/>
               </a:rPr>
               <a:t>Caso: OrangeHRM (opensource-demo.orangehrmlive.com)</a:t>
             </a:r>
+            <a:r>
+              <a:rPr>
+                <a:lang val="es-CL"/>
+              </a:rPr>
+              <a:t/>
+            </a:r>
             <a:br/>
             <a:r>
               <a:rPr>
                 <a:solidFill>
                   <a:srgbClr val="CBD5E1"/>
                 </a:solidFill>
+                <a:lang val="es-CL"/>
               </a:rPr>
               <a:t>Modulos evaluados: Login, Dashboard, PIM, Leave, Admin, My Info, Sesion</a:t>
             </a:r>
+            <a:r>
+              <a:rPr>
+                <a:lang val="es-CL"/>
+              </a:rPr>
+              <a:t/>
+            </a:r>
             <a:br/>
             <a:r>
               <a:rPr>
                 <a:solidFill>
                   <a:srgbClr val="CBD5E1"/>
                 </a:solidFill>
+                <a:lang val="es-CL"/>
               </a:rPr>
               <a:t>Tecnicas: BDD (Gherkin), Data-Driven Testing con Excel, Captura automatica de evidencia</a:t>
             </a:r>
+            <a:r>
+              <a:rPr>
+                <a:lang val="es-CL"/>
+              </a:rPr>
+              <a:t/>
+            </a:r>
             <a:br/>
             <a:r>
               <a:rPr>
                 <a:solidFill>
                   <a:srgbClr val="CBD5E1"/>
                 </a:solidFill>
+                <a:lang val="es-CL"/>
               </a:rPr>
               <a:t>Tipos de pruebas: Funcionales, Regresion, Humo, Internacionalizacion, Validacion</a:t>
             </a:r>
+            <a:r>
+              <a:rPr>
+                <a:lang val="es-CL"/>
+              </a:rPr>
+              <a:t/>
+            </a:r>
             <a:br/>
+            <a:r>
+              <a:rPr>
+                <a:lang val="es-CL"/>
+              </a:rPr>
+              <a:t/>
+            </a:r>
             <a:br/>
             <a:r>
               <a:rPr>
                 <a:solidFill>
                   <a:srgbClr val="CBD5E1"/>
                 </a:solidFill>
+                <a:lang val="es-CL"/>
               </a:rPr>
               <a:t>Total: 29 escenarios | 10 features | 6 archivos Excel | 177 screenshots</a:t>
             </a:r>
@@ -5269,7 +5733,7 @@
 </file>
 
 <file path=ppt/slides/slide4.xml><?xml version="1.0" encoding="utf-8"?>
-<p:sld xmlns:a="http://schemas.openxmlformats.org/drawingml/2006/main" xmlns:p="http://schemas.openxmlformats.org/presentationml/2006/main" xmlns:r="http://schemas.openxmlformats.org/officeDocument/2006/relationships">
+<p:sld xmlns:a="http://schemas.openxmlformats.org/drawingml/2006/main" xmlns:r="http://schemas.openxmlformats.org/officeDocument/2006/relationships" xmlns:p="http://schemas.openxmlformats.org/presentationml/2006/main">
   <p:cSld>
     <p:bg>
       <p:bgPr>
@@ -5285,7 +5749,14 @@
         <p:cNvGrpSpPr/>
         <p:nvPr/>
       </p:nvGrpSpPr>
-      <p:grpSpPr/>
+      <p:grpSpPr>
+        <a:xfrm>
+          <a:off x="0" y="0"/>
+          <a:ext cx="0" cy="0"/>
+          <a:chOff x="0" y="0"/>
+          <a:chExt cx="0" cy="0"/>
+        </a:xfrm>
+      </p:grpSpPr>
       <p:sp>
         <p:nvSpPr>
           <p:cNvPr id="2" name="Rectangle 1"/>
@@ -5316,7 +5787,12 @@
           <a:bodyPr rtlCol="0" anchor="ctr"/>
           <a:lstStyle/>
           <a:p>
-            <a:pPr algn="ctr"/>
+            <a:pPr algn="ctr">
+              <a:defRPr>
+                <a:lang val="es-CL"/>
+              </a:defRPr>
+            </a:pPr>
+            <a:endParaRPr/>
           </a:p>
         </p:txBody>
       </p:sp>
@@ -5347,6 +5823,7 @@
                 <a:solidFill>
                   <a:srgbClr val="FFFFFF"/>
                 </a:solidFill>
+                <a:lang val="es-CL"/>
               </a:defRPr>
             </a:pPr>
             <a:r>
@@ -5354,6 +5831,7 @@
                 <a:solidFill>
                   <a:srgbClr val="CBD5E1"/>
                 </a:solidFill>
+                <a:lang val="es-CL"/>
               </a:rPr>
               <a:t>Trazabilidad: Requisito -&gt; Funcionalidad -&gt; Escenario -&gt; Resultado</a:t>
             </a:r>
@@ -5379,10 +5857,34 @@
                 <a:tableStyleId>{5C22544A-7EE6-4342-B048-85BDC9FD1C3A}</a:tableStyleId>
               </a:tblPr>
               <a:tblGrid>
-                <a:gridCol w="2286000"/>
-                <a:gridCol w="1828800"/>
-                <a:gridCol w="3657600"/>
-                <a:gridCol w="1371600"/>
+                <a:gridCol w="2286000">
+                  <a:extLst>
+                    <a:ext uri="{9D8B030D-6E8A-4147-A177-3AD203B41FA5}">
+                      <a16:colId xmlns:a16="http://schemas.microsoft.com/office/drawing/2014/main" val="20000"/>
+                    </a:ext>
+                  </a:extLst>
+                </a:gridCol>
+                <a:gridCol w="1828800">
+                  <a:extLst>
+                    <a:ext uri="{9D8B030D-6E8A-4147-A177-3AD203B41FA5}">
+                      <a16:colId xmlns:a16="http://schemas.microsoft.com/office/drawing/2014/main" val="20001"/>
+                    </a:ext>
+                  </a:extLst>
+                </a:gridCol>
+                <a:gridCol w="3657600">
+                  <a:extLst>
+                    <a:ext uri="{9D8B030D-6E8A-4147-A177-3AD203B41FA5}">
+                      <a16:colId xmlns:a16="http://schemas.microsoft.com/office/drawing/2014/main" val="20002"/>
+                    </a:ext>
+                  </a:extLst>
+                </a:gridCol>
+                <a:gridCol w="1371600">
+                  <a:extLst>
+                    <a:ext uri="{9D8B030D-6E8A-4147-A177-3AD203B41FA5}">
+                      <a16:colId xmlns:a16="http://schemas.microsoft.com/office/drawing/2014/main" val="20003"/>
+                    </a:ext>
+                  </a:extLst>
+                </a:gridCol>
               </a:tblGrid>
               <a:tr h="419100">
                 <a:tc>
@@ -5402,6 +5904,7 @@
                           <a:solidFill>
                             <a:srgbClr val="FFFFFF"/>
                           </a:solidFill>
+                          <a:lang val="es-CL"/>
                         </a:rPr>
                         <a:t>Requisito</a:t>
                       </a:r>
@@ -5430,6 +5933,7 @@
                           <a:solidFill>
                             <a:srgbClr val="FFFFFF"/>
                           </a:solidFill>
+                          <a:lang val="es-CL"/>
                         </a:rPr>
                         <a:t>Funcionalidad</a:t>
                       </a:r>
@@ -5458,6 +5962,7 @@
                           <a:solidFill>
                             <a:srgbClr val="FFFFFF"/>
                           </a:solidFill>
+                          <a:lang val="es-CL"/>
                         </a:rPr>
                         <a:t>Escenario Gherkin</a:t>
                       </a:r>
@@ -5486,6 +5991,7 @@
                           <a:solidFill>
                             <a:srgbClr val="FFFFFF"/>
                           </a:solidFill>
+                          <a:lang val="es-CL"/>
                         </a:rPr>
                         <a:t>Resultado</a:t>
                       </a:r>
@@ -5497,6 +6003,11 @@
                     </a:solidFill>
                   </a:tcPr>
                 </a:tc>
+                <a:extLst>
+                  <a:ext uri="{0D108BD9-81ED-4DB2-BD59-A6C34878D82A}">
+                    <a16:rowId xmlns:a16="http://schemas.microsoft.com/office/drawing/2014/main" val="10000"/>
+                  </a:ext>
+                </a:extLst>
               </a:tr>
               <a:tr h="419100">
                 <a:tc>
@@ -5516,6 +6027,7 @@
                           <a:solidFill>
                             <a:srgbClr val="E2E8F0"/>
                           </a:solidFill>
+                          <a:lang val="es-CL"/>
                         </a:rPr>
                         <a:t>RF-01: Login valido</a:t>
                       </a:r>
@@ -5544,6 +6056,7 @@
                           <a:solidFill>
                             <a:srgbClr val="E2E8F0"/>
                           </a:solidFill>
+                          <a:lang val="es-CL"/>
                         </a:rPr>
                         <a:t>Autenticacion</a:t>
                       </a:r>
@@ -5572,6 +6085,7 @@
                           <a:solidFill>
                             <a:srgbClr val="E2E8F0"/>
                           </a:solidFill>
+                          <a:lang val="es-CL"/>
                         </a:rPr>
                         <a:t>TC_001_LoginExitoso</a:t>
                       </a:r>
@@ -5600,6 +6114,7 @@
                           <a:solidFill>
                             <a:srgbClr val="E2E8F0"/>
                           </a:solidFill>
+                          <a:lang val="es-CL"/>
                         </a:rPr>
                         <a:t>PASS</a:t>
                       </a:r>
@@ -5611,6 +6126,11 @@
                     </a:solidFill>
                   </a:tcPr>
                 </a:tc>
+                <a:extLst>
+                  <a:ext uri="{0D108BD9-81ED-4DB2-BD59-A6C34878D82A}">
+                    <a16:rowId xmlns:a16="http://schemas.microsoft.com/office/drawing/2014/main" val="10001"/>
+                  </a:ext>
+                </a:extLst>
               </a:tr>
               <a:tr h="419100">
                 <a:tc>
@@ -5630,6 +6150,7 @@
                           <a:solidFill>
                             <a:srgbClr val="E2E8F0"/>
                           </a:solidFill>
+                          <a:lang val="es-CL"/>
                         </a:rPr>
                         <a:t>RF-02: Login invalido</a:t>
                       </a:r>
@@ -5658,6 +6179,7 @@
                           <a:solidFill>
                             <a:srgbClr val="E2E8F0"/>
                           </a:solidFill>
+                          <a:lang val="es-CL"/>
                         </a:rPr>
                         <a:t>Error auth</a:t>
                       </a:r>
@@ -5686,6 +6208,7 @@
                           <a:solidFill>
                             <a:srgbClr val="E2E8F0"/>
                           </a:solidFill>
+                          <a:lang val="es-CL"/>
                         </a:rPr>
                         <a:t>TC_002_LoginFallido</a:t>
                       </a:r>
@@ -5714,6 +6237,7 @@
                           <a:solidFill>
                             <a:srgbClr val="E2E8F0"/>
                           </a:solidFill>
+                          <a:lang val="es-CL"/>
                         </a:rPr>
                         <a:t>PASS</a:t>
                       </a:r>
@@ -5725,6 +6249,11 @@
                     </a:solidFill>
                   </a:tcPr>
                 </a:tc>
+                <a:extLst>
+                  <a:ext uri="{0D108BD9-81ED-4DB2-BD59-A6C34878D82A}">
+                    <a16:rowId xmlns:a16="http://schemas.microsoft.com/office/drawing/2014/main" val="10002"/>
+                  </a:ext>
+                </a:extLst>
               </a:tr>
               <a:tr h="419100">
                 <a:tc>
@@ -5744,6 +6273,7 @@
                           <a:solidFill>
                             <a:srgbClr val="E2E8F0"/>
                           </a:solidFill>
+                          <a:lang val="es-CL"/>
                         </a:rPr>
                         <a:t>RF-03: Crear empleado</a:t>
                       </a:r>
@@ -5772,6 +6302,7 @@
                           <a:solidFill>
                             <a:srgbClr val="E2E8F0"/>
                           </a:solidFill>
+                          <a:lang val="es-CL"/>
                         </a:rPr>
                         <a:t>PIM Registro</a:t>
                       </a:r>
@@ -5800,6 +6331,7 @@
                           <a:solidFill>
                             <a:srgbClr val="E2E8F0"/>
                           </a:solidFill>
+                          <a:lang val="es-CL"/>
                         </a:rPr>
                         <a:t>TC_005_Agregar (3 filas DD)</a:t>
                       </a:r>
@@ -5828,6 +6360,7 @@
                           <a:solidFill>
                             <a:srgbClr val="E2E8F0"/>
                           </a:solidFill>
+                          <a:lang val="es-CL"/>
                         </a:rPr>
                         <a:t>PASS</a:t>
                       </a:r>
@@ -5839,6 +6372,11 @@
                     </a:solidFill>
                   </a:tcPr>
                 </a:tc>
+                <a:extLst>
+                  <a:ext uri="{0D108BD9-81ED-4DB2-BD59-A6C34878D82A}">
+                    <a16:rowId xmlns:a16="http://schemas.microsoft.com/office/drawing/2014/main" val="10003"/>
+                  </a:ext>
+                </a:extLst>
               </a:tr>
               <a:tr h="419100">
                 <a:tc>
@@ -5858,6 +6396,7 @@
                           <a:solidFill>
                             <a:srgbClr val="E2E8F0"/>
                           </a:solidFill>
+                          <a:lang val="es-CL"/>
                         </a:rPr>
                         <a:t>RF-04: Buscar empleado</a:t>
                       </a:r>
@@ -5886,6 +6425,7 @@
                           <a:solidFill>
                             <a:srgbClr val="E2E8F0"/>
                           </a:solidFill>
+                          <a:lang val="es-CL"/>
                         </a:rPr>
                         <a:t>PIM Busqueda</a:t>
                       </a:r>
@@ -5914,6 +6454,7 @@
                           <a:solidFill>
                             <a:srgbClr val="E2E8F0"/>
                           </a:solidFill>
+                          <a:lang val="es-CL"/>
                         </a:rPr>
                         <a:t>TC_006_Buscar (3 filas DD)</a:t>
                       </a:r>
@@ -5942,6 +6483,7 @@
                           <a:solidFill>
                             <a:srgbClr val="E2E8F0"/>
                           </a:solidFill>
+                          <a:lang val="es-CL"/>
                         </a:rPr>
                         <a:t>PASS</a:t>
                       </a:r>
@@ -5953,6 +6495,11 @@
                     </a:solidFill>
                   </a:tcPr>
                 </a:tc>
+                <a:extLst>
+                  <a:ext uri="{0D108BD9-81ED-4DB2-BD59-A6C34878D82A}">
+                    <a16:rowId xmlns:a16="http://schemas.microsoft.com/office/drawing/2014/main" val="10004"/>
+                  </a:ext>
+                </a:extLst>
               </a:tr>
               <a:tr h="419100">
                 <a:tc>
@@ -5972,6 +6519,7 @@
                           <a:solidFill>
                             <a:srgbClr val="E2E8F0"/>
                           </a:solidFill>
+                          <a:lang val="es-CL"/>
                         </a:rPr>
                         <a:t>RF-05: Editar empleado</a:t>
                       </a:r>
@@ -6000,6 +6548,7 @@
                           <a:solidFill>
                             <a:srgbClr val="E2E8F0"/>
                           </a:solidFill>
+                          <a:lang val="es-CL"/>
                         </a:rPr>
                         <a:t>PIM Edicion</a:t>
                       </a:r>
@@ -6028,6 +6577,7 @@
                           <a:solidFill>
                             <a:srgbClr val="E2E8F0"/>
                           </a:solidFill>
+                          <a:lang val="es-CL"/>
                         </a:rPr>
                         <a:t>TC_007_Editar (3 filas DD)</a:t>
                       </a:r>
@@ -6056,6 +6606,7 @@
                           <a:solidFill>
                             <a:srgbClr val="E2E8F0"/>
                           </a:solidFill>
+                          <a:lang val="es-CL"/>
                         </a:rPr>
                         <a:t>PASS</a:t>
                       </a:r>
@@ -6067,6 +6618,11 @@
                     </a:solidFill>
                   </a:tcPr>
                 </a:tc>
+                <a:extLst>
+                  <a:ext uri="{0D108BD9-81ED-4DB2-BD59-A6C34878D82A}">
+                    <a16:rowId xmlns:a16="http://schemas.microsoft.com/office/drawing/2014/main" val="10005"/>
+                  </a:ext>
+                </a:extLst>
               </a:tr>
               <a:tr h="419100">
                 <a:tc>
@@ -6086,6 +6642,7 @@
                           <a:solidFill>
                             <a:srgbClr val="E2E8F0"/>
                           </a:solidFill>
+                          <a:lang val="es-CL"/>
                         </a:rPr>
                         <a:t>RF-06: Eliminar empleado</a:t>
                       </a:r>
@@ -6114,6 +6671,7 @@
                           <a:solidFill>
                             <a:srgbClr val="E2E8F0"/>
                           </a:solidFill>
+                          <a:lang val="es-CL"/>
                         </a:rPr>
                         <a:t>PIM Eliminacion</a:t>
                       </a:r>
@@ -6142,6 +6700,7 @@
                           <a:solidFill>
                             <a:srgbClr val="E2E8F0"/>
                           </a:solidFill>
+                          <a:lang val="es-CL"/>
                         </a:rPr>
                         <a:t>TC_008_Eliminar (3 filas DD)</a:t>
                       </a:r>
@@ -6170,6 +6729,7 @@
                           <a:solidFill>
                             <a:srgbClr val="E2E8F0"/>
                           </a:solidFill>
+                          <a:lang val="es-CL"/>
                         </a:rPr>
                         <a:t>PASS</a:t>
                       </a:r>
@@ -6181,6 +6741,11 @@
                     </a:solidFill>
                   </a:tcPr>
                 </a:tc>
+                <a:extLst>
+                  <a:ext uri="{0D108BD9-81ED-4DB2-BD59-A6C34878D82A}">
+                    <a16:rowId xmlns:a16="http://schemas.microsoft.com/office/drawing/2014/main" val="10006"/>
+                  </a:ext>
+                </a:extLst>
               </a:tr>
               <a:tr h="419100">
                 <a:tc>
@@ -6200,6 +6765,7 @@
                           <a:solidFill>
                             <a:srgbClr val="E2E8F0"/>
                           </a:solidFill>
+                          <a:lang val="es-CL"/>
                         </a:rPr>
                         <a:t>RF-07: Navegacion</a:t>
                       </a:r>
@@ -6228,6 +6794,7 @@
                           <a:solidFill>
                             <a:srgbClr val="E2E8F0"/>
                           </a:solidFill>
+                          <a:lang val="es-CL"/>
                         </a:rPr>
                         <a:t>Modulos</a:t>
                       </a:r>
@@ -6256,6 +6823,7 @@
                           <a:solidFill>
                             <a:srgbClr val="E2E8F0"/>
                           </a:solidFill>
+                          <a:lang val="es-CL"/>
                         </a:rPr>
                         <a:t>TC_007-009_Nav (Leave/Admin/Info)</a:t>
                       </a:r>
@@ -6284,6 +6852,7 @@
                           <a:solidFill>
                             <a:srgbClr val="E2E8F0"/>
                           </a:solidFill>
+                          <a:lang val="es-CL"/>
                         </a:rPr>
                         <a:t>PASS</a:t>
                       </a:r>
@@ -6295,6 +6864,11 @@
                     </a:solidFill>
                   </a:tcPr>
                 </a:tc>
+                <a:extLst>
+                  <a:ext uri="{0D108BD9-81ED-4DB2-BD59-A6C34878D82A}">
+                    <a16:rowId xmlns:a16="http://schemas.microsoft.com/office/drawing/2014/main" val="10007"/>
+                  </a:ext>
+                </a:extLst>
               </a:tr>
               <a:tr h="419100">
                 <a:tc>
@@ -6314,6 +6888,7 @@
                           <a:solidFill>
                             <a:srgbClr val="E2E8F0"/>
                           </a:solidFill>
+                          <a:lang val="es-CL"/>
                         </a:rPr>
                         <a:t>RF-08: Cerrar sesion</a:t>
                       </a:r>
@@ -6342,6 +6917,7 @@
                           <a:solidFill>
                             <a:srgbClr val="E2E8F0"/>
                           </a:solidFill>
+                          <a:lang val="es-CL"/>
                         </a:rPr>
                         <a:t>Logout</a:t>
                       </a:r>
@@ -6370,6 +6946,7 @@
                           <a:solidFill>
                             <a:srgbClr val="E2E8F0"/>
                           </a:solidFill>
+                          <a:lang val="es-CL"/>
                         </a:rPr>
                         <a:t>TC_003_Logout</a:t>
                       </a:r>
@@ -6398,6 +6975,7 @@
                           <a:solidFill>
                             <a:srgbClr val="E2E8F0"/>
                           </a:solidFill>
+                          <a:lang val="es-CL"/>
                         </a:rPr>
                         <a:t>PASS</a:t>
                       </a:r>
@@ -6409,6 +6987,11 @@
                     </a:solidFill>
                   </a:tcPr>
                 </a:tc>
+                <a:extLst>
+                  <a:ext uri="{0D108BD9-81ED-4DB2-BD59-A6C34878D82A}">
+                    <a16:rowId xmlns:a16="http://schemas.microsoft.com/office/drawing/2014/main" val="10008"/>
+                  </a:ext>
+                </a:extLst>
               </a:tr>
               <a:tr h="419100">
                 <a:tc>
@@ -6428,6 +7011,7 @@
                           <a:solidFill>
                             <a:srgbClr val="E2E8F0"/>
                           </a:solidFill>
+                          <a:lang val="es-CL"/>
                         </a:rPr>
                         <a:t>RF-09: Validacion campos</a:t>
                       </a:r>
@@ -6456,6 +7040,7 @@
                           <a:solidFill>
                             <a:srgbClr val="E2E8F0"/>
                           </a:solidFill>
+                          <a:lang val="es-CL"/>
                         </a:rPr>
                         <a:t>Formularios</a:t>
                       </a:r>
@@ -6484,6 +7069,7 @@
                           <a:solidFill>
                             <a:srgbClr val="E2E8F0"/>
                           </a:solidFill>
+                          <a:lang val="es-CL"/>
                         </a:rPr>
                         <a:t>TC_010_ValidarCampos</a:t>
                       </a:r>
@@ -6512,6 +7098,7 @@
                           <a:solidFill>
                             <a:srgbClr val="E2E8F0"/>
                           </a:solidFill>
+                          <a:lang val="es-CL"/>
                         </a:rPr>
                         <a:t>PASS</a:t>
                       </a:r>
@@ -6523,6 +7110,11 @@
                     </a:solidFill>
                   </a:tcPr>
                 </a:tc>
+                <a:extLst>
+                  <a:ext uri="{0D108BD9-81ED-4DB2-BD59-A6C34878D82A}">
+                    <a16:rowId xmlns:a16="http://schemas.microsoft.com/office/drawing/2014/main" val="10009"/>
+                  </a:ext>
+                </a:extLst>
               </a:tr>
               <a:tr h="419100">
                 <a:tc>
@@ -6542,6 +7134,7 @@
                           <a:solidFill>
                             <a:srgbClr val="E2E8F0"/>
                           </a:solidFill>
+                          <a:lang val="es-CL"/>
                         </a:rPr>
                         <a:t>RF-10: Assert titulo</a:t>
                       </a:r>
@@ -6570,6 +7163,7 @@
                           <a:solidFill>
                             <a:srgbClr val="E2E8F0"/>
                           </a:solidFill>
+                          <a:lang val="es-CL"/>
                         </a:rPr>
                         <a:t>Verificacion</a:t>
                       </a:r>
@@ -6598,6 +7192,7 @@
                           <a:solidFill>
                             <a:srgbClr val="E2E8F0"/>
                           </a:solidFill>
+                          <a:lang val="es-CL"/>
                         </a:rPr>
                         <a:t>TC_004_AssertTitulo</a:t>
                       </a:r>
@@ -6626,6 +7221,7 @@
                           <a:solidFill>
                             <a:srgbClr val="E2E8F0"/>
                           </a:solidFill>
+                          <a:lang val="es-CL"/>
                         </a:rPr>
                         <a:t>FAIL (diseno)</a:t>
                       </a:r>
@@ -6637,6 +7233,11 @@
                     </a:solidFill>
                   </a:tcPr>
                 </a:tc>
+                <a:extLst>
+                  <a:ext uri="{0D108BD9-81ED-4DB2-BD59-A6C34878D82A}">
+                    <a16:rowId xmlns:a16="http://schemas.microsoft.com/office/drawing/2014/main" val="10010"/>
+                  </a:ext>
+                </a:extLst>
               </a:tr>
               <a:tr h="419100">
                 <a:tc>
@@ -6656,6 +7257,7 @@
                           <a:solidFill>
                             <a:srgbClr val="E2E8F0"/>
                           </a:solidFill>
+                          <a:lang val="es-CL"/>
                         </a:rPr>
                         <a:t>RF-11: Solicitar licencia</a:t>
                       </a:r>
@@ -6684,6 +7286,7 @@
                           <a:solidFill>
                             <a:srgbClr val="E2E8F0"/>
                           </a:solidFill>
+                          <a:lang val="es-CL"/>
                         </a:rPr>
                         <a:t>Leave</a:t>
                       </a:r>
@@ -6712,6 +7315,7 @@
                           <a:solidFill>
                             <a:srgbClr val="E2E8F0"/>
                           </a:solidFill>
+                          <a:lang val="es-CL"/>
                         </a:rPr>
                         <a:t>TC_014_LeaveApply (3 filas DD)</a:t>
                       </a:r>
@@ -6740,6 +7344,7 @@
                           <a:solidFill>
                             <a:srgbClr val="E2E8F0"/>
                           </a:solidFill>
+                          <a:lang val="es-CL"/>
                         </a:rPr>
                         <a:t>PASS</a:t>
                       </a:r>
@@ -6751,6 +7356,11 @@
                     </a:solidFill>
                   </a:tcPr>
                 </a:tc>
+                <a:extLst>
+                  <a:ext uri="{0D108BD9-81ED-4DB2-BD59-A6C34878D82A}">
+                    <a16:rowId xmlns:a16="http://schemas.microsoft.com/office/drawing/2014/main" val="10011"/>
+                  </a:ext>
+                </a:extLst>
               </a:tr>
             </a:tbl>
           </a:graphicData>
@@ -6765,7 +7375,7 @@
 </file>
 
 <file path=ppt/slides/slide5.xml><?xml version="1.0" encoding="utf-8"?>
-<p:sld xmlns:a="http://schemas.openxmlformats.org/drawingml/2006/main" xmlns:p="http://schemas.openxmlformats.org/presentationml/2006/main" xmlns:r="http://schemas.openxmlformats.org/officeDocument/2006/relationships">
+<p:sld xmlns:a="http://schemas.openxmlformats.org/drawingml/2006/main" xmlns:r="http://schemas.openxmlformats.org/officeDocument/2006/relationships" xmlns:p="http://schemas.openxmlformats.org/presentationml/2006/main">
   <p:cSld>
     <p:bg>
       <p:bgPr>
@@ -6781,7 +7391,14 @@
         <p:cNvGrpSpPr/>
         <p:nvPr/>
       </p:nvGrpSpPr>
-      <p:grpSpPr/>
+      <p:grpSpPr>
+        <a:xfrm>
+          <a:off x="0" y="0"/>
+          <a:ext cx="0" cy="0"/>
+          <a:chOff x="0" y="0"/>
+          <a:chExt cx="0" cy="0"/>
+        </a:xfrm>
+      </p:grpSpPr>
       <p:sp>
         <p:nvSpPr>
           <p:cNvPr id="2" name="Rectangle 1"/>
@@ -6812,7 +7429,12 @@
           <a:bodyPr rtlCol="0" anchor="ctr"/>
           <a:lstStyle/>
           <a:p>
-            <a:pPr algn="ctr"/>
+            <a:pPr algn="ctr">
+              <a:defRPr>
+                <a:lang val="es-CL"/>
+              </a:defRPr>
+            </a:pPr>
+            <a:endParaRPr/>
           </a:p>
         </p:txBody>
       </p:sp>
@@ -6843,6 +7465,7 @@
                 <a:solidFill>
                   <a:srgbClr val="FFFFFF"/>
                 </a:solidFill>
+                <a:lang val="es-CL"/>
               </a:defRPr>
             </a:pPr>
             <a:r>
@@ -6850,6 +7473,7 @@
                 <a:solidFill>
                   <a:srgbClr val="CBD5E1"/>
                 </a:solidFill>
+                <a:lang val="es-CL"/>
               </a:rPr>
               <a:t>Resultados de Ejecucion</a:t>
             </a:r>
@@ -6883,6 +7507,7 @@
                 <a:solidFill>
                   <a:srgbClr val="2980B9"/>
                 </a:solidFill>
+                <a:lang val="es-CL"/>
               </a:defRPr>
             </a:pPr>
             <a:r>
@@ -6890,6 +7515,7 @@
                 <a:solidFill>
                   <a:srgbClr val="CBD5E1"/>
                 </a:solidFill>
+                <a:lang val="es-CL"/>
               </a:rPr>
               <a:t>29 escenarios ejecutados | 96.55% aprobacion</a:t>
             </a:r>
@@ -6926,6 +7552,7 @@
                 <a:solidFill>
                   <a:srgbClr val="2C3E50"/>
                 </a:solidFill>
+                <a:lang val="es-CL"/>
               </a:defRPr>
             </a:pPr>
             <a:r>
@@ -6933,6 +7560,7 @@
                 <a:solidFill>
                   <a:srgbClr val="CBD5E1"/>
                 </a:solidFill>
+                <a:lang val="es-CL"/>
               </a:rPr>
               <a:t>Total escenarios: 29</a:t>
             </a:r>
@@ -6946,6 +7574,7 @@
                 <a:solidFill>
                   <a:srgbClr val="2C3E50"/>
                 </a:solidFill>
+                <a:lang val="es-CL"/>
               </a:defRPr>
             </a:pPr>
             <a:r>
@@ -6953,6 +7582,7 @@
                 <a:solidFill>
                   <a:srgbClr val="CBD5E1"/>
                 </a:solidFill>
+                <a:lang val="es-CL"/>
               </a:rPr>
               <a:t>Aprobados: 28 (96.55%)</a:t>
             </a:r>
@@ -6966,6 +7596,7 @@
                 <a:solidFill>
                   <a:srgbClr val="2C3E50"/>
                 </a:solidFill>
+                <a:lang val="es-CL"/>
               </a:defRPr>
             </a:pPr>
             <a:r>
@@ -6973,6 +7604,7 @@
                 <a:solidFill>
                   <a:srgbClr val="CBD5E1"/>
                 </a:solidFill>
+                <a:lang val="es-CL"/>
               </a:rPr>
               <a:t>Fallidos: 1 (3.45%) - TC_004 intencional</a:t>
             </a:r>
@@ -6986,6 +7618,7 @@
                 <a:solidFill>
                   <a:srgbClr val="2C3E50"/>
                 </a:solidFill>
+                <a:lang val="es-CL"/>
               </a:defRPr>
             </a:pPr>
             <a:r>
@@ -6993,6 +7626,7 @@
                 <a:solidFill>
                   <a:srgbClr val="CBD5E1"/>
                 </a:solidFill>
+                <a:lang val="es-CL"/>
               </a:rPr>
               <a:t>Data-Driven: 18/18 PASS (62%)</a:t>
             </a:r>
@@ -7006,6 +7640,7 @@
                 <a:solidFill>
                   <a:srgbClr val="2C3E50"/>
                 </a:solidFill>
+                <a:lang val="es-CL"/>
               </a:defRPr>
             </a:pPr>
             <a:r>
@@ -7013,6 +7648,7 @@
                 <a:solidFill>
                   <a:srgbClr val="CBD5E1"/>
                 </a:solidFill>
+                <a:lang val="es-CL"/>
               </a:rPr>
               <a:t>10 features ejecutadas</a:t>
             </a:r>
@@ -7026,6 +7662,7 @@
                 <a:solidFill>
                   <a:srgbClr val="2C3E50"/>
                 </a:solidFill>
+                <a:lang val="es-CL"/>
               </a:defRPr>
             </a:pPr>
             <a:r>
@@ -7033,6 +7670,7 @@
                 <a:solidFill>
                   <a:srgbClr val="CBD5E1"/>
                 </a:solidFill>
+                <a:lang val="es-CL"/>
               </a:rPr>
               <a:t>Tiempo total: ~7 minutos</a:t>
             </a:r>
@@ -7046,6 +7684,7 @@
                 <a:solidFill>
                   <a:srgbClr val="2C3E50"/>
                 </a:solidFill>
+                <a:lang val="es-CL"/>
               </a:defRPr>
             </a:pPr>
             <a:r>
@@ -7053,6 +7692,7 @@
                 <a:solidFill>
                   <a:srgbClr val="CBD5E1"/>
                 </a:solidFill>
+                <a:lang val="es-CL"/>
               </a:rPr>
               <a:t>177 screenshots en evidencias/</a:t>
             </a:r>
@@ -7066,6 +7706,7 @@
                 <a:solidFill>
                   <a:srgbClr val="2C3E50"/>
                 </a:solidFill>
+                <a:lang val="es-CL"/>
               </a:defRPr>
             </a:pPr>
             <a:r>
@@ -7073,6 +7714,7 @@
                 <a:solidFill>
                   <a:srgbClr val="CBD5E1"/>
                 </a:solidFill>
+                <a:lang val="es-CL"/>
               </a:rPr>
               <a:t>6 archivos Excel testData</a:t>
             </a:r>
@@ -7118,7 +7760,12 @@
           <a:bodyPr rtlCol="0" anchor="ctr"/>
           <a:lstStyle/>
           <a:p>
-            <a:pPr algn="ctr"/>
+            <a:pPr algn="ctr">
+              <a:defRPr>
+                <a:lang val="es-CL"/>
+              </a:defRPr>
+            </a:pPr>
+            <a:endParaRPr/>
           </a:p>
         </p:txBody>
       </p:sp>
@@ -7131,7 +7778,7 @@
         <p:spPr>
           <a:xfrm>
             <a:off x="6675120" y="1554480"/>
-            <a:ext cx="4572000" cy="365760"/>
+            <a:ext cx="4572000" cy="307777"/>
           </a:xfrm>
           <a:prstGeom prst="rect">
             <a:avLst/>
@@ -7149,15 +7796,32 @@
                 <a:solidFill>
                   <a:srgbClr val="27AE60"/>
                 </a:solidFill>
+                <a:lang val="es-CL"/>
               </a:defRPr>
             </a:pPr>
             <a:r>
-              <a:rPr>
-                <a:solidFill>
-                  <a:srgbClr val="CBD5E1"/>
-                </a:solidFill>
-              </a:rPr>
-              <a:t>Fallo Intencional TC_004:</a:t>
+              <a:rPr dirty="0" err="1">
+                <a:lang val="es-CL"/>
+              </a:rPr>
+              <a:t>Fallo</a:t>
+            </a:r>
+            <a:r>
+              <a:rPr dirty="0">
+                <a:lang val="es-CL"/>
+              </a:rPr>
+              <a:t> </a:t>
+            </a:r>
+            <a:r>
+              <a:rPr dirty="0" err="1">
+                <a:lang val="es-CL"/>
+              </a:rPr>
+              <a:t>Intencional</a:t>
+            </a:r>
+            <a:r>
+              <a:rPr dirty="0">
+                <a:lang val="es-CL"/>
+              </a:rPr>
+              <a:t> TC_004:</a:t>
             </a:r>
           </a:p>
         </p:txBody>
@@ -7171,7 +7835,7 @@
         <p:spPr>
           <a:xfrm>
             <a:off x="6675120" y="1920240"/>
-            <a:ext cx="4572000" cy="1463040"/>
+            <a:ext cx="4572000" cy="1200329"/>
           </a:xfrm>
           <a:prstGeom prst="rect">
             <a:avLst/>
@@ -7189,60 +7853,257 @@
                 <a:solidFill>
                   <a:srgbClr val="2C3E50"/>
                 </a:solidFill>
+                <a:lang val="es-CL"/>
               </a:defRPr>
             </a:pPr>
             <a:r>
-              <a:rPr>
-                <a:solidFill>
-                  <a:srgbClr val="CBD5E1"/>
-                </a:solidFill>
-              </a:rPr>
-              <a:t>Escenario: Assert falla en verificacion de titulo</a:t>
-            </a:r>
-            <a:br/>
-            <a:r>
-              <a:rPr>
-                <a:solidFill>
-                  <a:srgbClr val="CBD5E1"/>
-                </a:solidFill>
-              </a:rPr>
-              <a:t>Esperado: 'OrangeHRM OS 5.7'</a:t>
-            </a:r>
-            <a:br/>
-            <a:r>
-              <a:rPr>
-                <a:solidFill>
-                  <a:srgbClr val="CBD5E1"/>
-                </a:solidFill>
-              </a:rPr>
-              <a:t>Real: 'OrangeHRM'</a:t>
-            </a:r>
-            <a:br/>
-            <a:r>
-              <a:rPr>
-                <a:solidFill>
-                  <a:srgbClr val="CBD5E1"/>
-                </a:solidFill>
-              </a:rPr>
-              <a:t>Proposito: Demostrar hook @after_scenario</a:t>
-            </a:r>
-            <a:br/>
-            <a:r>
-              <a:rPr>
-                <a:solidFill>
-                  <a:srgbClr val="CBD5E1"/>
-                </a:solidFill>
-              </a:rPr>
-              <a:t>captura screenshot automatico en fallos</a:t>
-            </a:r>
-            <a:br/>
-            <a:r>
-              <a:rPr>
-                <a:solidFill>
-                  <a:srgbClr val="CBD5E1"/>
-                </a:solidFill>
-              </a:rPr>
-              <a:t>Evidencia en: evidencias/screenshot_*.png</a:t>
+              <a:rPr dirty="0" err="1">
+                <a:lang val="es-CL"/>
+              </a:rPr>
+              <a:t>Escenario</a:t>
+            </a:r>
+            <a:r>
+              <a:rPr dirty="0">
+                <a:lang val="es-CL"/>
+              </a:rPr>
+              <a:t>: Assert </a:t>
+            </a:r>
+            <a:r>
+              <a:rPr dirty="0" err="1">
+                <a:lang val="es-CL"/>
+              </a:rPr>
+              <a:t>falla</a:t>
+            </a:r>
+            <a:r>
+              <a:rPr dirty="0">
+                <a:lang val="es-CL"/>
+              </a:rPr>
+              <a:t> </a:t>
+            </a:r>
+            <a:r>
+              <a:rPr dirty="0" err="1">
+                <a:lang val="es-CL"/>
+              </a:rPr>
+              <a:t>en</a:t>
+            </a:r>
+            <a:r>
+              <a:rPr dirty="0">
+                <a:lang val="es-CL"/>
+              </a:rPr>
+              <a:t> </a:t>
+            </a:r>
+            <a:r>
+              <a:rPr dirty="0" err="1">
+                <a:lang val="es-CL"/>
+              </a:rPr>
+              <a:t>verificacion</a:t>
+            </a:r>
+            <a:r>
+              <a:rPr dirty="0">
+                <a:lang val="es-CL"/>
+              </a:rPr>
+              <a:t> de </a:t>
+            </a:r>
+            <a:r>
+              <a:rPr dirty="0" err="1">
+                <a:lang val="es-CL"/>
+              </a:rPr>
+              <a:t>titulo</a:t>
+            </a:r>
+            <a:r>
+              <a:rPr dirty="0">
+                <a:lang val="es-CL"/>
+              </a:rPr>
+              <a:t/>
+            </a:r>
+            <a:br>
+              <a:rPr dirty="0"/>
+            </a:br>
+            <a:r>
+              <a:rPr dirty="0" err="1">
+                <a:lang val="es-CL"/>
+              </a:rPr>
+              <a:t>Esperado</a:t>
+            </a:r>
+            <a:r>
+              <a:rPr dirty="0">
+                <a:lang val="es-CL"/>
+              </a:rPr>
+              <a:t>: '</a:t>
+            </a:r>
+            <a:r>
+              <a:rPr dirty="0" err="1">
+                <a:lang val="es-CL"/>
+              </a:rPr>
+              <a:t>OrangeHRM</a:t>
+            </a:r>
+            <a:r>
+              <a:rPr dirty="0">
+                <a:lang val="es-CL"/>
+              </a:rPr>
+              <a:t> OS 5.7'</a:t>
+            </a:r>
+            <a:r>
+              <a:rPr dirty="0">
+                <a:lang val="es-CL"/>
+              </a:rPr>
+              <a:t/>
+            </a:r>
+            <a:br>
+              <a:rPr dirty="0"/>
+            </a:br>
+            <a:r>
+              <a:rPr dirty="0">
+                <a:lang val="es-CL"/>
+              </a:rPr>
+              <a:t>Real: '</a:t>
+            </a:r>
+            <a:r>
+              <a:rPr dirty="0" err="1">
+                <a:lang val="es-CL"/>
+              </a:rPr>
+              <a:t>OrangeHRM</a:t>
+            </a:r>
+            <a:r>
+              <a:rPr dirty="0">
+                <a:lang val="es-CL"/>
+              </a:rPr>
+              <a:t>'</a:t>
+            </a:r>
+            <a:r>
+              <a:rPr dirty="0">
+                <a:lang val="es-CL"/>
+              </a:rPr>
+              <a:t/>
+            </a:r>
+            <a:br>
+              <a:rPr dirty="0"/>
+            </a:br>
+            <a:r>
+              <a:rPr dirty="0" err="1">
+                <a:lang val="es-CL"/>
+              </a:rPr>
+              <a:t>Proposito</a:t>
+            </a:r>
+            <a:r>
+              <a:rPr dirty="0">
+                <a:lang val="es-CL"/>
+              </a:rPr>
+              <a:t>: </a:t>
+            </a:r>
+            <a:r>
+              <a:rPr dirty="0" err="1">
+                <a:lang val="es-CL"/>
+              </a:rPr>
+              <a:t>Demostrar</a:t>
+            </a:r>
+            <a:r>
+              <a:rPr dirty="0">
+                <a:lang val="es-CL"/>
+              </a:rPr>
+              <a:t> hook @</a:t>
+            </a:r>
+            <a:r>
+              <a:rPr dirty="0" err="1">
+                <a:lang val="es-CL"/>
+              </a:rPr>
+              <a:t>after_scenario</a:t>
+            </a:r>
+            <a:r>
+              <a:rPr dirty="0">
+                <a:lang val="es-CL"/>
+              </a:rPr>
+              <a:t/>
+            </a:r>
+            <a:br>
+              <a:rPr dirty="0"/>
+            </a:br>
+            <a:r>
+              <a:rPr dirty="0" err="1">
+                <a:lang val="es-CL"/>
+              </a:rPr>
+              <a:t>captura</a:t>
+            </a:r>
+            <a:r>
+              <a:rPr dirty="0">
+                <a:lang val="es-CL"/>
+              </a:rPr>
+              <a:t> screenshot </a:t>
+            </a:r>
+            <a:r>
+              <a:rPr dirty="0" err="1">
+                <a:lang val="es-CL"/>
+              </a:rPr>
+              <a:t>automatico</a:t>
+            </a:r>
+            <a:r>
+              <a:rPr dirty="0">
+                <a:lang val="es-CL"/>
+              </a:rPr>
+              <a:t> </a:t>
+            </a:r>
+            <a:r>
+              <a:rPr dirty="0" err="1">
+                <a:lang val="es-CL"/>
+              </a:rPr>
+              <a:t>en</a:t>
+            </a:r>
+            <a:r>
+              <a:rPr dirty="0">
+                <a:lang val="es-CL"/>
+              </a:rPr>
+              <a:t> </a:t>
+            </a:r>
+            <a:r>
+              <a:rPr dirty="0" err="1">
+                <a:lang val="es-CL"/>
+              </a:rPr>
+              <a:t>fallos</a:t>
+            </a:r>
+            <a:r>
+              <a:rPr dirty="0">
+                <a:lang val="es-CL"/>
+              </a:rPr>
+              <a:t/>
+            </a:r>
+            <a:br>
+              <a:rPr dirty="0"/>
+            </a:br>
+            <a:r>
+              <a:rPr dirty="0" err="1">
+                <a:lang val="es-CL"/>
+              </a:rPr>
+              <a:t>Evidencia</a:t>
+            </a:r>
+            <a:r>
+              <a:rPr dirty="0">
+                <a:lang val="es-CL"/>
+              </a:rPr>
+              <a:t> </a:t>
+            </a:r>
+            <a:r>
+              <a:rPr dirty="0" err="1">
+                <a:lang val="es-CL"/>
+              </a:rPr>
+              <a:t>en</a:t>
+            </a:r>
+            <a:r>
+              <a:rPr dirty="0">
+                <a:lang val="es-CL"/>
+              </a:rPr>
+              <a:t>: </a:t>
+            </a:r>
+            <a:r>
+              <a:rPr dirty="0" err="1">
+                <a:lang val="es-CL"/>
+              </a:rPr>
+              <a:t>evidencias</a:t>
+            </a:r>
+            <a:r>
+              <a:rPr dirty="0">
+                <a:lang val="es-CL"/>
+              </a:rPr>
+              <a:t>/screenshot_*.png</a:t>
             </a:r>
           </a:p>
         </p:txBody>
@@ -7286,7 +8147,12 @@
           <a:bodyPr rtlCol="0" anchor="ctr"/>
           <a:lstStyle/>
           <a:p>
-            <a:pPr algn="ctr"/>
+            <a:pPr algn="ctr">
+              <a:defRPr>
+                <a:lang val="es-CL"/>
+              </a:defRPr>
+            </a:pPr>
+            <a:endParaRPr/>
           </a:p>
         </p:txBody>
       </p:sp>
@@ -7299,7 +8165,7 @@
         <p:spPr>
           <a:xfrm>
             <a:off x="6675120" y="4114800"/>
-            <a:ext cx="4572000" cy="365760"/>
+            <a:ext cx="4572000" cy="307777"/>
           </a:xfrm>
           <a:prstGeom prst="rect">
             <a:avLst/>
@@ -7317,15 +8183,32 @@
                 <a:solidFill>
                   <a:srgbClr val="E74C3C"/>
                 </a:solidFill>
+                <a:lang val="es-CL"/>
               </a:defRPr>
             </a:pPr>
             <a:r>
-              <a:rPr>
-                <a:solidFill>
-                  <a:srgbClr val="CBD5E1"/>
-                </a:solidFill>
-              </a:rPr>
-              <a:t>Cobertura por Modulo:</a:t>
+              <a:rPr dirty="0" err="1">
+                <a:lang val="es-CL"/>
+              </a:rPr>
+              <a:t>Cobertura</a:t>
+            </a:r>
+            <a:r>
+              <a:rPr dirty="0">
+                <a:lang val="es-CL"/>
+              </a:rPr>
+              <a:t> </a:t>
+            </a:r>
+            <a:r>
+              <a:rPr dirty="0" err="1">
+                <a:lang val="es-CL"/>
+              </a:rPr>
+              <a:t>por</a:t>
+            </a:r>
+            <a:r>
+              <a:rPr dirty="0">
+                <a:lang val="es-CL"/>
+              </a:rPr>
+              <a:t> Modulo:</a:t>
             </a:r>
           </a:p>
         </p:txBody>
@@ -7338,8 +8221,8 @@
         </p:nvSpPr>
         <p:spPr>
           <a:xfrm>
-            <a:off x="6675120" y="4480560"/>
-            <a:ext cx="4572000" cy="1463040"/>
+            <a:off x="6629400" y="4663440"/>
+            <a:ext cx="4572000" cy="830997"/>
           </a:xfrm>
           <a:prstGeom prst="rect">
             <a:avLst/>
@@ -7357,42 +8240,107 @@
                 <a:solidFill>
                   <a:srgbClr val="2C3E50"/>
                 </a:solidFill>
+                <a:lang val="es-CL"/>
               </a:defRPr>
             </a:pPr>
             <a:r>
-              <a:rPr>
-                <a:solidFill>
-                  <a:srgbClr val="CBD5E1"/>
-                </a:solidFill>
-              </a:rPr>
-              <a:t>Login: 3/4 PASS  |  Navegacion: 3/3 PASS</a:t>
-            </a:r>
-            <a:br/>
-            <a:r>
-              <a:rPr>
-                <a:solidFill>
-                  <a:srgbClr val="CBD5E1"/>
-                </a:solidFill>
-              </a:rPr>
-              <a:t>Sesion: 1/1 PASS  |  PIM CRUD: 12/12 PASS</a:t>
-            </a:r>
-            <a:br/>
-            <a:r>
-              <a:rPr>
-                <a:solidFill>
-                  <a:srgbClr val="CBD5E1"/>
-                </a:solidFill>
-              </a:rPr>
-              <a:t>Perfil: 3/3 PASS  |  Licencias: 3/3 PASS</a:t>
-            </a:r>
-            <a:br/>
-            <a:r>
-              <a:rPr>
-                <a:solidFill>
-                  <a:srgbClr val="CBD5E1"/>
-                </a:solidFill>
-              </a:rPr>
-              <a:t>Data-Driven: 18/18 PASS  |  62% cobertura DD</a:t>
+              <a:rPr dirty="0">
+                <a:lang val="es-CL"/>
+              </a:rPr>
+              <a:t>Login: 3/4 PASS  |  </a:t>
+            </a:r>
+            <a:r>
+              <a:rPr dirty="0" err="1">
+                <a:lang val="es-CL"/>
+              </a:rPr>
+              <a:t>Navegacion</a:t>
+            </a:r>
+            <a:r>
+              <a:rPr dirty="0">
+                <a:lang val="es-CL"/>
+              </a:rPr>
+              <a:t>: 3/3 PASS</a:t>
+            </a:r>
+            <a:r>
+              <a:rPr dirty="0">
+                <a:lang val="es-CL"/>
+              </a:rPr>
+              <a:t/>
+            </a:r>
+            <a:br>
+              <a:rPr dirty="0"/>
+            </a:br>
+            <a:r>
+              <a:rPr dirty="0" err="1">
+                <a:lang val="es-CL"/>
+              </a:rPr>
+              <a:t>Sesion</a:t>
+            </a:r>
+            <a:r>
+              <a:rPr dirty="0">
+                <a:lang val="es-CL"/>
+              </a:rPr>
+              <a:t>: 1/1 PASS  |  PIM CRUD: 12/12 PASS</a:t>
+            </a:r>
+            <a:r>
+              <a:rPr dirty="0">
+                <a:lang val="es-CL"/>
+              </a:rPr>
+              <a:t/>
+            </a:r>
+            <a:br>
+              <a:rPr dirty="0"/>
+            </a:br>
+            <a:r>
+              <a:rPr dirty="0" err="1">
+                <a:lang val="es-CL"/>
+              </a:rPr>
+              <a:t>Perfil</a:t>
+            </a:r>
+            <a:r>
+              <a:rPr dirty="0">
+                <a:lang val="es-CL"/>
+              </a:rPr>
+              <a:t>: 3/3 PASS  |  </a:t>
+            </a:r>
+            <a:r>
+              <a:rPr dirty="0" err="1">
+                <a:lang val="es-CL"/>
+              </a:rPr>
+              <a:t>Licencias</a:t>
+            </a:r>
+            <a:r>
+              <a:rPr dirty="0">
+                <a:lang val="es-CL"/>
+              </a:rPr>
+              <a:t>: 3/3 PASS</a:t>
+            </a:r>
+            <a:r>
+              <a:rPr dirty="0">
+                <a:lang val="es-CL"/>
+              </a:rPr>
+              <a:t/>
+            </a:r>
+            <a:br>
+              <a:rPr dirty="0"/>
+            </a:br>
+            <a:r>
+              <a:rPr dirty="0">
+                <a:lang val="es-CL"/>
+              </a:rPr>
+              <a:t>Data-Driven: 18/18 PASS  |  62% </a:t>
+            </a:r>
+            <a:r>
+              <a:rPr dirty="0" err="1">
+                <a:lang val="es-CL"/>
+              </a:rPr>
+              <a:t>cobertura</a:t>
+            </a:r>
+            <a:r>
+              <a:rPr dirty="0">
+                <a:lang val="es-CL"/>
+              </a:rPr>
+              <a:t> DD</a:t>
             </a:r>
           </a:p>
         </p:txBody>
@@ -7406,7 +8354,7 @@
 </file>
 
 <file path=ppt/slides/slide6.xml><?xml version="1.0" encoding="utf-8"?>
-<p:sld xmlns:a="http://schemas.openxmlformats.org/drawingml/2006/main" xmlns:p="http://schemas.openxmlformats.org/presentationml/2006/main" xmlns:r="http://schemas.openxmlformats.org/officeDocument/2006/relationships">
+<p:sld xmlns:a="http://schemas.openxmlformats.org/drawingml/2006/main" xmlns:r="http://schemas.openxmlformats.org/officeDocument/2006/relationships" xmlns:p="http://schemas.openxmlformats.org/presentationml/2006/main">
   <p:cSld>
     <p:bg>
       <p:bgPr>
@@ -7422,7 +8370,14 @@
         <p:cNvGrpSpPr/>
         <p:nvPr/>
       </p:nvGrpSpPr>
-      <p:grpSpPr/>
+      <p:grpSpPr>
+        <a:xfrm>
+          <a:off x="0" y="0"/>
+          <a:ext cx="0" cy="0"/>
+          <a:chOff x="0" y="0"/>
+          <a:chExt cx="0" cy="0"/>
+        </a:xfrm>
+      </p:grpSpPr>
       <p:sp>
         <p:nvSpPr>
           <p:cNvPr id="2" name="Rectangle 1"/>
@@ -7453,7 +8408,12 @@
           <a:bodyPr rtlCol="0" anchor="ctr"/>
           <a:lstStyle/>
           <a:p>
-            <a:pPr algn="ctr"/>
+            <a:pPr algn="ctr">
+              <a:defRPr>
+                <a:lang val="es-CL"/>
+              </a:defRPr>
+            </a:pPr>
+            <a:endParaRPr/>
           </a:p>
         </p:txBody>
       </p:sp>
@@ -7484,6 +8444,7 @@
                 <a:solidFill>
                   <a:srgbClr val="FFFFFF"/>
                 </a:solidFill>
+                <a:lang val="es-CL"/>
               </a:defRPr>
             </a:pPr>
             <a:r>
@@ -7491,6 +8452,7 @@
                 <a:solidFill>
                   <a:srgbClr val="CBD5E1"/>
                 </a:solidFill>
+                <a:lang val="es-CL"/>
               </a:rPr>
               <a:t>Metricas de Calidad y Rendimiento</a:t>
             </a:r>
@@ -7516,10 +8478,34 @@
                 <a:tableStyleId>{5C22544A-7EE6-4342-B048-85BDC9FD1C3A}</a:tableStyleId>
               </a:tblPr>
               <a:tblGrid>
-                <a:gridCol w="1645920"/>
-                <a:gridCol w="1371600"/>
-                <a:gridCol w="1371600"/>
-                <a:gridCol w="1097280"/>
+                <a:gridCol w="1645920">
+                  <a:extLst>
+                    <a:ext uri="{9D8B030D-6E8A-4147-A177-3AD203B41FA5}">
+                      <a16:colId xmlns:a16="http://schemas.microsoft.com/office/drawing/2014/main" val="20000"/>
+                    </a:ext>
+                  </a:extLst>
+                </a:gridCol>
+                <a:gridCol w="1371600">
+                  <a:extLst>
+                    <a:ext uri="{9D8B030D-6E8A-4147-A177-3AD203B41FA5}">
+                      <a16:colId xmlns:a16="http://schemas.microsoft.com/office/drawing/2014/main" val="20001"/>
+                    </a:ext>
+                  </a:extLst>
+                </a:gridCol>
+                <a:gridCol w="1371600">
+                  <a:extLst>
+                    <a:ext uri="{9D8B030D-6E8A-4147-A177-3AD203B41FA5}">
+                      <a16:colId xmlns:a16="http://schemas.microsoft.com/office/drawing/2014/main" val="20002"/>
+                    </a:ext>
+                  </a:extLst>
+                </a:gridCol>
+                <a:gridCol w="1097280">
+                  <a:extLst>
+                    <a:ext uri="{9D8B030D-6E8A-4147-A177-3AD203B41FA5}">
+                      <a16:colId xmlns:a16="http://schemas.microsoft.com/office/drawing/2014/main" val="20003"/>
+                    </a:ext>
+                  </a:extLst>
+                </a:gridCol>
               </a:tblGrid>
               <a:tr h="533400">
                 <a:tc>
@@ -7539,6 +8525,7 @@
                           <a:solidFill>
                             <a:srgbClr val="FFFFFF"/>
                           </a:solidFill>
+                          <a:lang val="es-CL"/>
                         </a:rPr>
                         <a:t>Metrica (PPT 3.3.1)</a:t>
                       </a:r>
@@ -7567,6 +8554,7 @@
                           <a:solidFill>
                             <a:srgbClr val="FFFFFF"/>
                           </a:solidFill>
+                          <a:lang val="es-CL"/>
                         </a:rPr>
                         <a:t>Formula</a:t>
                       </a:r>
@@ -7595,6 +8583,7 @@
                           <a:solidFill>
                             <a:srgbClr val="FFFFFF"/>
                           </a:solidFill>
+                          <a:lang val="es-CL"/>
                         </a:rPr>
                         <a:t>Resultado</a:t>
                       </a:r>
@@ -7623,6 +8612,7 @@
                           <a:solidFill>
                             <a:srgbClr val="FFFFFF"/>
                           </a:solidFill>
+                          <a:lang val="es-CL"/>
                         </a:rPr>
                         <a:t>Fuente</a:t>
                       </a:r>
@@ -7634,6 +8624,11 @@
                     </a:solidFill>
                   </a:tcPr>
                 </a:tc>
+                <a:extLst>
+                  <a:ext uri="{0D108BD9-81ED-4DB2-BD59-A6C34878D82A}">
+                    <a16:rowId xmlns:a16="http://schemas.microsoft.com/office/drawing/2014/main" val="10000"/>
+                  </a:ext>
+                </a:extLst>
               </a:tr>
               <a:tr h="533400">
                 <a:tc>
@@ -7653,6 +8648,7 @@
                           <a:solidFill>
                             <a:srgbClr val="E2E8F0"/>
                           </a:solidFill>
+                          <a:lang val="es-CL"/>
                         </a:rPr>
                         <a:t>% Automatizable</a:t>
                       </a:r>
@@ -7681,6 +8677,7 @@
                           <a:solidFill>
                             <a:srgbClr val="E2E8F0"/>
                           </a:solidFill>
+                          <a:lang val="es-CL"/>
                         </a:rPr>
                         <a:t>(Aut/Tot) x 100</a:t>
                       </a:r>
@@ -7709,6 +8706,7 @@
                           <a:solidFill>
                             <a:srgbClr val="E2E8F0"/>
                           </a:solidFill>
+                          <a:lang val="es-CL"/>
                         </a:rPr>
                         <a:t>100% (29/29)</a:t>
                       </a:r>
@@ -7737,6 +8735,7 @@
                           <a:solidFill>
                             <a:srgbClr val="E2E8F0"/>
                           </a:solidFill>
+                          <a:lang val="es-CL"/>
                         </a:rPr>
                         <a:t>reporte.html</a:t>
                       </a:r>
@@ -7748,6 +8747,11 @@
                     </a:solidFill>
                   </a:tcPr>
                 </a:tc>
+                <a:extLst>
+                  <a:ext uri="{0D108BD9-81ED-4DB2-BD59-A6C34878D82A}">
+                    <a16:rowId xmlns:a16="http://schemas.microsoft.com/office/drawing/2014/main" val="10001"/>
+                  </a:ext>
+                </a:extLst>
               </a:tr>
               <a:tr h="533400">
                 <a:tc>
@@ -7767,6 +8771,7 @@
                           <a:solidFill>
                             <a:srgbClr val="E2E8F0"/>
                           </a:solidFill>
+                          <a:lang val="es-CL"/>
                         </a:rPr>
                         <a:t>Progreso Autom.</a:t>
                       </a:r>
@@ -7795,6 +8800,7 @@
                           <a:solidFill>
                             <a:srgbClr val="E2E8F0"/>
                           </a:solidFill>
+                          <a:lang val="es-CL"/>
                         </a:rPr>
                         <a:t>(Ejec/Planif) x 100</a:t>
                       </a:r>
@@ -7823,6 +8829,7 @@
                           <a:solidFill>
                             <a:srgbClr val="E2E8F0"/>
                           </a:solidFill>
+                          <a:lang val="es-CL"/>
                         </a:rPr>
                         <a:t>100% (29/29)</a:t>
                       </a:r>
@@ -7851,6 +8858,7 @@
                           <a:solidFill>
                             <a:srgbClr val="E2E8F0"/>
                           </a:solidFill>
+                          <a:lang val="es-CL"/>
                         </a:rPr>
                         <a:t>reporte.json</a:t>
                       </a:r>
@@ -7862,6 +8870,11 @@
                     </a:solidFill>
                   </a:tcPr>
                 </a:tc>
+                <a:extLst>
+                  <a:ext uri="{0D108BD9-81ED-4DB2-BD59-A6C34878D82A}">
+                    <a16:rowId xmlns:a16="http://schemas.microsoft.com/office/drawing/2014/main" val="10002"/>
+                  </a:ext>
+                </a:extLst>
               </a:tr>
               <a:tr h="533400">
                 <a:tc>
@@ -7881,6 +8894,7 @@
                           <a:solidFill>
                             <a:srgbClr val="E2E8F0"/>
                           </a:solidFill>
+                          <a:lang val="es-CL"/>
                         </a:rPr>
                         <a:t>Productiv. Diseno</a:t>
                       </a:r>
@@ -7909,6 +8923,7 @@
                           <a:solidFill>
                             <a:srgbClr val="E2E8F0"/>
                           </a:solidFill>
+                          <a:lang val="es-CL"/>
                         </a:rPr>
                         <a:t>Esc / Horas</a:t>
                       </a:r>
@@ -7937,6 +8952,7 @@
                           <a:solidFill>
                             <a:srgbClr val="E2E8F0"/>
                           </a:solidFill>
+                          <a:lang val="es-CL"/>
                         </a:rPr>
                         <a:t>7.25 esc/h</a:t>
                       </a:r>
@@ -7965,6 +8981,7 @@
                           <a:solidFill>
                             <a:srgbClr val="E2E8F0"/>
                           </a:solidFill>
+                          <a:lang val="es-CL"/>
                         </a:rPr>
                         <a:t>Tiempo: 4 hrs</a:t>
                       </a:r>
@@ -7976,6 +8993,11 @@
                     </a:solidFill>
                   </a:tcPr>
                 </a:tc>
+                <a:extLst>
+                  <a:ext uri="{0D108BD9-81ED-4DB2-BD59-A6C34878D82A}">
+                    <a16:rowId xmlns:a16="http://schemas.microsoft.com/office/drawing/2014/main" val="10003"/>
+                  </a:ext>
+                </a:extLst>
               </a:tr>
               <a:tr h="533400">
                 <a:tc>
@@ -7995,6 +9017,7 @@
                           <a:solidFill>
                             <a:srgbClr val="E2E8F0"/>
                           </a:solidFill>
+                          <a:lang val="es-CL"/>
                         </a:rPr>
                         <a:t>Productiv. Ejec.</a:t>
                       </a:r>
@@ -8023,6 +9046,7 @@
                           <a:solidFill>
                             <a:srgbClr val="E2E8F0"/>
                           </a:solidFill>
+                          <a:lang val="es-CL"/>
                         </a:rPr>
                         <a:t>Esc / T total</a:t>
                       </a:r>
@@ -8051,6 +9075,7 @@
                           <a:solidFill>
                             <a:srgbClr val="E2E8F0"/>
                           </a:solidFill>
+                          <a:lang val="es-CL"/>
                         </a:rPr>
                         <a:t>0.067 esc/s</a:t>
                       </a:r>
@@ -8079,6 +9104,7 @@
                           <a:solidFill>
                             <a:srgbClr val="E2E8F0"/>
                           </a:solidFill>
+                          <a:lang val="es-CL"/>
                         </a:rPr>
                         <a:t>reporte.json</a:t>
                       </a:r>
@@ -8090,6 +9116,11 @@
                     </a:solidFill>
                   </a:tcPr>
                 </a:tc>
+                <a:extLst>
+                  <a:ext uri="{0D108BD9-81ED-4DB2-BD59-A6C34878D82A}">
+                    <a16:rowId xmlns:a16="http://schemas.microsoft.com/office/drawing/2014/main" val="10004"/>
+                  </a:ext>
+                </a:extLst>
               </a:tr>
               <a:tr h="533400">
                 <a:tc>
@@ -8109,6 +9140,7 @@
                           <a:solidFill>
                             <a:srgbClr val="E2E8F0"/>
                           </a:solidFill>
+                          <a:lang val="es-CL"/>
                         </a:rPr>
                         <a:t>Tasa de Fallos</a:t>
                       </a:r>
@@ -8137,6 +9169,7 @@
                           <a:solidFill>
                             <a:srgbClr val="E2E8F0"/>
                           </a:solidFill>
+                          <a:lang val="es-CL"/>
                         </a:rPr>
                         <a:t>(Fallos/Total) x 100</a:t>
                       </a:r>
@@ -8165,6 +9198,7 @@
                           <a:solidFill>
                             <a:srgbClr val="E2E8F0"/>
                           </a:solidFill>
+                          <a:lang val="es-CL"/>
                         </a:rPr>
                         <a:t>3.45% (1/29)</a:t>
                       </a:r>
@@ -8193,6 +9227,7 @@
                           <a:solidFill>
                             <a:srgbClr val="E2E8F0"/>
                           </a:solidFill>
+                          <a:lang val="es-CL"/>
                         </a:rPr>
                         <a:t>reporte.html</a:t>
                       </a:r>
@@ -8204,6 +9239,11 @@
                     </a:solidFill>
                   </a:tcPr>
                 </a:tc>
+                <a:extLst>
+                  <a:ext uri="{0D108BD9-81ED-4DB2-BD59-A6C34878D82A}">
+                    <a16:rowId xmlns:a16="http://schemas.microsoft.com/office/drawing/2014/main" val="10005"/>
+                  </a:ext>
+                </a:extLst>
               </a:tr>
             </a:tbl>
           </a:graphicData>
@@ -8228,10 +9268,34 @@
                 <a:tableStyleId>{5C22544A-7EE6-4342-B048-85BDC9FD1C3A}</a:tableStyleId>
               </a:tblPr>
               <a:tblGrid>
-                <a:gridCol w="1645920"/>
-                <a:gridCol w="1371600"/>
-                <a:gridCol w="1371600"/>
-                <a:gridCol w="1097280"/>
+                <a:gridCol w="1645920">
+                  <a:extLst>
+                    <a:ext uri="{9D8B030D-6E8A-4147-A177-3AD203B41FA5}">
+                      <a16:colId xmlns:a16="http://schemas.microsoft.com/office/drawing/2014/main" val="20000"/>
+                    </a:ext>
+                  </a:extLst>
+                </a:gridCol>
+                <a:gridCol w="1371600">
+                  <a:extLst>
+                    <a:ext uri="{9D8B030D-6E8A-4147-A177-3AD203B41FA5}">
+                      <a16:colId xmlns:a16="http://schemas.microsoft.com/office/drawing/2014/main" val="20001"/>
+                    </a:ext>
+                  </a:extLst>
+                </a:gridCol>
+                <a:gridCol w="1371600">
+                  <a:extLst>
+                    <a:ext uri="{9D8B030D-6E8A-4147-A177-3AD203B41FA5}">
+                      <a16:colId xmlns:a16="http://schemas.microsoft.com/office/drawing/2014/main" val="20002"/>
+                    </a:ext>
+                  </a:extLst>
+                </a:gridCol>
+                <a:gridCol w="1097280">
+                  <a:extLst>
+                    <a:ext uri="{9D8B030D-6E8A-4147-A177-3AD203B41FA5}">
+                      <a16:colId xmlns:a16="http://schemas.microsoft.com/office/drawing/2014/main" val="20003"/>
+                    </a:ext>
+                  </a:extLst>
+                </a:gridCol>
               </a:tblGrid>
               <a:tr h="533400">
                 <a:tc>
@@ -8251,6 +9315,7 @@
                           <a:solidFill>
                             <a:srgbClr val="FFFFFF"/>
                           </a:solidFill>
+                          <a:lang val="es-CL"/>
                         </a:rPr>
                         <a:t>Metrica Rendimiento</a:t>
                       </a:r>
@@ -8279,6 +9344,7 @@
                           <a:solidFill>
                             <a:srgbClr val="FFFFFF"/>
                           </a:solidFill>
+                          <a:lang val="es-CL"/>
                         </a:rPr>
                         <a:t>Formula</a:t>
                       </a:r>
@@ -8307,6 +9373,7 @@
                           <a:solidFill>
                             <a:srgbClr val="FFFFFF"/>
                           </a:solidFill>
+                          <a:lang val="es-CL"/>
                         </a:rPr>
                         <a:t>Resultado</a:t>
                       </a:r>
@@ -8335,6 +9402,7 @@
                           <a:solidFill>
                             <a:srgbClr val="FFFFFF"/>
                           </a:solidFill>
+                          <a:lang val="es-CL"/>
                         </a:rPr>
                         <a:t>Fuente</a:t>
                       </a:r>
@@ -8346,6 +9414,11 @@
                     </a:solidFill>
                   </a:tcPr>
                 </a:tc>
+                <a:extLst>
+                  <a:ext uri="{0D108BD9-81ED-4DB2-BD59-A6C34878D82A}">
+                    <a16:rowId xmlns:a16="http://schemas.microsoft.com/office/drawing/2014/main" val="10000"/>
+                  </a:ext>
+                </a:extLst>
               </a:tr>
               <a:tr h="533400">
                 <a:tc>
@@ -8365,6 +9438,7 @@
                           <a:solidFill>
                             <a:srgbClr val="E2E8F0"/>
                           </a:solidFill>
+                          <a:lang val="es-CL"/>
                         </a:rPr>
                         <a:t>Tiempo prom./esc</a:t>
                       </a:r>
@@ -8393,6 +9467,7 @@
                           <a:solidFill>
                             <a:srgbClr val="E2E8F0"/>
                           </a:solidFill>
+                          <a:lang val="es-CL"/>
                         </a:rPr>
                         <a:t>Suma dur / Total</a:t>
                       </a:r>
@@ -8421,6 +9496,7 @@
                           <a:solidFill>
                             <a:srgbClr val="E2E8F0"/>
                           </a:solidFill>
+                          <a:lang val="es-CL"/>
                         </a:rPr>
                         <a:t>~15 seg</a:t>
                       </a:r>
@@ -8449,6 +9525,7 @@
                           <a:solidFill>
                             <a:srgbClr val="E2E8F0"/>
                           </a:solidFill>
+                          <a:lang val="es-CL"/>
                         </a:rPr>
                         <a:t>reporte.json</a:t>
                       </a:r>
@@ -8460,6 +9537,11 @@
                     </a:solidFill>
                   </a:tcPr>
                 </a:tc>
+                <a:extLst>
+                  <a:ext uri="{0D108BD9-81ED-4DB2-BD59-A6C34878D82A}">
+                    <a16:rowId xmlns:a16="http://schemas.microsoft.com/office/drawing/2014/main" val="10001"/>
+                  </a:ext>
+                </a:extLst>
               </a:tr>
               <a:tr h="533400">
                 <a:tc>
@@ -8479,6 +9561,7 @@
                           <a:solidFill>
                             <a:srgbClr val="E2E8F0"/>
                           </a:solidFill>
+                          <a:lang val="es-CL"/>
                         </a:rPr>
                         <a:t>Feature mas lenta</a:t>
                       </a:r>
@@ -8507,6 +9590,7 @@
                           <a:solidFill>
                             <a:srgbClr val="E2E8F0"/>
                           </a:solidFill>
+                          <a:lang val="es-CL"/>
                         </a:rPr>
                         <a:t>Max(dur feature)</a:t>
                       </a:r>
@@ -8535,6 +9619,7 @@
                           <a:solidFill>
                             <a:srgbClr val="E2E8F0"/>
                           </a:solidFill>
+                          <a:lang val="es-CL"/>
                         </a:rPr>
                         <a:t>~40s (PIM)</a:t>
                       </a:r>
@@ -8563,6 +9648,7 @@
                           <a:solidFill>
                             <a:srgbClr val="E2E8F0"/>
                           </a:solidFill>
+                          <a:lang val="es-CL"/>
                         </a:rPr>
                         <a:t>reporte.json</a:t>
                       </a:r>
@@ -8574,6 +9660,11 @@
                     </a:solidFill>
                   </a:tcPr>
                 </a:tc>
+                <a:extLst>
+                  <a:ext uri="{0D108BD9-81ED-4DB2-BD59-A6C34878D82A}">
+                    <a16:rowId xmlns:a16="http://schemas.microsoft.com/office/drawing/2014/main" val="10002"/>
+                  </a:ext>
+                </a:extLst>
               </a:tr>
               <a:tr h="533400">
                 <a:tc>
@@ -8593,6 +9684,7 @@
                           <a:solidFill>
                             <a:srgbClr val="E2E8F0"/>
                           </a:solidFill>
+                          <a:lang val="es-CL"/>
                         </a:rPr>
                         <a:t>Overhead setup</a:t>
                       </a:r>
@@ -8621,6 +9713,7 @@
                           <a:solidFill>
                             <a:srgbClr val="E2E8F0"/>
                           </a:solidFill>
+                          <a:lang val="es-CL"/>
                         </a:rPr>
                         <a:t>Setup/Total</a:t>
                       </a:r>
@@ -8649,6 +9742,7 @@
                           <a:solidFill>
                             <a:srgbClr val="E2E8F0"/>
                           </a:solidFill>
+                          <a:lang val="es-CL"/>
                         </a:rPr>
                         <a:t>~25%</a:t>
                       </a:r>
@@ -8677,6 +9771,7 @@
                           <a:solidFill>
                             <a:srgbClr val="E2E8F0"/>
                           </a:solidFill>
+                          <a:lang val="es-CL"/>
                         </a:rPr>
                         <a:t>environment.py</a:t>
                       </a:r>
@@ -8688,6 +9783,11 @@
                     </a:solidFill>
                   </a:tcPr>
                 </a:tc>
+                <a:extLst>
+                  <a:ext uri="{0D108BD9-81ED-4DB2-BD59-A6C34878D82A}">
+                    <a16:rowId xmlns:a16="http://schemas.microsoft.com/office/drawing/2014/main" val="10003"/>
+                  </a:ext>
+                </a:extLst>
               </a:tr>
               <a:tr h="533400">
                 <a:tc>
@@ -8707,6 +9807,7 @@
                           <a:solidFill>
                             <a:srgbClr val="E2E8F0"/>
                           </a:solidFill>
+                          <a:lang val="es-CL"/>
                         </a:rPr>
                         <a:t>Cobertura DD</a:t>
                       </a:r>
@@ -8735,6 +9836,7 @@
                           <a:solidFill>
                             <a:srgbClr val="E2E8F0"/>
                           </a:solidFill>
+                          <a:lang val="es-CL"/>
                         </a:rPr>
                         <a:t>DD / Total</a:t>
                       </a:r>
@@ -8763,6 +9865,7 @@
                           <a:solidFill>
                             <a:srgbClr val="E2E8F0"/>
                           </a:solidFill>
+                          <a:lang val="es-CL"/>
                         </a:rPr>
                         <a:t>62% (18/29)</a:t>
                       </a:r>
@@ -8791,6 +9894,7 @@
                           <a:solidFill>
                             <a:srgbClr val="E2E8F0"/>
                           </a:solidFill>
+                          <a:lang val="es-CL"/>
                         </a:rPr>
                         <a:t>Features</a:t>
                       </a:r>
@@ -8802,6 +9906,11 @@
                     </a:solidFill>
                   </a:tcPr>
                 </a:tc>
+                <a:extLst>
+                  <a:ext uri="{0D108BD9-81ED-4DB2-BD59-A6C34878D82A}">
+                    <a16:rowId xmlns:a16="http://schemas.microsoft.com/office/drawing/2014/main" val="10004"/>
+                  </a:ext>
+                </a:extLst>
               </a:tr>
               <a:tr h="533400">
                 <a:tc>
@@ -8821,6 +9930,7 @@
                           <a:solidFill>
                             <a:srgbClr val="E2E8F0"/>
                           </a:solidFill>
+                          <a:lang val="es-CL"/>
                         </a:rPr>
                         <a:t>Screenshots/esc</a:t>
                       </a:r>
@@ -8849,6 +9959,7 @@
                           <a:solidFill>
                             <a:srgbClr val="E2E8F0"/>
                           </a:solidFill>
+                          <a:lang val="es-CL"/>
                         </a:rPr>
                         <a:t>Total SS / Esc</a:t>
                       </a:r>
@@ -8877,6 +9988,7 @@
                           <a:solidFill>
                             <a:srgbClr val="E2E8F0"/>
                           </a:solidFill>
+                          <a:lang val="es-CL"/>
                         </a:rPr>
                         <a:t>6.1 (177/29)</a:t>
                       </a:r>
@@ -8905,6 +10017,7 @@
                           <a:solidFill>
                             <a:srgbClr val="E2E8F0"/>
                           </a:solidFill>
+                          <a:lang val="es-CL"/>
                         </a:rPr>
                         <a:t>evidencias/</a:t>
                       </a:r>
@@ -8916,6 +10029,11 @@
                     </a:solidFill>
                   </a:tcPr>
                 </a:tc>
+                <a:extLst>
+                  <a:ext uri="{0D108BD9-81ED-4DB2-BD59-A6C34878D82A}">
+                    <a16:rowId xmlns:a16="http://schemas.microsoft.com/office/drawing/2014/main" val="10005"/>
+                  </a:ext>
+                </a:extLst>
               </a:tr>
             </a:tbl>
           </a:graphicData>
@@ -8948,6 +10066,7 @@
                 <a:solidFill>
                   <a:srgbClr val="7F8C8D"/>
                 </a:solidFill>
+                <a:lang val="es-CL"/>
               </a:defRPr>
             </a:pPr>
             <a:r>
@@ -8955,24 +10074,39 @@
                 <a:solidFill>
                   <a:srgbClr val="CBD5E1"/>
                 </a:solidFill>
+                <a:lang val="es-CL"/>
               </a:rPr>
               <a:t>Tasa de fallos: unico fallo = TC_004 intencional. Excluyendolo: 0%. Suite estable.</a:t>
             </a:r>
+            <a:r>
+              <a:rPr>
+                <a:lang val="es-CL"/>
+              </a:rPr>
+              <a:t/>
+            </a:r>
             <a:br/>
             <a:r>
               <a:rPr>
                 <a:solidFill>
                   <a:srgbClr val="CBD5E1"/>
                 </a:solidFill>
+                <a:lang val="es-CL"/>
               </a:rPr>
               <a:t>Overhead setup: cada escenario abre su propio Chrome. Con paralelizacion (-j 4) se reduce.</a:t>
             </a:r>
+            <a:r>
+              <a:rPr>
+                <a:lang val="es-CL"/>
+              </a:rPr>
+              <a:t/>
+            </a:r>
             <a:br/>
             <a:r>
               <a:rPr>
                 <a:solidFill>
                   <a:srgbClr val="CBD5E1"/>
                 </a:solidFill>
+                <a:lang val="es-CL"/>
               </a:rPr>
               <a:t>Cobertura DD 62%: escalable, permite agregar filas al Excel sin modificar codigo.</a:t>
             </a:r>
@@ -8988,7 +10122,7 @@
 </file>
 
 <file path=ppt/slides/slide7.xml><?xml version="1.0" encoding="utf-8"?>
-<p:sld xmlns:a="http://schemas.openxmlformats.org/drawingml/2006/main" xmlns:p="http://schemas.openxmlformats.org/presentationml/2006/main" xmlns:r="http://schemas.openxmlformats.org/officeDocument/2006/relationships">
+<p:sld xmlns:a="http://schemas.openxmlformats.org/drawingml/2006/main" xmlns:r="http://schemas.openxmlformats.org/officeDocument/2006/relationships" xmlns:p="http://schemas.openxmlformats.org/presentationml/2006/main">
   <p:cSld>
     <p:bg>
       <p:bgPr>
@@ -9004,7 +10138,14 @@
         <p:cNvGrpSpPr/>
         <p:nvPr/>
       </p:nvGrpSpPr>
-      <p:grpSpPr/>
+      <p:grpSpPr>
+        <a:xfrm>
+          <a:off x="0" y="0"/>
+          <a:ext cx="0" cy="0"/>
+          <a:chOff x="0" y="0"/>
+          <a:chExt cx="0" cy="0"/>
+        </a:xfrm>
+      </p:grpSpPr>
       <p:sp>
         <p:nvSpPr>
           <p:cNvPr id="2" name="Rectangle 1"/>
@@ -9035,7 +10176,12 @@
           <a:bodyPr rtlCol="0" anchor="ctr"/>
           <a:lstStyle/>
           <a:p>
-            <a:pPr algn="ctr"/>
+            <a:pPr algn="ctr">
+              <a:defRPr>
+                <a:lang val="es-CL"/>
+              </a:defRPr>
+            </a:pPr>
+            <a:endParaRPr/>
           </a:p>
         </p:txBody>
       </p:sp>
@@ -9066,6 +10212,7 @@
                 <a:solidFill>
                   <a:srgbClr val="FFFFFF"/>
                 </a:solidFill>
+                <a:lang val="es-CL"/>
               </a:defRPr>
             </a:pPr>
             <a:r>
@@ -9073,6 +10220,7 @@
                 <a:solidFill>
                   <a:srgbClr val="CBD5E1"/>
                 </a:solidFill>
+                <a:lang val="es-CL"/>
               </a:rPr>
               <a:t>Oportunidades de Mejora (A: Observacion -&gt; B: Causa -&gt; C: Accion)</a:t>
             </a:r>
@@ -9115,7 +10263,7 @@
           </a:fontRef>
         </p:style>
         <p:txBody>
-          <a:bodyPr rtlCol="0" anchor="ctr" wrap="square"/>
+          <a:bodyPr wrap="square" rtlCol="0" anchor="ctr"/>
           <a:lstStyle/>
           <a:p>
             <a:pPr algn="ctr">
@@ -9123,6 +10271,7 @@
                 <a:solidFill>
                   <a:srgbClr val="FFFFFF"/>
                 </a:solidFill>
+                <a:lang val="es-CL"/>
               </a:defRPr>
             </a:pPr>
             <a:r>
@@ -9130,6 +10279,7 @@
                 <a:solidFill>
                   <a:srgbClr val="CBD5E1"/>
                 </a:solidFill>
+                <a:lang val="es-CL"/>
               </a:rPr>
               <a:t>O1: Menu en chino</a:t>
             </a:r>
@@ -9163,6 +10313,7 @@
                 <a:solidFill>
                   <a:srgbClr val="2C3E50"/>
                 </a:solidFill>
+                <a:lang val="es-CL"/>
               </a:defRPr>
             </a:pPr>
             <a:r>
@@ -9170,33 +10321,55 @@
                 <a:solidFill>
                   <a:srgbClr val="CBD5E1"/>
                 </a:solidFill>
+                <a:lang val="es-CL"/>
               </a:rPr>
               <a:t>A) TC_007/008/009 fallaron</a:t>
             </a:r>
+            <a:r>
+              <a:rPr>
+                <a:lang val="es-CL"/>
+              </a:rPr>
+              <a:t/>
+            </a:r>
             <a:br/>
             <a:r>
               <a:rPr>
                 <a:solidFill>
                   <a:srgbClr val="CBD5E1"/>
                 </a:solidFill>
+                <a:lang val="es-CL"/>
               </a:rPr>
               <a:t>B) Server locale cambia a chino</a:t>
             </a:r>
+            <a:r>
+              <a:rPr>
+                <a:lang val="es-CL"/>
+              </a:rPr>
+              <a:t/>
+            </a:r>
             <a:br/>
             <a:r>
               <a:rPr>
                 <a:solidFill>
                   <a:srgbClr val="CBD5E1"/>
                 </a:solidFill>
+                <a:lang val="es-CL"/>
               </a:rPr>
               <a:t>C) MENU_TRANSLATIONS</a:t>
             </a:r>
+            <a:r>
+              <a:rPr>
+                <a:lang val="es-CL"/>
+              </a:rPr>
+              <a:t/>
+            </a:r>
             <a:br/>
             <a:r>
               <a:rPr>
                 <a:solidFill>
                   <a:srgbClr val="CBD5E1"/>
                 </a:solidFill>
+                <a:lang val="es-CL"/>
               </a:rPr>
               <a:t>+ fallback bilingue implementado</a:t>
             </a:r>
@@ -9239,7 +10412,7 @@
           </a:fontRef>
         </p:style>
         <p:txBody>
-          <a:bodyPr rtlCol="0" anchor="ctr" wrap="square"/>
+          <a:bodyPr wrap="square" rtlCol="0" anchor="ctr"/>
           <a:lstStyle/>
           <a:p>
             <a:pPr algn="ctr">
@@ -9247,6 +10420,7 @@
                 <a:solidFill>
                   <a:srgbClr val="FFFFFF"/>
                 </a:solidFill>
+                <a:lang val="es-CL"/>
               </a:defRPr>
             </a:pPr>
             <a:r>
@@ -9254,6 +10428,7 @@
                 <a:solidFill>
                   <a:srgbClr val="CBD5E1"/>
                 </a:solidFill>
+                <a:lang val="es-CL"/>
               </a:rPr>
               <a:t>O2: Boton Save + Spinner</a:t>
             </a:r>
@@ -9287,6 +10462,7 @@
                 <a:solidFill>
                   <a:srgbClr val="2C3E50"/>
                 </a:solidFill>
+                <a:lang val="es-CL"/>
               </a:defRPr>
             </a:pPr>
             <a:r>
@@ -9294,33 +10470,55 @@
                 <a:solidFill>
                   <a:srgbClr val="CBD5E1"/>
                 </a:solidFill>
+                <a:lang val="es-CL"/>
               </a:rPr>
               <a:t>A) Save interceptado por spinner</a:t>
             </a:r>
+            <a:r>
+              <a:rPr>
+                <a:lang val="es-CL"/>
+              </a:rPr>
+              <a:t/>
+            </a:r>
             <a:br/>
             <a:r>
               <a:rPr>
                 <a:solidFill>
                   <a:srgbClr val="CBD5E1"/>
                 </a:solidFill>
+                <a:lang val="es-CL"/>
               </a:rPr>
               <a:t>B) Spinner OX tapa boton</a:t>
             </a:r>
+            <a:r>
+              <a:rPr>
+                <a:lang val="es-CL"/>
+              </a:rPr>
+              <a:t/>
+            </a:r>
             <a:br/>
             <a:r>
               <a:rPr>
                 <a:solidFill>
                   <a:srgbClr val="CBD5E1"/>
                 </a:solidFill>
+                <a:lang val="es-CL"/>
               </a:rPr>
               <a:t>C) _wait_spinner_done()</a:t>
             </a:r>
+            <a:r>
+              <a:rPr>
+                <a:lang val="es-CL"/>
+              </a:rPr>
+              <a:t/>
+            </a:r>
             <a:br/>
             <a:r>
               <a:rPr>
                 <a:solidFill>
                   <a:srgbClr val="CBD5E1"/>
                 </a:solidFill>
+                <a:lang val="es-CL"/>
               </a:rPr>
               <a:t>+ JS click implementado</a:t>
             </a:r>
@@ -9363,7 +10561,7 @@
           </a:fontRef>
         </p:style>
         <p:txBody>
-          <a:bodyPr rtlCol="0" anchor="ctr" wrap="square"/>
+          <a:bodyPr wrap="square" rtlCol="0" anchor="ctr"/>
           <a:lstStyle/>
           <a:p>
             <a:pPr algn="ctr">
@@ -9371,6 +10569,7 @@
                 <a:solidFill>
                   <a:srgbClr val="FFFFFF"/>
                 </a:solidFill>
+                <a:lang val="es-CL"/>
               </a:defRPr>
             </a:pPr>
             <a:r>
@@ -9378,6 +10577,7 @@
                 <a:solidFill>
                   <a:srgbClr val="CBD5E1"/>
                 </a:solidFill>
+                <a:lang val="es-CL"/>
               </a:rPr>
               <a:t>O3: Titulo incorrecto</a:t>
             </a:r>
@@ -9411,6 +10611,7 @@
                 <a:solidFill>
                   <a:srgbClr val="2C3E50"/>
                 </a:solidFill>
+                <a:lang val="es-CL"/>
               </a:defRPr>
             </a:pPr>
             <a:r>
@@ -9418,33 +10619,55 @@
                 <a:solidFill>
                   <a:srgbClr val="CBD5E1"/>
                 </a:solidFill>
+                <a:lang val="es-CL"/>
               </a:rPr>
               <a:t>A) TC_004: titulo no coincide</a:t>
             </a:r>
+            <a:r>
+              <a:rPr>
+                <a:lang val="es-CL"/>
+              </a:rPr>
+              <a:t/>
+            </a:r>
             <a:br/>
             <a:r>
               <a:rPr>
                 <a:solidFill>
                   <a:srgbClr val="CBD5E1"/>
                 </a:solidFill>
+                <a:lang val="es-CL"/>
               </a:rPr>
               <a:t>B) driver.title es 'OrangeHRM'</a:t>
             </a:r>
+            <a:r>
+              <a:rPr>
+                <a:lang val="es-CL"/>
+              </a:rPr>
+              <a:t/>
+            </a:r>
             <a:br/>
             <a:r>
               <a:rPr>
                 <a:solidFill>
                   <a:srgbClr val="CBD5E1"/>
                 </a:solidFill>
+                <a:lang val="es-CL"/>
               </a:rPr>
               <a:t>C) Validar por URL en vez</a:t>
             </a:r>
+            <a:r>
+              <a:rPr>
+                <a:lang val="es-CL"/>
+              </a:rPr>
+              <a:t/>
+            </a:r>
             <a:br/>
             <a:r>
               <a:rPr>
                 <a:solidFill>
                   <a:srgbClr val="CBD5E1"/>
                 </a:solidFill>
+                <a:lang val="es-CL"/>
               </a:rPr>
               <a:t>de titulo implementado</a:t>
             </a:r>
@@ -9487,7 +10710,7 @@
           </a:fontRef>
         </p:style>
         <p:txBody>
-          <a:bodyPr rtlCol="0" anchor="ctr" wrap="square"/>
+          <a:bodyPr wrap="square" rtlCol="0" anchor="ctr"/>
           <a:lstStyle/>
           <a:p>
             <a:pPr algn="ctr">
@@ -9495,6 +10718,7 @@
                 <a:solidFill>
                   <a:srgbClr val="FFFFFF"/>
                 </a:solidFill>
+                <a:lang val="es-CL"/>
               </a:defRPr>
             </a:pPr>
             <a:r>
@@ -9502,6 +10726,7 @@
                 <a:solidFill>
                   <a:srgbClr val="CBD5E1"/>
                 </a:solidFill>
+                <a:lang val="es-CL"/>
               </a:rPr>
               <a:t>O4: Tiempo ejecucion</a:t>
             </a:r>
@@ -9535,6 +10760,7 @@
                 <a:solidFill>
                   <a:srgbClr val="2C3E50"/>
                 </a:solidFill>
+                <a:lang val="es-CL"/>
               </a:defRPr>
             </a:pPr>
             <a:r>
@@ -9542,42 +10768,71 @@
                 <a:solidFill>
                   <a:srgbClr val="CBD5E1"/>
                 </a:solidFill>
+                <a:lang val="es-CL"/>
               </a:rPr>
               <a:t>A) Suite ~7 minutos</a:t>
             </a:r>
+            <a:r>
+              <a:rPr>
+                <a:lang val="es-CL"/>
+              </a:rPr>
+              <a:t/>
+            </a:r>
             <a:br/>
             <a:r>
               <a:rPr>
                 <a:solidFill>
                   <a:srgbClr val="CBD5E1"/>
                 </a:solidFill>
+                <a:lang val="es-CL"/>
               </a:rPr>
               <a:t>B) Escenarios secuenciales</a:t>
             </a:r>
+            <a:r>
+              <a:rPr>
+                <a:lang val="es-CL"/>
+              </a:rPr>
+              <a:t/>
+            </a:r>
             <a:br/>
             <a:r>
               <a:rPr>
                 <a:solidFill>
                   <a:srgbClr val="CBD5E1"/>
                 </a:solidFill>
+                <a:lang val="es-CL"/>
               </a:rPr>
               <a:t>  driver nuevo c/u</a:t>
             </a:r>
+            <a:r>
+              <a:rPr>
+                <a:lang val="es-CL"/>
+              </a:rPr>
+              <a:t/>
+            </a:r>
             <a:br/>
             <a:r>
               <a:rPr>
                 <a:solidFill>
                   <a:srgbClr val="CBD5E1"/>
                 </a:solidFill>
+                <a:lang val="es-CL"/>
               </a:rPr>
               <a:t>C) Propuesta: behave -j 4</a:t>
             </a:r>
+            <a:r>
+              <a:rPr>
+                <a:lang val="es-CL"/>
+              </a:rPr>
+              <a:t/>
+            </a:r>
             <a:br/>
             <a:r>
               <a:rPr>
                 <a:solidFill>
                   <a:srgbClr val="CBD5E1"/>
                 </a:solidFill>
+                <a:lang val="es-CL"/>
               </a:rPr>
               <a:t>  (~2 min)</a:t>
             </a:r>
@@ -9620,7 +10875,7 @@
           </a:fontRef>
         </p:style>
         <p:txBody>
-          <a:bodyPr rtlCol="0" anchor="ctr" wrap="square"/>
+          <a:bodyPr wrap="square" rtlCol="0" anchor="ctr"/>
           <a:lstStyle/>
           <a:p>
             <a:pPr algn="ctr">
@@ -9628,6 +10883,7 @@
                 <a:solidFill>
                   <a:srgbClr val="FFFFFF"/>
                 </a:solidFill>
+                <a:lang val="es-CL"/>
               </a:defRPr>
             </a:pPr>
             <a:r>
@@ -9635,6 +10891,7 @@
                 <a:solidFill>
                   <a:srgbClr val="CBD5E1"/>
                 </a:solidFill>
+                <a:lang val="es-CL"/>
               </a:rPr>
               <a:t>O5: Excel no versionables</a:t>
             </a:r>
@@ -9668,6 +10925,7 @@
                 <a:solidFill>
                   <a:srgbClr val="2C3E50"/>
                 </a:solidFill>
+                <a:lang val="es-CL"/>
               </a:defRPr>
             </a:pPr>
             <a:r>
@@ -9675,33 +10933,55 @@
                 <a:solidFill>
                   <a:srgbClr val="CBD5E1"/>
                 </a:solidFill>
+                <a:lang val="es-CL"/>
               </a:rPr>
               <a:t>A) 6 .xlsx editables manual</a:t>
             </a:r>
+            <a:r>
+              <a:rPr>
+                <a:lang val="es-CL"/>
+              </a:rPr>
+              <a:t/>
+            </a:r>
             <a:br/>
             <a:r>
               <a:rPr>
                 <a:solidFill>
                   <a:srgbClr val="CBD5E1"/>
                 </a:solidFill>
+                <a:lang val="es-CL"/>
               </a:rPr>
               <a:t>B) Binarios, sin diff en git</a:t>
             </a:r>
+            <a:r>
+              <a:rPr>
+                <a:lang val="es-CL"/>
+              </a:rPr>
+              <a:t/>
+            </a:r>
             <a:br/>
             <a:r>
               <a:rPr>
                 <a:solidFill>
                   <a:srgbClr val="CBD5E1"/>
                 </a:solidFill>
+                <a:lang val="es-CL"/>
               </a:rPr>
               <a:t>C) Propuesta: regenerar con</a:t>
             </a:r>
+            <a:r>
+              <a:rPr>
+                <a:lang val="es-CL"/>
+              </a:rPr>
+              <a:t/>
+            </a:r>
             <a:br/>
             <a:r>
               <a:rPr>
                 <a:solidFill>
                   <a:srgbClr val="CBD5E1"/>
                 </a:solidFill>
+                <a:lang val="es-CL"/>
               </a:rPr>
               <a:t>  generar_excel.py pre-ejec</a:t>
             </a:r>
@@ -9744,7 +11024,7 @@
           </a:fontRef>
         </p:style>
         <p:txBody>
-          <a:bodyPr rtlCol="0" anchor="ctr" wrap="square"/>
+          <a:bodyPr wrap="square" rtlCol="0" anchor="ctr"/>
           <a:lstStyle/>
           <a:p>
             <a:pPr algn="ctr">
@@ -9752,6 +11032,7 @@
                 <a:solidFill>
                   <a:srgbClr val="FFFFFF"/>
                 </a:solidFill>
+                <a:lang val="es-CL"/>
               </a:defRPr>
             </a:pPr>
             <a:r>
@@ -9759,6 +11040,7 @@
                 <a:solidFill>
                   <a:srgbClr val="CBD5E1"/>
                 </a:solidFill>
+                <a:lang val="es-CL"/>
               </a:rPr>
               <a:t>3 implementadas | 2 propuestas</a:t>
             </a:r>
@@ -9774,7 +11056,7 @@
 </file>
 
 <file path=ppt/slides/slide8.xml><?xml version="1.0" encoding="utf-8"?>
-<p:sld xmlns:a="http://schemas.openxmlformats.org/drawingml/2006/main" xmlns:p="http://schemas.openxmlformats.org/presentationml/2006/main" xmlns:r="http://schemas.openxmlformats.org/officeDocument/2006/relationships">
+<p:sld xmlns:a="http://schemas.openxmlformats.org/drawingml/2006/main" xmlns:r="http://schemas.openxmlformats.org/officeDocument/2006/relationships" xmlns:p="http://schemas.openxmlformats.org/presentationml/2006/main">
   <p:cSld>
     <p:bg>
       <p:bgPr>
@@ -9790,7 +11072,14 @@
         <p:cNvGrpSpPr/>
         <p:nvPr/>
       </p:nvGrpSpPr>
-      <p:grpSpPr/>
+      <p:grpSpPr>
+        <a:xfrm>
+          <a:off x="0" y="0"/>
+          <a:ext cx="0" cy="0"/>
+          <a:chOff x="0" y="0"/>
+          <a:chExt cx="0" cy="0"/>
+        </a:xfrm>
+      </p:grpSpPr>
       <p:sp>
         <p:nvSpPr>
           <p:cNvPr id="2" name="Rectangle 1"/>
@@ -9821,7 +11110,12 @@
           <a:bodyPr rtlCol="0" anchor="ctr"/>
           <a:lstStyle/>
           <a:p>
-            <a:pPr algn="ctr"/>
+            <a:pPr algn="ctr">
+              <a:defRPr>
+                <a:lang val="es-CL"/>
+              </a:defRPr>
+            </a:pPr>
+            <a:endParaRPr/>
           </a:p>
         </p:txBody>
       </p:sp>
@@ -9852,6 +11146,7 @@
                 <a:solidFill>
                   <a:srgbClr val="FFFFFF"/>
                 </a:solidFill>
+                <a:lang val="es-CL"/>
               </a:defRPr>
             </a:pPr>
             <a:r>
@@ -9859,6 +11154,7 @@
                 <a:solidFill>
                   <a:srgbClr val="CBD5E1"/>
                 </a:solidFill>
+                <a:lang val="es-CL"/>
               </a:rPr>
               <a:t>Propuestas de Mejora (Dato -&gt; Causa -&gt; Accion -&gt; Impacto)</a:t>
             </a:r>
@@ -9884,11 +11180,41 @@
                 <a:tableStyleId>{5C22544A-7EE6-4342-B048-85BDC9FD1C3A}</a:tableStyleId>
               </a:tblPr>
               <a:tblGrid>
-                <a:gridCol w="1097280"/>
-                <a:gridCol w="1828800"/>
-                <a:gridCol w="2286000"/>
-                <a:gridCol w="2286000"/>
-                <a:gridCol w="1828800"/>
+                <a:gridCol w="1097280">
+                  <a:extLst>
+                    <a:ext uri="{9D8B030D-6E8A-4147-A177-3AD203B41FA5}">
+                      <a16:colId xmlns:a16="http://schemas.microsoft.com/office/drawing/2014/main" val="20000"/>
+                    </a:ext>
+                  </a:extLst>
+                </a:gridCol>
+                <a:gridCol w="1828800">
+                  <a:extLst>
+                    <a:ext uri="{9D8B030D-6E8A-4147-A177-3AD203B41FA5}">
+                      <a16:colId xmlns:a16="http://schemas.microsoft.com/office/drawing/2014/main" val="20001"/>
+                    </a:ext>
+                  </a:extLst>
+                </a:gridCol>
+                <a:gridCol w="2286000">
+                  <a:extLst>
+                    <a:ext uri="{9D8B030D-6E8A-4147-A177-3AD203B41FA5}">
+                      <a16:colId xmlns:a16="http://schemas.microsoft.com/office/drawing/2014/main" val="20002"/>
+                    </a:ext>
+                  </a:extLst>
+                </a:gridCol>
+                <a:gridCol w="2286000">
+                  <a:extLst>
+                    <a:ext uri="{9D8B030D-6E8A-4147-A177-3AD203B41FA5}">
+                      <a16:colId xmlns:a16="http://schemas.microsoft.com/office/drawing/2014/main" val="20003"/>
+                    </a:ext>
+                  </a:extLst>
+                </a:gridCol>
+                <a:gridCol w="1828800">
+                  <a:extLst>
+                    <a:ext uri="{9D8B030D-6E8A-4147-A177-3AD203B41FA5}">
+                      <a16:colId xmlns:a16="http://schemas.microsoft.com/office/drawing/2014/main" val="20004"/>
+                    </a:ext>
+                  </a:extLst>
+                </a:gridCol>
               </a:tblGrid>
               <a:tr h="457200">
                 <a:tc>
@@ -9908,6 +11234,7 @@
                           <a:solidFill>
                             <a:srgbClr val="FFFFFF"/>
                           </a:solidFill>
+                          <a:lang val="es-CL"/>
                         </a:rPr>
                         <a:t>Tipo</a:t>
                       </a:r>
@@ -9936,6 +11263,7 @@
                           <a:solidFill>
                             <a:srgbClr val="FFFFFF"/>
                           </a:solidFill>
+                          <a:lang val="es-CL"/>
                         </a:rPr>
                         <a:t>Propuesta</a:t>
                       </a:r>
@@ -9964,6 +11292,7 @@
                           <a:solidFill>
                             <a:srgbClr val="FFFFFF"/>
                           </a:solidFill>
+                          <a:lang val="es-CL"/>
                         </a:rPr>
                         <a:t>Dato</a:t>
                       </a:r>
@@ -9992,6 +11321,7 @@
                           <a:solidFill>
                             <a:srgbClr val="FFFFFF"/>
                           </a:solidFill>
+                          <a:lang val="es-CL"/>
                         </a:rPr>
                         <a:t>Accion</a:t>
                       </a:r>
@@ -10020,6 +11350,7 @@
                           <a:solidFill>
                             <a:srgbClr val="FFFFFF"/>
                           </a:solidFill>
+                          <a:lang val="es-CL"/>
                         </a:rPr>
                         <a:t>Impacto</a:t>
                       </a:r>
@@ -10031,6 +11362,11 @@
                     </a:solidFill>
                   </a:tcPr>
                 </a:tc>
+                <a:extLst>
+                  <a:ext uri="{0D108BD9-81ED-4DB2-BD59-A6C34878D82A}">
+                    <a16:rowId xmlns:a16="http://schemas.microsoft.com/office/drawing/2014/main" val="10000"/>
+                  </a:ext>
+                </a:extLst>
               </a:tr>
               <a:tr h="457200">
                 <a:tc>
@@ -10050,6 +11386,7 @@
                           <a:solidFill>
                             <a:srgbClr val="E2E8F0"/>
                           </a:solidFill>
+                          <a:lang val="es-CL"/>
                         </a:rPr>
                         <a:t>Producto</a:t>
                       </a:r>
@@ -10078,6 +11415,7 @@
                           <a:solidFill>
                             <a:srgbClr val="E2E8F0"/>
                           </a:solidFill>
+                          <a:lang val="es-CL"/>
                         </a:rPr>
                         <a:t>MP-01: Mensajes</a:t>
                       </a:r>
@@ -10095,6 +11433,7 @@
                           <a:solidFill>
                             <a:srgbClr val="E2E8F0"/>
                           </a:solidFill>
+                          <a:lang val="es-CL"/>
                         </a:rPr>
                         <a:t>error diferenciados</a:t>
                       </a:r>
@@ -10123,6 +11462,7 @@
                           <a:solidFill>
                             <a:srgbClr val="E2E8F0"/>
                           </a:solidFill>
+                          <a:lang val="es-CL"/>
                         </a:rPr>
                         <a:t>TC_002: msj generico</a:t>
                       </a:r>
@@ -10140,6 +11480,7 @@
                           <a:solidFill>
                             <a:srgbClr val="E2E8F0"/>
                           </a:solidFill>
+                          <a:lang val="es-CL"/>
                         </a:rPr>
                         <a:t>'Invalid credentials'</a:t>
                       </a:r>
@@ -10168,6 +11509,7 @@
                           <a:solidFill>
                             <a:srgbClr val="E2E8F0"/>
                           </a:solidFill>
+                          <a:lang val="es-CL"/>
                         </a:rPr>
                         <a:t>Separar casos:</a:t>
                       </a:r>
@@ -10185,6 +11527,7 @@
                           <a:solidFill>
                             <a:srgbClr val="E2E8F0"/>
                           </a:solidFill>
+                          <a:lang val="es-CL"/>
                         </a:rPr>
                         <a:t>usuario vs pass</a:t>
                       </a:r>
@@ -10213,6 +11556,7 @@
                           <a:solidFill>
                             <a:srgbClr val="E2E8F0"/>
                           </a:solidFill>
+                          <a:lang val="es-CL"/>
                         </a:rPr>
                         <a:t>UX + seguridad</a:t>
                       </a:r>
@@ -10230,6 +11574,7 @@
                           <a:solidFill>
                             <a:srgbClr val="E2E8F0"/>
                           </a:solidFill>
+                          <a:lang val="es-CL"/>
                         </a:rPr>
                         <a:t>informatica</a:t>
                       </a:r>
@@ -10241,6 +11586,11 @@
                     </a:solidFill>
                   </a:tcPr>
                 </a:tc>
+                <a:extLst>
+                  <a:ext uri="{0D108BD9-81ED-4DB2-BD59-A6C34878D82A}">
+                    <a16:rowId xmlns:a16="http://schemas.microsoft.com/office/drawing/2014/main" val="10001"/>
+                  </a:ext>
+                </a:extLst>
               </a:tr>
               <a:tr h="457200">
                 <a:tc>
@@ -10260,6 +11610,7 @@
                           <a:solidFill>
                             <a:srgbClr val="E2E8F0"/>
                           </a:solidFill>
+                          <a:lang val="es-CL"/>
                         </a:rPr>
                         <a:t>Producto</a:t>
                       </a:r>
@@ -10288,6 +11639,7 @@
                           <a:solidFill>
                             <a:srgbClr val="E2E8F0"/>
                           </a:solidFill>
+                          <a:lang val="es-CL"/>
                         </a:rPr>
                         <a:t>MP-02: Selector</a:t>
                       </a:r>
@@ -10305,6 +11657,7 @@
                           <a:solidFill>
                             <a:srgbClr val="E2E8F0"/>
                           </a:solidFill>
+                          <a:lang val="es-CL"/>
                         </a:rPr>
                         <a:t>idioma persistente</a:t>
                       </a:r>
@@ -10333,6 +11686,7 @@
                           <a:solidFill>
                             <a:srgbClr val="E2E8F0"/>
                           </a:solidFill>
+                          <a:lang val="es-CL"/>
                         </a:rPr>
                         <a:t>INC-01/02: locale</a:t>
                       </a:r>
@@ -10350,6 +11704,7 @@
                           <a:solidFill>
                             <a:srgbClr val="E2E8F0"/>
                           </a:solidFill>
+                          <a:lang val="es-CL"/>
                         </a:rPr>
                         <a:t>cambia a chino</a:t>
                       </a:r>
@@ -10378,6 +11733,7 @@
                           <a:solidFill>
                             <a:srgbClr val="E2E8F0"/>
                           </a:solidFill>
+                          <a:lang val="es-CL"/>
                         </a:rPr>
                         <a:t>Cookie de idioma</a:t>
                       </a:r>
@@ -10395,6 +11751,7 @@
                           <a:solidFill>
                             <a:srgbClr val="E2E8F0"/>
                           </a:solidFill>
+                          <a:lang val="es-CL"/>
                         </a:rPr>
                         <a:t>persistente</a:t>
                       </a:r>
@@ -10423,6 +11780,7 @@
                           <a:solidFill>
                             <a:srgbClr val="E2E8F0"/>
                           </a:solidFill>
+                          <a:lang val="es-CL"/>
                         </a:rPr>
                         <a:t>UX internacional</a:t>
                       </a:r>
@@ -10434,6 +11792,11 @@
                     </a:solidFill>
                   </a:tcPr>
                 </a:tc>
+                <a:extLst>
+                  <a:ext uri="{0D108BD9-81ED-4DB2-BD59-A6C34878D82A}">
+                    <a16:rowId xmlns:a16="http://schemas.microsoft.com/office/drawing/2014/main" val="10002"/>
+                  </a:ext>
+                </a:extLst>
               </a:tr>
               <a:tr h="457200">
                 <a:tc>
@@ -10453,6 +11816,7 @@
                           <a:solidFill>
                             <a:srgbClr val="E2E8F0"/>
                           </a:solidFill>
+                          <a:lang val="es-CL"/>
                         </a:rPr>
                         <a:t>Proceso</a:t>
                       </a:r>
@@ -10481,6 +11845,7 @@
                           <a:solidFill>
                             <a:srgbClr val="E2E8F0"/>
                           </a:solidFill>
+                          <a:lang val="es-CL"/>
                         </a:rPr>
                         <a:t>MP-03: Page</a:t>
                       </a:r>
@@ -10498,6 +11863,7 @@
                           <a:solidFill>
                             <a:srgbClr val="E2E8F0"/>
                           </a:solidFill>
+                          <a:lang val="es-CL"/>
                         </a:rPr>
                         <a:t>Object Model</a:t>
                       </a:r>
@@ -10526,6 +11892,7 @@
                           <a:solidFill>
                             <a:srgbClr val="E2E8F0"/>
                           </a:solidFill>
+                          <a:lang val="es-CL"/>
                         </a:rPr>
                         <a:t>Selectores en</a:t>
                       </a:r>
@@ -10543,6 +11910,7 @@
                           <a:solidFill>
                             <a:srgbClr val="E2E8F0"/>
                           </a:solidFill>
+                          <a:lang val="es-CL"/>
                         </a:rPr>
                         <a:t>2+ archivos steps</a:t>
                       </a:r>
@@ -10571,6 +11939,7 @@
                           <a:solidFill>
                             <a:srgbClr val="E2E8F0"/>
                           </a:solidFill>
+                          <a:lang val="es-CL"/>
                         </a:rPr>
                         <a:t>Refactor a clases:</a:t>
                       </a:r>
@@ -10588,6 +11957,7 @@
                           <a:solidFill>
                             <a:srgbClr val="E2E8F0"/>
                           </a:solidFill>
+                          <a:lang val="es-CL"/>
                         </a:rPr>
                         <a:t>LoginPage, PimPage</a:t>
                       </a:r>
@@ -10616,6 +11986,7 @@
                           <a:solidFill>
                             <a:srgbClr val="E2E8F0"/>
                           </a:solidFill>
+                          <a:lang val="es-CL"/>
                         </a:rPr>
                         <a:t>Mantenibilidad</a:t>
                       </a:r>
@@ -10633,6 +12004,7 @@
                           <a:solidFill>
                             <a:srgbClr val="E2E8F0"/>
                           </a:solidFill>
+                          <a:lang val="es-CL"/>
                         </a:rPr>
                         <a:t>centralizada</a:t>
                       </a:r>
@@ -10644,6 +12016,11 @@
                     </a:solidFill>
                   </a:tcPr>
                 </a:tc>
+                <a:extLst>
+                  <a:ext uri="{0D108BD9-81ED-4DB2-BD59-A6C34878D82A}">
+                    <a16:rowId xmlns:a16="http://schemas.microsoft.com/office/drawing/2014/main" val="10003"/>
+                  </a:ext>
+                </a:extLst>
               </a:tr>
               <a:tr h="457200">
                 <a:tc>
@@ -10663,6 +12040,7 @@
                           <a:solidFill>
                             <a:srgbClr val="E2E8F0"/>
                           </a:solidFill>
+                          <a:lang val="es-CL"/>
                         </a:rPr>
                         <a:t>Proceso</a:t>
                       </a:r>
@@ -10691,6 +12069,7 @@
                           <a:solidFill>
                             <a:srgbClr val="E2E8F0"/>
                           </a:solidFill>
+                          <a:lang val="es-CL"/>
                         </a:rPr>
                         <a:t>MP-04: Ejecucion</a:t>
                       </a:r>
@@ -10708,6 +12087,7 @@
                           <a:solidFill>
                             <a:srgbClr val="E2E8F0"/>
                           </a:solidFill>
+                          <a:lang val="es-CL"/>
                         </a:rPr>
                         <a:t>paralela</a:t>
                       </a:r>
@@ -10736,6 +12116,7 @@
                           <a:solidFill>
                             <a:srgbClr val="E2E8F0"/>
                           </a:solidFill>
+                          <a:lang val="es-CL"/>
                         </a:rPr>
                         <a:t>Suite completa</a:t>
                       </a:r>
@@ -10753,6 +12134,7 @@
                           <a:solidFill>
                             <a:srgbClr val="E2E8F0"/>
                           </a:solidFill>
+                          <a:lang val="es-CL"/>
                         </a:rPr>
                         <a:t>~7 minutos</a:t>
                       </a:r>
@@ -10781,6 +12163,7 @@
                           <a:solidFill>
                             <a:srgbClr val="E2E8F0"/>
                           </a:solidFill>
+                          <a:lang val="es-CL"/>
                         </a:rPr>
                         <a:t>behave -j 4</a:t>
                       </a:r>
@@ -10798,6 +12181,7 @@
                           <a:solidFill>
                             <a:srgbClr val="E2E8F0"/>
                           </a:solidFill>
+                          <a:lang val="es-CL"/>
                         </a:rPr>
                         <a:t>(4 workers)</a:t>
                       </a:r>
@@ -10826,6 +12210,7 @@
                           <a:solidFill>
                             <a:srgbClr val="E2E8F0"/>
                           </a:solidFill>
+                          <a:lang val="es-CL"/>
                         </a:rPr>
                         <a:t>~2 min (-70%)</a:t>
                       </a:r>
@@ -10837,6 +12222,11 @@
                     </a:solidFill>
                   </a:tcPr>
                 </a:tc>
+                <a:extLst>
+                  <a:ext uri="{0D108BD9-81ED-4DB2-BD59-A6C34878D82A}">
+                    <a16:rowId xmlns:a16="http://schemas.microsoft.com/office/drawing/2014/main" val="10004"/>
+                  </a:ext>
+                </a:extLst>
               </a:tr>
               <a:tr h="457200">
                 <a:tc>
@@ -10856,6 +12246,7 @@
                           <a:solidFill>
                             <a:srgbClr val="E2E8F0"/>
                           </a:solidFill>
+                          <a:lang val="es-CL"/>
                         </a:rPr>
                         <a:t>Proceso</a:t>
                       </a:r>
@@ -10884,6 +12275,7 @@
                           <a:solidFill>
                             <a:srgbClr val="E2E8F0"/>
                           </a:solidFill>
+                          <a:lang val="es-CL"/>
                         </a:rPr>
                         <a:t>MP-05: Logging</a:t>
                       </a:r>
@@ -10901,6 +12293,7 @@
                           <a:solidFill>
                             <a:srgbClr val="E2E8F0"/>
                           </a:solidFill>
+                          <a:lang val="es-CL"/>
                         </a:rPr>
                         <a:t>estructurado</a:t>
                       </a:r>
@@ -10929,6 +12322,7 @@
                           <a:solidFill>
                             <a:srgbClr val="E2E8F0"/>
                           </a:solidFill>
+                          <a:lang val="es-CL"/>
                         </a:rPr>
                         <a:t>print() comentados</a:t>
                       </a:r>
@@ -10946,6 +12340,7 @@
                           <a:solidFill>
                             <a:srgbClr val="E2E8F0"/>
                           </a:solidFill>
+                          <a:lang val="es-CL"/>
                         </a:rPr>
                         <a:t>sin trazas</a:t>
                       </a:r>
@@ -10974,6 +12369,7 @@
                           <a:solidFill>
                             <a:srgbClr val="E2E8F0"/>
                           </a:solidFill>
+                          <a:lang val="es-CL"/>
                         </a:rPr>
                         <a:t>Modulo logging</a:t>
                       </a:r>
@@ -10991,6 +12387,7 @@
                           <a:solidFill>
                             <a:srgbClr val="E2E8F0"/>
                           </a:solidFill>
+                          <a:lang val="es-CL"/>
                         </a:rPr>
                         <a:t>con timestamps</a:t>
                       </a:r>
@@ -11019,6 +12416,7 @@
                           <a:solidFill>
                             <a:srgbClr val="E2E8F0"/>
                           </a:solidFill>
+                          <a:lang val="es-CL"/>
                         </a:rPr>
                         <a:t>Diagnostico</a:t>
                       </a:r>
@@ -11036,6 +12434,7 @@
                           <a:solidFill>
                             <a:srgbClr val="E2E8F0"/>
                           </a:solidFill>
+                          <a:lang val="es-CL"/>
                         </a:rPr>
                         <a:t>rapido fallos</a:t>
                       </a:r>
@@ -11047,6 +12446,11 @@
                     </a:solidFill>
                   </a:tcPr>
                 </a:tc>
+                <a:extLst>
+                  <a:ext uri="{0D108BD9-81ED-4DB2-BD59-A6C34878D82A}">
+                    <a16:rowId xmlns:a16="http://schemas.microsoft.com/office/drawing/2014/main" val="10005"/>
+                  </a:ext>
+                </a:extLst>
               </a:tr>
               <a:tr h="457200">
                 <a:tc>
@@ -11066,6 +12470,7 @@
                           <a:solidFill>
                             <a:srgbClr val="E2E8F0"/>
                           </a:solidFill>
+                          <a:lang val="es-CL"/>
                         </a:rPr>
                         <a:t>Processo</a:t>
                       </a:r>
@@ -11094,6 +12499,7 @@
                           <a:solidFill>
                             <a:srgbClr val="E2E8F0"/>
                           </a:solidFill>
+                          <a:lang val="es-CL"/>
                         </a:rPr>
                         <a:t>MP-06: CI/CD</a:t>
                       </a:r>
@@ -11111,6 +12517,7 @@
                           <a:solidFill>
                             <a:srgbClr val="E2E8F0"/>
                           </a:solidFill>
+                          <a:lang val="es-CL"/>
                         </a:rPr>
                         <a:t>GitHub Actions</a:t>
                       </a:r>
@@ -11139,6 +12546,7 @@
                           <a:solidFill>
                             <a:srgbClr val="E2E8F0"/>
                           </a:solidFill>
+                          <a:lang val="es-CL"/>
                         </a:rPr>
                         <a:t>Ejecucion</a:t>
                       </a:r>
@@ -11156,6 +12564,7 @@
                           <a:solidFill>
                             <a:srgbClr val="E2E8F0"/>
                           </a:solidFill>
+                          <a:lang val="es-CL"/>
                         </a:rPr>
                         <a:t>manual</a:t>
                       </a:r>
@@ -11184,6 +12593,7 @@
                           <a:solidFill>
                             <a:srgbClr val="E2E8F0"/>
                           </a:solidFill>
+                          <a:lang val="es-CL"/>
                         </a:rPr>
                         <a:t>Workflow .github/</a:t>
                       </a:r>
@@ -11201,6 +12611,7 @@
                           <a:solidFill>
                             <a:srgbClr val="E2E8F0"/>
                           </a:solidFill>
+                          <a:lang val="es-CL"/>
                         </a:rPr>
                         <a:t>en cada push</a:t>
                       </a:r>
@@ -11229,6 +12640,7 @@
                           <a:solidFill>
                             <a:srgbClr val="E2E8F0"/>
                           </a:solidFill>
+                          <a:lang val="es-CL"/>
                         </a:rPr>
                         <a:t>Regresion</a:t>
                       </a:r>
@@ -11246,6 +12658,7 @@
                           <a:solidFill>
                             <a:srgbClr val="E2E8F0"/>
                           </a:solidFill>
+                          <a:lang val="es-CL"/>
                         </a:rPr>
                         <a:t>automatica</a:t>
                       </a:r>
@@ -11257,6 +12670,11 @@
                     </a:solidFill>
                   </a:tcPr>
                 </a:tc>
+                <a:extLst>
+                  <a:ext uri="{0D108BD9-81ED-4DB2-BD59-A6C34878D82A}">
+                    <a16:rowId xmlns:a16="http://schemas.microsoft.com/office/drawing/2014/main" val="10006"/>
+                  </a:ext>
+                </a:extLst>
               </a:tr>
             </a:tbl>
           </a:graphicData>
@@ -11301,7 +12719,12 @@
           <a:bodyPr rtlCol="0" anchor="ctr"/>
           <a:lstStyle/>
           <a:p>
-            <a:pPr algn="ctr"/>
+            <a:pPr algn="ctr">
+              <a:defRPr>
+                <a:lang val="es-CL"/>
+              </a:defRPr>
+            </a:pPr>
+            <a:endParaRPr/>
           </a:p>
         </p:txBody>
       </p:sp>
@@ -11313,8 +12736,8 @@
         </p:nvSpPr>
         <p:spPr>
           <a:xfrm>
-            <a:off x="548640" y="4937760"/>
-            <a:ext cx="10972800" cy="1188720"/>
+            <a:off x="457200" y="5029200"/>
+            <a:ext cx="10972800" cy="646331"/>
           </a:xfrm>
           <a:prstGeom prst="rect">
             <a:avLst/>
@@ -11332,25 +12755,287 @@
                 <a:solidFill>
                   <a:srgbClr val="2C3E50"/>
                 </a:solidFill>
+                <a:lang val="es-CL"/>
               </a:defRPr>
             </a:pPr>
             <a:r>
-              <a:rPr>
+              <a:rPr dirty="0" err="1">
+                <a:lang val="es-CL"/>
+              </a:rPr>
+              <a:t>Criterio</a:t>
+            </a:r>
+            <a:r>
+              <a:rPr dirty="0">
+                <a:lang val="es-CL"/>
+              </a:rPr>
+              <a:t> 3 (</a:t>
+            </a:r>
+            <a:r>
+              <a:rPr dirty="0" err="1">
+                <a:lang val="es-CL"/>
+              </a:rPr>
+              <a:t>Producto</a:t>
+            </a:r>
+            <a:r>
+              <a:rPr dirty="0">
+                <a:lang val="es-CL"/>
+              </a:rPr>
+              <a:t> </a:t>
+            </a:r>
+            <a:r>
+              <a:rPr dirty="0" err="1">
+                <a:lang val="es-CL"/>
+              </a:rPr>
+              <a:t>OrangeHRM</a:t>
+            </a:r>
+            <a:r>
+              <a:rPr dirty="0">
+                <a:lang val="es-CL"/>
+              </a:rPr>
+              <a:t>): MP-01, MP-02  |  </a:t>
+            </a:r>
+            <a:r>
+              <a:rPr dirty="0" err="1">
+                <a:lang val="es-CL"/>
+              </a:rPr>
+              <a:t>Criterio</a:t>
+            </a:r>
+            <a:r>
+              <a:rPr dirty="0">
+                <a:lang val="es-CL"/>
+              </a:rPr>
+              <a:t> 4 (</a:t>
+            </a:r>
+            <a:r>
+              <a:rPr dirty="0" err="1">
+                <a:lang val="es-CL"/>
+              </a:rPr>
+              <a:t>Proceso</a:t>
+            </a:r>
+            <a:r>
+              <a:rPr dirty="0">
+                <a:lang val="es-CL"/>
+              </a:rPr>
+              <a:t> Framework): MP-03, MP-04, MP-05, MP-06</a:t>
+            </a:r>
+            <a:r>
+              <a:rPr dirty="0">
+                <a:lang val="es-CL"/>
+              </a:rPr>
+              <a:t/>
+            </a:r>
+            <a:br>
+              <a:rPr dirty="0"/>
+            </a:br>
+            <a:r>
+              <a:rPr dirty="0">
+                <a:lang val="es-CL"/>
+              </a:rPr>
+              <a:t/>
+            </a:r>
+            <a:br>
+              <a:rPr dirty="0"/>
+            </a:br>
+            <a:r>
+              <a:rPr dirty="0" err="1">
+                <a:lang val="es-CL"/>
+              </a:rPr>
+              <a:t>Cada</a:t>
+            </a:r>
+            <a:r>
+              <a:rPr dirty="0">
+                <a:lang val="es-CL"/>
+              </a:rPr>
+              <a:t> </a:t>
+            </a:r>
+            <a:r>
+              <a:rPr dirty="0" err="1">
+                <a:lang val="es-CL"/>
+              </a:rPr>
+              <a:t>propuesta</a:t>
+            </a:r>
+            <a:r>
+              <a:rPr dirty="0">
+                <a:lang val="es-CL"/>
+              </a:rPr>
+              <a:t> </a:t>
+            </a:r>
+            <a:r>
+              <a:rPr dirty="0" err="1">
+                <a:lang val="es-CL"/>
+              </a:rPr>
+              <a:t>nace</a:t>
+            </a:r>
+            <a:r>
+              <a:rPr dirty="0">
+                <a:lang val="es-CL"/>
+              </a:rPr>
+              <a:t> de un </a:t>
+            </a:r>
+            <a:r>
+              <a:rPr dirty="0" err="1">
+                <a:lang val="es-CL"/>
+              </a:rPr>
+              <a:t>dato</a:t>
+            </a:r>
+            <a:r>
+              <a:rPr dirty="0">
+                <a:lang val="es-CL"/>
+              </a:rPr>
+              <a:t> real del </a:t>
+            </a:r>
+            <a:r>
+              <a:rPr dirty="0" err="1">
+                <a:lang val="es-CL"/>
+              </a:rPr>
+              <a:t>reporte</a:t>
+            </a:r>
+            <a:r>
+              <a:rPr dirty="0">
+                <a:lang val="es-CL"/>
+              </a:rPr>
+              <a:t>, </a:t>
+            </a:r>
+            <a:r>
+              <a:rPr dirty="0" err="1">
+                <a:lang val="es-CL"/>
+              </a:rPr>
+              <a:t>explica</a:t>
+            </a:r>
+            <a:r>
+              <a:rPr dirty="0">
+                <a:lang val="es-CL"/>
+              </a:rPr>
+              <a:t> la causa </a:t>
+            </a:r>
+            <a:r>
+              <a:rPr dirty="0" err="1">
+                <a:lang val="es-CL"/>
+              </a:rPr>
+              <a:t>tecnica</a:t>
+            </a:r>
+            <a:r>
+              <a:rPr dirty="0">
+                <a:lang val="es-CL"/>
+              </a:rPr>
+              <a:t>, propone un </a:t>
+            </a:r>
+            <a:r>
+              <a:rPr dirty="0" err="1">
+                <a:lang val="es-CL"/>
+              </a:rPr>
+              <a:t>cambio</a:t>
+            </a:r>
+            <a:r>
+              <a:rPr dirty="0">
+                <a:lang val="es-CL"/>
+              </a:rPr>
+              <a:t> </a:t>
+            </a:r>
+            <a:r>
+              <a:rPr dirty="0" err="1">
+                <a:lang val="es-CL"/>
+              </a:rPr>
+              <a:t>concreto</a:t>
+            </a:r>
+            <a:r>
+              <a:rPr dirty="0">
+                <a:lang val="es-CL"/>
+              </a:rPr>
+              <a:t> </a:t>
+            </a:r>
+            <a:r>
+              <a:rPr dirty="0" err="1">
+                <a:lang val="es-CL"/>
+              </a:rPr>
+              <a:t>en</a:t>
+            </a:r>
+            <a:r>
+              <a:rPr dirty="0">
+                <a:lang val="es-CL"/>
+              </a:rPr>
+              <a:t> el </a:t>
+            </a:r>
+            <a:r>
+              <a:rPr dirty="0" err="1">
+                <a:lang val="es-CL"/>
+              </a:rPr>
+              <a:t>codigo</a:t>
+            </a:r>
+            <a:r>
+              <a:rPr dirty="0">
+                <a:lang val="es-CL"/>
+              </a:rPr>
+              <a:t>, y </a:t>
+            </a:r>
+            <a:r>
+              <a:rPr dirty="0" err="1">
+                <a:lang val="es-CL"/>
+              </a:rPr>
+              <a:t>cuantifica</a:t>
+            </a:r>
+            <a:r>
+              <a:rPr dirty="0">
+                <a:lang val="es-CL"/>
+              </a:rPr>
+              <a:t> el </a:t>
+            </a:r>
+            <a:r>
+              <a:rPr dirty="0" err="1">
+                <a:lang val="es-CL"/>
+              </a:rPr>
+              <a:t>impacto</a:t>
+            </a:r>
+            <a:r>
+              <a:rPr dirty="0">
+                <a:lang val="es-CL"/>
+              </a:rPr>
+              <a:t> </a:t>
+            </a:r>
+            <a:r>
+              <a:rPr dirty="0" err="1">
+                <a:lang val="es-CL"/>
+              </a:rPr>
+              <a:t>en</a:t>
+            </a:r>
+            <a:r>
+              <a:rPr dirty="0">
+                <a:lang val="es-CL"/>
+              </a:rPr>
+              <a:t> el </a:t>
+            </a:r>
+            <a:r>
+              <a:rPr dirty="0" err="1">
+                <a:lang val="es-CL"/>
+              </a:rPr>
+              <a:t>ciclo</a:t>
+            </a:r>
+            <a:r>
+              <a:rPr dirty="0">
+                <a:lang val="es-CL"/>
+              </a:rPr>
+              <a:t> de </a:t>
+            </a:r>
+            <a:r>
+              <a:rPr dirty="0" err="1">
+                <a:lang val="es-CL"/>
+              </a:rPr>
+              <a:t>vida</a:t>
+            </a:r>
+            <a:r>
+              <a:rPr dirty="0">
+                <a:lang val="es-CL"/>
+              </a:rPr>
+              <a:t> del software</a:t>
+            </a:r>
+            <a:r>
+              <a:rPr dirty="0">
                 <a:solidFill>
                   <a:srgbClr val="CBD5E1"/>
                 </a:solidFill>
-              </a:rPr>
-              <a:t>Criterio 3 (Producto OrangeHRM): MP-01, MP-02  |  Criterio 4 (Proceso Framework): MP-03, MP-04, MP-05, MP-06</a:t>
-            </a:r>
-            <a:br/>
-            <a:br/>
-            <a:r>
-              <a:rPr>
-                <a:solidFill>
-                  <a:srgbClr val="CBD5E1"/>
-                </a:solidFill>
-              </a:rPr>
-              <a:t>Cada propuesta nace de un dato real del reporte, explica la causa tecnica, propone un cambio concreto en el codigo, y cuantifica el impacto en el ciclo de vida del software.</a:t>
+                <a:lang val="es-CL"/>
+              </a:rPr>
+              <a:t>.</a:t>
             </a:r>
           </a:p>
         </p:txBody>
@@ -11364,7 +13049,7 @@
 </file>
 
 <file path=ppt/slides/slide9.xml><?xml version="1.0" encoding="utf-8"?>
-<p:sld xmlns:a="http://schemas.openxmlformats.org/drawingml/2006/main" xmlns:p="http://schemas.openxmlformats.org/presentationml/2006/main" xmlns:r="http://schemas.openxmlformats.org/officeDocument/2006/relationships">
+<p:sld xmlns:a="http://schemas.openxmlformats.org/drawingml/2006/main" xmlns:r="http://schemas.openxmlformats.org/officeDocument/2006/relationships" xmlns:p="http://schemas.openxmlformats.org/presentationml/2006/main">
   <p:cSld>
     <p:bg>
       <p:bgPr>
@@ -11380,7 +13065,14 @@
         <p:cNvGrpSpPr/>
         <p:nvPr/>
       </p:nvGrpSpPr>
-      <p:grpSpPr/>
+      <p:grpSpPr>
+        <a:xfrm>
+          <a:off x="0" y="0"/>
+          <a:ext cx="0" cy="0"/>
+          <a:chOff x="0" y="0"/>
+          <a:chExt cx="0" cy="0"/>
+        </a:xfrm>
+      </p:grpSpPr>
       <p:sp>
         <p:nvSpPr>
           <p:cNvPr id="2" name="Rectangle 1"/>
@@ -11411,7 +13103,12 @@
           <a:bodyPr rtlCol="0" anchor="ctr"/>
           <a:lstStyle/>
           <a:p>
-            <a:pPr algn="ctr"/>
+            <a:pPr algn="ctr">
+              <a:defRPr>
+                <a:lang val="es-CL"/>
+              </a:defRPr>
+            </a:pPr>
+            <a:endParaRPr/>
           </a:p>
         </p:txBody>
       </p:sp>
@@ -11442,6 +13139,7 @@
                 <a:solidFill>
                   <a:srgbClr val="FFFFFF"/>
                 </a:solidFill>
+                <a:lang val="es-CL"/>
               </a:defRPr>
             </a:pPr>
             <a:r>
@@ -11449,6 +13147,7 @@
                 <a:solidFill>
                   <a:srgbClr val="CBD5E1"/>
                 </a:solidFill>
+                <a:lang val="es-CL"/>
               </a:rPr>
               <a:t>Stack Tecnologico: Behave + Python + Selenium</a:t>
             </a:r>
@@ -11474,10 +13173,34 @@
                 <a:tableStyleId>{5C22544A-7EE6-4342-B048-85BDC9FD1C3A}</a:tableStyleId>
               </a:tblPr>
               <a:tblGrid>
-                <a:gridCol w="1828800"/>
-                <a:gridCol w="1097280"/>
-                <a:gridCol w="3200400"/>
-                <a:gridCol w="4572000"/>
+                <a:gridCol w="1828800">
+                  <a:extLst>
+                    <a:ext uri="{9D8B030D-6E8A-4147-A177-3AD203B41FA5}">
+                      <a16:colId xmlns:a16="http://schemas.microsoft.com/office/drawing/2014/main" val="20000"/>
+                    </a:ext>
+                  </a:extLst>
+                </a:gridCol>
+                <a:gridCol w="1097280">
+                  <a:extLst>
+                    <a:ext uri="{9D8B030D-6E8A-4147-A177-3AD203B41FA5}">
+                      <a16:colId xmlns:a16="http://schemas.microsoft.com/office/drawing/2014/main" val="20001"/>
+                    </a:ext>
+                  </a:extLst>
+                </a:gridCol>
+                <a:gridCol w="3200400">
+                  <a:extLst>
+                    <a:ext uri="{9D8B030D-6E8A-4147-A177-3AD203B41FA5}">
+                      <a16:colId xmlns:a16="http://schemas.microsoft.com/office/drawing/2014/main" val="20002"/>
+                    </a:ext>
+                  </a:extLst>
+                </a:gridCol>
+                <a:gridCol w="4572000">
+                  <a:extLst>
+                    <a:ext uri="{9D8B030D-6E8A-4147-A177-3AD203B41FA5}">
+                      <a16:colId xmlns:a16="http://schemas.microsoft.com/office/drawing/2014/main" val="20003"/>
+                    </a:ext>
+                  </a:extLst>
+                </a:gridCol>
               </a:tblGrid>
               <a:tr h="391885">
                 <a:tc>
@@ -11497,6 +13220,7 @@
                           <a:solidFill>
                             <a:srgbClr val="FFFFFF"/>
                           </a:solidFill>
+                          <a:lang val="es-CL"/>
                         </a:rPr>
                         <a:t>Componente</a:t>
                       </a:r>
@@ -11525,6 +13249,7 @@
                           <a:solidFill>
                             <a:srgbClr val="FFFFFF"/>
                           </a:solidFill>
+                          <a:lang val="es-CL"/>
                         </a:rPr>
                         <a:t>Version</a:t>
                       </a:r>
@@ -11553,6 +13278,7 @@
                           <a:solidFill>
                             <a:srgbClr val="FFFFFF"/>
                           </a:solidFill>
+                          <a:lang val="es-CL"/>
                         </a:rPr>
                         <a:t>Proposito</a:t>
                       </a:r>
@@ -11581,6 +13307,7 @@
                           <a:solidFill>
                             <a:srgbClr val="FFFFFF"/>
                           </a:solidFill>
+                          <a:lang val="es-CL"/>
                         </a:rPr>
                         <a:t>Configuracion</a:t>
                       </a:r>
@@ -11592,6 +13319,11 @@
                     </a:solidFill>
                   </a:tcPr>
                 </a:tc>
+                <a:extLst>
+                  <a:ext uri="{0D108BD9-81ED-4DB2-BD59-A6C34878D82A}">
+                    <a16:rowId xmlns:a16="http://schemas.microsoft.com/office/drawing/2014/main" val="10000"/>
+                  </a:ext>
+                </a:extLst>
               </a:tr>
               <a:tr h="391885">
                 <a:tc>
@@ -11611,6 +13343,7 @@
                           <a:solidFill>
                             <a:srgbClr val="E2E8F0"/>
                           </a:solidFill>
+                          <a:lang val="es-CL"/>
                         </a:rPr>
                         <a:t>Python</a:t>
                       </a:r>
@@ -11639,6 +13372,7 @@
                           <a:solidFill>
                             <a:srgbClr val="E2E8F0"/>
                           </a:solidFill>
+                          <a:lang val="es-CL"/>
                         </a:rPr>
                         <a:t>3.14</a:t>
                       </a:r>
@@ -11667,6 +13401,7 @@
                           <a:solidFill>
                             <a:srgbClr val="E2E8F0"/>
                           </a:solidFill>
+                          <a:lang val="es-CL"/>
                         </a:rPr>
                         <a:t>Lenguaje base</a:t>
                       </a:r>
@@ -11695,6 +13430,7 @@
                           <a:solidFill>
                             <a:srgbClr val="E2E8F0"/>
                           </a:solidFill>
+                          <a:lang val="es-CL"/>
                         </a:rPr>
                         <a:t>Interprete: python.exe</a:t>
                       </a:r>
@@ -11706,6 +13442,11 @@
                     </a:solidFill>
                   </a:tcPr>
                 </a:tc>
+                <a:extLst>
+                  <a:ext uri="{0D108BD9-81ED-4DB2-BD59-A6C34878D82A}">
+                    <a16:rowId xmlns:a16="http://schemas.microsoft.com/office/drawing/2014/main" val="10001"/>
+                  </a:ext>
+                </a:extLst>
               </a:tr>
               <a:tr h="391885">
                 <a:tc>
@@ -11725,6 +13466,7 @@
                           <a:solidFill>
                             <a:srgbClr val="E2E8F0"/>
                           </a:solidFill>
+                          <a:lang val="es-CL"/>
                         </a:rPr>
                         <a:t>Behave</a:t>
                       </a:r>
@@ -11753,6 +13495,7 @@
                           <a:solidFill>
                             <a:srgbClr val="E2E8F0"/>
                           </a:solidFill>
+                          <a:lang val="es-CL"/>
                         </a:rPr>
                         <a:t>1.2.6</a:t>
                       </a:r>
@@ -11781,6 +13524,7 @@
                           <a:solidFill>
                             <a:srgbClr val="E2E8F0"/>
                           </a:solidFill>
+                          <a:lang val="es-CL"/>
                         </a:rPr>
                         <a:t>Framework BDD (Gherkin)</a:t>
                       </a:r>
@@ -11809,6 +13553,7 @@
                           <a:solidFill>
                             <a:srgbClr val="E2E8F0"/>
                           </a:solidFill>
+                          <a:lang val="es-CL"/>
                         </a:rPr>
                         <a:t>environment.py + features/ + steps/</a:t>
                       </a:r>
@@ -11820,6 +13565,11 @@
                     </a:solidFill>
                   </a:tcPr>
                 </a:tc>
+                <a:extLst>
+                  <a:ext uri="{0D108BD9-81ED-4DB2-BD59-A6C34878D82A}">
+                    <a16:rowId xmlns:a16="http://schemas.microsoft.com/office/drawing/2014/main" val="10002"/>
+                  </a:ext>
+                </a:extLst>
               </a:tr>
               <a:tr h="391885">
                 <a:tc>
@@ -11839,6 +13589,7 @@
                           <a:solidFill>
                             <a:srgbClr val="E2E8F0"/>
                           </a:solidFill>
+                          <a:lang val="es-CL"/>
                         </a:rPr>
                         <a:t>Selenium</a:t>
                       </a:r>
@@ -11867,6 +13618,7 @@
                           <a:solidFill>
                             <a:srgbClr val="E2E8F0"/>
                           </a:solidFill>
+                          <a:lang val="es-CL"/>
                         </a:rPr>
                         <a:t>4.28</a:t>
                       </a:r>
@@ -11895,6 +13647,7 @@
                           <a:solidFill>
                             <a:srgbClr val="E2E8F0"/>
                           </a:solidFill>
+                          <a:lang val="es-CL"/>
                         </a:rPr>
                         <a:t>Autom. navegador Chrome</a:t>
                       </a:r>
@@ -11923,6 +13676,7 @@
                           <a:solidFill>
                             <a:srgbClr val="E2E8F0"/>
                           </a:solidFill>
+                          <a:lang val="es-CL"/>
                         </a:rPr>
                         <a:t>WebDriverWait, By, EC</a:t>
                       </a:r>
@@ -11934,6 +13688,11 @@
                     </a:solidFill>
                   </a:tcPr>
                 </a:tc>
+                <a:extLst>
+                  <a:ext uri="{0D108BD9-81ED-4DB2-BD59-A6C34878D82A}">
+                    <a16:rowId xmlns:a16="http://schemas.microsoft.com/office/drawing/2014/main" val="10003"/>
+                  </a:ext>
+                </a:extLst>
               </a:tr>
               <a:tr h="391885">
                 <a:tc>
@@ -11953,6 +13712,7 @@
                           <a:solidFill>
                             <a:srgbClr val="E2E8F0"/>
                           </a:solidFill>
+                          <a:lang val="es-CL"/>
                         </a:rPr>
                         <a:t>openpyxl</a:t>
                       </a:r>
@@ -11981,6 +13741,7 @@
                           <a:solidFill>
                             <a:srgbClr val="E2E8F0"/>
                           </a:solidFill>
+                          <a:lang val="es-CL"/>
                         </a:rPr>
                         <a:t>3.1+</a:t>
                       </a:r>
@@ -12009,6 +13770,7 @@
                           <a:solidFill>
                             <a:srgbClr val="E2E8F0"/>
                           </a:solidFill>
+                          <a:lang val="es-CL"/>
                         </a:rPr>
                         <a:t>Lectura Excel DD</a:t>
                       </a:r>
@@ -12037,6 +13799,7 @@
                           <a:solidFill>
                             <a:srgbClr val="E2E8F0"/>
                           </a:solidFill>
+                          <a:lang val="es-CL"/>
                         </a:rPr>
                         <a:t>ExcelUtils.get_cell_data()</a:t>
                       </a:r>
@@ -12048,6 +13811,11 @@
                     </a:solidFill>
                   </a:tcPr>
                 </a:tc>
+                <a:extLst>
+                  <a:ext uri="{0D108BD9-81ED-4DB2-BD59-A6C34878D82A}">
+                    <a16:rowId xmlns:a16="http://schemas.microsoft.com/office/drawing/2014/main" val="10004"/>
+                  </a:ext>
+                </a:extLst>
               </a:tr>
               <a:tr h="391885">
                 <a:tc>
@@ -12067,6 +13835,7 @@
                           <a:solidFill>
                             <a:srgbClr val="E2E8F0"/>
                           </a:solidFill>
+                          <a:lang val="es-CL"/>
                         </a:rPr>
                         <a:t>Chrome</a:t>
                       </a:r>
@@ -12095,6 +13864,7 @@
                           <a:solidFill>
                             <a:srgbClr val="E2E8F0"/>
                           </a:solidFill>
+                          <a:lang val="es-CL"/>
                         </a:rPr>
                         <a:t>149</a:t>
                       </a:r>
@@ -12123,6 +13893,7 @@
                           <a:solidFill>
                             <a:srgbClr val="E2E8F0"/>
                           </a:solidFill>
+                          <a:lang val="es-CL"/>
                         </a:rPr>
                         <a:t>Navegador bajo prueba</a:t>
                       </a:r>
@@ -12151,6 +13922,7 @@
                           <a:solidFill>
                             <a:srgbClr val="E2E8F0"/>
                           </a:solidFill>
+                          <a:lang val="es-CL"/>
                         </a:rPr>
                         <a:t>ChromeDriver compatible</a:t>
                       </a:r>
@@ -12162,6 +13934,11 @@
                     </a:solidFill>
                   </a:tcPr>
                 </a:tc>
+                <a:extLst>
+                  <a:ext uri="{0D108BD9-81ED-4DB2-BD59-A6C34878D82A}">
+                    <a16:rowId xmlns:a16="http://schemas.microsoft.com/office/drawing/2014/main" val="10005"/>
+                  </a:ext>
+                </a:extLst>
               </a:tr>
               <a:tr h="391890">
                 <a:tc>
@@ -12181,6 +13958,7 @@
                           <a:solidFill>
                             <a:srgbClr val="E2E8F0"/>
                           </a:solidFill>
+                          <a:lang val="es-CL"/>
                         </a:rPr>
                         <a:t>PyCharm</a:t>
                       </a:r>
@@ -12209,6 +13987,7 @@
                           <a:solidFill>
                             <a:srgbClr val="E2E8F0"/>
                           </a:solidFill>
+                          <a:lang val="es-CL"/>
                         </a:rPr>
                         <a:t>2026.1</a:t>
                       </a:r>
@@ -12237,6 +14016,7 @@
                           <a:solidFill>
                             <a:srgbClr val="E2E8F0"/>
                           </a:solidFill>
+                          <a:lang val="es-CL"/>
                         </a:rPr>
                         <a:t>IDE desarrollo</a:t>
                       </a:r>
@@ -12265,6 +14045,7 @@
                           <a:solidFill>
                             <a:srgbClr val="E2E8F0"/>
                           </a:solidFill>
+                          <a:lang val="es-CL"/>
                         </a:rPr>
                         <a:t>Run Config: behave features/</a:t>
                       </a:r>
@@ -12276,6 +14057,11 @@
                     </a:solidFill>
                   </a:tcPr>
                 </a:tc>
+                <a:extLst>
+                  <a:ext uri="{0D108BD9-81ED-4DB2-BD59-A6C34878D82A}">
+                    <a16:rowId xmlns:a16="http://schemas.microsoft.com/office/drawing/2014/main" val="10006"/>
+                  </a:ext>
+                </a:extLst>
               </a:tr>
             </a:tbl>
           </a:graphicData>
@@ -12308,6 +14094,7 @@
                 <a:solidFill>
                   <a:srgbClr val="2C3E50"/>
                 </a:solidFill>
+                <a:lang val="es-CL"/>
               </a:defRPr>
             </a:pPr>
             <a:r>
@@ -12315,51 +14102,87 @@
                 <a:solidFill>
                   <a:srgbClr val="CBD5E1"/>
                 </a:solidFill>
+                <a:lang val="es-CL"/>
               </a:rPr>
               <a:t>Comandos principales:</a:t>
             </a:r>
+            <a:r>
+              <a:rPr>
+                <a:lang val="es-CL"/>
+              </a:rPr>
+              <a:t/>
+            </a:r>
             <a:br/>
             <a:r>
               <a:rPr>
                 <a:solidFill>
                   <a:srgbClr val="CBD5E1"/>
                 </a:solidFill>
+                <a:lang val="es-CL"/>
               </a:rPr>
               <a:t>- python -m behave features/                 # Toda la suite</a:t>
             </a:r>
+            <a:r>
+              <a:rPr>
+                <a:lang val="es-CL"/>
+              </a:rPr>
+              <a:t/>
+            </a:r>
             <a:br/>
             <a:r>
               <a:rPr>
                 <a:solidFill>
                   <a:srgbClr val="CBD5E1"/>
                 </a:solidFill>
+                <a:lang val="es-CL"/>
               </a:rPr>
               <a:t>- python -m behave features/login.feature    # Una feature</a:t>
             </a:r>
+            <a:r>
+              <a:rPr>
+                <a:lang val="es-CL"/>
+              </a:rPr>
+              <a:t/>
+            </a:r>
             <a:br/>
             <a:r>
               <a:rPr>
                 <a:solidFill>
                   <a:srgbClr val="CBD5E1"/>
                 </a:solidFill>
+                <a:lang val="es-CL"/>
               </a:rPr>
               <a:t>- python -m behave --format json -o reporte.json   # Reporte JSON</a:t>
             </a:r>
+            <a:r>
+              <a:rPr>
+                <a:lang val="es-CL"/>
+              </a:rPr>
+              <a:t/>
+            </a:r>
             <a:br/>
             <a:r>
               <a:rPr>
                 <a:solidFill>
                   <a:srgbClr val="CBD5E1"/>
                 </a:solidFill>
+                <a:lang val="es-CL"/>
               </a:rPr>
               <a:t>- set HEADLESS=0 &amp;&amp; python -m behave features/     # Modo visual</a:t>
             </a:r>
+            <a:r>
+              <a:rPr>
+                <a:lang val="es-CL"/>
+              </a:rPr>
+              <a:t/>
+            </a:r>
             <a:br/>
             <a:r>
               <a:rPr>
                 <a:solidFill>
                   <a:srgbClr val="CBD5E1"/>
                 </a:solidFill>
+                <a:lang val="es-CL"/>
               </a:rPr>
               <a:t>Gestion dependencias: pip install -r requirements.txt (equivalente a Maven)</a:t>
             </a:r>

--- a/PRESENTACION_FINAL_EFT.pptx
+++ b/PRESENTACION_FINAL_EFT.pptx
@@ -3987,12 +3987,6 @@
               </a:rPr>
               <a:t>)</a:t>
             </a:r>
-            <a:r>
-              <a:rPr dirty="0">
-                <a:lang val="es-CL"/>
-              </a:rPr>
-              <a:t/>
-            </a:r>
             <a:br>
               <a:rPr dirty="0"/>
             </a:br>
@@ -4001,12 +3995,6 @@
                 <a:lang val="es-CL"/>
               </a:rPr>
               <a:t>Stack: Behave 1.2.6 + Selenium 4.28 + Python 3.14</a:t>
-            </a:r>
-            <a:r>
-              <a:rPr dirty="0">
-                <a:lang val="es-CL"/>
-              </a:rPr>
-              <a:t/>
             </a:r>
             <a:br>
               <a:rPr dirty="0"/>
@@ -4740,6 +4728,7 @@
                           <a:solidFill>
                             <a:srgbClr val="FFFFFF"/>
                           </a:solidFill>
+                          <a:lang val="es-CL"/>
                         </a:defRPr>
                       </a:pPr>
                       <a:r>
@@ -4769,6 +4758,7 @@
                           <a:solidFill>
                             <a:srgbClr val="FFFFFF"/>
                           </a:solidFill>
+                          <a:lang val="es-CL"/>
                         </a:defRPr>
                       </a:pPr>
                       <a:r>
@@ -4798,6 +4788,7 @@
                           <a:solidFill>
                             <a:srgbClr val="FFFFFF"/>
                           </a:solidFill>
+                          <a:lang val="es-CL"/>
                         </a:defRPr>
                       </a:pPr>
                       <a:r>
@@ -4827,6 +4818,7 @@
                           <a:solidFill>
                             <a:srgbClr val="FFFFFF"/>
                           </a:solidFill>
+                          <a:lang val="es-CL"/>
                         </a:defRPr>
                       </a:pPr>
                       <a:r>
@@ -4856,6 +4848,7 @@
                           <a:solidFill>
                             <a:srgbClr val="FFFFFF"/>
                           </a:solidFill>
+                          <a:lang val="es-CL"/>
                         </a:defRPr>
                       </a:pPr>
                       <a:r>
@@ -4892,6 +4885,7 @@
                           <a:solidFill>
                             <a:srgbClr val="2C3E50"/>
                           </a:solidFill>
+                          <a:lang val="es-CL"/>
                         </a:defRPr>
                       </a:pPr>
                       <a:r>
@@ -4910,6 +4904,7 @@
                           <a:solidFill>
                             <a:srgbClr val="2C3E50"/>
                           </a:solidFill>
+                          <a:lang val="es-CL"/>
                         </a:defRPr>
                       </a:pPr>
                       <a:r>
@@ -4939,6 +4934,7 @@
                           <a:solidFill>
                             <a:srgbClr val="2C3E50"/>
                           </a:solidFill>
+                          <a:lang val="es-CL"/>
                         </a:defRPr>
                       </a:pPr>
                       <a:r>
@@ -4968,6 +4964,7 @@
                           <a:solidFill>
                             <a:srgbClr val="2C3E50"/>
                           </a:solidFill>
+                          <a:lang val="es-CL"/>
                         </a:defRPr>
                       </a:pPr>
                       <a:r>
@@ -4986,6 +4983,7 @@
                           <a:solidFill>
                             <a:srgbClr val="2C3E50"/>
                           </a:solidFill>
+                          <a:lang val="es-CL"/>
                         </a:defRPr>
                       </a:pPr>
                       <a:r>
@@ -5015,6 +5013,7 @@
                           <a:solidFill>
                             <a:srgbClr val="2C3E50"/>
                           </a:solidFill>
+                          <a:lang val="es-CL"/>
                         </a:defRPr>
                       </a:pPr>
                       <a:r>
@@ -5044,6 +5043,7 @@
                           <a:solidFill>
                             <a:srgbClr val="2C3E50"/>
                           </a:solidFill>
+                          <a:lang val="es-CL"/>
                         </a:defRPr>
                       </a:pPr>
                       <a:r>
@@ -5062,6 +5062,7 @@
                           <a:solidFill>
                             <a:srgbClr val="2C3E50"/>
                           </a:solidFill>
+                          <a:lang val="es-CL"/>
                         </a:defRPr>
                       </a:pPr>
                       <a:r>
@@ -5080,6 +5081,7 @@
                           <a:solidFill>
                             <a:srgbClr val="2C3E50"/>
                           </a:solidFill>
+                          <a:lang val="es-CL"/>
                         </a:defRPr>
                       </a:pPr>
                       <a:r>
@@ -5116,6 +5118,7 @@
                           <a:solidFill>
                             <a:srgbClr val="2C3E50"/>
                           </a:solidFill>
+                          <a:lang val="es-CL"/>
                         </a:defRPr>
                       </a:pPr>
                       <a:r>
@@ -5134,6 +5137,7 @@
                           <a:solidFill>
                             <a:srgbClr val="2C3E50"/>
                           </a:solidFill>
+                          <a:lang val="es-CL"/>
                         </a:defRPr>
                       </a:pPr>
                       <a:r>
@@ -5163,6 +5167,7 @@
                           <a:solidFill>
                             <a:srgbClr val="2C3E50"/>
                           </a:solidFill>
+                          <a:lang val="es-CL"/>
                         </a:defRPr>
                       </a:pPr>
                       <a:r>
@@ -5192,6 +5197,7 @@
                           <a:solidFill>
                             <a:srgbClr val="2C3E50"/>
                           </a:solidFill>
+                          <a:lang val="es-CL"/>
                         </a:defRPr>
                       </a:pPr>
                       <a:r>
@@ -5210,6 +5216,7 @@
                           <a:solidFill>
                             <a:srgbClr val="2C3E50"/>
                           </a:solidFill>
+                          <a:lang val="es-CL"/>
                         </a:defRPr>
                       </a:pPr>
                       <a:r>
@@ -5228,6 +5235,7 @@
                           <a:solidFill>
                             <a:srgbClr val="2C3E50"/>
                           </a:solidFill>
+                          <a:lang val="es-CL"/>
                         </a:defRPr>
                       </a:pPr>
                       <a:r>
@@ -5246,6 +5254,7 @@
                           <a:solidFill>
                             <a:srgbClr val="2C3E50"/>
                           </a:solidFill>
+                          <a:lang val="es-CL"/>
                         </a:defRPr>
                       </a:pPr>
                       <a:r>
@@ -5275,6 +5284,7 @@
                           <a:solidFill>
                             <a:srgbClr val="2C3E50"/>
                           </a:solidFill>
+                          <a:lang val="es-CL"/>
                         </a:defRPr>
                       </a:pPr>
                       <a:r>
@@ -5304,6 +5314,7 @@
                           <a:solidFill>
                             <a:srgbClr val="2C3E50"/>
                           </a:solidFill>
+                          <a:lang val="es-CL"/>
                         </a:defRPr>
                       </a:pPr>
                       <a:r>
@@ -5322,6 +5333,7 @@
                           <a:solidFill>
                             <a:srgbClr val="2C3E50"/>
                           </a:solidFill>
+                          <a:lang val="es-CL"/>
                         </a:defRPr>
                       </a:pPr>
                       <a:r>
@@ -5340,6 +5352,7 @@
                           <a:solidFill>
                             <a:srgbClr val="2C3E50"/>
                           </a:solidFill>
+                          <a:lang val="es-CL"/>
                         </a:defRPr>
                       </a:pPr>
                       <a:r>
@@ -5376,6 +5389,7 @@
                           <a:solidFill>
                             <a:srgbClr val="2C3E50"/>
                           </a:solidFill>
+                          <a:lang val="es-CL"/>
                         </a:defRPr>
                       </a:pPr>
                       <a:r>
@@ -5394,6 +5408,7 @@
                           <a:solidFill>
                             <a:srgbClr val="2C3E50"/>
                           </a:solidFill>
+                          <a:lang val="es-CL"/>
                         </a:defRPr>
                       </a:pPr>
                       <a:r>
@@ -5423,6 +5438,7 @@
                           <a:solidFill>
                             <a:srgbClr val="2C3E50"/>
                           </a:solidFill>
+                          <a:lang val="es-CL"/>
                         </a:defRPr>
                       </a:pPr>
                       <a:r>
@@ -5452,6 +5468,7 @@
                           <a:solidFill>
                             <a:srgbClr val="2C3E50"/>
                           </a:solidFill>
+                          <a:lang val="es-CL"/>
                         </a:defRPr>
                       </a:pPr>
                       <a:r>
@@ -5470,6 +5487,7 @@
                           <a:solidFill>
                             <a:srgbClr val="2C3E50"/>
                           </a:solidFill>
+                          <a:lang val="es-CL"/>
                         </a:defRPr>
                       </a:pPr>
                       <a:r>
@@ -5488,6 +5506,7 @@
                           <a:solidFill>
                             <a:srgbClr val="2C3E50"/>
                           </a:solidFill>
+                          <a:lang val="es-CL"/>
                         </a:defRPr>
                       </a:pPr>
                       <a:r>
@@ -5517,6 +5536,7 @@
                           <a:solidFill>
                             <a:srgbClr val="2C3E50"/>
                           </a:solidFill>
+                          <a:lang val="es-CL"/>
                         </a:defRPr>
                       </a:pPr>
                       <a:r>
@@ -5546,6 +5566,7 @@
                           <a:solidFill>
                             <a:srgbClr val="2C3E50"/>
                           </a:solidFill>
+                          <a:lang val="es-CL"/>
                         </a:defRPr>
                       </a:pPr>
                       <a:r>
@@ -5564,6 +5585,7 @@
                           <a:solidFill>
                             <a:srgbClr val="2C3E50"/>
                           </a:solidFill>
+                          <a:lang val="es-CL"/>
                         </a:defRPr>
                       </a:pPr>
                       <a:r>
@@ -5582,6 +5604,7 @@
                           <a:solidFill>
                             <a:srgbClr val="2C3E50"/>
                           </a:solidFill>
+                          <a:lang val="es-CL"/>
                         </a:defRPr>
                       </a:pPr>
                       <a:r>
@@ -5897,6 +5920,7 @@
                           <a:solidFill>
                             <a:srgbClr val="FFFFFF"/>
                           </a:solidFill>
+                          <a:lang val="es-CL"/>
                         </a:defRPr>
                       </a:pPr>
                       <a:r>
@@ -5926,6 +5950,7 @@
                           <a:solidFill>
                             <a:srgbClr val="FFFFFF"/>
                           </a:solidFill>
+                          <a:lang val="es-CL"/>
                         </a:defRPr>
                       </a:pPr>
                       <a:r>
@@ -5955,6 +5980,7 @@
                           <a:solidFill>
                             <a:srgbClr val="FFFFFF"/>
                           </a:solidFill>
+                          <a:lang val="es-CL"/>
                         </a:defRPr>
                       </a:pPr>
                       <a:r>
@@ -5984,6 +6010,7 @@
                           <a:solidFill>
                             <a:srgbClr val="FFFFFF"/>
                           </a:solidFill>
+                          <a:lang val="es-CL"/>
                         </a:defRPr>
                       </a:pPr>
                       <a:r>
@@ -6020,6 +6047,7 @@
                           <a:solidFill>
                             <a:srgbClr val="2C3E50"/>
                           </a:solidFill>
+                          <a:lang val="es-CL"/>
                         </a:defRPr>
                       </a:pPr>
                       <a:r>
@@ -6049,6 +6077,7 @@
                           <a:solidFill>
                             <a:srgbClr val="2C3E50"/>
                           </a:solidFill>
+                          <a:lang val="es-CL"/>
                         </a:defRPr>
                       </a:pPr>
                       <a:r>
@@ -6078,6 +6107,7 @@
                           <a:solidFill>
                             <a:srgbClr val="2C3E50"/>
                           </a:solidFill>
+                          <a:lang val="es-CL"/>
                         </a:defRPr>
                       </a:pPr>
                       <a:r>
@@ -6107,6 +6137,7 @@
                           <a:solidFill>
                             <a:srgbClr val="2C3E50"/>
                           </a:solidFill>
+                          <a:lang val="es-CL"/>
                         </a:defRPr>
                       </a:pPr>
                       <a:r>
@@ -6143,6 +6174,7 @@
                           <a:solidFill>
                             <a:srgbClr val="2C3E50"/>
                           </a:solidFill>
+                          <a:lang val="es-CL"/>
                         </a:defRPr>
                       </a:pPr>
                       <a:r>
@@ -6172,6 +6204,7 @@
                           <a:solidFill>
                             <a:srgbClr val="2C3E50"/>
                           </a:solidFill>
+                          <a:lang val="es-CL"/>
                         </a:defRPr>
                       </a:pPr>
                       <a:r>
@@ -6201,6 +6234,7 @@
                           <a:solidFill>
                             <a:srgbClr val="2C3E50"/>
                           </a:solidFill>
+                          <a:lang val="es-CL"/>
                         </a:defRPr>
                       </a:pPr>
                       <a:r>
@@ -6230,6 +6264,7 @@
                           <a:solidFill>
                             <a:srgbClr val="2C3E50"/>
                           </a:solidFill>
+                          <a:lang val="es-CL"/>
                         </a:defRPr>
                       </a:pPr>
                       <a:r>
@@ -6266,6 +6301,7 @@
                           <a:solidFill>
                             <a:srgbClr val="2C3E50"/>
                           </a:solidFill>
+                          <a:lang val="es-CL"/>
                         </a:defRPr>
                       </a:pPr>
                       <a:r>
@@ -6295,6 +6331,7 @@
                           <a:solidFill>
                             <a:srgbClr val="2C3E50"/>
                           </a:solidFill>
+                          <a:lang val="es-CL"/>
                         </a:defRPr>
                       </a:pPr>
                       <a:r>
@@ -6324,6 +6361,7 @@
                           <a:solidFill>
                             <a:srgbClr val="2C3E50"/>
                           </a:solidFill>
+                          <a:lang val="es-CL"/>
                         </a:defRPr>
                       </a:pPr>
                       <a:r>
@@ -6353,6 +6391,7 @@
                           <a:solidFill>
                             <a:srgbClr val="2C3E50"/>
                           </a:solidFill>
+                          <a:lang val="es-CL"/>
                         </a:defRPr>
                       </a:pPr>
                       <a:r>
@@ -6389,6 +6428,7 @@
                           <a:solidFill>
                             <a:srgbClr val="2C3E50"/>
                           </a:solidFill>
+                          <a:lang val="es-CL"/>
                         </a:defRPr>
                       </a:pPr>
                       <a:r>
@@ -6418,6 +6458,7 @@
                           <a:solidFill>
                             <a:srgbClr val="2C3E50"/>
                           </a:solidFill>
+                          <a:lang val="es-CL"/>
                         </a:defRPr>
                       </a:pPr>
                       <a:r>
@@ -6447,6 +6488,7 @@
                           <a:solidFill>
                             <a:srgbClr val="2C3E50"/>
                           </a:solidFill>
+                          <a:lang val="es-CL"/>
                         </a:defRPr>
                       </a:pPr>
                       <a:r>
@@ -6476,6 +6518,7 @@
                           <a:solidFill>
                             <a:srgbClr val="2C3E50"/>
                           </a:solidFill>
+                          <a:lang val="es-CL"/>
                         </a:defRPr>
                       </a:pPr>
                       <a:r>
@@ -6512,6 +6555,7 @@
                           <a:solidFill>
                             <a:srgbClr val="2C3E50"/>
                           </a:solidFill>
+                          <a:lang val="es-CL"/>
                         </a:defRPr>
                       </a:pPr>
                       <a:r>
@@ -6541,6 +6585,7 @@
                           <a:solidFill>
                             <a:srgbClr val="2C3E50"/>
                           </a:solidFill>
+                          <a:lang val="es-CL"/>
                         </a:defRPr>
                       </a:pPr>
                       <a:r>
@@ -6570,6 +6615,7 @@
                           <a:solidFill>
                             <a:srgbClr val="2C3E50"/>
                           </a:solidFill>
+                          <a:lang val="es-CL"/>
                         </a:defRPr>
                       </a:pPr>
                       <a:r>
@@ -6599,6 +6645,7 @@
                           <a:solidFill>
                             <a:srgbClr val="2C3E50"/>
                           </a:solidFill>
+                          <a:lang val="es-CL"/>
                         </a:defRPr>
                       </a:pPr>
                       <a:r>
@@ -6635,6 +6682,7 @@
                           <a:solidFill>
                             <a:srgbClr val="2C3E50"/>
                           </a:solidFill>
+                          <a:lang val="es-CL"/>
                         </a:defRPr>
                       </a:pPr>
                       <a:r>
@@ -6664,6 +6712,7 @@
                           <a:solidFill>
                             <a:srgbClr val="2C3E50"/>
                           </a:solidFill>
+                          <a:lang val="es-CL"/>
                         </a:defRPr>
                       </a:pPr>
                       <a:r>
@@ -6693,6 +6742,7 @@
                           <a:solidFill>
                             <a:srgbClr val="2C3E50"/>
                           </a:solidFill>
+                          <a:lang val="es-CL"/>
                         </a:defRPr>
                       </a:pPr>
                       <a:r>
@@ -6722,6 +6772,7 @@
                           <a:solidFill>
                             <a:srgbClr val="2C3E50"/>
                           </a:solidFill>
+                          <a:lang val="es-CL"/>
                         </a:defRPr>
                       </a:pPr>
                       <a:r>
@@ -6758,6 +6809,7 @@
                           <a:solidFill>
                             <a:srgbClr val="2C3E50"/>
                           </a:solidFill>
+                          <a:lang val="es-CL"/>
                         </a:defRPr>
                       </a:pPr>
                       <a:r>
@@ -6787,6 +6839,7 @@
                           <a:solidFill>
                             <a:srgbClr val="2C3E50"/>
                           </a:solidFill>
+                          <a:lang val="es-CL"/>
                         </a:defRPr>
                       </a:pPr>
                       <a:r>
@@ -6816,6 +6869,7 @@
                           <a:solidFill>
                             <a:srgbClr val="2C3E50"/>
                           </a:solidFill>
+                          <a:lang val="es-CL"/>
                         </a:defRPr>
                       </a:pPr>
                       <a:r>
@@ -6845,6 +6899,7 @@
                           <a:solidFill>
                             <a:srgbClr val="2C3E50"/>
                           </a:solidFill>
+                          <a:lang val="es-CL"/>
                         </a:defRPr>
                       </a:pPr>
                       <a:r>
@@ -6881,6 +6936,7 @@
                           <a:solidFill>
                             <a:srgbClr val="2C3E50"/>
                           </a:solidFill>
+                          <a:lang val="es-CL"/>
                         </a:defRPr>
                       </a:pPr>
                       <a:r>
@@ -6910,6 +6966,7 @@
                           <a:solidFill>
                             <a:srgbClr val="2C3E50"/>
                           </a:solidFill>
+                          <a:lang val="es-CL"/>
                         </a:defRPr>
                       </a:pPr>
                       <a:r>
@@ -6939,6 +6996,7 @@
                           <a:solidFill>
                             <a:srgbClr val="2C3E50"/>
                           </a:solidFill>
+                          <a:lang val="es-CL"/>
                         </a:defRPr>
                       </a:pPr>
                       <a:r>
@@ -6968,6 +7026,7 @@
                           <a:solidFill>
                             <a:srgbClr val="2C3E50"/>
                           </a:solidFill>
+                          <a:lang val="es-CL"/>
                         </a:defRPr>
                       </a:pPr>
                       <a:r>
@@ -7004,6 +7063,7 @@
                           <a:solidFill>
                             <a:srgbClr val="2C3E50"/>
                           </a:solidFill>
+                          <a:lang val="es-CL"/>
                         </a:defRPr>
                       </a:pPr>
                       <a:r>
@@ -7033,6 +7093,7 @@
                           <a:solidFill>
                             <a:srgbClr val="2C3E50"/>
                           </a:solidFill>
+                          <a:lang val="es-CL"/>
                         </a:defRPr>
                       </a:pPr>
                       <a:r>
@@ -7062,6 +7123,7 @@
                           <a:solidFill>
                             <a:srgbClr val="2C3E50"/>
                           </a:solidFill>
+                          <a:lang val="es-CL"/>
                         </a:defRPr>
                       </a:pPr>
                       <a:r>
@@ -7091,6 +7153,7 @@
                           <a:solidFill>
                             <a:srgbClr val="2C3E50"/>
                           </a:solidFill>
+                          <a:lang val="es-CL"/>
                         </a:defRPr>
                       </a:pPr>
                       <a:r>
@@ -7127,6 +7190,7 @@
                           <a:solidFill>
                             <a:srgbClr val="2C3E50"/>
                           </a:solidFill>
+                          <a:lang val="es-CL"/>
                         </a:defRPr>
                       </a:pPr>
                       <a:r>
@@ -7156,6 +7220,7 @@
                           <a:solidFill>
                             <a:srgbClr val="2C3E50"/>
                           </a:solidFill>
+                          <a:lang val="es-CL"/>
                         </a:defRPr>
                       </a:pPr>
                       <a:r>
@@ -7185,6 +7250,7 @@
                           <a:solidFill>
                             <a:srgbClr val="2C3E50"/>
                           </a:solidFill>
+                          <a:lang val="es-CL"/>
                         </a:defRPr>
                       </a:pPr>
                       <a:r>
@@ -7214,6 +7280,7 @@
                           <a:solidFill>
                             <a:srgbClr val="2C3E50"/>
                           </a:solidFill>
+                          <a:lang val="es-CL"/>
                         </a:defRPr>
                       </a:pPr>
                       <a:r>
@@ -7250,6 +7317,7 @@
                           <a:solidFill>
                             <a:srgbClr val="2C3E50"/>
                           </a:solidFill>
+                          <a:lang val="es-CL"/>
                         </a:defRPr>
                       </a:pPr>
                       <a:r>
@@ -7279,6 +7347,7 @@
                           <a:solidFill>
                             <a:srgbClr val="2C3E50"/>
                           </a:solidFill>
+                          <a:lang val="es-CL"/>
                         </a:defRPr>
                       </a:pPr>
                       <a:r>
@@ -7308,6 +7377,7 @@
                           <a:solidFill>
                             <a:srgbClr val="2C3E50"/>
                           </a:solidFill>
+                          <a:lang val="es-CL"/>
                         </a:defRPr>
                       </a:pPr>
                       <a:r>
@@ -7337,6 +7407,7 @@
                           <a:solidFill>
                             <a:srgbClr val="2C3E50"/>
                           </a:solidFill>
+                          <a:lang val="es-CL"/>
                         </a:defRPr>
                       </a:pPr>
                       <a:r>
@@ -7729,7 +7800,7 @@
         </p:nvSpPr>
         <p:spPr>
           <a:xfrm>
-            <a:off x="6400800" y="1371600"/>
+            <a:off x="6400800" y="1295808"/>
             <a:ext cx="5029200" cy="2286000"/>
           </a:xfrm>
           <a:prstGeom prst="rect">
@@ -7943,12 +8014,6 @@
               </a:rPr>
               <a:t> OS 5.7'</a:t>
             </a:r>
-            <a:r>
-              <a:rPr dirty="0">
-                <a:lang val="es-CL"/>
-              </a:rPr>
-              <a:t/>
-            </a:r>
             <a:br>
               <a:rPr dirty="0"/>
             </a:br>
@@ -7969,12 +8034,6 @@
                 <a:lang val="es-CL"/>
               </a:rPr>
               <a:t>'</a:t>
-            </a:r>
-            <a:r>
-              <a:rPr dirty="0">
-                <a:lang val="es-CL"/>
-              </a:rPr>
-              <a:t/>
             </a:r>
             <a:br>
               <a:rPr dirty="0"/>
@@ -8261,12 +8320,6 @@
               </a:rPr>
               <a:t>: 3/3 PASS</a:t>
             </a:r>
-            <a:r>
-              <a:rPr dirty="0">
-                <a:lang val="es-CL"/>
-              </a:rPr>
-              <a:t/>
-            </a:r>
             <a:br>
               <a:rPr dirty="0"/>
             </a:br>
@@ -8282,12 +8335,6 @@
               </a:rPr>
               <a:t>: 1/1 PASS  |  PIM CRUD: 12/12 PASS</a:t>
             </a:r>
-            <a:r>
-              <a:rPr dirty="0">
-                <a:lang val="es-CL"/>
-              </a:rPr>
-              <a:t/>
-            </a:r>
             <a:br>
               <a:rPr dirty="0"/>
             </a:br>
@@ -8314,12 +8361,6 @@
                 <a:lang val="es-CL"/>
               </a:rPr>
               <a:t>: 3/3 PASS</a:t>
-            </a:r>
-            <a:r>
-              <a:rPr dirty="0">
-                <a:lang val="es-CL"/>
-              </a:rPr>
-              <a:t/>
             </a:r>
             <a:br>
               <a:rPr dirty="0"/>
@@ -8518,6 +8559,7 @@
                           <a:solidFill>
                             <a:srgbClr val="FFFFFF"/>
                           </a:solidFill>
+                          <a:lang val="es-CL"/>
                         </a:defRPr>
                       </a:pPr>
                       <a:r>
@@ -8547,6 +8589,7 @@
                           <a:solidFill>
                             <a:srgbClr val="FFFFFF"/>
                           </a:solidFill>
+                          <a:lang val="es-CL"/>
                         </a:defRPr>
                       </a:pPr>
                       <a:r>
@@ -8576,6 +8619,7 @@
                           <a:solidFill>
                             <a:srgbClr val="FFFFFF"/>
                           </a:solidFill>
+                          <a:lang val="es-CL"/>
                         </a:defRPr>
                       </a:pPr>
                       <a:r>
@@ -8605,6 +8649,7 @@
                           <a:solidFill>
                             <a:srgbClr val="FFFFFF"/>
                           </a:solidFill>
+                          <a:lang val="es-CL"/>
                         </a:defRPr>
                       </a:pPr>
                       <a:r>
@@ -8641,6 +8686,7 @@
                           <a:solidFill>
                             <a:srgbClr val="2C3E50"/>
                           </a:solidFill>
+                          <a:lang val="es-CL"/>
                         </a:defRPr>
                       </a:pPr>
                       <a:r>
@@ -8670,6 +8716,7 @@
                           <a:solidFill>
                             <a:srgbClr val="2C3E50"/>
                           </a:solidFill>
+                          <a:lang val="es-CL"/>
                         </a:defRPr>
                       </a:pPr>
                       <a:r>
@@ -8699,6 +8746,7 @@
                           <a:solidFill>
                             <a:srgbClr val="2C3E50"/>
                           </a:solidFill>
+                          <a:lang val="es-CL"/>
                         </a:defRPr>
                       </a:pPr>
                       <a:r>
@@ -8728,6 +8776,7 @@
                           <a:solidFill>
                             <a:srgbClr val="2C3E50"/>
                           </a:solidFill>
+                          <a:lang val="es-CL"/>
                         </a:defRPr>
                       </a:pPr>
                       <a:r>
@@ -8764,6 +8813,7 @@
                           <a:solidFill>
                             <a:srgbClr val="2C3E50"/>
                           </a:solidFill>
+                          <a:lang val="es-CL"/>
                         </a:defRPr>
                       </a:pPr>
                       <a:r>
@@ -8793,6 +8843,7 @@
                           <a:solidFill>
                             <a:srgbClr val="2C3E50"/>
                           </a:solidFill>
+                          <a:lang val="es-CL"/>
                         </a:defRPr>
                       </a:pPr>
                       <a:r>
@@ -8822,6 +8873,7 @@
                           <a:solidFill>
                             <a:srgbClr val="2C3E50"/>
                           </a:solidFill>
+                          <a:lang val="es-CL"/>
                         </a:defRPr>
                       </a:pPr>
                       <a:r>
@@ -8851,6 +8903,7 @@
                           <a:solidFill>
                             <a:srgbClr val="2C3E50"/>
                           </a:solidFill>
+                          <a:lang val="es-CL"/>
                         </a:defRPr>
                       </a:pPr>
                       <a:r>
@@ -8887,6 +8940,7 @@
                           <a:solidFill>
                             <a:srgbClr val="2C3E50"/>
                           </a:solidFill>
+                          <a:lang val="es-CL"/>
                         </a:defRPr>
                       </a:pPr>
                       <a:r>
@@ -8916,6 +8970,7 @@
                           <a:solidFill>
                             <a:srgbClr val="2C3E50"/>
                           </a:solidFill>
+                          <a:lang val="es-CL"/>
                         </a:defRPr>
                       </a:pPr>
                       <a:r>
@@ -8945,6 +9000,7 @@
                           <a:solidFill>
                             <a:srgbClr val="2C3E50"/>
                           </a:solidFill>
+                          <a:lang val="es-CL"/>
                         </a:defRPr>
                       </a:pPr>
                       <a:r>
@@ -8974,6 +9030,7 @@
                           <a:solidFill>
                             <a:srgbClr val="2C3E50"/>
                           </a:solidFill>
+                          <a:lang val="es-CL"/>
                         </a:defRPr>
                       </a:pPr>
                       <a:r>
@@ -9010,6 +9067,7 @@
                           <a:solidFill>
                             <a:srgbClr val="2C3E50"/>
                           </a:solidFill>
+                          <a:lang val="es-CL"/>
                         </a:defRPr>
                       </a:pPr>
                       <a:r>
@@ -9039,6 +9097,7 @@
                           <a:solidFill>
                             <a:srgbClr val="2C3E50"/>
                           </a:solidFill>
+                          <a:lang val="es-CL"/>
                         </a:defRPr>
                       </a:pPr>
                       <a:r>
@@ -9068,6 +9127,7 @@
                           <a:solidFill>
                             <a:srgbClr val="2C3E50"/>
                           </a:solidFill>
+                          <a:lang val="es-CL"/>
                         </a:defRPr>
                       </a:pPr>
                       <a:r>
@@ -9097,6 +9157,7 @@
                           <a:solidFill>
                             <a:srgbClr val="2C3E50"/>
                           </a:solidFill>
+                          <a:lang val="es-CL"/>
                         </a:defRPr>
                       </a:pPr>
                       <a:r>
@@ -9133,6 +9194,7 @@
                           <a:solidFill>
                             <a:srgbClr val="2C3E50"/>
                           </a:solidFill>
+                          <a:lang val="es-CL"/>
                         </a:defRPr>
                       </a:pPr>
                       <a:r>
@@ -9162,6 +9224,7 @@
                           <a:solidFill>
                             <a:srgbClr val="2C3E50"/>
                           </a:solidFill>
+                          <a:lang val="es-CL"/>
                         </a:defRPr>
                       </a:pPr>
                       <a:r>
@@ -9191,6 +9254,7 @@
                           <a:solidFill>
                             <a:srgbClr val="2C3E50"/>
                           </a:solidFill>
+                          <a:lang val="es-CL"/>
                         </a:defRPr>
                       </a:pPr>
                       <a:r>
@@ -9220,6 +9284,7 @@
                           <a:solidFill>
                             <a:srgbClr val="2C3E50"/>
                           </a:solidFill>
+                          <a:lang val="es-CL"/>
                         </a:defRPr>
                       </a:pPr>
                       <a:r>
@@ -9308,6 +9373,7 @@
                           <a:solidFill>
                             <a:srgbClr val="FFFFFF"/>
                           </a:solidFill>
+                          <a:lang val="es-CL"/>
                         </a:defRPr>
                       </a:pPr>
                       <a:r>
@@ -9337,6 +9403,7 @@
                           <a:solidFill>
                             <a:srgbClr val="FFFFFF"/>
                           </a:solidFill>
+                          <a:lang val="es-CL"/>
                         </a:defRPr>
                       </a:pPr>
                       <a:r>
@@ -9366,6 +9433,7 @@
                           <a:solidFill>
                             <a:srgbClr val="FFFFFF"/>
                           </a:solidFill>
+                          <a:lang val="es-CL"/>
                         </a:defRPr>
                       </a:pPr>
                       <a:r>
@@ -9395,6 +9463,7 @@
                           <a:solidFill>
                             <a:srgbClr val="FFFFFF"/>
                           </a:solidFill>
+                          <a:lang val="es-CL"/>
                         </a:defRPr>
                       </a:pPr>
                       <a:r>
@@ -9431,6 +9500,7 @@
                           <a:solidFill>
                             <a:srgbClr val="2C3E50"/>
                           </a:solidFill>
+                          <a:lang val="es-CL"/>
                         </a:defRPr>
                       </a:pPr>
                       <a:r>
@@ -9460,6 +9530,7 @@
                           <a:solidFill>
                             <a:srgbClr val="2C3E50"/>
                           </a:solidFill>
+                          <a:lang val="es-CL"/>
                         </a:defRPr>
                       </a:pPr>
                       <a:r>
@@ -9489,6 +9560,7 @@
                           <a:solidFill>
                             <a:srgbClr val="2C3E50"/>
                           </a:solidFill>
+                          <a:lang val="es-CL"/>
                         </a:defRPr>
                       </a:pPr>
                       <a:r>
@@ -9518,6 +9590,7 @@
                           <a:solidFill>
                             <a:srgbClr val="2C3E50"/>
                           </a:solidFill>
+                          <a:lang val="es-CL"/>
                         </a:defRPr>
                       </a:pPr>
                       <a:r>
@@ -9554,6 +9627,7 @@
                           <a:solidFill>
                             <a:srgbClr val="2C3E50"/>
                           </a:solidFill>
+                          <a:lang val="es-CL"/>
                         </a:defRPr>
                       </a:pPr>
                       <a:r>
@@ -9583,6 +9657,7 @@
                           <a:solidFill>
                             <a:srgbClr val="2C3E50"/>
                           </a:solidFill>
+                          <a:lang val="es-CL"/>
                         </a:defRPr>
                       </a:pPr>
                       <a:r>
@@ -9612,6 +9687,7 @@
                           <a:solidFill>
                             <a:srgbClr val="2C3E50"/>
                           </a:solidFill>
+                          <a:lang val="es-CL"/>
                         </a:defRPr>
                       </a:pPr>
                       <a:r>
@@ -9641,6 +9717,7 @@
                           <a:solidFill>
                             <a:srgbClr val="2C3E50"/>
                           </a:solidFill>
+                          <a:lang val="es-CL"/>
                         </a:defRPr>
                       </a:pPr>
                       <a:r>
@@ -9677,6 +9754,7 @@
                           <a:solidFill>
                             <a:srgbClr val="2C3E50"/>
                           </a:solidFill>
+                          <a:lang val="es-CL"/>
                         </a:defRPr>
                       </a:pPr>
                       <a:r>
@@ -9706,6 +9784,7 @@
                           <a:solidFill>
                             <a:srgbClr val="2C3E50"/>
                           </a:solidFill>
+                          <a:lang val="es-CL"/>
                         </a:defRPr>
                       </a:pPr>
                       <a:r>
@@ -9735,6 +9814,7 @@
                           <a:solidFill>
                             <a:srgbClr val="2C3E50"/>
                           </a:solidFill>
+                          <a:lang val="es-CL"/>
                         </a:defRPr>
                       </a:pPr>
                       <a:r>
@@ -9764,6 +9844,7 @@
                           <a:solidFill>
                             <a:srgbClr val="2C3E50"/>
                           </a:solidFill>
+                          <a:lang val="es-CL"/>
                         </a:defRPr>
                       </a:pPr>
                       <a:r>
@@ -9800,6 +9881,7 @@
                           <a:solidFill>
                             <a:srgbClr val="2C3E50"/>
                           </a:solidFill>
+                          <a:lang val="es-CL"/>
                         </a:defRPr>
                       </a:pPr>
                       <a:r>
@@ -9829,6 +9911,7 @@
                           <a:solidFill>
                             <a:srgbClr val="2C3E50"/>
                           </a:solidFill>
+                          <a:lang val="es-CL"/>
                         </a:defRPr>
                       </a:pPr>
                       <a:r>
@@ -9858,6 +9941,7 @@
                           <a:solidFill>
                             <a:srgbClr val="2C3E50"/>
                           </a:solidFill>
+                          <a:lang val="es-CL"/>
                         </a:defRPr>
                       </a:pPr>
                       <a:r>
@@ -9887,6 +9971,7 @@
                           <a:solidFill>
                             <a:srgbClr val="2C3E50"/>
                           </a:solidFill>
+                          <a:lang val="es-CL"/>
                         </a:defRPr>
                       </a:pPr>
                       <a:r>
@@ -9923,6 +10008,7 @@
                           <a:solidFill>
                             <a:srgbClr val="2C3E50"/>
                           </a:solidFill>
+                          <a:lang val="es-CL"/>
                         </a:defRPr>
                       </a:pPr>
                       <a:r>
@@ -9952,6 +10038,7 @@
                           <a:solidFill>
                             <a:srgbClr val="2C3E50"/>
                           </a:solidFill>
+                          <a:lang val="es-CL"/>
                         </a:defRPr>
                       </a:pPr>
                       <a:r>
@@ -9981,6 +10068,7 @@
                           <a:solidFill>
                             <a:srgbClr val="2C3E50"/>
                           </a:solidFill>
+                          <a:lang val="es-CL"/>
                         </a:defRPr>
                       </a:pPr>
                       <a:r>
@@ -10010,6 +10098,7 @@
                           <a:solidFill>
                             <a:srgbClr val="2C3E50"/>
                           </a:solidFill>
+                          <a:lang val="es-CL"/>
                         </a:defRPr>
                       </a:pPr>
                       <a:r>
@@ -11227,6 +11316,7 @@
                           <a:solidFill>
                             <a:srgbClr val="FFFFFF"/>
                           </a:solidFill>
+                          <a:lang val="es-CL"/>
                         </a:defRPr>
                       </a:pPr>
                       <a:r>
@@ -11256,6 +11346,7 @@
                           <a:solidFill>
                             <a:srgbClr val="FFFFFF"/>
                           </a:solidFill>
+                          <a:lang val="es-CL"/>
                         </a:defRPr>
                       </a:pPr>
                       <a:r>
@@ -11285,6 +11376,7 @@
                           <a:solidFill>
                             <a:srgbClr val="FFFFFF"/>
                           </a:solidFill>
+                          <a:lang val="es-CL"/>
                         </a:defRPr>
                       </a:pPr>
                       <a:r>
@@ -11314,6 +11406,7 @@
                           <a:solidFill>
                             <a:srgbClr val="FFFFFF"/>
                           </a:solidFill>
+                          <a:lang val="es-CL"/>
                         </a:defRPr>
                       </a:pPr>
                       <a:r>
@@ -11343,6 +11436,7 @@
                           <a:solidFill>
                             <a:srgbClr val="FFFFFF"/>
                           </a:solidFill>
+                          <a:lang val="es-CL"/>
                         </a:defRPr>
                       </a:pPr>
                       <a:r>
@@ -11379,6 +11473,7 @@
                           <a:solidFill>
                             <a:srgbClr val="2C3E50"/>
                           </a:solidFill>
+                          <a:lang val="es-CL"/>
                         </a:defRPr>
                       </a:pPr>
                       <a:r>
@@ -11408,6 +11503,7 @@
                           <a:solidFill>
                             <a:srgbClr val="2C3E50"/>
                           </a:solidFill>
+                          <a:lang val="es-CL"/>
                         </a:defRPr>
                       </a:pPr>
                       <a:r>
@@ -11426,6 +11522,7 @@
                           <a:solidFill>
                             <a:srgbClr val="2C3E50"/>
                           </a:solidFill>
+                          <a:lang val="es-CL"/>
                         </a:defRPr>
                       </a:pPr>
                       <a:r>
@@ -11455,6 +11552,7 @@
                           <a:solidFill>
                             <a:srgbClr val="2C3E50"/>
                           </a:solidFill>
+                          <a:lang val="es-CL"/>
                         </a:defRPr>
                       </a:pPr>
                       <a:r>
@@ -11473,6 +11571,7 @@
                           <a:solidFill>
                             <a:srgbClr val="2C3E50"/>
                           </a:solidFill>
+                          <a:lang val="es-CL"/>
                         </a:defRPr>
                       </a:pPr>
                       <a:r>
@@ -11502,6 +11601,7 @@
                           <a:solidFill>
                             <a:srgbClr val="2C3E50"/>
                           </a:solidFill>
+                          <a:lang val="es-CL"/>
                         </a:defRPr>
                       </a:pPr>
                       <a:r>
@@ -11520,6 +11620,7 @@
                           <a:solidFill>
                             <a:srgbClr val="2C3E50"/>
                           </a:solidFill>
+                          <a:lang val="es-CL"/>
                         </a:defRPr>
                       </a:pPr>
                       <a:r>
@@ -11549,6 +11650,7 @@
                           <a:solidFill>
                             <a:srgbClr val="2C3E50"/>
                           </a:solidFill>
+                          <a:lang val="es-CL"/>
                         </a:defRPr>
                       </a:pPr>
                       <a:r>
@@ -11567,6 +11669,7 @@
                           <a:solidFill>
                             <a:srgbClr val="2C3E50"/>
                           </a:solidFill>
+                          <a:lang val="es-CL"/>
                         </a:defRPr>
                       </a:pPr>
                       <a:r>
@@ -11603,6 +11706,7 @@
                           <a:solidFill>
                             <a:srgbClr val="2C3E50"/>
                           </a:solidFill>
+                          <a:lang val="es-CL"/>
                         </a:defRPr>
                       </a:pPr>
                       <a:r>
@@ -11632,6 +11736,7 @@
                           <a:solidFill>
                             <a:srgbClr val="2C3E50"/>
                           </a:solidFill>
+                          <a:lang val="es-CL"/>
                         </a:defRPr>
                       </a:pPr>
                       <a:r>
@@ -11650,6 +11755,7 @@
                           <a:solidFill>
                             <a:srgbClr val="2C3E50"/>
                           </a:solidFill>
+                          <a:lang val="es-CL"/>
                         </a:defRPr>
                       </a:pPr>
                       <a:r>
@@ -11679,6 +11785,7 @@
                           <a:solidFill>
                             <a:srgbClr val="2C3E50"/>
                           </a:solidFill>
+                          <a:lang val="es-CL"/>
                         </a:defRPr>
                       </a:pPr>
                       <a:r>
@@ -11697,6 +11804,7 @@
                           <a:solidFill>
                             <a:srgbClr val="2C3E50"/>
                           </a:solidFill>
+                          <a:lang val="es-CL"/>
                         </a:defRPr>
                       </a:pPr>
                       <a:r>
@@ -11726,6 +11834,7 @@
                           <a:solidFill>
                             <a:srgbClr val="2C3E50"/>
                           </a:solidFill>
+                          <a:lang val="es-CL"/>
                         </a:defRPr>
                       </a:pPr>
                       <a:r>
@@ -11744,6 +11853,7 @@
                           <a:solidFill>
                             <a:srgbClr val="2C3E50"/>
                           </a:solidFill>
+                          <a:lang val="es-CL"/>
                         </a:defRPr>
                       </a:pPr>
                       <a:r>
@@ -11773,6 +11883,7 @@
                           <a:solidFill>
                             <a:srgbClr val="2C3E50"/>
                           </a:solidFill>
+                          <a:lang val="es-CL"/>
                         </a:defRPr>
                       </a:pPr>
                       <a:r>
@@ -11809,6 +11920,7 @@
                           <a:solidFill>
                             <a:srgbClr val="2C3E50"/>
                           </a:solidFill>
+                          <a:lang val="es-CL"/>
                         </a:defRPr>
                       </a:pPr>
                       <a:r>
@@ -11838,6 +11950,7 @@
                           <a:solidFill>
                             <a:srgbClr val="2C3E50"/>
                           </a:solidFill>
+                          <a:lang val="es-CL"/>
                         </a:defRPr>
                       </a:pPr>
                       <a:r>
@@ -11856,6 +11969,7 @@
                           <a:solidFill>
                             <a:srgbClr val="2C3E50"/>
                           </a:solidFill>
+                          <a:lang val="es-CL"/>
                         </a:defRPr>
                       </a:pPr>
                       <a:r>
@@ -11885,6 +11999,7 @@
                           <a:solidFill>
                             <a:srgbClr val="2C3E50"/>
                           </a:solidFill>
+                          <a:lang val="es-CL"/>
                         </a:defRPr>
                       </a:pPr>
                       <a:r>
@@ -11903,6 +12018,7 @@
                           <a:solidFill>
                             <a:srgbClr val="2C3E50"/>
                           </a:solidFill>
+                          <a:lang val="es-CL"/>
                         </a:defRPr>
                       </a:pPr>
                       <a:r>
@@ -11932,6 +12048,7 @@
                           <a:solidFill>
                             <a:srgbClr val="2C3E50"/>
                           </a:solidFill>
+                          <a:lang val="es-CL"/>
                         </a:defRPr>
                       </a:pPr>
                       <a:r>
@@ -11950,6 +12067,7 @@
                           <a:solidFill>
                             <a:srgbClr val="2C3E50"/>
                           </a:solidFill>
+                          <a:lang val="es-CL"/>
                         </a:defRPr>
                       </a:pPr>
                       <a:r>
@@ -11979,6 +12097,7 @@
                           <a:solidFill>
                             <a:srgbClr val="2C3E50"/>
                           </a:solidFill>
+                          <a:lang val="es-CL"/>
                         </a:defRPr>
                       </a:pPr>
                       <a:r>
@@ -11997,6 +12116,7 @@
                           <a:solidFill>
                             <a:srgbClr val="2C3E50"/>
                           </a:solidFill>
+                          <a:lang val="es-CL"/>
                         </a:defRPr>
                       </a:pPr>
                       <a:r>
@@ -12033,6 +12153,7 @@
                           <a:solidFill>
                             <a:srgbClr val="2C3E50"/>
                           </a:solidFill>
+                          <a:lang val="es-CL"/>
                         </a:defRPr>
                       </a:pPr>
                       <a:r>
@@ -12062,6 +12183,7 @@
                           <a:solidFill>
                             <a:srgbClr val="2C3E50"/>
                           </a:solidFill>
+                          <a:lang val="es-CL"/>
                         </a:defRPr>
                       </a:pPr>
                       <a:r>
@@ -12080,6 +12202,7 @@
                           <a:solidFill>
                             <a:srgbClr val="2C3E50"/>
                           </a:solidFill>
+                          <a:lang val="es-CL"/>
                         </a:defRPr>
                       </a:pPr>
                       <a:r>
@@ -12109,6 +12232,7 @@
                           <a:solidFill>
                             <a:srgbClr val="2C3E50"/>
                           </a:solidFill>
+                          <a:lang val="es-CL"/>
                         </a:defRPr>
                       </a:pPr>
                       <a:r>
@@ -12127,6 +12251,7 @@
                           <a:solidFill>
                             <a:srgbClr val="2C3E50"/>
                           </a:solidFill>
+                          <a:lang val="es-CL"/>
                         </a:defRPr>
                       </a:pPr>
                       <a:r>
@@ -12156,6 +12281,7 @@
                           <a:solidFill>
                             <a:srgbClr val="2C3E50"/>
                           </a:solidFill>
+                          <a:lang val="es-CL"/>
                         </a:defRPr>
                       </a:pPr>
                       <a:r>
@@ -12174,6 +12300,7 @@
                           <a:solidFill>
                             <a:srgbClr val="2C3E50"/>
                           </a:solidFill>
+                          <a:lang val="es-CL"/>
                         </a:defRPr>
                       </a:pPr>
                       <a:r>
@@ -12203,6 +12330,7 @@
                           <a:solidFill>
                             <a:srgbClr val="2C3E50"/>
                           </a:solidFill>
+                          <a:lang val="es-CL"/>
                         </a:defRPr>
                       </a:pPr>
                       <a:r>
@@ -12239,6 +12367,7 @@
                           <a:solidFill>
                             <a:srgbClr val="2C3E50"/>
                           </a:solidFill>
+                          <a:lang val="es-CL"/>
                         </a:defRPr>
                       </a:pPr>
                       <a:r>
@@ -12268,6 +12397,7 @@
                           <a:solidFill>
                             <a:srgbClr val="2C3E50"/>
                           </a:solidFill>
+                          <a:lang val="es-CL"/>
                         </a:defRPr>
                       </a:pPr>
                       <a:r>
@@ -12286,6 +12416,7 @@
                           <a:solidFill>
                             <a:srgbClr val="2C3E50"/>
                           </a:solidFill>
+                          <a:lang val="es-CL"/>
                         </a:defRPr>
                       </a:pPr>
                       <a:r>
@@ -12315,6 +12446,7 @@
                           <a:solidFill>
                             <a:srgbClr val="2C3E50"/>
                           </a:solidFill>
+                          <a:lang val="es-CL"/>
                         </a:defRPr>
                       </a:pPr>
                       <a:r>
@@ -12333,6 +12465,7 @@
                           <a:solidFill>
                             <a:srgbClr val="2C3E50"/>
                           </a:solidFill>
+                          <a:lang val="es-CL"/>
                         </a:defRPr>
                       </a:pPr>
                       <a:r>
@@ -12362,6 +12495,7 @@
                           <a:solidFill>
                             <a:srgbClr val="2C3E50"/>
                           </a:solidFill>
+                          <a:lang val="es-CL"/>
                         </a:defRPr>
                       </a:pPr>
                       <a:r>
@@ -12380,6 +12514,7 @@
                           <a:solidFill>
                             <a:srgbClr val="2C3E50"/>
                           </a:solidFill>
+                          <a:lang val="es-CL"/>
                         </a:defRPr>
                       </a:pPr>
                       <a:r>
@@ -12409,6 +12544,7 @@
                           <a:solidFill>
                             <a:srgbClr val="2C3E50"/>
                           </a:solidFill>
+                          <a:lang val="es-CL"/>
                         </a:defRPr>
                       </a:pPr>
                       <a:r>
@@ -12427,6 +12563,7 @@
                           <a:solidFill>
                             <a:srgbClr val="2C3E50"/>
                           </a:solidFill>
+                          <a:lang val="es-CL"/>
                         </a:defRPr>
                       </a:pPr>
                       <a:r>
@@ -12463,6 +12600,7 @@
                           <a:solidFill>
                             <a:srgbClr val="2C3E50"/>
                           </a:solidFill>
+                          <a:lang val="es-CL"/>
                         </a:defRPr>
                       </a:pPr>
                       <a:r>
@@ -12492,6 +12630,7 @@
                           <a:solidFill>
                             <a:srgbClr val="2C3E50"/>
                           </a:solidFill>
+                          <a:lang val="es-CL"/>
                         </a:defRPr>
                       </a:pPr>
                       <a:r>
@@ -12510,6 +12649,7 @@
                           <a:solidFill>
                             <a:srgbClr val="2C3E50"/>
                           </a:solidFill>
+                          <a:lang val="es-CL"/>
                         </a:defRPr>
                       </a:pPr>
                       <a:r>
@@ -12539,6 +12679,7 @@
                           <a:solidFill>
                             <a:srgbClr val="2C3E50"/>
                           </a:solidFill>
+                          <a:lang val="es-CL"/>
                         </a:defRPr>
                       </a:pPr>
                       <a:r>
@@ -12557,6 +12698,7 @@
                           <a:solidFill>
                             <a:srgbClr val="2C3E50"/>
                           </a:solidFill>
+                          <a:lang val="es-CL"/>
                         </a:defRPr>
                       </a:pPr>
                       <a:r>
@@ -12586,6 +12728,7 @@
                           <a:solidFill>
                             <a:srgbClr val="2C3E50"/>
                           </a:solidFill>
+                          <a:lang val="es-CL"/>
                         </a:defRPr>
                       </a:pPr>
                       <a:r>
@@ -12604,6 +12747,7 @@
                           <a:solidFill>
                             <a:srgbClr val="2C3E50"/>
                           </a:solidFill>
+                          <a:lang val="es-CL"/>
                         </a:defRPr>
                       </a:pPr>
                       <a:r>
@@ -12633,6 +12777,7 @@
                           <a:solidFill>
                             <a:srgbClr val="2C3E50"/>
                           </a:solidFill>
+                          <a:lang val="es-CL"/>
                         </a:defRPr>
                       </a:pPr>
                       <a:r>
@@ -12651,6 +12796,7 @@
                           <a:solidFill>
                             <a:srgbClr val="2C3E50"/>
                           </a:solidFill>
+                          <a:lang val="es-CL"/>
                         </a:defRPr>
                       </a:pPr>
                       <a:r>
@@ -12817,12 +12963,6 @@
                 <a:lang val="es-CL"/>
               </a:rPr>
               <a:t> Framework): MP-03, MP-04, MP-05, MP-06</a:t>
-            </a:r>
-            <a:r>
-              <a:rPr dirty="0">
-                <a:lang val="es-CL"/>
-              </a:rPr>
-              <a:t/>
             </a:r>
             <a:br>
               <a:rPr dirty="0"/>
@@ -13213,6 +13353,7 @@
                           <a:solidFill>
                             <a:srgbClr val="FFFFFF"/>
                           </a:solidFill>
+                          <a:lang val="es-CL"/>
                         </a:defRPr>
                       </a:pPr>
                       <a:r>
@@ -13242,6 +13383,7 @@
                           <a:solidFill>
                             <a:srgbClr val="FFFFFF"/>
                           </a:solidFill>
+                          <a:lang val="es-CL"/>
                         </a:defRPr>
                       </a:pPr>
                       <a:r>
@@ -13271,6 +13413,7 @@
                           <a:solidFill>
                             <a:srgbClr val="FFFFFF"/>
                           </a:solidFill>
+                          <a:lang val="es-CL"/>
                         </a:defRPr>
                       </a:pPr>
                       <a:r>
@@ -13300,6 +13443,7 @@
                           <a:solidFill>
                             <a:srgbClr val="FFFFFF"/>
                           </a:solidFill>
+                          <a:lang val="es-CL"/>
                         </a:defRPr>
                       </a:pPr>
                       <a:r>
@@ -13336,6 +13480,7 @@
                           <a:solidFill>
                             <a:srgbClr val="2C3E50"/>
                           </a:solidFill>
+                          <a:lang val="es-CL"/>
                         </a:defRPr>
                       </a:pPr>
                       <a:r>
@@ -13365,6 +13510,7 @@
                           <a:solidFill>
                             <a:srgbClr val="2C3E50"/>
                           </a:solidFill>
+                          <a:lang val="es-CL"/>
                         </a:defRPr>
                       </a:pPr>
                       <a:r>
@@ -13394,6 +13540,7 @@
                           <a:solidFill>
                             <a:srgbClr val="2C3E50"/>
                           </a:solidFill>
+                          <a:lang val="es-CL"/>
                         </a:defRPr>
                       </a:pPr>
                       <a:r>
@@ -13423,6 +13570,7 @@
                           <a:solidFill>
                             <a:srgbClr val="2C3E50"/>
                           </a:solidFill>
+                          <a:lang val="es-CL"/>
                         </a:defRPr>
                       </a:pPr>
                       <a:r>
@@ -13459,6 +13607,7 @@
                           <a:solidFill>
                             <a:srgbClr val="2C3E50"/>
                           </a:solidFill>
+                          <a:lang val="es-CL"/>
                         </a:defRPr>
                       </a:pPr>
                       <a:r>
@@ -13488,6 +13637,7 @@
                           <a:solidFill>
                             <a:srgbClr val="2C3E50"/>
                           </a:solidFill>
+                          <a:lang val="es-CL"/>
                         </a:defRPr>
                       </a:pPr>
                       <a:r>
@@ -13517,6 +13667,7 @@
                           <a:solidFill>
                             <a:srgbClr val="2C3E50"/>
                           </a:solidFill>
+                          <a:lang val="es-CL"/>
                         </a:defRPr>
                       </a:pPr>
                       <a:r>
@@ -13546,6 +13697,7 @@
                           <a:solidFill>
                             <a:srgbClr val="2C3E50"/>
                           </a:solidFill>
+                          <a:lang val="es-CL"/>
                         </a:defRPr>
                       </a:pPr>
                       <a:r>
@@ -13582,6 +13734,7 @@
                           <a:solidFill>
                             <a:srgbClr val="2C3E50"/>
                           </a:solidFill>
+                          <a:lang val="es-CL"/>
                         </a:defRPr>
                       </a:pPr>
                       <a:r>
@@ -13611,6 +13764,7 @@
                           <a:solidFill>
                             <a:srgbClr val="2C3E50"/>
                           </a:solidFill>
+                          <a:lang val="es-CL"/>
                         </a:defRPr>
                       </a:pPr>
                       <a:r>
@@ -13640,6 +13794,7 @@
                           <a:solidFill>
                             <a:srgbClr val="2C3E50"/>
                           </a:solidFill>
+                          <a:lang val="es-CL"/>
                         </a:defRPr>
                       </a:pPr>
                       <a:r>
@@ -13669,6 +13824,7 @@
                           <a:solidFill>
                             <a:srgbClr val="2C3E50"/>
                           </a:solidFill>
+                          <a:lang val="es-CL"/>
                         </a:defRPr>
                       </a:pPr>
                       <a:r>
@@ -13705,6 +13861,7 @@
                           <a:solidFill>
                             <a:srgbClr val="2C3E50"/>
                           </a:solidFill>
+                          <a:lang val="es-CL"/>
                         </a:defRPr>
                       </a:pPr>
                       <a:r>
@@ -13734,6 +13891,7 @@
                           <a:solidFill>
                             <a:srgbClr val="2C3E50"/>
                           </a:solidFill>
+                          <a:lang val="es-CL"/>
                         </a:defRPr>
                       </a:pPr>
                       <a:r>
@@ -13763,6 +13921,7 @@
                           <a:solidFill>
                             <a:srgbClr val="2C3E50"/>
                           </a:solidFill>
+                          <a:lang val="es-CL"/>
                         </a:defRPr>
                       </a:pPr>
                       <a:r>
@@ -13792,6 +13951,7 @@
                           <a:solidFill>
                             <a:srgbClr val="2C3E50"/>
                           </a:solidFill>
+                          <a:lang val="es-CL"/>
                         </a:defRPr>
                       </a:pPr>
                       <a:r>
@@ -13828,6 +13988,7 @@
                           <a:solidFill>
                             <a:srgbClr val="2C3E50"/>
                           </a:solidFill>
+                          <a:lang val="es-CL"/>
                         </a:defRPr>
                       </a:pPr>
                       <a:r>
@@ -13857,6 +14018,7 @@
                           <a:solidFill>
                             <a:srgbClr val="2C3E50"/>
                           </a:solidFill>
+                          <a:lang val="es-CL"/>
                         </a:defRPr>
                       </a:pPr>
                       <a:r>
@@ -13886,6 +14048,7 @@
                           <a:solidFill>
                             <a:srgbClr val="2C3E50"/>
                           </a:solidFill>
+                          <a:lang val="es-CL"/>
                         </a:defRPr>
                       </a:pPr>
                       <a:r>
@@ -13915,6 +14078,7 @@
                           <a:solidFill>
                             <a:srgbClr val="2C3E50"/>
                           </a:solidFill>
+                          <a:lang val="es-CL"/>
                         </a:defRPr>
                       </a:pPr>
                       <a:r>
@@ -13951,6 +14115,7 @@
                           <a:solidFill>
                             <a:srgbClr val="2C3E50"/>
                           </a:solidFill>
+                          <a:lang val="es-CL"/>
                         </a:defRPr>
                       </a:pPr>
                       <a:r>
@@ -13980,6 +14145,7 @@
                           <a:solidFill>
                             <a:srgbClr val="2C3E50"/>
                           </a:solidFill>
+                          <a:lang val="es-CL"/>
                         </a:defRPr>
                       </a:pPr>
                       <a:r>
@@ -14009,6 +14175,7 @@
                           <a:solidFill>
                             <a:srgbClr val="2C3E50"/>
                           </a:solidFill>
+                          <a:lang val="es-CL"/>
                         </a:defRPr>
                       </a:pPr>
                       <a:r>
@@ -14038,6 +14205,7 @@
                           <a:solidFill>
                             <a:srgbClr val="2C3E50"/>
                           </a:solidFill>
+                          <a:lang val="es-CL"/>
                         </a:defRPr>
                       </a:pPr>
                       <a:r>
